--- a/Microservices/07.3. Autoscaling.pptx
+++ b/Microservices/07.3. Autoscaling.pptx
@@ -5,7 +5,7 @@
     <p:sldMasterId id="2147483708" r:id="rId1"/>
   </p:sldMasterIdLst>
   <p:notesMasterIdLst>
-    <p:notesMasterId r:id="rId32"/>
+    <p:notesMasterId r:id="rId36"/>
   </p:notesMasterIdLst>
   <p:sldIdLst>
     <p:sldId id="561" r:id="rId2"/>
@@ -36,8 +36,12 @@
     <p:sldId id="647" r:id="rId27"/>
     <p:sldId id="645" r:id="rId28"/>
     <p:sldId id="646" r:id="rId29"/>
-    <p:sldId id="649" r:id="rId30"/>
-    <p:sldId id="516" r:id="rId31"/>
+    <p:sldId id="656" r:id="rId30"/>
+    <p:sldId id="657" r:id="rId31"/>
+    <p:sldId id="658" r:id="rId32"/>
+    <p:sldId id="659" r:id="rId33"/>
+    <p:sldId id="660" r:id="rId34"/>
+    <p:sldId id="516" r:id="rId35"/>
   </p:sldIdLst>
   <p:sldSz cx="9144000" cy="6858000" type="screen4x3"/>
   <p:notesSz cx="6858000" cy="9144000"/>
@@ -252,7 +256,7 @@
             <a:fld id="{2F0940CE-BE1D-4C40-AF8B-3898A4D1F5EC}" type="datetimeFigureOut">
               <a:rPr lang="en-US" smtClean="0"/>
               <a:pPr/>
-              <a:t>3/23/2026</a:t>
+              <a:t>8/8/2026</a:t>
             </a:fld>
             <a:endParaRPr lang="en-US"/>
           </a:p>
@@ -709,7 +713,7 @@
               <a:pPr>
                 <a:defRPr/>
               </a:pPr>
-              <a:t>3/23/2026</a:t>
+              <a:t>8/8/2026</a:t>
             </a:fld>
             <a:endParaRPr lang="en-US"/>
           </a:p>
@@ -901,7 +905,7 @@
               <a:pPr>
                 <a:defRPr/>
               </a:pPr>
-              <a:t>3/23/2026</a:t>
+              <a:t>8/8/2026</a:t>
             </a:fld>
             <a:endParaRPr lang="en-US"/>
           </a:p>
@@ -1103,7 +1107,7 @@
               <a:pPr>
                 <a:defRPr/>
               </a:pPr>
-              <a:t>3/23/2026</a:t>
+              <a:t>8/8/2026</a:t>
             </a:fld>
             <a:endParaRPr lang="en-US"/>
           </a:p>
@@ -1295,7 +1299,7 @@
               <a:pPr>
                 <a:defRPr/>
               </a:pPr>
-              <a:t>3/23/2026</a:t>
+              <a:t>8/8/2026</a:t>
             </a:fld>
             <a:endParaRPr lang="en-US"/>
           </a:p>
@@ -1563,7 +1567,7 @@
               <a:pPr>
                 <a:defRPr/>
               </a:pPr>
-              <a:t>3/23/2026</a:t>
+              <a:t>8/8/2026</a:t>
             </a:fld>
             <a:endParaRPr lang="en-US"/>
           </a:p>
@@ -1873,7 +1877,7 @@
               <a:pPr>
                 <a:defRPr/>
               </a:pPr>
-              <a:t>3/23/2026</a:t>
+              <a:t>8/8/2026</a:t>
             </a:fld>
             <a:endParaRPr lang="en-US"/>
           </a:p>
@@ -2317,7 +2321,7 @@
               <a:pPr>
                 <a:defRPr/>
               </a:pPr>
-              <a:t>3/23/2026</a:t>
+              <a:t>8/8/2026</a:t>
             </a:fld>
             <a:endParaRPr lang="en-US"/>
           </a:p>
@@ -2457,7 +2461,7 @@
               <a:pPr>
                 <a:defRPr/>
               </a:pPr>
-              <a:t>3/23/2026</a:t>
+              <a:t>8/8/2026</a:t>
             </a:fld>
             <a:endParaRPr lang="en-US"/>
           </a:p>
@@ -2574,7 +2578,7 @@
               <a:pPr>
                 <a:defRPr/>
               </a:pPr>
-              <a:t>3/23/2026</a:t>
+              <a:t>8/8/2026</a:t>
             </a:fld>
             <a:endParaRPr lang="en-US"/>
           </a:p>
@@ -2873,7 +2877,7 @@
               <a:pPr>
                 <a:defRPr/>
               </a:pPr>
-              <a:t>3/23/2026</a:t>
+              <a:t>8/8/2026</a:t>
             </a:fld>
             <a:endParaRPr lang="en-US"/>
           </a:p>
@@ -3151,7 +3155,7 @@
               <a:pPr>
                 <a:defRPr/>
               </a:pPr>
-              <a:t>3/23/2026</a:t>
+              <a:t>8/8/2026</a:t>
             </a:fld>
             <a:endParaRPr lang="en-US"/>
           </a:p>
@@ -3399,7 +3403,7 @@
               <a:pPr>
                 <a:defRPr/>
               </a:pPr>
-              <a:t>3/23/2026</a:t>
+              <a:t>8/8/2026</a:t>
             </a:fld>
             <a:endParaRPr lang="en-US"/>
           </a:p>
@@ -8541,83 +8545,32 @@
           <a:chExt cx="0" cy="0"/>
         </a:xfrm>
       </p:grpSpPr>
-      <p:sp>
-        <p:nvSpPr>
-          <p:cNvPr id="2" name="Title 1"/>
-          <p:cNvSpPr>
-            <a:spLocks noGrp="1"/>
-          </p:cNvSpPr>
-          <p:nvPr>
-            <p:ph type="title"/>
-          </p:nvPr>
-        </p:nvSpPr>
-        <p:spPr/>
-        <p:txBody>
-          <a:bodyPr/>
-          <a:lstStyle/>
-          <a:p>
-            <a:r>
-              <a:rPr lang="en-US" dirty="0" smtClean="0"/>
-              <a:t>Further Reading</a:t>
-            </a:r>
-            <a:endParaRPr lang="en-US" dirty="0"/>
-          </a:p>
-        </p:txBody>
-      </p:sp>
-      <p:sp>
-        <p:nvSpPr>
-          <p:cNvPr id="3" name="Content Placeholder 2"/>
-          <p:cNvSpPr>
-            <a:spLocks noGrp="1"/>
-          </p:cNvSpPr>
-          <p:nvPr>
-            <p:ph idx="1"/>
-          </p:nvPr>
-        </p:nvSpPr>
-        <p:spPr/>
-        <p:txBody>
-          <a:bodyPr/>
-          <a:lstStyle/>
-          <a:p>
-            <a:r>
-              <a:rPr lang="en-US" sz="2400" dirty="0" smtClean="0"/>
-              <a:t>David G. </a:t>
-            </a:r>
-            <a:r>
-              <a:rPr lang="en-US" sz="2400" dirty="0" err="1" smtClean="0"/>
-              <a:t>Thaler</a:t>
-            </a:r>
-            <a:r>
-              <a:rPr lang="en-US" sz="2400" dirty="0" smtClean="0"/>
-              <a:t> and </a:t>
-            </a:r>
-            <a:r>
-              <a:rPr lang="en-US" sz="2400" dirty="0" err="1" smtClean="0"/>
-              <a:t>Chinya</a:t>
-            </a:r>
-            <a:r>
-              <a:rPr lang="en-US" sz="2400" dirty="0" smtClean="0"/>
-              <a:t> V. </a:t>
-            </a:r>
-            <a:r>
-              <a:rPr lang="en-US" sz="2400" dirty="0" err="1" smtClean="0"/>
-              <a:t>Ravishankar</a:t>
-            </a:r>
-            <a:r>
-              <a:rPr lang="en-US" sz="2400" dirty="0" smtClean="0"/>
-              <a:t> (1998). Using Name-Based Mappings to Increase Hit Rates.</a:t>
-            </a:r>
-          </a:p>
-          <a:p>
-            <a:pPr lvl="1"/>
-            <a:r>
-              <a:rPr lang="en-US" sz="2000" dirty="0" smtClean="0"/>
-              <a:t>Load Balancing Algorithms</a:t>
-            </a:r>
-            <a:endParaRPr lang="en-US" sz="2000" dirty="0"/>
-          </a:p>
-        </p:txBody>
-      </p:sp>
+      <p:pic>
+        <p:nvPicPr>
+          <p:cNvPr id="4" name="Picture 2" descr="https://lh3.ggpht.com/1IfZLL2QDSjZ0wS7sUhaMlsAOS8BBzdR3wZ1WawgRn7KZAM8nEVZYMOUM-lqQb0ikIzp=w300"/>
+          <p:cNvPicPr>
+            <a:picLocks noChangeAspect="1" noChangeArrowheads="1"/>
+          </p:cNvPicPr>
+          <p:nvPr/>
+        </p:nvPicPr>
+        <p:blipFill>
+          <a:blip r:embed="rId2" cstate="print"/>
+          <a:srcRect/>
+          <a:stretch>
+            <a:fillRect/>
+          </a:stretch>
+        </p:blipFill>
+        <p:spPr bwMode="auto">
+          <a:xfrm>
+            <a:off x="3276600" y="1905000"/>
+            <a:ext cx="2857500" cy="2857500"/>
+          </a:xfrm>
+          <a:prstGeom prst="rect">
+            <a:avLst/>
+          </a:prstGeom>
+          <a:noFill/>
+        </p:spPr>
+      </p:pic>
     </p:spTree>
   </p:cSld>
   <p:clrMapOvr>
@@ -8660,11 +8613,7 @@
           <a:p>
             <a:r>
               <a:rPr lang="en-US" dirty="0" smtClean="0"/>
-              <a:t>Scaling </a:t>
-            </a:r>
-            <a:r>
-              <a:rPr lang="en-US" dirty="0" smtClean="0"/>
-              <a:t>Indicators [1]</a:t>
+              <a:t>Scaling Indicators [1]</a:t>
             </a:r>
             <a:endParaRPr lang="en-US" dirty="0"/>
           </a:p>
@@ -8695,15 +8644,7 @@
             </a:r>
             <a:r>
               <a:rPr lang="en-US" sz="2800" dirty="0" smtClean="0"/>
-              <a:t>, it </a:t>
-            </a:r>
-            <a:r>
-              <a:rPr lang="en-US" sz="2800" dirty="0" smtClean="0"/>
-              <a:t>is common </a:t>
-            </a:r>
-            <a:r>
-              <a:rPr lang="en-US" sz="2800" dirty="0" smtClean="0"/>
-              <a:t>to use </a:t>
+              <a:t>, it is common to use </a:t>
             </a:r>
             <a:r>
               <a:rPr lang="en-US" sz="2800" i="1" dirty="0" smtClean="0">
@@ -8723,19 +8664,7 @@
             </a:r>
             <a:r>
               <a:rPr lang="en-US" sz="2800" dirty="0" smtClean="0"/>
-              <a:t> </a:t>
-            </a:r>
-            <a:r>
-              <a:rPr lang="en-US" sz="2800" dirty="0" smtClean="0"/>
-              <a:t>to monitor </a:t>
-            </a:r>
-            <a:r>
-              <a:rPr lang="en-US" sz="2800" dirty="0" smtClean="0"/>
-              <a:t>and track the </a:t>
-            </a:r>
-            <a:r>
-              <a:rPr lang="en-US" sz="2800" dirty="0" smtClean="0"/>
-              <a:t>performance.</a:t>
+              <a:t> to monitor and track the performance.</a:t>
             </a:r>
           </a:p>
           <a:p>
@@ -8749,71 +8678,39 @@
                   <a:srgbClr val="C00000"/>
                 </a:solidFill>
               </a:rPr>
-              <a:t>web </a:t>
-            </a:r>
-            <a:r>
-              <a:rPr lang="en-US" sz="2800" i="1" dirty="0" smtClean="0">
-                <a:solidFill>
-                  <a:srgbClr val="C00000"/>
-                </a:solidFill>
-              </a:rPr>
-              <a:t>applications</a:t>
+              <a:t>web applications</a:t>
             </a:r>
             <a:r>
               <a:rPr lang="en-US" sz="2800" dirty="0" smtClean="0"/>
-              <a:t>, typical </a:t>
-            </a:r>
-            <a:r>
-              <a:rPr lang="en-US" sz="2800" dirty="0" smtClean="0"/>
-              <a:t>scaling indicators at the web server may include</a:t>
-            </a:r>
-            <a:r>
-              <a:rPr lang="en-US" sz="2800" dirty="0" smtClean="0"/>
-              <a:t>:</a:t>
+              <a:t>, typical scaling indicators at the web server may include:</a:t>
             </a:r>
           </a:p>
           <a:p>
             <a:pPr lvl="1"/>
             <a:r>
               <a:rPr lang="en-US" sz="2400" dirty="0" smtClean="0"/>
-              <a:t>Number </a:t>
-            </a:r>
-            <a:r>
-              <a:rPr lang="en-US" sz="2400" dirty="0" smtClean="0"/>
-              <a:t>of concurrent users.</a:t>
+              <a:t>Number of concurrent users.</a:t>
             </a:r>
           </a:p>
           <a:p>
             <a:pPr lvl="1"/>
             <a:r>
               <a:rPr lang="en-US" sz="2400" dirty="0" smtClean="0"/>
-              <a:t>Number </a:t>
-            </a:r>
-            <a:r>
-              <a:rPr lang="en-US" sz="2400" dirty="0" smtClean="0"/>
-              <a:t>of active connections.</a:t>
+              <a:t>Number of active connections.</a:t>
             </a:r>
           </a:p>
           <a:p>
             <a:pPr lvl="1"/>
             <a:r>
               <a:rPr lang="en-US" sz="2400" dirty="0" smtClean="0"/>
-              <a:t>Number </a:t>
-            </a:r>
-            <a:r>
-              <a:rPr lang="en-US" sz="2400" dirty="0" smtClean="0"/>
-              <a:t>of requests per second.</a:t>
+              <a:t>Number of requests per second.</a:t>
             </a:r>
           </a:p>
           <a:p>
             <a:pPr lvl="1"/>
             <a:r>
               <a:rPr lang="en-US" sz="2400" dirty="0" smtClean="0"/>
-              <a:t>Average </a:t>
-            </a:r>
-            <a:r>
-              <a:rPr lang="en-US" sz="2400" dirty="0" smtClean="0"/>
-              <a:t>response times per request.</a:t>
+              <a:t>Average response times per request.</a:t>
             </a:r>
             <a:endParaRPr lang="en-US" sz="2400" dirty="0"/>
           </a:p>
@@ -8828,6 +8725,596 @@
 </file>
 
 <file path=ppt/slides/slide30.xml><?xml version="1.0" encoding="utf-8"?>
+<p:sld xmlns:a="http://schemas.openxmlformats.org/drawingml/2006/main" xmlns:r="http://schemas.openxmlformats.org/officeDocument/2006/relationships" xmlns:p="http://schemas.openxmlformats.org/presentationml/2006/main">
+  <p:cSld>
+    <p:spTree>
+      <p:nvGrpSpPr>
+        <p:cNvPr id="1" name=""/>
+        <p:cNvGrpSpPr/>
+        <p:nvPr/>
+      </p:nvGrpSpPr>
+      <p:grpSpPr>
+        <a:xfrm>
+          <a:off x="0" y="0"/>
+          <a:ext cx="0" cy="0"/>
+          <a:chOff x="0" y="0"/>
+          <a:chExt cx="0" cy="0"/>
+        </a:xfrm>
+      </p:grpSpPr>
+      <p:sp>
+        <p:nvSpPr>
+          <p:cNvPr id="2" name="Title 1"/>
+          <p:cNvSpPr>
+            <a:spLocks noGrp="1"/>
+          </p:cNvSpPr>
+          <p:nvPr>
+            <p:ph type="title"/>
+          </p:nvPr>
+        </p:nvSpPr>
+        <p:spPr/>
+        <p:txBody>
+          <a:bodyPr/>
+          <a:lstStyle/>
+          <a:p>
+            <a:r>
+              <a:rPr lang="en-US" dirty="0" smtClean="0"/>
+              <a:t>Horizontal Pod </a:t>
+            </a:r>
+            <a:r>
+              <a:rPr lang="en-US" dirty="0" err="1" smtClean="0"/>
+              <a:t>Autoscaling</a:t>
+            </a:r>
+            <a:endParaRPr lang="en-US" dirty="0"/>
+          </a:p>
+        </p:txBody>
+      </p:sp>
+      <p:sp>
+        <p:nvSpPr>
+          <p:cNvPr id="3" name="Content Placeholder 2"/>
+          <p:cNvSpPr>
+            <a:spLocks noGrp="1"/>
+          </p:cNvSpPr>
+          <p:nvPr>
+            <p:ph idx="1"/>
+          </p:nvPr>
+        </p:nvSpPr>
+        <p:spPr/>
+        <p:txBody>
+          <a:bodyPr/>
+          <a:lstStyle/>
+          <a:p>
+            <a:r>
+              <a:rPr lang="en-US" sz="2400" dirty="0" smtClean="0">
+                <a:hlinkClick r:id="rId2"/>
+              </a:rPr>
+              <a:t>https://kubernetes.io/docs/concepts/workloads/autoscaling/horizontal-pod-autoscale</a:t>
+            </a:r>
+            <a:r>
+              <a:rPr lang="en-US" sz="2400" dirty="0" smtClean="0">
+                <a:hlinkClick r:id="rId2"/>
+              </a:rPr>
+              <a:t>/</a:t>
+            </a:r>
+            <a:endParaRPr lang="en-US" sz="2400" dirty="0" smtClean="0"/>
+          </a:p>
+          <a:p>
+            <a:r>
+              <a:rPr lang="en-US" sz="2400" dirty="0" smtClean="0"/>
+              <a:t>Horizontal scaling means that the response to increased load is to deploy more Pods.</a:t>
+            </a:r>
+          </a:p>
+          <a:p>
+            <a:r>
+              <a:rPr lang="en-US" sz="2400" dirty="0" smtClean="0"/>
+              <a:t>If the load decreases, and the number of Pods is above the configured minimum, the </a:t>
+            </a:r>
+            <a:r>
+              <a:rPr lang="en-US" sz="2400" dirty="0" err="1" smtClean="0"/>
+              <a:t>HorizontalPodAutoscaler</a:t>
+            </a:r>
+            <a:r>
+              <a:rPr lang="en-US" sz="2400" dirty="0" smtClean="0"/>
+              <a:t> instructs the workload resource (the Deployment, </a:t>
+            </a:r>
+            <a:r>
+              <a:rPr lang="en-US" sz="2400" dirty="0" err="1" smtClean="0"/>
+              <a:t>StatefulSet</a:t>
+            </a:r>
+            <a:r>
+              <a:rPr lang="en-US" sz="2400" dirty="0" smtClean="0"/>
+              <a:t>, or other similar resource) to scale back down.</a:t>
+            </a:r>
+          </a:p>
+          <a:p>
+            <a:r>
+              <a:rPr lang="en-US" sz="2400" dirty="0" err="1" smtClean="0"/>
+              <a:t>Kubernetes</a:t>
+            </a:r>
+            <a:r>
+              <a:rPr lang="en-US" sz="2400" dirty="0" smtClean="0"/>
+              <a:t> implements horizontal pod </a:t>
+            </a:r>
+            <a:r>
+              <a:rPr lang="en-US" sz="2400" dirty="0" err="1" smtClean="0"/>
+              <a:t>autoscaling</a:t>
+            </a:r>
+            <a:r>
+              <a:rPr lang="en-US" sz="2400" dirty="0" smtClean="0"/>
+              <a:t> as a control loop that runs intermittently (it is not a continuous process).</a:t>
+            </a:r>
+          </a:p>
+          <a:p>
+            <a:endParaRPr lang="en-US" sz="2400" dirty="0"/>
+          </a:p>
+        </p:txBody>
+      </p:sp>
+    </p:spTree>
+  </p:cSld>
+  <p:clrMapOvr>
+    <a:masterClrMapping/>
+  </p:clrMapOvr>
+</p:sld>
+</file>
+
+<file path=ppt/slides/slide31.xml><?xml version="1.0" encoding="utf-8"?>
+<p:sld xmlns:a="http://schemas.openxmlformats.org/drawingml/2006/main" xmlns:r="http://schemas.openxmlformats.org/officeDocument/2006/relationships" xmlns:p="http://schemas.openxmlformats.org/presentationml/2006/main">
+  <p:cSld>
+    <p:spTree>
+      <p:nvGrpSpPr>
+        <p:cNvPr id="1" name=""/>
+        <p:cNvGrpSpPr/>
+        <p:nvPr/>
+      </p:nvGrpSpPr>
+      <p:grpSpPr>
+        <a:xfrm>
+          <a:off x="0" y="0"/>
+          <a:ext cx="0" cy="0"/>
+          <a:chOff x="0" y="0"/>
+          <a:chExt cx="0" cy="0"/>
+        </a:xfrm>
+      </p:grpSpPr>
+      <p:sp>
+        <p:nvSpPr>
+          <p:cNvPr id="2" name="Title 1"/>
+          <p:cNvSpPr>
+            <a:spLocks noGrp="1"/>
+          </p:cNvSpPr>
+          <p:nvPr>
+            <p:ph type="title"/>
+          </p:nvPr>
+        </p:nvSpPr>
+        <p:spPr/>
+        <p:txBody>
+          <a:bodyPr/>
+          <a:lstStyle/>
+          <a:p>
+            <a:r>
+              <a:rPr lang="en-US" dirty="0" err="1" smtClean="0"/>
+              <a:t>Kubernetes</a:t>
+            </a:r>
+            <a:r>
+              <a:rPr lang="en-US" dirty="0" smtClean="0"/>
+              <a:t> HPA (KHPA</a:t>
+            </a:r>
+            <a:r>
+              <a:rPr lang="en-US" dirty="0" smtClean="0"/>
+              <a:t>) Algorithm</a:t>
+            </a:r>
+            <a:endParaRPr lang="en-US" dirty="0"/>
+          </a:p>
+        </p:txBody>
+      </p:sp>
+      <p:sp>
+        <p:nvSpPr>
+          <p:cNvPr id="3" name="Content Placeholder 2"/>
+          <p:cNvSpPr>
+            <a:spLocks noGrp="1"/>
+          </p:cNvSpPr>
+          <p:nvPr>
+            <p:ph idx="1"/>
+          </p:nvPr>
+        </p:nvSpPr>
+        <p:spPr/>
+        <p:txBody>
+          <a:bodyPr/>
+          <a:lstStyle/>
+          <a:p>
+            <a:r>
+              <a:rPr lang="en-US" sz="2400" dirty="0" smtClean="0"/>
+              <a:t>The </a:t>
+            </a:r>
+            <a:r>
+              <a:rPr lang="en-US" sz="2400" dirty="0" err="1" smtClean="0"/>
+              <a:t>HorizontalPodAutoscaler</a:t>
+            </a:r>
+            <a:r>
+              <a:rPr lang="en-US" sz="2400" dirty="0" smtClean="0"/>
+              <a:t> controller operates on the ratio between desired metric value and current metric value:</a:t>
+            </a:r>
+          </a:p>
+          <a:p>
+            <a:r>
+              <a:rPr lang="en-US" sz="2400" dirty="0" err="1" smtClean="0"/>
+              <a:t>desiredReplicas</a:t>
+            </a:r>
+            <a:r>
+              <a:rPr lang="en-US" sz="2400" dirty="0" smtClean="0"/>
+              <a:t> = ceil [ </a:t>
+            </a:r>
+            <a:r>
+              <a:rPr lang="en-US" sz="2400" dirty="0" err="1" smtClean="0"/>
+              <a:t>currentReplicas</a:t>
+            </a:r>
+            <a:r>
+              <a:rPr lang="en-US" sz="2400" dirty="0" smtClean="0"/>
+              <a:t> × (</a:t>
+            </a:r>
+            <a:r>
+              <a:rPr lang="en-US" sz="2400" dirty="0" err="1" smtClean="0"/>
+              <a:t>desiredMetricValue</a:t>
+            </a:r>
+            <a:r>
+              <a:rPr lang="en-US" sz="2400" dirty="0" smtClean="0"/>
+              <a:t>/</a:t>
+            </a:r>
+            <a:r>
+              <a:rPr lang="en-US" sz="2400" dirty="0" err="1" smtClean="0"/>
+              <a:t>currentMetricValue</a:t>
+            </a:r>
+            <a:r>
+              <a:rPr lang="en-US" sz="2400" dirty="0" smtClean="0"/>
+              <a:t>​) ]</a:t>
+            </a:r>
+          </a:p>
+          <a:p>
+            <a:r>
+              <a:rPr lang="en-US" sz="2400" dirty="0" smtClean="0"/>
+              <a:t>For example, if the current metric value is 200m, and the desired value is 100m, the number of replicas will be doubled, since </a:t>
+            </a:r>
+            <a:r>
+              <a:rPr lang="en-US" sz="2400" dirty="0" smtClean="0"/>
+              <a:t>200.0 ÷ 100.0 = 2.0.</a:t>
+            </a:r>
+            <a:endParaRPr lang="en-US" sz="2400" dirty="0" smtClean="0"/>
+          </a:p>
+          <a:p>
+            <a:r>
+              <a:rPr lang="en-US" sz="2400" dirty="0" smtClean="0"/>
+              <a:t>If the current value is instead 50m, you'll halve the number of replicas, since </a:t>
+            </a:r>
+            <a:r>
+              <a:rPr lang="en-US" sz="2400" dirty="0" smtClean="0"/>
+              <a:t>50.0 ÷ 100.0 = 0.5.</a:t>
+            </a:r>
+            <a:endParaRPr lang="en-US" sz="2400" dirty="0" smtClean="0"/>
+          </a:p>
+          <a:p>
+            <a:r>
+              <a:rPr lang="en-US" sz="2400" dirty="0" smtClean="0"/>
+              <a:t>The control plane skips any scaling action if the ratio is sufficiently close to </a:t>
+            </a:r>
+            <a:r>
+              <a:rPr lang="en-US" sz="2400" dirty="0" smtClean="0"/>
+              <a:t>1.0.</a:t>
+            </a:r>
+            <a:endParaRPr lang="en-US" sz="2400" dirty="0" smtClean="0"/>
+          </a:p>
+        </p:txBody>
+      </p:sp>
+    </p:spTree>
+  </p:cSld>
+  <p:clrMapOvr>
+    <a:masterClrMapping/>
+  </p:clrMapOvr>
+</p:sld>
+</file>
+
+<file path=ppt/slides/slide32.xml><?xml version="1.0" encoding="utf-8"?>
+<p:sld xmlns:a="http://schemas.openxmlformats.org/drawingml/2006/main" xmlns:r="http://schemas.openxmlformats.org/officeDocument/2006/relationships" xmlns:p="http://schemas.openxmlformats.org/presentationml/2006/main">
+  <p:cSld>
+    <p:spTree>
+      <p:nvGrpSpPr>
+        <p:cNvPr id="1" name=""/>
+        <p:cNvGrpSpPr/>
+        <p:nvPr/>
+      </p:nvGrpSpPr>
+      <p:grpSpPr>
+        <a:xfrm>
+          <a:off x="0" y="0"/>
+          <a:ext cx="0" cy="0"/>
+          <a:chOff x="0" y="0"/>
+          <a:chExt cx="0" cy="0"/>
+        </a:xfrm>
+      </p:grpSpPr>
+      <p:sp>
+        <p:nvSpPr>
+          <p:cNvPr id="2" name="Title 1"/>
+          <p:cNvSpPr>
+            <a:spLocks noGrp="1"/>
+          </p:cNvSpPr>
+          <p:nvPr>
+            <p:ph type="title"/>
+          </p:nvPr>
+        </p:nvSpPr>
+        <p:spPr/>
+        <p:txBody>
+          <a:bodyPr/>
+          <a:lstStyle/>
+          <a:p>
+            <a:r>
+              <a:rPr lang="en-US" dirty="0" smtClean="0"/>
+              <a:t>Smart HPA</a:t>
+            </a:r>
+            <a:endParaRPr lang="en-US" dirty="0"/>
+          </a:p>
+        </p:txBody>
+      </p:sp>
+      <p:sp>
+        <p:nvSpPr>
+          <p:cNvPr id="3" name="Content Placeholder 2"/>
+          <p:cNvSpPr>
+            <a:spLocks noGrp="1"/>
+          </p:cNvSpPr>
+          <p:nvPr>
+            <p:ph idx="1"/>
+          </p:nvPr>
+        </p:nvSpPr>
+        <p:spPr/>
+        <p:txBody>
+          <a:bodyPr/>
+          <a:lstStyle/>
+          <a:p>
+            <a:r>
+              <a:rPr lang="en-US" sz="2000" b="1" dirty="0" err="1" smtClean="0"/>
+              <a:t>Hussain</a:t>
+            </a:r>
+            <a:r>
+              <a:rPr lang="en-US" sz="2000" b="1" dirty="0" smtClean="0"/>
+              <a:t> Ahmad et al. (2025). Towards resource-efficient reactive and proactive auto-scaling for </a:t>
+            </a:r>
+            <a:r>
+              <a:rPr lang="en-US" sz="2000" b="1" dirty="0" err="1" smtClean="0"/>
+              <a:t>microservice</a:t>
+            </a:r>
+            <a:r>
+              <a:rPr lang="en-US" sz="2000" b="1" dirty="0" smtClean="0"/>
+              <a:t> </a:t>
+            </a:r>
+            <a:r>
+              <a:rPr lang="en-US" sz="2000" b="1" dirty="0" smtClean="0"/>
+              <a:t>architectures.</a:t>
+            </a:r>
+            <a:endParaRPr lang="en-US" sz="2000" b="1" dirty="0" smtClean="0"/>
+          </a:p>
+        </p:txBody>
+      </p:sp>
+      <p:pic>
+        <p:nvPicPr>
+          <p:cNvPr id="1026" name="Picture 2"/>
+          <p:cNvPicPr>
+            <a:picLocks noChangeAspect="1" noChangeArrowheads="1"/>
+          </p:cNvPicPr>
+          <p:nvPr/>
+        </p:nvPicPr>
+        <p:blipFill>
+          <a:blip r:embed="rId2" cstate="print"/>
+          <a:srcRect/>
+          <a:stretch>
+            <a:fillRect/>
+          </a:stretch>
+        </p:blipFill>
+        <p:spPr bwMode="auto">
+          <a:xfrm>
+            <a:off x="2514600" y="2514600"/>
+            <a:ext cx="6235700" cy="3444875"/>
+          </a:xfrm>
+          <a:prstGeom prst="rect">
+            <a:avLst/>
+          </a:prstGeom>
+          <a:noFill/>
+          <a:ln w="9525">
+            <a:noFill/>
+            <a:miter lim="800000"/>
+            <a:headEnd/>
+            <a:tailEnd/>
+          </a:ln>
+        </p:spPr>
+      </p:pic>
+      <p:sp>
+        <p:nvSpPr>
+          <p:cNvPr id="5" name="Rectangle 4"/>
+          <p:cNvSpPr/>
+          <p:nvPr/>
+        </p:nvSpPr>
+        <p:spPr>
+          <a:xfrm>
+            <a:off x="609600" y="2590800"/>
+            <a:ext cx="1828800" cy="3693319"/>
+          </a:xfrm>
+          <a:prstGeom prst="rect">
+            <a:avLst/>
+          </a:prstGeom>
+        </p:spPr>
+        <p:style>
+          <a:lnRef idx="2">
+            <a:schemeClr val="dk1"/>
+          </a:lnRef>
+          <a:fillRef idx="1">
+            <a:schemeClr val="lt1"/>
+          </a:fillRef>
+          <a:effectRef idx="0">
+            <a:schemeClr val="dk1"/>
+          </a:effectRef>
+          <a:fontRef idx="minor">
+            <a:schemeClr val="dk1"/>
+          </a:fontRef>
+        </p:style>
+        <p:txBody>
+          <a:bodyPr wrap="square">
+            <a:spAutoFit/>
+          </a:bodyPr>
+          <a:lstStyle/>
+          <a:p>
+            <a:r>
+              <a:rPr lang="en-US" dirty="0" smtClean="0"/>
+              <a:t>Smart HPA employs a reactive scaling policy that facilitates </a:t>
+            </a:r>
+            <a:r>
+              <a:rPr lang="en-US" i="1" dirty="0" smtClean="0">
+                <a:solidFill>
+                  <a:srgbClr val="C00000"/>
+                </a:solidFill>
+              </a:rPr>
+              <a:t>resource exchange among </a:t>
+            </a:r>
+            <a:r>
+              <a:rPr lang="en-US" i="1" dirty="0" err="1" smtClean="0">
+                <a:solidFill>
+                  <a:srgbClr val="C00000"/>
+                </a:solidFill>
+              </a:rPr>
+              <a:t>microservices</a:t>
+            </a:r>
+            <a:r>
+              <a:rPr lang="en-US" dirty="0" smtClean="0"/>
+              <a:t>, optimizing auto-scaling in resource-constrained environments.</a:t>
+            </a:r>
+            <a:endParaRPr lang="en-US" dirty="0"/>
+          </a:p>
+        </p:txBody>
+      </p:sp>
+    </p:spTree>
+  </p:cSld>
+  <p:clrMapOvr>
+    <a:masterClrMapping/>
+  </p:clrMapOvr>
+</p:sld>
+</file>
+
+<file path=ppt/slides/slide33.xml><?xml version="1.0" encoding="utf-8"?>
+<p:sld xmlns:a="http://schemas.openxmlformats.org/drawingml/2006/main" xmlns:r="http://schemas.openxmlformats.org/officeDocument/2006/relationships" xmlns:p="http://schemas.openxmlformats.org/presentationml/2006/main">
+  <p:cSld>
+    <p:spTree>
+      <p:nvGrpSpPr>
+        <p:cNvPr id="1" name=""/>
+        <p:cNvGrpSpPr/>
+        <p:nvPr/>
+      </p:nvGrpSpPr>
+      <p:grpSpPr>
+        <a:xfrm>
+          <a:off x="0" y="0"/>
+          <a:ext cx="0" cy="0"/>
+          <a:chOff x="0" y="0"/>
+          <a:chExt cx="0" cy="0"/>
+        </a:xfrm>
+      </p:grpSpPr>
+      <p:sp>
+        <p:nvSpPr>
+          <p:cNvPr id="2" name="Title 1"/>
+          <p:cNvSpPr>
+            <a:spLocks noGrp="1"/>
+          </p:cNvSpPr>
+          <p:nvPr>
+            <p:ph type="title"/>
+          </p:nvPr>
+        </p:nvSpPr>
+        <p:spPr/>
+        <p:txBody>
+          <a:bodyPr/>
+          <a:lstStyle/>
+          <a:p>
+            <a:r>
+              <a:rPr lang="en-US" dirty="0" err="1" smtClean="0"/>
+              <a:t>TopoRank</a:t>
+            </a:r>
+            <a:r>
+              <a:rPr lang="en-US" dirty="0" smtClean="0"/>
+              <a:t> </a:t>
+            </a:r>
+            <a:r>
+              <a:rPr lang="en-US" dirty="0" smtClean="0"/>
+              <a:t>Algorithm</a:t>
+            </a:r>
+            <a:endParaRPr lang="en-US" dirty="0"/>
+          </a:p>
+        </p:txBody>
+      </p:sp>
+      <p:sp>
+        <p:nvSpPr>
+          <p:cNvPr id="3" name="Content Placeholder 2"/>
+          <p:cNvSpPr>
+            <a:spLocks noGrp="1"/>
+          </p:cNvSpPr>
+          <p:nvPr>
+            <p:ph idx="1"/>
+          </p:nvPr>
+        </p:nvSpPr>
+        <p:spPr/>
+        <p:txBody>
+          <a:bodyPr/>
+          <a:lstStyle/>
+          <a:p>
+            <a:r>
+              <a:rPr lang="en-US" sz="2400" b="1" dirty="0" err="1" smtClean="0"/>
+              <a:t>Shuaiyu</a:t>
+            </a:r>
+            <a:r>
+              <a:rPr lang="en-US" sz="2400" b="1" dirty="0" smtClean="0"/>
+              <a:t> </a:t>
+            </a:r>
+            <a:r>
+              <a:rPr lang="en-US" sz="2400" b="1" dirty="0" err="1" smtClean="0"/>
+              <a:t>Xie</a:t>
+            </a:r>
+            <a:r>
+              <a:rPr lang="en-US" sz="2400" b="1" dirty="0" smtClean="0"/>
+              <a:t> et al. (2023). </a:t>
+            </a:r>
+            <a:r>
+              <a:rPr lang="en-US" sz="2400" b="1" dirty="0" err="1" smtClean="0"/>
+              <a:t>PBScaler</a:t>
+            </a:r>
+            <a:r>
+              <a:rPr lang="en-US" sz="2400" b="1" dirty="0" smtClean="0"/>
+              <a:t>: </a:t>
+            </a:r>
+            <a:r>
+              <a:rPr lang="en-US" sz="2400" b="1" dirty="0" smtClean="0"/>
+              <a:t>A Bottleneck-aware </a:t>
+            </a:r>
+            <a:r>
+              <a:rPr lang="en-US" sz="2400" b="1" dirty="0" err="1" smtClean="0"/>
+              <a:t>Autoscaling</a:t>
+            </a:r>
+            <a:r>
+              <a:rPr lang="en-US" sz="2400" b="1" dirty="0" smtClean="0"/>
+              <a:t> Framework for </a:t>
+            </a:r>
+            <a:r>
+              <a:rPr lang="en-US" sz="2400" b="1" dirty="0" err="1" smtClean="0"/>
+              <a:t>Microservice</a:t>
+            </a:r>
+            <a:r>
+              <a:rPr lang="en-US" sz="2400" b="1" dirty="0" smtClean="0"/>
+              <a:t>-based </a:t>
+            </a:r>
+            <a:r>
+              <a:rPr lang="en-US" sz="2400" b="1" dirty="0" smtClean="0"/>
+              <a:t>Applications.</a:t>
+            </a:r>
+            <a:endParaRPr lang="en-US" sz="2400" b="1" dirty="0"/>
+          </a:p>
+        </p:txBody>
+      </p:sp>
+    </p:spTree>
+  </p:cSld>
+  <p:clrMapOvr>
+    <a:masterClrMapping/>
+  </p:clrMapOvr>
+</p:sld>
+</file>
+
+<file path=ppt/slides/slide34.xml><?xml version="1.0" encoding="utf-8"?>
 <p:sld xmlns:a="http://schemas.openxmlformats.org/drawingml/2006/main" xmlns:r="http://schemas.openxmlformats.org/officeDocument/2006/relationships" xmlns:p="http://schemas.openxmlformats.org/presentationml/2006/main">
   <p:cSld>
     <p:spTree>
@@ -8941,11 +9428,7 @@
           <a:p>
             <a:r>
               <a:rPr lang="en-US" dirty="0" smtClean="0"/>
-              <a:t>Scaling </a:t>
-            </a:r>
-            <a:r>
-              <a:rPr lang="en-US" dirty="0" smtClean="0"/>
-              <a:t>Rules</a:t>
+              <a:t>Scaling Rules</a:t>
             </a:r>
             <a:endParaRPr lang="en-US" dirty="0"/>
           </a:p>
@@ -8980,15 +9463,7 @@
             </a:r>
             <a:r>
               <a:rPr lang="en-US" sz="2800" dirty="0" smtClean="0"/>
-              <a:t> for use to scale </a:t>
-            </a:r>
-            <a:r>
-              <a:rPr lang="en-US" sz="2800" dirty="0" smtClean="0"/>
-              <a:t>the application</a:t>
-            </a:r>
-            <a:r>
-              <a:rPr lang="en-US" sz="2800" dirty="0" smtClean="0"/>
-              <a:t>, </a:t>
+              <a:t> for use to scale the application, </a:t>
             </a:r>
             <a:r>
               <a:rPr lang="en-US" sz="2800" u="sng" dirty="0" smtClean="0"/>
@@ -9004,11 +9479,7 @@
             </a:r>
             <a:r>
               <a:rPr lang="en-US" sz="2800" dirty="0" smtClean="0"/>
-              <a:t> in </a:t>
-            </a:r>
-            <a:r>
-              <a:rPr lang="en-US" sz="2800" dirty="0" smtClean="0"/>
-              <a:t>real-time, and statistics is </a:t>
+              <a:t> in real-time, and statistics is </a:t>
             </a:r>
             <a:r>
               <a:rPr lang="en-US" sz="2800" u="sng" dirty="0" smtClean="0"/>
@@ -9016,29 +9487,13 @@
             </a:r>
             <a:r>
               <a:rPr lang="en-US" sz="2800" dirty="0" smtClean="0"/>
-              <a:t> </a:t>
-            </a:r>
+              <a:t> periodically.</a:t>
+            </a:r>
+          </a:p>
+          <a:p>
             <a:r>
               <a:rPr lang="en-US" sz="2800" dirty="0" smtClean="0"/>
-              <a:t>periodically.</a:t>
-            </a:r>
-          </a:p>
-          <a:p>
-            <a:r>
-              <a:rPr lang="en-US" sz="2800" dirty="0" smtClean="0"/>
-              <a:t>Based on </a:t>
-            </a:r>
-            <a:r>
-              <a:rPr lang="en-US" sz="2800" dirty="0" smtClean="0"/>
-              <a:t>the historical trends and predictions derived from </a:t>
-            </a:r>
-            <a:r>
-              <a:rPr lang="en-US" sz="2800" dirty="0" smtClean="0"/>
-              <a:t>the statistics </a:t>
-            </a:r>
-            <a:r>
-              <a:rPr lang="en-US" sz="2800" dirty="0" smtClean="0"/>
-              <a:t>of the scaling indicator, </a:t>
+              <a:t>Based on the historical trends and predictions derived from the statistics of the scaling indicator, </a:t>
             </a:r>
             <a:r>
               <a:rPr lang="en-US" sz="2800" i="1" dirty="0" smtClean="0">
@@ -9054,15 +9509,7 @@
             </a:r>
             <a:r>
               <a:rPr lang="en-US" sz="2800" u="sng" dirty="0" smtClean="0"/>
-              <a:t>be </a:t>
-            </a:r>
-            <a:r>
-              <a:rPr lang="en-US" sz="2800" u="sng" dirty="0" smtClean="0"/>
-              <a:t>defined to </a:t>
-            </a:r>
-            <a:r>
-              <a:rPr lang="en-US" sz="2800" u="sng" dirty="0" smtClean="0"/>
-              <a:t>scale up or down</a:t>
+              <a:t>be defined to scale up or down</a:t>
             </a:r>
             <a:r>
               <a:rPr lang="en-US" sz="2800" dirty="0" smtClean="0"/>
@@ -9114,11 +9561,7 @@
           <a:p>
             <a:r>
               <a:rPr lang="en-US" dirty="0" smtClean="0"/>
-              <a:t>Architecture to Scale Web Applications in a </a:t>
-            </a:r>
-            <a:r>
-              <a:rPr lang="en-US" dirty="0" smtClean="0"/>
-              <a:t>Cloud</a:t>
+              <a:t>Architecture to Scale Web Applications in a Cloud</a:t>
             </a:r>
             <a:endParaRPr lang="en-US" dirty="0"/>
           </a:p>

--- a/Microservices/07.3. Autoscaling.pptx
+++ b/Microservices/07.3. Autoscaling.pptx
@@ -5,7 +5,7 @@
     <p:sldMasterId id="2147483708" r:id="rId1"/>
   </p:sldMasterIdLst>
   <p:notesMasterIdLst>
-    <p:notesMasterId r:id="rId36"/>
+    <p:notesMasterId r:id="rId37"/>
   </p:notesMasterIdLst>
   <p:sldIdLst>
     <p:sldId id="561" r:id="rId2"/>
@@ -41,7 +41,8 @@
     <p:sldId id="658" r:id="rId32"/>
     <p:sldId id="659" r:id="rId33"/>
     <p:sldId id="660" r:id="rId34"/>
-    <p:sldId id="516" r:id="rId35"/>
+    <p:sldId id="661" r:id="rId35"/>
+    <p:sldId id="516" r:id="rId36"/>
   </p:sldIdLst>
   <p:sldSz cx="9144000" cy="6858000" type="screen4x3"/>
   <p:notesSz cx="6858000" cy="9144000"/>
@@ -9315,6 +9316,109 @@
 </file>
 
 <file path=ppt/slides/slide34.xml><?xml version="1.0" encoding="utf-8"?>
+<p:sld xmlns:a="http://schemas.openxmlformats.org/drawingml/2006/main" xmlns:r="http://schemas.openxmlformats.org/officeDocument/2006/relationships" xmlns:p="http://schemas.openxmlformats.org/presentationml/2006/main">
+  <p:cSld>
+    <p:spTree>
+      <p:nvGrpSpPr>
+        <p:cNvPr id="1" name=""/>
+        <p:cNvGrpSpPr/>
+        <p:nvPr/>
+      </p:nvGrpSpPr>
+      <p:grpSpPr>
+        <a:xfrm>
+          <a:off x="0" y="0"/>
+          <a:ext cx="0" cy="0"/>
+          <a:chOff x="0" y="0"/>
+          <a:chExt cx="0" cy="0"/>
+        </a:xfrm>
+      </p:grpSpPr>
+      <p:sp>
+        <p:nvSpPr>
+          <p:cNvPr id="2" name="Title 1"/>
+          <p:cNvSpPr>
+            <a:spLocks noGrp="1"/>
+          </p:cNvSpPr>
+          <p:nvPr>
+            <p:ph type="title"/>
+          </p:nvPr>
+        </p:nvSpPr>
+        <p:spPr/>
+        <p:txBody>
+          <a:bodyPr/>
+          <a:lstStyle/>
+          <a:p>
+            <a:r>
+              <a:rPr lang="en-US" dirty="0" smtClean="0"/>
+              <a:t>Framework of </a:t>
+            </a:r>
+            <a:r>
+              <a:rPr lang="en-US" dirty="0" err="1" smtClean="0"/>
+              <a:t>PBScaler</a:t>
+            </a:r>
+            <a:endParaRPr lang="en-US" dirty="0"/>
+          </a:p>
+        </p:txBody>
+      </p:sp>
+      <p:sp>
+        <p:nvSpPr>
+          <p:cNvPr id="3" name="Content Placeholder 2"/>
+          <p:cNvSpPr>
+            <a:spLocks noGrp="1"/>
+          </p:cNvSpPr>
+          <p:nvPr>
+            <p:ph idx="1"/>
+          </p:nvPr>
+        </p:nvSpPr>
+        <p:spPr/>
+        <p:txBody>
+          <a:bodyPr/>
+          <a:lstStyle/>
+          <a:p>
+            <a:endParaRPr lang="en-US"/>
+          </a:p>
+        </p:txBody>
+      </p:sp>
+      <p:pic>
+        <p:nvPicPr>
+          <p:cNvPr id="2051" name="Picture 3"/>
+          <p:cNvPicPr>
+            <a:picLocks noChangeAspect="1" noChangeArrowheads="1"/>
+          </p:cNvPicPr>
+          <p:nvPr/>
+        </p:nvPicPr>
+        <p:blipFill>
+          <a:blip r:embed="rId2" cstate="print"/>
+          <a:srcRect/>
+          <a:stretch>
+            <a:fillRect/>
+          </a:stretch>
+        </p:blipFill>
+        <p:spPr bwMode="auto">
+          <a:xfrm>
+            <a:off x="596900" y="2419350"/>
+            <a:ext cx="7950200" cy="2990850"/>
+          </a:xfrm>
+          <a:prstGeom prst="rect">
+            <a:avLst/>
+          </a:prstGeom>
+          <a:noFill/>
+          <a:ln w="9525">
+            <a:noFill/>
+            <a:miter lim="800000"/>
+            <a:headEnd/>
+            <a:tailEnd/>
+          </a:ln>
+        </p:spPr>
+      </p:pic>
+    </p:spTree>
+  </p:cSld>
+  <p:clrMapOvr>
+    <a:masterClrMapping/>
+  </p:clrMapOvr>
+</p:sld>
+</file>
+
+<file path=ppt/slides/slide35.xml><?xml version="1.0" encoding="utf-8"?>
 <p:sld xmlns:a="http://schemas.openxmlformats.org/drawingml/2006/main" xmlns:r="http://schemas.openxmlformats.org/officeDocument/2006/relationships" xmlns:p="http://schemas.openxmlformats.org/presentationml/2006/main">
   <p:cSld>
     <p:spTree>

--- a/Microservices/07.3. Autoscaling.pptx
+++ b/Microservices/07.3. Autoscaling.pptx
@@ -5,7 +5,7 @@
     <p:sldMasterId id="2147483708" r:id="rId1"/>
   </p:sldMasterIdLst>
   <p:notesMasterIdLst>
-    <p:notesMasterId r:id="rId37"/>
+    <p:notesMasterId r:id="rId39"/>
   </p:notesMasterIdLst>
   <p:sldIdLst>
     <p:sldId id="561" r:id="rId2"/>
@@ -42,7 +42,9 @@
     <p:sldId id="659" r:id="rId33"/>
     <p:sldId id="660" r:id="rId34"/>
     <p:sldId id="661" r:id="rId35"/>
-    <p:sldId id="516" r:id="rId36"/>
+    <p:sldId id="662" r:id="rId36"/>
+    <p:sldId id="663" r:id="rId37"/>
+    <p:sldId id="516" r:id="rId38"/>
   </p:sldIdLst>
   <p:sldSz cx="9144000" cy="6858000" type="screen4x3"/>
   <p:notesSz cx="6858000" cy="9144000"/>
@@ -9226,84 +9228,264 @@
           <a:p>
             <a:r>
               <a:rPr lang="en-US" dirty="0" err="1" smtClean="0"/>
+              <a:t>PBScaler</a:t>
+            </a:r>
+            <a:endParaRPr lang="en-US" dirty="0"/>
+          </a:p>
+        </p:txBody>
+      </p:sp>
+      <p:sp>
+        <p:nvSpPr>
+          <p:cNvPr id="3" name="Content Placeholder 2"/>
+          <p:cNvSpPr>
+            <a:spLocks noGrp="1"/>
+          </p:cNvSpPr>
+          <p:nvPr>
+            <p:ph idx="1"/>
+          </p:nvPr>
+        </p:nvSpPr>
+        <p:spPr/>
+        <p:txBody>
+          <a:bodyPr/>
+          <a:lstStyle/>
+          <a:p>
+            <a:r>
+              <a:rPr lang="en-US" sz="2000" b="1" dirty="0" err="1" smtClean="0"/>
+              <a:t>Shuaiyu</a:t>
+            </a:r>
+            <a:r>
+              <a:rPr lang="en-US" sz="2000" b="1" dirty="0" smtClean="0"/>
+              <a:t> </a:t>
+            </a:r>
+            <a:r>
+              <a:rPr lang="en-US" sz="2000" b="1" dirty="0" err="1" smtClean="0"/>
+              <a:t>Xie</a:t>
+            </a:r>
+            <a:r>
+              <a:rPr lang="en-US" sz="2000" b="1" dirty="0" smtClean="0"/>
+              <a:t> et al. (2023). </a:t>
+            </a:r>
+            <a:r>
+              <a:rPr lang="en-US" sz="2000" b="1" dirty="0" err="1" smtClean="0"/>
+              <a:t>PBScaler</a:t>
+            </a:r>
+            <a:r>
+              <a:rPr lang="en-US" sz="2000" b="1" dirty="0" smtClean="0"/>
+              <a:t>: </a:t>
+            </a:r>
+            <a:r>
+              <a:rPr lang="en-US" sz="2000" b="1" dirty="0" smtClean="0"/>
+              <a:t>A Bottleneck-aware </a:t>
+            </a:r>
+            <a:r>
+              <a:rPr lang="en-US" sz="2000" b="1" dirty="0" err="1" smtClean="0"/>
+              <a:t>Autoscaling</a:t>
+            </a:r>
+            <a:r>
+              <a:rPr lang="en-US" sz="2000" b="1" dirty="0" smtClean="0"/>
+              <a:t> Framework for </a:t>
+            </a:r>
+            <a:r>
+              <a:rPr lang="en-US" sz="2000" b="1" dirty="0" err="1" smtClean="0"/>
+              <a:t>Microservice</a:t>
+            </a:r>
+            <a:r>
+              <a:rPr lang="en-US" sz="2000" b="1" dirty="0" smtClean="0"/>
+              <a:t>-based </a:t>
+            </a:r>
+            <a:r>
+              <a:rPr lang="en-US" sz="2000" b="1" dirty="0" smtClean="0"/>
+              <a:t>Applications.</a:t>
+            </a:r>
+          </a:p>
+          <a:p>
+            <a:r>
+              <a:rPr lang="en-US" sz="2000" dirty="0" smtClean="0"/>
+              <a:t>We </a:t>
+            </a:r>
+            <a:r>
+              <a:rPr lang="en-US" sz="2000" dirty="0" smtClean="0"/>
+              <a:t>propose </a:t>
+            </a:r>
+            <a:r>
+              <a:rPr lang="en-US" sz="2000" dirty="0" err="1" smtClean="0"/>
               <a:t>TopoRank</a:t>
             </a:r>
             <a:r>
-              <a:rPr lang="en-US" dirty="0" smtClean="0"/>
+              <a:rPr lang="en-US" sz="2000" dirty="0" smtClean="0"/>
+              <a:t>, a </a:t>
+            </a:r>
+            <a:r>
+              <a:rPr lang="en-US" sz="2000" u="sng" dirty="0" smtClean="0"/>
+              <a:t>random walk </a:t>
+            </a:r>
+            <a:r>
+              <a:rPr lang="en-US" sz="2000" u="sng" dirty="0" smtClean="0"/>
+              <a:t>algorithm</a:t>
+            </a:r>
+            <a:r>
+              <a:rPr lang="en-US" sz="2000" dirty="0" smtClean="0"/>
+              <a:t> based </a:t>
+            </a:r>
+            <a:r>
+              <a:rPr lang="en-US" sz="2000" dirty="0" smtClean="0"/>
+              <a:t>on topological potential theory (TPT) to </a:t>
+            </a:r>
+            <a:r>
+              <a:rPr lang="en-US" sz="2000" i="1" dirty="0" smtClean="0">
+                <a:solidFill>
+                  <a:srgbClr val="C00000"/>
+                </a:solidFill>
+              </a:rPr>
+              <a:t>identify performance </a:t>
+            </a:r>
+            <a:r>
+              <a:rPr lang="en-US" sz="2000" i="1" dirty="0" smtClean="0">
+                <a:solidFill>
+                  <a:srgbClr val="C00000"/>
+                </a:solidFill>
+              </a:rPr>
+              <a:t>bottlenecks</a:t>
+            </a:r>
+            <a:r>
+              <a:rPr lang="en-US" sz="2000" dirty="0" smtClean="0"/>
+              <a:t> (PBs</a:t>
+            </a:r>
+            <a:r>
+              <a:rPr lang="en-US" sz="2000" dirty="0" smtClean="0"/>
+              <a:t>).</a:t>
+            </a:r>
+          </a:p>
+          <a:p>
+            <a:r>
+              <a:rPr lang="en-US" sz="2000" dirty="0" smtClean="0"/>
+              <a:t>By taking into account </a:t>
+            </a:r>
+            <a:r>
+              <a:rPr lang="en-US" sz="2000" dirty="0" err="1" smtClean="0"/>
+              <a:t>microservice</a:t>
+            </a:r>
+            <a:r>
+              <a:rPr lang="en-US" sz="2000" dirty="0" smtClean="0"/>
+              <a:t> dependencies and anomaly potential, </a:t>
+            </a:r>
+            <a:r>
+              <a:rPr lang="en-US" sz="2000" dirty="0" err="1" smtClean="0"/>
+              <a:t>TopoRank</a:t>
+            </a:r>
+            <a:r>
+              <a:rPr lang="en-US" sz="2000" dirty="0" smtClean="0"/>
               <a:t> </a:t>
             </a:r>
             <a:r>
-              <a:rPr lang="en-US" dirty="0" smtClean="0"/>
-              <a:t>Algorithm</a:t>
-            </a:r>
-            <a:endParaRPr lang="en-US" dirty="0"/>
-          </a:p>
-        </p:txBody>
-      </p:sp>
-      <p:sp>
-        <p:nvSpPr>
-          <p:cNvPr id="3" name="Content Placeholder 2"/>
-          <p:cNvSpPr>
-            <a:spLocks noGrp="1"/>
-          </p:cNvSpPr>
-          <p:nvPr>
-            <p:ph idx="1"/>
-          </p:nvPr>
-        </p:nvSpPr>
-        <p:spPr/>
-        <p:txBody>
-          <a:bodyPr/>
-          <a:lstStyle/>
-          <a:p>
-            <a:r>
-              <a:rPr lang="en-US" sz="2400" b="1" dirty="0" err="1" smtClean="0"/>
-              <a:t>Shuaiyu</a:t>
-            </a:r>
-            <a:r>
-              <a:rPr lang="en-US" sz="2400" b="1" dirty="0" smtClean="0"/>
+              <a:rPr lang="en-US" sz="2000" dirty="0" smtClean="0"/>
+              <a:t>improves the accuracy and </a:t>
+            </a:r>
+            <a:r>
+              <a:rPr lang="en-US" sz="2000" dirty="0" err="1" smtClean="0"/>
+              <a:t>explainability</a:t>
+            </a:r>
+            <a:r>
+              <a:rPr lang="en-US" sz="2000" dirty="0" smtClean="0"/>
+              <a:t> of bottleneck localization.</a:t>
+            </a:r>
+          </a:p>
+          <a:p>
+            <a:r>
+              <a:rPr lang="en-US" sz="2000" dirty="0" smtClean="0"/>
+              <a:t>After identifying the PBs by </a:t>
+            </a:r>
+            <a:r>
+              <a:rPr lang="en-US" sz="2000" dirty="0" err="1" smtClean="0"/>
+              <a:t>TopoRank</a:t>
+            </a:r>
+            <a:r>
+              <a:rPr lang="en-US" sz="2000" dirty="0" smtClean="0"/>
+              <a:t>, </a:t>
+            </a:r>
+            <a:r>
+              <a:rPr lang="en-US" sz="2000" dirty="0" err="1" smtClean="0"/>
+              <a:t>PBScaler</a:t>
+            </a:r>
+            <a:r>
+              <a:rPr lang="en-US" sz="2000" dirty="0" smtClean="0"/>
+              <a:t> further </a:t>
+            </a:r>
+            <a:r>
+              <a:rPr lang="en-US" sz="2000" dirty="0" smtClean="0"/>
+              <a:t>employs a </a:t>
+            </a:r>
+            <a:r>
+              <a:rPr lang="en-US" sz="2000" i="1" dirty="0" smtClean="0">
+                <a:solidFill>
+                  <a:srgbClr val="C00000"/>
+                </a:solidFill>
+              </a:rPr>
+              <a:t>genetic algorithm</a:t>
+            </a:r>
+            <a:r>
+              <a:rPr lang="en-US" sz="2000" dirty="0" smtClean="0"/>
+              <a:t> to find nearly </a:t>
+            </a:r>
+            <a:r>
+              <a:rPr lang="en-US" sz="2000" dirty="0" smtClean="0"/>
+              <a:t>optimal strategies.</a:t>
+            </a:r>
+          </a:p>
+          <a:p>
+            <a:r>
+              <a:rPr lang="en-US" sz="2000" dirty="0" smtClean="0"/>
+              <a:t>To </a:t>
+            </a:r>
+            <a:r>
+              <a:rPr lang="en-US" sz="2000" dirty="0" smtClean="0"/>
+              <a:t>avoid application oscillation caused by </a:t>
+            </a:r>
+            <a:r>
+              <a:rPr lang="en-US" sz="2000" dirty="0" smtClean="0"/>
+              <a:t>excessive optimization</a:t>
+            </a:r>
+            <a:r>
+              <a:rPr lang="en-US" sz="2000" dirty="0" smtClean="0"/>
+              <a:t>, the process is </a:t>
+            </a:r>
+            <a:r>
+              <a:rPr lang="en-US" sz="2000" i="1" dirty="0" smtClean="0">
+                <a:solidFill>
+                  <a:srgbClr val="C00000"/>
+                </a:solidFill>
+              </a:rPr>
+              <a:t>conducted offline</a:t>
+            </a:r>
+            <a:r>
+              <a:rPr lang="en-US" sz="2000" dirty="0" smtClean="0"/>
               <a:t> </a:t>
             </a:r>
             <a:r>
-              <a:rPr lang="en-US" sz="2400" b="1" dirty="0" err="1" smtClean="0"/>
-              <a:t>Xie</a:t>
-            </a:r>
-            <a:r>
-              <a:rPr lang="en-US" sz="2400" b="1" dirty="0" smtClean="0"/>
-              <a:t> et al. (2023). </a:t>
-            </a:r>
-            <a:r>
-              <a:rPr lang="en-US" sz="2400" b="1" dirty="0" err="1" smtClean="0"/>
-              <a:t>PBScaler</a:t>
-            </a:r>
-            <a:r>
-              <a:rPr lang="en-US" sz="2400" b="1" dirty="0" smtClean="0"/>
-              <a:t>: </a:t>
-            </a:r>
-            <a:r>
-              <a:rPr lang="en-US" sz="2400" b="1" dirty="0" smtClean="0"/>
-              <a:t>A Bottleneck-aware </a:t>
-            </a:r>
-            <a:r>
-              <a:rPr lang="en-US" sz="2400" b="1" dirty="0" err="1" smtClean="0"/>
-              <a:t>Autoscaling</a:t>
-            </a:r>
-            <a:r>
-              <a:rPr lang="en-US" sz="2400" b="1" dirty="0" smtClean="0"/>
-              <a:t> Framework for </a:t>
-            </a:r>
-            <a:r>
-              <a:rPr lang="en-US" sz="2400" b="1" dirty="0" err="1" smtClean="0"/>
-              <a:t>Microservice</a:t>
-            </a:r>
-            <a:r>
-              <a:rPr lang="en-US" sz="2400" b="1" dirty="0" smtClean="0"/>
-              <a:t>-based </a:t>
-            </a:r>
-            <a:r>
-              <a:rPr lang="en-US" sz="2400" b="1" dirty="0" smtClean="0"/>
-              <a:t>Applications.</a:t>
-            </a:r>
-            <a:endParaRPr lang="en-US" sz="2400" b="1" dirty="0"/>
+              <a:rPr lang="en-US" sz="2000" dirty="0" smtClean="0"/>
+              <a:t>and is </a:t>
+            </a:r>
+            <a:r>
+              <a:rPr lang="en-US" sz="2000" dirty="0" smtClean="0"/>
+              <a:t>guided by an SLO violation predictor, which </a:t>
+            </a:r>
+            <a:r>
+              <a:rPr lang="en-US" sz="2000" dirty="0" smtClean="0"/>
+              <a:t>simulates the </a:t>
+            </a:r>
+            <a:r>
+              <a:rPr lang="en-US" sz="2000" dirty="0" smtClean="0"/>
+              <a:t>online application and provides feedback to the </a:t>
+            </a:r>
+            <a:r>
+              <a:rPr lang="en-US" sz="2000" dirty="0" smtClean="0"/>
+              <a:t>scaling strategies</a:t>
+            </a:r>
+            <a:r>
+              <a:rPr lang="en-US" sz="2000" dirty="0" smtClean="0"/>
+              <a:t>.</a:t>
+            </a:r>
+            <a:endParaRPr lang="en-US" sz="2000" b="1" dirty="0"/>
           </a:p>
         </p:txBody>
       </p:sp>
@@ -9419,6 +9601,156 @@
 </file>
 
 <file path=ppt/slides/slide35.xml><?xml version="1.0" encoding="utf-8"?>
+<p:sld xmlns:a="http://schemas.openxmlformats.org/drawingml/2006/main" xmlns:r="http://schemas.openxmlformats.org/officeDocument/2006/relationships" xmlns:p="http://schemas.openxmlformats.org/presentationml/2006/main">
+  <p:cSld>
+    <p:spTree>
+      <p:nvGrpSpPr>
+        <p:cNvPr id="1" name=""/>
+        <p:cNvGrpSpPr/>
+        <p:nvPr/>
+      </p:nvGrpSpPr>
+      <p:grpSpPr>
+        <a:xfrm>
+          <a:off x="0" y="0"/>
+          <a:ext cx="0" cy="0"/>
+          <a:chOff x="0" y="0"/>
+          <a:chExt cx="0" cy="0"/>
+        </a:xfrm>
+      </p:grpSpPr>
+      <p:sp>
+        <p:nvSpPr>
+          <p:cNvPr id="2" name="Title 1"/>
+          <p:cNvSpPr>
+            <a:spLocks noGrp="1"/>
+          </p:cNvSpPr>
+          <p:nvPr>
+            <p:ph type="title"/>
+          </p:nvPr>
+        </p:nvSpPr>
+        <p:spPr/>
+        <p:txBody>
+          <a:bodyPr/>
+          <a:lstStyle/>
+          <a:p>
+            <a:r>
+              <a:rPr lang="en-US" dirty="0" err="1" smtClean="0"/>
+              <a:t>TopoRank</a:t>
+            </a:r>
+            <a:r>
+              <a:rPr lang="en-US" dirty="0" smtClean="0"/>
+              <a:t> </a:t>
+            </a:r>
+            <a:r>
+              <a:rPr lang="en-US" dirty="0" smtClean="0"/>
+              <a:t>Algorithm</a:t>
+            </a:r>
+            <a:endParaRPr lang="en-US" dirty="0"/>
+          </a:p>
+        </p:txBody>
+      </p:sp>
+      <p:sp>
+        <p:nvSpPr>
+          <p:cNvPr id="3" name="Content Placeholder 2"/>
+          <p:cNvSpPr>
+            <a:spLocks noGrp="1"/>
+          </p:cNvSpPr>
+          <p:nvPr>
+            <p:ph idx="1"/>
+          </p:nvPr>
+        </p:nvSpPr>
+        <p:spPr/>
+        <p:txBody>
+          <a:bodyPr/>
+          <a:lstStyle/>
+          <a:p>
+            <a:endParaRPr lang="en-US" sz="2000" b="1" dirty="0"/>
+          </a:p>
+        </p:txBody>
+      </p:sp>
+    </p:spTree>
+  </p:cSld>
+  <p:clrMapOvr>
+    <a:masterClrMapping/>
+  </p:clrMapOvr>
+</p:sld>
+</file>
+
+<file path=ppt/slides/slide36.xml><?xml version="1.0" encoding="utf-8"?>
+<p:sld xmlns:a="http://schemas.openxmlformats.org/drawingml/2006/main" xmlns:r="http://schemas.openxmlformats.org/officeDocument/2006/relationships" xmlns:p="http://schemas.openxmlformats.org/presentationml/2006/main">
+  <p:cSld>
+    <p:spTree>
+      <p:nvGrpSpPr>
+        <p:cNvPr id="1" name=""/>
+        <p:cNvGrpSpPr/>
+        <p:nvPr/>
+      </p:nvGrpSpPr>
+      <p:grpSpPr>
+        <a:xfrm>
+          <a:off x="0" y="0"/>
+          <a:ext cx="0" cy="0"/>
+          <a:chOff x="0" y="0"/>
+          <a:chExt cx="0" cy="0"/>
+        </a:xfrm>
+      </p:grpSpPr>
+      <p:sp>
+        <p:nvSpPr>
+          <p:cNvPr id="2" name="Title 1"/>
+          <p:cNvSpPr>
+            <a:spLocks noGrp="1"/>
+          </p:cNvSpPr>
+          <p:nvPr>
+            <p:ph type="title"/>
+          </p:nvPr>
+        </p:nvSpPr>
+        <p:spPr/>
+        <p:txBody>
+          <a:bodyPr/>
+          <a:lstStyle/>
+          <a:p>
+            <a:r>
+              <a:rPr lang="en-US" dirty="0" err="1" smtClean="0"/>
+              <a:t>TopoRank</a:t>
+            </a:r>
+            <a:r>
+              <a:rPr lang="en-US" dirty="0" smtClean="0"/>
+              <a:t> </a:t>
+            </a:r>
+            <a:r>
+              <a:rPr lang="en-US" dirty="0" smtClean="0"/>
+              <a:t>Algorithm</a:t>
+            </a:r>
+            <a:endParaRPr lang="en-US" dirty="0"/>
+          </a:p>
+        </p:txBody>
+      </p:sp>
+      <p:sp>
+        <p:nvSpPr>
+          <p:cNvPr id="3" name="Content Placeholder 2"/>
+          <p:cNvSpPr>
+            <a:spLocks noGrp="1"/>
+          </p:cNvSpPr>
+          <p:nvPr>
+            <p:ph idx="1"/>
+          </p:nvPr>
+        </p:nvSpPr>
+        <p:spPr/>
+        <p:txBody>
+          <a:bodyPr/>
+          <a:lstStyle/>
+          <a:p>
+            <a:endParaRPr lang="en-US" sz="2000" b="1" dirty="0"/>
+          </a:p>
+        </p:txBody>
+      </p:sp>
+    </p:spTree>
+  </p:cSld>
+  <p:clrMapOvr>
+    <a:masterClrMapping/>
+  </p:clrMapOvr>
+</p:sld>
+</file>
+
+<file path=ppt/slides/slide37.xml><?xml version="1.0" encoding="utf-8"?>
 <p:sld xmlns:a="http://schemas.openxmlformats.org/drawingml/2006/main" xmlns:r="http://schemas.openxmlformats.org/officeDocument/2006/relationships" xmlns:p="http://schemas.openxmlformats.org/presentationml/2006/main">
   <p:cSld>
     <p:spTree>

--- a/Microservices/07.3. Autoscaling.pptx
+++ b/Microservices/07.3. Autoscaling.pptx
@@ -5,7 +5,7 @@
     <p:sldMasterId id="2147483708" r:id="rId1"/>
   </p:sldMasterIdLst>
   <p:notesMasterIdLst>
-    <p:notesMasterId r:id="rId39"/>
+    <p:notesMasterId r:id="rId42"/>
   </p:notesMasterIdLst>
   <p:sldIdLst>
     <p:sldId id="561" r:id="rId2"/>
@@ -39,12 +39,15 @@
     <p:sldId id="656" r:id="rId30"/>
     <p:sldId id="657" r:id="rId31"/>
     <p:sldId id="658" r:id="rId32"/>
-    <p:sldId id="659" r:id="rId33"/>
-    <p:sldId id="660" r:id="rId34"/>
-    <p:sldId id="661" r:id="rId35"/>
-    <p:sldId id="662" r:id="rId36"/>
-    <p:sldId id="663" r:id="rId37"/>
-    <p:sldId id="516" r:id="rId38"/>
+    <p:sldId id="666" r:id="rId33"/>
+    <p:sldId id="659" r:id="rId34"/>
+    <p:sldId id="667" r:id="rId35"/>
+    <p:sldId id="660" r:id="rId36"/>
+    <p:sldId id="661" r:id="rId37"/>
+    <p:sldId id="662" r:id="rId38"/>
+    <p:sldId id="664" r:id="rId39"/>
+    <p:sldId id="665" r:id="rId40"/>
+    <p:sldId id="516" r:id="rId41"/>
   </p:sldIdLst>
   <p:sldSz cx="9144000" cy="6858000" type="screen4x3"/>
   <p:notesSz cx="6858000" cy="9144000"/>
@@ -9029,6 +9032,57 @@
           <a:chExt cx="0" cy="0"/>
         </a:xfrm>
       </p:grpSpPr>
+      <p:pic>
+        <p:nvPicPr>
+          <p:cNvPr id="4" name="Picture 2" descr="https://lh3.ggpht.com/1IfZLL2QDSjZ0wS7sUhaMlsAOS8BBzdR3wZ1WawgRn7KZAM8nEVZYMOUM-lqQb0ikIzp=w300"/>
+          <p:cNvPicPr>
+            <a:picLocks noChangeAspect="1" noChangeArrowheads="1"/>
+          </p:cNvPicPr>
+          <p:nvPr/>
+        </p:nvPicPr>
+        <p:blipFill>
+          <a:blip r:embed="rId2" cstate="print"/>
+          <a:srcRect/>
+          <a:stretch>
+            <a:fillRect/>
+          </a:stretch>
+        </p:blipFill>
+        <p:spPr bwMode="auto">
+          <a:xfrm>
+            <a:off x="3276600" y="1905000"/>
+            <a:ext cx="2857500" cy="2857500"/>
+          </a:xfrm>
+          <a:prstGeom prst="rect">
+            <a:avLst/>
+          </a:prstGeom>
+          <a:noFill/>
+        </p:spPr>
+      </p:pic>
+    </p:spTree>
+  </p:cSld>
+  <p:clrMapOvr>
+    <a:masterClrMapping/>
+  </p:clrMapOvr>
+</p:sld>
+</file>
+
+<file path=ppt/slides/slide33.xml><?xml version="1.0" encoding="utf-8"?>
+<p:sld xmlns:a="http://schemas.openxmlformats.org/drawingml/2006/main" xmlns:r="http://schemas.openxmlformats.org/officeDocument/2006/relationships" xmlns:p="http://schemas.openxmlformats.org/presentationml/2006/main">
+  <p:cSld>
+    <p:spTree>
+      <p:nvGrpSpPr>
+        <p:cNvPr id="1" name=""/>
+        <p:cNvGrpSpPr/>
+        <p:nvPr/>
+      </p:nvGrpSpPr>
+      <p:grpSpPr>
+        <a:xfrm>
+          <a:off x="0" y="0"/>
+          <a:ext cx="0" cy="0"/>
+          <a:chOff x="0" y="0"/>
+          <a:chExt cx="0" cy="0"/>
+        </a:xfrm>
+      </p:grpSpPr>
       <p:sp>
         <p:nvSpPr>
           <p:cNvPr id="2" name="Title 1"/>
@@ -9194,7 +9248,7 @@
 </p:sld>
 </file>
 
-<file path=ppt/slides/slide33.xml><?xml version="1.0" encoding="utf-8"?>
+<file path=ppt/slides/slide34.xml><?xml version="1.0" encoding="utf-8"?>
 <p:sld xmlns:a="http://schemas.openxmlformats.org/drawingml/2006/main" xmlns:r="http://schemas.openxmlformats.org/officeDocument/2006/relationships" xmlns:p="http://schemas.openxmlformats.org/presentationml/2006/main">
   <p:cSld>
     <p:spTree>
@@ -9211,284 +9265,32 @@
           <a:chExt cx="0" cy="0"/>
         </a:xfrm>
       </p:grpSpPr>
-      <p:sp>
-        <p:nvSpPr>
-          <p:cNvPr id="2" name="Title 1"/>
-          <p:cNvSpPr>
-            <a:spLocks noGrp="1"/>
-          </p:cNvSpPr>
-          <p:nvPr>
-            <p:ph type="title"/>
-          </p:nvPr>
-        </p:nvSpPr>
-        <p:spPr/>
-        <p:txBody>
-          <a:bodyPr/>
-          <a:lstStyle/>
-          <a:p>
-            <a:r>
-              <a:rPr lang="en-US" dirty="0" err="1" smtClean="0"/>
-              <a:t>PBScaler</a:t>
-            </a:r>
-            <a:endParaRPr lang="en-US" dirty="0"/>
-          </a:p>
-        </p:txBody>
-      </p:sp>
-      <p:sp>
-        <p:nvSpPr>
-          <p:cNvPr id="3" name="Content Placeholder 2"/>
-          <p:cNvSpPr>
-            <a:spLocks noGrp="1"/>
-          </p:cNvSpPr>
-          <p:nvPr>
-            <p:ph idx="1"/>
-          </p:nvPr>
-        </p:nvSpPr>
-        <p:spPr/>
-        <p:txBody>
-          <a:bodyPr/>
-          <a:lstStyle/>
-          <a:p>
-            <a:r>
-              <a:rPr lang="en-US" sz="2000" b="1" dirty="0" err="1" smtClean="0"/>
-              <a:t>Shuaiyu</a:t>
-            </a:r>
-            <a:r>
-              <a:rPr lang="en-US" sz="2000" b="1" dirty="0" smtClean="0"/>
-              <a:t> </a:t>
-            </a:r>
-            <a:r>
-              <a:rPr lang="en-US" sz="2000" b="1" dirty="0" err="1" smtClean="0"/>
-              <a:t>Xie</a:t>
-            </a:r>
-            <a:r>
-              <a:rPr lang="en-US" sz="2000" b="1" dirty="0" smtClean="0"/>
-              <a:t> et al. (2023). </a:t>
-            </a:r>
-            <a:r>
-              <a:rPr lang="en-US" sz="2000" b="1" dirty="0" err="1" smtClean="0"/>
-              <a:t>PBScaler</a:t>
-            </a:r>
-            <a:r>
-              <a:rPr lang="en-US" sz="2000" b="1" dirty="0" smtClean="0"/>
-              <a:t>: </a:t>
-            </a:r>
-            <a:r>
-              <a:rPr lang="en-US" sz="2000" b="1" dirty="0" smtClean="0"/>
-              <a:t>A Bottleneck-aware </a:t>
-            </a:r>
-            <a:r>
-              <a:rPr lang="en-US" sz="2000" b="1" dirty="0" err="1" smtClean="0"/>
-              <a:t>Autoscaling</a:t>
-            </a:r>
-            <a:r>
-              <a:rPr lang="en-US" sz="2000" b="1" dirty="0" smtClean="0"/>
-              <a:t> Framework for </a:t>
-            </a:r>
-            <a:r>
-              <a:rPr lang="en-US" sz="2000" b="1" dirty="0" err="1" smtClean="0"/>
-              <a:t>Microservice</a:t>
-            </a:r>
-            <a:r>
-              <a:rPr lang="en-US" sz="2000" b="1" dirty="0" smtClean="0"/>
-              <a:t>-based </a:t>
-            </a:r>
-            <a:r>
-              <a:rPr lang="en-US" sz="2000" b="1" dirty="0" smtClean="0"/>
-              <a:t>Applications.</a:t>
-            </a:r>
-          </a:p>
-          <a:p>
-            <a:r>
-              <a:rPr lang="en-US" sz="2000" dirty="0" smtClean="0"/>
-              <a:t>We </a:t>
-            </a:r>
-            <a:r>
-              <a:rPr lang="en-US" sz="2000" dirty="0" smtClean="0"/>
-              <a:t>propose </a:t>
-            </a:r>
-            <a:r>
-              <a:rPr lang="en-US" sz="2000" dirty="0" err="1" smtClean="0"/>
-              <a:t>TopoRank</a:t>
-            </a:r>
-            <a:r>
-              <a:rPr lang="en-US" sz="2000" dirty="0" smtClean="0"/>
-              <a:t>, a </a:t>
-            </a:r>
-            <a:r>
-              <a:rPr lang="en-US" sz="2000" u="sng" dirty="0" smtClean="0"/>
-              <a:t>random walk </a:t>
-            </a:r>
-            <a:r>
-              <a:rPr lang="en-US" sz="2000" u="sng" dirty="0" smtClean="0"/>
-              <a:t>algorithm</a:t>
-            </a:r>
-            <a:r>
-              <a:rPr lang="en-US" sz="2000" dirty="0" smtClean="0"/>
-              <a:t> based </a:t>
-            </a:r>
-            <a:r>
-              <a:rPr lang="en-US" sz="2000" dirty="0" smtClean="0"/>
-              <a:t>on topological potential theory (TPT) to </a:t>
-            </a:r>
-            <a:r>
-              <a:rPr lang="en-US" sz="2000" i="1" dirty="0" smtClean="0">
-                <a:solidFill>
-                  <a:srgbClr val="C00000"/>
-                </a:solidFill>
-              </a:rPr>
-              <a:t>identify performance </a:t>
-            </a:r>
-            <a:r>
-              <a:rPr lang="en-US" sz="2000" i="1" dirty="0" smtClean="0">
-                <a:solidFill>
-                  <a:srgbClr val="C00000"/>
-                </a:solidFill>
-              </a:rPr>
-              <a:t>bottlenecks</a:t>
-            </a:r>
-            <a:r>
-              <a:rPr lang="en-US" sz="2000" dirty="0" smtClean="0"/>
-              <a:t> (PBs</a:t>
-            </a:r>
-            <a:r>
-              <a:rPr lang="en-US" sz="2000" dirty="0" smtClean="0"/>
-              <a:t>).</a:t>
-            </a:r>
-          </a:p>
-          <a:p>
-            <a:r>
-              <a:rPr lang="en-US" sz="2000" dirty="0" smtClean="0"/>
-              <a:t>By taking into account </a:t>
-            </a:r>
-            <a:r>
-              <a:rPr lang="en-US" sz="2000" dirty="0" err="1" smtClean="0"/>
-              <a:t>microservice</a:t>
-            </a:r>
-            <a:r>
-              <a:rPr lang="en-US" sz="2000" dirty="0" smtClean="0"/>
-              <a:t> dependencies and anomaly potential, </a:t>
-            </a:r>
-            <a:r>
-              <a:rPr lang="en-US" sz="2000" dirty="0" err="1" smtClean="0"/>
-              <a:t>TopoRank</a:t>
-            </a:r>
-            <a:r>
-              <a:rPr lang="en-US" sz="2000" dirty="0" smtClean="0"/>
-              <a:t> </a:t>
-            </a:r>
-            <a:r>
-              <a:rPr lang="en-US" sz="2000" dirty="0" smtClean="0"/>
-              <a:t>improves the accuracy and </a:t>
-            </a:r>
-            <a:r>
-              <a:rPr lang="en-US" sz="2000" dirty="0" err="1" smtClean="0"/>
-              <a:t>explainability</a:t>
-            </a:r>
-            <a:r>
-              <a:rPr lang="en-US" sz="2000" dirty="0" smtClean="0"/>
-              <a:t> of bottleneck localization.</a:t>
-            </a:r>
-          </a:p>
-          <a:p>
-            <a:r>
-              <a:rPr lang="en-US" sz="2000" dirty="0" smtClean="0"/>
-              <a:t>After identifying the PBs by </a:t>
-            </a:r>
-            <a:r>
-              <a:rPr lang="en-US" sz="2000" dirty="0" err="1" smtClean="0"/>
-              <a:t>TopoRank</a:t>
-            </a:r>
-            <a:r>
-              <a:rPr lang="en-US" sz="2000" dirty="0" smtClean="0"/>
-              <a:t>, </a:t>
-            </a:r>
-            <a:r>
-              <a:rPr lang="en-US" sz="2000" dirty="0" err="1" smtClean="0"/>
-              <a:t>PBScaler</a:t>
-            </a:r>
-            <a:r>
-              <a:rPr lang="en-US" sz="2000" dirty="0" smtClean="0"/>
-              <a:t> further </a:t>
-            </a:r>
-            <a:r>
-              <a:rPr lang="en-US" sz="2000" dirty="0" smtClean="0"/>
-              <a:t>employs a </a:t>
-            </a:r>
-            <a:r>
-              <a:rPr lang="en-US" sz="2000" i="1" dirty="0" smtClean="0">
-                <a:solidFill>
-                  <a:srgbClr val="C00000"/>
-                </a:solidFill>
-              </a:rPr>
-              <a:t>genetic algorithm</a:t>
-            </a:r>
-            <a:r>
-              <a:rPr lang="en-US" sz="2000" dirty="0" smtClean="0"/>
-              <a:t> to find nearly </a:t>
-            </a:r>
-            <a:r>
-              <a:rPr lang="en-US" sz="2000" dirty="0" smtClean="0"/>
-              <a:t>optimal strategies.</a:t>
-            </a:r>
-          </a:p>
-          <a:p>
-            <a:r>
-              <a:rPr lang="en-US" sz="2000" dirty="0" smtClean="0"/>
-              <a:t>To </a:t>
-            </a:r>
-            <a:r>
-              <a:rPr lang="en-US" sz="2000" dirty="0" smtClean="0"/>
-              <a:t>avoid application oscillation caused by </a:t>
-            </a:r>
-            <a:r>
-              <a:rPr lang="en-US" sz="2000" dirty="0" smtClean="0"/>
-              <a:t>excessive optimization</a:t>
-            </a:r>
-            <a:r>
-              <a:rPr lang="en-US" sz="2000" dirty="0" smtClean="0"/>
-              <a:t>, the process is </a:t>
-            </a:r>
-            <a:r>
-              <a:rPr lang="en-US" sz="2000" i="1" dirty="0" smtClean="0">
-                <a:solidFill>
-                  <a:srgbClr val="C00000"/>
-                </a:solidFill>
-              </a:rPr>
-              <a:t>conducted offline</a:t>
-            </a:r>
-            <a:r>
-              <a:rPr lang="en-US" sz="2000" dirty="0" smtClean="0"/>
-              <a:t> </a:t>
-            </a:r>
-            <a:r>
-              <a:rPr lang="en-US" sz="2000" dirty="0" smtClean="0"/>
-              <a:t>and is </a:t>
-            </a:r>
-            <a:r>
-              <a:rPr lang="en-US" sz="2000" dirty="0" smtClean="0"/>
-              <a:t>guided by an SLO violation predictor, which </a:t>
-            </a:r>
-            <a:r>
-              <a:rPr lang="en-US" sz="2000" dirty="0" smtClean="0"/>
-              <a:t>simulates the </a:t>
-            </a:r>
-            <a:r>
-              <a:rPr lang="en-US" sz="2000" dirty="0" smtClean="0"/>
-              <a:t>online application and provides feedback to the </a:t>
-            </a:r>
-            <a:r>
-              <a:rPr lang="en-US" sz="2000" dirty="0" smtClean="0"/>
-              <a:t>scaling strategies</a:t>
-            </a:r>
-            <a:r>
-              <a:rPr lang="en-US" sz="2000" dirty="0" smtClean="0"/>
-              <a:t>.</a:t>
-            </a:r>
-            <a:endParaRPr lang="en-US" sz="2000" b="1" dirty="0"/>
-          </a:p>
-        </p:txBody>
-      </p:sp>
+      <p:pic>
+        <p:nvPicPr>
+          <p:cNvPr id="4" name="Picture 2" descr="https://lh3.ggpht.com/1IfZLL2QDSjZ0wS7sUhaMlsAOS8BBzdR3wZ1WawgRn7KZAM8nEVZYMOUM-lqQb0ikIzp=w300"/>
+          <p:cNvPicPr>
+            <a:picLocks noChangeAspect="1" noChangeArrowheads="1"/>
+          </p:cNvPicPr>
+          <p:nvPr/>
+        </p:nvPicPr>
+        <p:blipFill>
+          <a:blip r:embed="rId2" cstate="print"/>
+          <a:srcRect/>
+          <a:stretch>
+            <a:fillRect/>
+          </a:stretch>
+        </p:blipFill>
+        <p:spPr bwMode="auto">
+          <a:xfrm>
+            <a:off x="3276600" y="1905000"/>
+            <a:ext cx="2857500" cy="2857500"/>
+          </a:xfrm>
+          <a:prstGeom prst="rect">
+            <a:avLst/>
+          </a:prstGeom>
+          <a:noFill/>
+        </p:spPr>
+      </p:pic>
     </p:spTree>
   </p:cSld>
   <p:clrMapOvr>
@@ -9497,7 +9299,310 @@
 </p:sld>
 </file>
 
-<file path=ppt/slides/slide34.xml><?xml version="1.0" encoding="utf-8"?>
+<file path=ppt/slides/slide35.xml><?xml version="1.0" encoding="utf-8"?>
+<p:sld xmlns:a="http://schemas.openxmlformats.org/drawingml/2006/main" xmlns:r="http://schemas.openxmlformats.org/officeDocument/2006/relationships" xmlns:p="http://schemas.openxmlformats.org/presentationml/2006/main">
+  <p:cSld>
+    <p:spTree>
+      <p:nvGrpSpPr>
+        <p:cNvPr id="1" name=""/>
+        <p:cNvGrpSpPr/>
+        <p:nvPr/>
+      </p:nvGrpSpPr>
+      <p:grpSpPr>
+        <a:xfrm>
+          <a:off x="0" y="0"/>
+          <a:ext cx="0" cy="0"/>
+          <a:chOff x="0" y="0"/>
+          <a:chExt cx="0" cy="0"/>
+        </a:xfrm>
+      </p:grpSpPr>
+      <p:sp>
+        <p:nvSpPr>
+          <p:cNvPr id="2" name="Title 1"/>
+          <p:cNvSpPr>
+            <a:spLocks noGrp="1"/>
+          </p:cNvSpPr>
+          <p:nvPr>
+            <p:ph type="title"/>
+          </p:nvPr>
+        </p:nvSpPr>
+        <p:spPr/>
+        <p:txBody>
+          <a:bodyPr/>
+          <a:lstStyle/>
+          <a:p>
+            <a:r>
+              <a:rPr lang="en-US" dirty="0" err="1" smtClean="0"/>
+              <a:t>PBScaler</a:t>
+            </a:r>
+            <a:endParaRPr lang="en-US" dirty="0"/>
+          </a:p>
+        </p:txBody>
+      </p:sp>
+      <p:sp>
+        <p:nvSpPr>
+          <p:cNvPr id="3" name="Content Placeholder 2"/>
+          <p:cNvSpPr>
+            <a:spLocks noGrp="1"/>
+          </p:cNvSpPr>
+          <p:nvPr>
+            <p:ph idx="1"/>
+          </p:nvPr>
+        </p:nvSpPr>
+        <p:spPr/>
+        <p:txBody>
+          <a:bodyPr/>
+          <a:lstStyle/>
+          <a:p>
+            <a:r>
+              <a:rPr lang="en-US" sz="2000" b="1" dirty="0" err="1" smtClean="0"/>
+              <a:t>Shuaiyu</a:t>
+            </a:r>
+            <a:r>
+              <a:rPr lang="en-US" sz="2000" b="1" dirty="0" smtClean="0"/>
+              <a:t> </a:t>
+            </a:r>
+            <a:r>
+              <a:rPr lang="en-US" sz="2000" b="1" dirty="0" err="1" smtClean="0"/>
+              <a:t>Xie</a:t>
+            </a:r>
+            <a:r>
+              <a:rPr lang="en-US" sz="2000" b="1" dirty="0" smtClean="0"/>
+              <a:t> et al. (2023). </a:t>
+            </a:r>
+            <a:r>
+              <a:rPr lang="en-US" sz="2000" b="1" dirty="0" err="1" smtClean="0"/>
+              <a:t>PBScaler</a:t>
+            </a:r>
+            <a:r>
+              <a:rPr lang="en-US" sz="2000" b="1" dirty="0" smtClean="0"/>
+              <a:t>: </a:t>
+            </a:r>
+            <a:r>
+              <a:rPr lang="en-US" sz="2000" b="1" dirty="0" smtClean="0"/>
+              <a:t>A Bottleneck-aware </a:t>
+            </a:r>
+            <a:r>
+              <a:rPr lang="en-US" sz="2000" b="1" dirty="0" err="1" smtClean="0"/>
+              <a:t>Autoscaling</a:t>
+            </a:r>
+            <a:r>
+              <a:rPr lang="en-US" sz="2000" b="1" dirty="0" smtClean="0"/>
+              <a:t> Framework for </a:t>
+            </a:r>
+            <a:r>
+              <a:rPr lang="en-US" sz="2000" b="1" dirty="0" err="1" smtClean="0"/>
+              <a:t>Microservice</a:t>
+            </a:r>
+            <a:r>
+              <a:rPr lang="en-US" sz="2000" b="1" dirty="0" smtClean="0"/>
+              <a:t>-based </a:t>
+            </a:r>
+            <a:r>
+              <a:rPr lang="en-US" sz="2000" b="1" dirty="0" smtClean="0"/>
+              <a:t>Applications.</a:t>
+            </a:r>
+          </a:p>
+          <a:p>
+            <a:r>
+              <a:rPr lang="en-US" sz="2000" dirty="0" smtClean="0"/>
+              <a:t>We </a:t>
+            </a:r>
+            <a:r>
+              <a:rPr lang="en-US" sz="2000" dirty="0" smtClean="0"/>
+              <a:t>propose </a:t>
+            </a:r>
+            <a:r>
+              <a:rPr lang="en-US" sz="2000" dirty="0" err="1" smtClean="0"/>
+              <a:t>TopoRank</a:t>
+            </a:r>
+            <a:r>
+              <a:rPr lang="en-US" sz="2000" dirty="0" smtClean="0"/>
+              <a:t>, a </a:t>
+            </a:r>
+            <a:r>
+              <a:rPr lang="en-US" sz="2000" u="sng" dirty="0" smtClean="0"/>
+              <a:t>random walk </a:t>
+            </a:r>
+            <a:r>
+              <a:rPr lang="en-US" sz="2000" u="sng" dirty="0" smtClean="0"/>
+              <a:t>algorithm</a:t>
+            </a:r>
+            <a:r>
+              <a:rPr lang="en-US" sz="2000" dirty="0" smtClean="0"/>
+              <a:t> based </a:t>
+            </a:r>
+            <a:r>
+              <a:rPr lang="en-US" sz="2000" dirty="0" smtClean="0"/>
+              <a:t>on topological potential theory (TPT) to </a:t>
+            </a:r>
+            <a:r>
+              <a:rPr lang="en-US" sz="2000" i="1" dirty="0" smtClean="0">
+                <a:solidFill>
+                  <a:srgbClr val="C00000"/>
+                </a:solidFill>
+              </a:rPr>
+              <a:t>identify performance </a:t>
+            </a:r>
+            <a:r>
+              <a:rPr lang="en-US" sz="2000" i="1" dirty="0" smtClean="0">
+                <a:solidFill>
+                  <a:srgbClr val="C00000"/>
+                </a:solidFill>
+              </a:rPr>
+              <a:t>bottlenecks</a:t>
+            </a:r>
+            <a:r>
+              <a:rPr lang="en-US" sz="2000" dirty="0" smtClean="0"/>
+              <a:t> (PBs</a:t>
+            </a:r>
+            <a:r>
+              <a:rPr lang="en-US" sz="2000" dirty="0" smtClean="0"/>
+              <a:t>).</a:t>
+            </a:r>
+          </a:p>
+          <a:p>
+            <a:r>
+              <a:rPr lang="en-US" sz="2000" dirty="0" smtClean="0"/>
+              <a:t>By taking into account </a:t>
+            </a:r>
+            <a:r>
+              <a:rPr lang="en-US" sz="2000" dirty="0" err="1" smtClean="0"/>
+              <a:t>microservice</a:t>
+            </a:r>
+            <a:r>
+              <a:rPr lang="en-US" sz="2000" dirty="0" smtClean="0"/>
+              <a:t> dependencies and anomaly potential, </a:t>
+            </a:r>
+            <a:r>
+              <a:rPr lang="en-US" sz="2000" dirty="0" err="1" smtClean="0"/>
+              <a:t>TopoRank</a:t>
+            </a:r>
+            <a:r>
+              <a:rPr lang="en-US" sz="2000" dirty="0" smtClean="0"/>
+              <a:t> </a:t>
+            </a:r>
+            <a:r>
+              <a:rPr lang="en-US" sz="2000" dirty="0" smtClean="0"/>
+              <a:t>improves the accuracy and </a:t>
+            </a:r>
+            <a:r>
+              <a:rPr lang="en-US" sz="2000" dirty="0" err="1" smtClean="0"/>
+              <a:t>explainability</a:t>
+            </a:r>
+            <a:r>
+              <a:rPr lang="en-US" sz="2000" dirty="0" smtClean="0"/>
+              <a:t> of bottleneck localization.</a:t>
+            </a:r>
+          </a:p>
+          <a:p>
+            <a:r>
+              <a:rPr lang="en-US" sz="2000" dirty="0" smtClean="0"/>
+              <a:t>After identifying the PBs by </a:t>
+            </a:r>
+            <a:r>
+              <a:rPr lang="en-US" sz="2000" dirty="0" err="1" smtClean="0"/>
+              <a:t>TopoRank</a:t>
+            </a:r>
+            <a:r>
+              <a:rPr lang="en-US" sz="2000" dirty="0" smtClean="0"/>
+              <a:t>, </a:t>
+            </a:r>
+            <a:r>
+              <a:rPr lang="en-US" sz="2000" dirty="0" err="1" smtClean="0"/>
+              <a:t>PBScaler</a:t>
+            </a:r>
+            <a:r>
+              <a:rPr lang="en-US" sz="2000" dirty="0" smtClean="0"/>
+              <a:t> further </a:t>
+            </a:r>
+            <a:r>
+              <a:rPr lang="en-US" sz="2000" dirty="0" smtClean="0"/>
+              <a:t>employs a </a:t>
+            </a:r>
+            <a:r>
+              <a:rPr lang="en-US" sz="2000" i="1" dirty="0" smtClean="0">
+                <a:solidFill>
+                  <a:srgbClr val="C00000"/>
+                </a:solidFill>
+              </a:rPr>
+              <a:t>genetic algorithm</a:t>
+            </a:r>
+            <a:r>
+              <a:rPr lang="en-US" sz="2000" dirty="0" smtClean="0"/>
+              <a:t> to find nearly </a:t>
+            </a:r>
+            <a:r>
+              <a:rPr lang="en-US" sz="2000" dirty="0" smtClean="0"/>
+              <a:t>optimal strategies.</a:t>
+            </a:r>
+          </a:p>
+          <a:p>
+            <a:r>
+              <a:rPr lang="en-US" sz="2000" dirty="0" smtClean="0"/>
+              <a:t>To </a:t>
+            </a:r>
+            <a:r>
+              <a:rPr lang="en-US" sz="2000" dirty="0" smtClean="0"/>
+              <a:t>avoid application oscillation caused by </a:t>
+            </a:r>
+            <a:r>
+              <a:rPr lang="en-US" sz="2000" dirty="0" smtClean="0"/>
+              <a:t>excessive optimization</a:t>
+            </a:r>
+            <a:r>
+              <a:rPr lang="en-US" sz="2000" dirty="0" smtClean="0"/>
+              <a:t>, the process is </a:t>
+            </a:r>
+            <a:r>
+              <a:rPr lang="en-US" sz="2000" i="1" dirty="0" smtClean="0">
+                <a:solidFill>
+                  <a:srgbClr val="C00000"/>
+                </a:solidFill>
+              </a:rPr>
+              <a:t>conducted offline</a:t>
+            </a:r>
+            <a:r>
+              <a:rPr lang="en-US" sz="2000" dirty="0" smtClean="0"/>
+              <a:t> </a:t>
+            </a:r>
+            <a:r>
+              <a:rPr lang="en-US" sz="2000" dirty="0" smtClean="0"/>
+              <a:t>and is </a:t>
+            </a:r>
+            <a:r>
+              <a:rPr lang="en-US" sz="2000" dirty="0" smtClean="0"/>
+              <a:t>guided by an SLO violation predictor, which </a:t>
+            </a:r>
+            <a:r>
+              <a:rPr lang="en-US" sz="2000" dirty="0" smtClean="0"/>
+              <a:t>simulates the </a:t>
+            </a:r>
+            <a:r>
+              <a:rPr lang="en-US" sz="2000" dirty="0" smtClean="0"/>
+              <a:t>online application and provides feedback to the </a:t>
+            </a:r>
+            <a:r>
+              <a:rPr lang="en-US" sz="2000" dirty="0" smtClean="0"/>
+              <a:t>scaling strategies</a:t>
+            </a:r>
+            <a:r>
+              <a:rPr lang="en-US" sz="2000" dirty="0" smtClean="0"/>
+              <a:t>.</a:t>
+            </a:r>
+            <a:endParaRPr lang="en-US" sz="2000" b="1" dirty="0"/>
+          </a:p>
+        </p:txBody>
+      </p:sp>
+    </p:spTree>
+  </p:cSld>
+  <p:clrMapOvr>
+    <a:masterClrMapping/>
+  </p:clrMapOvr>
+</p:sld>
+</file>
+
+<file path=ppt/slides/slide36.xml><?xml version="1.0" encoding="utf-8"?>
 <p:sld xmlns:a="http://schemas.openxmlformats.org/drawingml/2006/main" xmlns:r="http://schemas.openxmlformats.org/officeDocument/2006/relationships" xmlns:p="http://schemas.openxmlformats.org/presentationml/2006/main">
   <p:cSld>
     <p:spTree>
@@ -9600,7 +9705,7 @@
 </p:sld>
 </file>
 
-<file path=ppt/slides/slide35.xml><?xml version="1.0" encoding="utf-8"?>
+<file path=ppt/slides/slide37.xml><?xml version="1.0" encoding="utf-8"?>
 <p:sld xmlns:a="http://schemas.openxmlformats.org/drawingml/2006/main" xmlns:r="http://schemas.openxmlformats.org/officeDocument/2006/relationships" xmlns:p="http://schemas.openxmlformats.org/presentationml/2006/main">
   <p:cSld>
     <p:spTree>
@@ -9633,16 +9738,8 @@
           <a:lstStyle/>
           <a:p>
             <a:r>
-              <a:rPr lang="en-US" dirty="0" err="1" smtClean="0"/>
-              <a:t>TopoRank</a:t>
-            </a:r>
-            <a:r>
               <a:rPr lang="en-US" dirty="0" smtClean="0"/>
-              <a:t> </a:t>
-            </a:r>
-            <a:r>
-              <a:rPr lang="en-US" dirty="0" smtClean="0"/>
-              <a:t>Algorithm</a:t>
+              <a:t>SLO Violation Detection</a:t>
             </a:r>
             <a:endParaRPr lang="en-US" dirty="0"/>
           </a:p>
@@ -9663,7 +9760,79 @@
           <a:bodyPr/>
           <a:lstStyle/>
           <a:p>
-            <a:endParaRPr lang="en-US" sz="2000" b="1" dirty="0"/>
+            <a:r>
+              <a:rPr lang="en-US" sz="2400" dirty="0" err="1" smtClean="0"/>
+              <a:t>PBScaler</a:t>
+            </a:r>
+            <a:r>
+              <a:rPr lang="en-US" sz="2400" dirty="0" smtClean="0"/>
+              <a:t> inspects the P90 tail latency of all invocation edges </a:t>
+            </a:r>
+            <a:r>
+              <a:rPr lang="en-US" sz="2400" dirty="0" smtClean="0"/>
+              <a:t>every </a:t>
+            </a:r>
+            <a:r>
+              <a:rPr lang="en-US" sz="2400" dirty="0" smtClean="0"/>
+              <a:t>15 seconds to timely detect performance degradation</a:t>
+            </a:r>
+            <a:r>
+              <a:rPr lang="en-US" sz="2400" dirty="0" smtClean="0"/>
+              <a:t>.</a:t>
+            </a:r>
+          </a:p>
+          <a:p>
+            <a:r>
+              <a:rPr lang="en-US" sz="2400" dirty="0" smtClean="0"/>
+              <a:t>If the tail latency of an invocation exceeds a predetermined threshold (such as the SLO), the invoked </a:t>
+            </a:r>
+            <a:r>
+              <a:rPr lang="en-US" sz="2400" dirty="0" err="1" smtClean="0"/>
+              <a:t>microservice</a:t>
+            </a:r>
+            <a:r>
+              <a:rPr lang="en-US" sz="2400" dirty="0" smtClean="0"/>
+              <a:t> of the invocation will be added to the set of abnormal </a:t>
+            </a:r>
+            <a:r>
+              <a:rPr lang="en-US" sz="2400" dirty="0" err="1" smtClean="0"/>
+              <a:t>microservices</a:t>
+            </a:r>
+            <a:r>
+              <a:rPr lang="en-US" sz="2400" dirty="0" smtClean="0"/>
+              <a:t>, </a:t>
+            </a:r>
+            <a:r>
+              <a:rPr lang="en-US" sz="2400" dirty="0" smtClean="0"/>
+              <a:t>and the bottleneck localization process will be activated</a:t>
+            </a:r>
+            <a:r>
+              <a:rPr lang="en-US" sz="2400" dirty="0" smtClean="0"/>
+              <a:t>.</a:t>
+            </a:r>
+          </a:p>
+          <a:p>
+            <a:r>
+              <a:rPr lang="en-US" sz="2400" dirty="0" smtClean="0"/>
+              <a:t>To account for occasional noise in the </a:t>
+            </a:r>
+            <a:r>
+              <a:rPr lang="en-US" sz="2400" dirty="0" err="1" smtClean="0"/>
+              <a:t>microservice</a:t>
+            </a:r>
+            <a:r>
+              <a:rPr lang="en-US" sz="2400" dirty="0" smtClean="0"/>
+              <a:t> latency, the threshold is set to </a:t>
+            </a:r>
+            <a:r>
+              <a:rPr lang="en-US" sz="2400" dirty="0" smtClean="0"/>
+              <a:t>SLO × (</a:t>
+            </a:r>
+            <a:r>
+              <a:rPr lang="en-US" sz="2400" dirty="0" smtClean="0"/>
+              <a:t>1 + α/2), where α is used to adjust the tolerance to noise.</a:t>
+            </a:r>
+            <a:endParaRPr lang="en-US" sz="2400" dirty="0"/>
           </a:p>
         </p:txBody>
       </p:sp>
@@ -9675,7 +9844,7 @@
 </p:sld>
 </file>
 
-<file path=ppt/slides/slide36.xml><?xml version="1.0" encoding="utf-8"?>
+<file path=ppt/slides/slide38.xml><?xml version="1.0" encoding="utf-8"?>
 <p:sld xmlns:a="http://schemas.openxmlformats.org/drawingml/2006/main" xmlns:r="http://schemas.openxmlformats.org/officeDocument/2006/relationships" xmlns:p="http://schemas.openxmlformats.org/presentationml/2006/main">
   <p:cSld>
     <p:spTree>
@@ -9708,16 +9877,8 @@
           <a:lstStyle/>
           <a:p>
             <a:r>
-              <a:rPr lang="en-US" dirty="0" err="1" smtClean="0"/>
-              <a:t>TopoRank</a:t>
-            </a:r>
-            <a:r>
               <a:rPr lang="en-US" dirty="0" smtClean="0"/>
-              <a:t> </a:t>
-            </a:r>
-            <a:r>
-              <a:rPr lang="en-US" dirty="0" smtClean="0"/>
-              <a:t>Algorithm</a:t>
+              <a:t>Redundancy Checking</a:t>
             </a:r>
             <a:endParaRPr lang="en-US" dirty="0"/>
           </a:p>
@@ -9738,7 +9899,141 @@
           <a:bodyPr/>
           <a:lstStyle/>
           <a:p>
-            <a:endParaRPr lang="en-US" sz="2000" b="1" dirty="0"/>
+            <a:r>
+              <a:rPr lang="en-US" sz="2400" dirty="0" err="1" smtClean="0"/>
+              <a:t>PBScaler</a:t>
+            </a:r>
+            <a:r>
+              <a:rPr lang="en-US" sz="2400" dirty="0" smtClean="0"/>
+              <a:t> </a:t>
+            </a:r>
+            <a:r>
+              <a:rPr lang="en-US" sz="2400" dirty="0" smtClean="0"/>
+              <a:t>uses the </a:t>
+            </a:r>
+            <a:r>
+              <a:rPr lang="en-US" sz="2400" dirty="0" smtClean="0"/>
+              <a:t>rate of workload change per second of </a:t>
+            </a:r>
+            <a:r>
+              <a:rPr lang="en-US" sz="2400" dirty="0" err="1" smtClean="0"/>
+              <a:t>microservices</a:t>
+            </a:r>
+            <a:r>
+              <a:rPr lang="en-US" sz="2400" dirty="0" smtClean="0"/>
+              <a:t> </a:t>
+            </a:r>
+            <a:r>
+              <a:rPr lang="en-US" sz="2400" dirty="0" smtClean="0"/>
+              <a:t>to determine </a:t>
+            </a:r>
+            <a:r>
+              <a:rPr lang="en-US" sz="2400" dirty="0" smtClean="0"/>
+              <a:t>whether resources are redundant</a:t>
+            </a:r>
+            <a:r>
+              <a:rPr lang="en-US" sz="2400" dirty="0" smtClean="0"/>
+              <a:t>.</a:t>
+            </a:r>
+          </a:p>
+          <a:p>
+            <a:r>
+              <a:rPr lang="en-US" sz="2400" dirty="0" smtClean="0"/>
+              <a:t>This </a:t>
+            </a:r>
+            <a:r>
+              <a:rPr lang="en-US" sz="2400" dirty="0" smtClean="0"/>
+              <a:t>strategy </a:t>
+            </a:r>
+            <a:r>
+              <a:rPr lang="en-US" sz="2400" dirty="0" smtClean="0"/>
+              <a:t>is more </a:t>
+            </a:r>
+            <a:r>
+              <a:rPr lang="en-US" sz="2400" dirty="0" smtClean="0"/>
+              <a:t>effective than relying only on resource </a:t>
+            </a:r>
+            <a:r>
+              <a:rPr lang="en-US" sz="2400" dirty="0" smtClean="0"/>
+              <a:t>consumption because </a:t>
+            </a:r>
+            <a:r>
+              <a:rPr lang="en-US" sz="2400" dirty="0" smtClean="0"/>
+              <a:t>different </a:t>
+            </a:r>
+            <a:r>
+              <a:rPr lang="en-US" sz="2400" dirty="0" err="1" smtClean="0"/>
+              <a:t>microservices</a:t>
+            </a:r>
+            <a:r>
+              <a:rPr lang="en-US" sz="2400" dirty="0" smtClean="0"/>
+              <a:t> may have varying </a:t>
+            </a:r>
+            <a:r>
+              <a:rPr lang="en-US" sz="2400" dirty="0" smtClean="0"/>
+              <a:t>sensitivity to </a:t>
+            </a:r>
+            <a:r>
+              <a:rPr lang="en-US" sz="2400" dirty="0" smtClean="0"/>
+              <a:t>heterogeneous resources</a:t>
+            </a:r>
+            <a:r>
+              <a:rPr lang="en-US" sz="2400" dirty="0" smtClean="0"/>
+              <a:t>.</a:t>
+            </a:r>
+          </a:p>
+          <a:p>
+            <a:r>
+              <a:rPr lang="en-US" sz="2400" dirty="0" smtClean="0"/>
+              <a:t>The main idea </a:t>
+            </a:r>
+            <a:r>
+              <a:rPr lang="en-US" sz="2400" dirty="0" smtClean="0"/>
+              <a:t>behind </a:t>
+            </a:r>
+            <a:r>
+              <a:rPr lang="en-US" sz="2400" dirty="0" smtClean="0"/>
+              <a:t>redundancy checking is to employ hypothesis testing </a:t>
+            </a:r>
+            <a:r>
+              <a:rPr lang="en-US" sz="2400" dirty="0" smtClean="0"/>
+              <a:t>to detect </a:t>
+            </a:r>
+            <a:r>
+              <a:rPr lang="en-US" sz="2400" dirty="0" smtClean="0"/>
+              <a:t>whether a </a:t>
+            </a:r>
+            <a:r>
+              <a:rPr lang="en-US" sz="2400" dirty="0" err="1" smtClean="0"/>
+              <a:t>microservice’s</a:t>
+            </a:r>
+            <a:r>
+              <a:rPr lang="en-US" sz="2400" dirty="0" smtClean="0"/>
+              <a:t> current workload </a:t>
+            </a:r>
+            <a:r>
+              <a:rPr lang="en-US" sz="2400" dirty="0" smtClean="0"/>
+              <a:t>is significantly </a:t>
+            </a:r>
+            <a:r>
+              <a:rPr lang="en-US" sz="2400" dirty="0" smtClean="0"/>
+              <a:t>lower than its past </a:t>
+            </a:r>
+            <a:r>
+              <a:rPr lang="en-US" sz="2400" dirty="0" smtClean="0"/>
+              <a:t>workload.</a:t>
+            </a:r>
+          </a:p>
+          <a:p>
+            <a:r>
+              <a:rPr lang="en-US" sz="2400" dirty="0" smtClean="0"/>
+              <a:t>The degree of significance is adjusted by the parameter </a:t>
+            </a:r>
+            <a:r>
+              <a:rPr lang="en-US" sz="2400" dirty="0" smtClean="0"/>
+              <a:t>β.</a:t>
+            </a:r>
+            <a:endParaRPr lang="en-US" sz="2400" dirty="0"/>
           </a:p>
         </p:txBody>
       </p:sp>
@@ -9750,7 +10045,341 @@
 </p:sld>
 </file>
 
-<file path=ppt/slides/slide37.xml><?xml version="1.0" encoding="utf-8"?>
+<file path=ppt/slides/slide39.xml><?xml version="1.0" encoding="utf-8"?>
+<p:sld xmlns:a="http://schemas.openxmlformats.org/drawingml/2006/main" xmlns:r="http://schemas.openxmlformats.org/officeDocument/2006/relationships" xmlns:p="http://schemas.openxmlformats.org/presentationml/2006/main">
+  <p:cSld>
+    <p:spTree>
+      <p:nvGrpSpPr>
+        <p:cNvPr id="1" name=""/>
+        <p:cNvGrpSpPr/>
+        <p:nvPr/>
+      </p:nvGrpSpPr>
+      <p:grpSpPr>
+        <a:xfrm>
+          <a:off x="0" y="0"/>
+          <a:ext cx="0" cy="0"/>
+          <a:chOff x="0" y="0"/>
+          <a:chExt cx="0" cy="0"/>
+        </a:xfrm>
+      </p:grpSpPr>
+      <p:sp>
+        <p:nvSpPr>
+          <p:cNvPr id="2" name="Title 1"/>
+          <p:cNvSpPr>
+            <a:spLocks noGrp="1"/>
+          </p:cNvSpPr>
+          <p:nvPr>
+            <p:ph type="title"/>
+          </p:nvPr>
+        </p:nvSpPr>
+        <p:spPr/>
+        <p:txBody>
+          <a:bodyPr/>
+          <a:lstStyle/>
+          <a:p>
+            <a:r>
+              <a:rPr lang="en-US" dirty="0" smtClean="0"/>
+              <a:t>Bottleneck Localization</a:t>
+            </a:r>
+            <a:endParaRPr lang="en-US" dirty="0"/>
+          </a:p>
+        </p:txBody>
+      </p:sp>
+      <p:sp>
+        <p:nvSpPr>
+          <p:cNvPr id="3" name="Content Placeholder 2"/>
+          <p:cNvSpPr>
+            <a:spLocks noGrp="1"/>
+          </p:cNvSpPr>
+          <p:nvPr>
+            <p:ph idx="1"/>
+          </p:nvPr>
+        </p:nvSpPr>
+        <p:spPr/>
+        <p:txBody>
+          <a:bodyPr/>
+          <a:lstStyle/>
+          <a:p>
+            <a:r>
+              <a:rPr lang="en-US" sz="2400" dirty="0" err="1" smtClean="0"/>
+              <a:t>PBScaler</a:t>
+            </a:r>
+            <a:r>
+              <a:rPr lang="en-US" sz="2400" dirty="0" smtClean="0"/>
+              <a:t> </a:t>
+            </a:r>
+            <a:r>
+              <a:rPr lang="en-US" sz="2400" dirty="0" smtClean="0"/>
+              <a:t>uses the </a:t>
+            </a:r>
+            <a:r>
+              <a:rPr lang="en-US" sz="2400" dirty="0" smtClean="0"/>
+              <a:t>rate of workload change per second of </a:t>
+            </a:r>
+            <a:r>
+              <a:rPr lang="en-US" sz="2400" dirty="0" err="1" smtClean="0"/>
+              <a:t>microservices</a:t>
+            </a:r>
+            <a:r>
+              <a:rPr lang="en-US" sz="2400" dirty="0" smtClean="0"/>
+              <a:t> </a:t>
+            </a:r>
+            <a:r>
+              <a:rPr lang="en-US" sz="2400" dirty="0" smtClean="0"/>
+              <a:t>to determine </a:t>
+            </a:r>
+            <a:r>
+              <a:rPr lang="en-US" sz="2400" dirty="0" smtClean="0"/>
+              <a:t>whether resources are redundant</a:t>
+            </a:r>
+            <a:r>
+              <a:rPr lang="en-US" sz="2400" dirty="0" smtClean="0"/>
+              <a:t>.</a:t>
+            </a:r>
+          </a:p>
+          <a:p>
+            <a:r>
+              <a:rPr lang="en-US" sz="2400" dirty="0" smtClean="0"/>
+              <a:t>This </a:t>
+            </a:r>
+            <a:r>
+              <a:rPr lang="en-US" sz="2400" dirty="0" smtClean="0"/>
+              <a:t>strategy </a:t>
+            </a:r>
+            <a:r>
+              <a:rPr lang="en-US" sz="2400" dirty="0" smtClean="0"/>
+              <a:t>is more </a:t>
+            </a:r>
+            <a:r>
+              <a:rPr lang="en-US" sz="2400" dirty="0" smtClean="0"/>
+              <a:t>effective than relying only on resource </a:t>
+            </a:r>
+            <a:r>
+              <a:rPr lang="en-US" sz="2400" dirty="0" smtClean="0"/>
+              <a:t>consumption because </a:t>
+            </a:r>
+            <a:r>
+              <a:rPr lang="en-US" sz="2400" dirty="0" smtClean="0"/>
+              <a:t>different </a:t>
+            </a:r>
+            <a:r>
+              <a:rPr lang="en-US" sz="2400" dirty="0" err="1" smtClean="0"/>
+              <a:t>microservices</a:t>
+            </a:r>
+            <a:r>
+              <a:rPr lang="en-US" sz="2400" dirty="0" smtClean="0"/>
+              <a:t> may have varying </a:t>
+            </a:r>
+            <a:r>
+              <a:rPr lang="en-US" sz="2400" dirty="0" smtClean="0"/>
+              <a:t>sensitivity to </a:t>
+            </a:r>
+            <a:r>
+              <a:rPr lang="en-US" sz="2400" dirty="0" smtClean="0"/>
+              <a:t>heterogeneous resources</a:t>
+            </a:r>
+            <a:r>
+              <a:rPr lang="en-US" sz="2400" dirty="0" smtClean="0"/>
+              <a:t>.</a:t>
+            </a:r>
+          </a:p>
+          <a:p>
+            <a:r>
+              <a:rPr lang="en-US" sz="2400" dirty="0" smtClean="0"/>
+              <a:t>The main idea </a:t>
+            </a:r>
+            <a:r>
+              <a:rPr lang="en-US" sz="2400" dirty="0" smtClean="0"/>
+              <a:t>behind </a:t>
+            </a:r>
+            <a:r>
+              <a:rPr lang="en-US" sz="2400" dirty="0" smtClean="0"/>
+              <a:t>redundancy checking is to employ hypothesis testing </a:t>
+            </a:r>
+            <a:r>
+              <a:rPr lang="en-US" sz="2400" dirty="0" smtClean="0"/>
+              <a:t>to detect </a:t>
+            </a:r>
+            <a:r>
+              <a:rPr lang="en-US" sz="2400" dirty="0" smtClean="0"/>
+              <a:t>whether a </a:t>
+            </a:r>
+            <a:r>
+              <a:rPr lang="en-US" sz="2400" dirty="0" err="1" smtClean="0"/>
+              <a:t>microservice’s</a:t>
+            </a:r>
+            <a:r>
+              <a:rPr lang="en-US" sz="2400" dirty="0" smtClean="0"/>
+              <a:t> current workload </a:t>
+            </a:r>
+            <a:r>
+              <a:rPr lang="en-US" sz="2400" dirty="0" smtClean="0"/>
+              <a:t>is significantly </a:t>
+            </a:r>
+            <a:r>
+              <a:rPr lang="en-US" sz="2400" dirty="0" smtClean="0"/>
+              <a:t>lower than its past </a:t>
+            </a:r>
+            <a:r>
+              <a:rPr lang="en-US" sz="2400" dirty="0" smtClean="0"/>
+              <a:t>workload.</a:t>
+            </a:r>
+          </a:p>
+          <a:p>
+            <a:r>
+              <a:rPr lang="en-US" sz="2400" dirty="0" smtClean="0"/>
+              <a:t>The degree of significance is adjusted by the parameter </a:t>
+            </a:r>
+            <a:r>
+              <a:rPr lang="en-US" sz="2400" dirty="0" smtClean="0"/>
+              <a:t>β.</a:t>
+            </a:r>
+            <a:endParaRPr lang="en-US" sz="2400" dirty="0"/>
+          </a:p>
+        </p:txBody>
+      </p:sp>
+    </p:spTree>
+  </p:cSld>
+  <p:clrMapOvr>
+    <a:masterClrMapping/>
+  </p:clrMapOvr>
+</p:sld>
+</file>
+
+<file path=ppt/slides/slide4.xml><?xml version="1.0" encoding="utf-8"?>
+<p:sld xmlns:a="http://schemas.openxmlformats.org/drawingml/2006/main" xmlns:r="http://schemas.openxmlformats.org/officeDocument/2006/relationships" xmlns:p="http://schemas.openxmlformats.org/presentationml/2006/main">
+  <p:cSld>
+    <p:spTree>
+      <p:nvGrpSpPr>
+        <p:cNvPr id="1" name=""/>
+        <p:cNvGrpSpPr/>
+        <p:nvPr/>
+      </p:nvGrpSpPr>
+      <p:grpSpPr>
+        <a:xfrm>
+          <a:off x="0" y="0"/>
+          <a:ext cx="0" cy="0"/>
+          <a:chOff x="0" y="0"/>
+          <a:chExt cx="0" cy="0"/>
+        </a:xfrm>
+      </p:grpSpPr>
+      <p:sp>
+        <p:nvSpPr>
+          <p:cNvPr id="2" name="Title 1"/>
+          <p:cNvSpPr>
+            <a:spLocks noGrp="1"/>
+          </p:cNvSpPr>
+          <p:nvPr>
+            <p:ph type="title"/>
+          </p:nvPr>
+        </p:nvSpPr>
+        <p:spPr/>
+        <p:txBody>
+          <a:bodyPr/>
+          <a:lstStyle/>
+          <a:p>
+            <a:r>
+              <a:rPr lang="en-US" dirty="0" smtClean="0"/>
+              <a:t>Scaling Rules</a:t>
+            </a:r>
+            <a:endParaRPr lang="en-US" dirty="0"/>
+          </a:p>
+        </p:txBody>
+      </p:sp>
+      <p:sp>
+        <p:nvSpPr>
+          <p:cNvPr id="3" name="Content Placeholder 2"/>
+          <p:cNvSpPr>
+            <a:spLocks noGrp="1"/>
+          </p:cNvSpPr>
+          <p:nvPr>
+            <p:ph idx="1"/>
+          </p:nvPr>
+        </p:nvSpPr>
+        <p:spPr/>
+        <p:txBody>
+          <a:bodyPr/>
+          <a:lstStyle/>
+          <a:p>
+            <a:r>
+              <a:rPr lang="en-US" sz="2800" dirty="0" smtClean="0"/>
+              <a:t>Once </a:t>
+            </a:r>
+            <a:r>
+              <a:rPr lang="en-US" sz="2800" i="1" dirty="0" smtClean="0">
+                <a:solidFill>
+                  <a:srgbClr val="C00000"/>
+                </a:solidFill>
+              </a:rPr>
+              <a:t>a scaling indicator is selected</a:t>
+            </a:r>
+            <a:r>
+              <a:rPr lang="en-US" sz="2800" dirty="0" smtClean="0"/>
+              <a:t> for use to scale the application, </a:t>
+            </a:r>
+            <a:r>
+              <a:rPr lang="en-US" sz="2800" u="sng" dirty="0" smtClean="0"/>
+              <a:t>samplings</a:t>
+            </a:r>
+            <a:r>
+              <a:rPr lang="en-US" sz="2800" dirty="0" smtClean="0"/>
+              <a:t> of the scaling indicator are </a:t>
+            </a:r>
+            <a:r>
+              <a:rPr lang="en-US" sz="2800" u="sng" dirty="0" smtClean="0"/>
+              <a:t>collected</a:t>
+            </a:r>
+            <a:r>
+              <a:rPr lang="en-US" sz="2800" dirty="0" smtClean="0"/>
+              <a:t> in real-time, and statistics is </a:t>
+            </a:r>
+            <a:r>
+              <a:rPr lang="en-US" sz="2800" u="sng" dirty="0" smtClean="0"/>
+              <a:t>calculated</a:t>
+            </a:r>
+            <a:r>
+              <a:rPr lang="en-US" sz="2800" dirty="0" smtClean="0"/>
+              <a:t> periodically.</a:t>
+            </a:r>
+          </a:p>
+          <a:p>
+            <a:r>
+              <a:rPr lang="en-US" sz="2800" dirty="0" smtClean="0"/>
+              <a:t>Based on the historical trends and predictions derived from the statistics of the scaling indicator, </a:t>
+            </a:r>
+            <a:r>
+              <a:rPr lang="en-US" sz="2800" i="1" dirty="0" smtClean="0">
+                <a:solidFill>
+                  <a:srgbClr val="C00000"/>
+                </a:solidFill>
+              </a:rPr>
+              <a:t>scaling rules</a:t>
+            </a:r>
+            <a:r>
+              <a:rPr lang="en-US" sz="2800" dirty="0" smtClean="0"/>
+              <a:t> can </a:t>
+            </a:r>
+            <a:r>
+              <a:rPr lang="en-US" sz="2800" u="sng" dirty="0" smtClean="0"/>
+              <a:t>be defined to scale up or down</a:t>
+            </a:r>
+            <a:r>
+              <a:rPr lang="en-US" sz="2800" dirty="0" smtClean="0"/>
+              <a:t> the amount of web application instances.</a:t>
+            </a:r>
+            <a:endParaRPr lang="en-US" sz="2800" dirty="0"/>
+          </a:p>
+        </p:txBody>
+      </p:sp>
+    </p:spTree>
+  </p:cSld>
+  <p:clrMapOvr>
+    <a:masterClrMapping/>
+  </p:clrMapOvr>
+</p:sld>
+</file>
+
+<file path=ppt/slides/slide40.xml><?xml version="1.0" encoding="utf-8"?>
 <p:sld xmlns:a="http://schemas.openxmlformats.org/drawingml/2006/main" xmlns:r="http://schemas.openxmlformats.org/officeDocument/2006/relationships" xmlns:p="http://schemas.openxmlformats.org/presentationml/2006/main">
   <p:cSld>
     <p:spTree>
@@ -9827,139 +10456,6 @@
       </p:par>
     </p:tnLst>
   </p:timing>
-</p:sld>
-</file>
-
-<file path=ppt/slides/slide4.xml><?xml version="1.0" encoding="utf-8"?>
-<p:sld xmlns:a="http://schemas.openxmlformats.org/drawingml/2006/main" xmlns:r="http://schemas.openxmlformats.org/officeDocument/2006/relationships" xmlns:p="http://schemas.openxmlformats.org/presentationml/2006/main">
-  <p:cSld>
-    <p:spTree>
-      <p:nvGrpSpPr>
-        <p:cNvPr id="1" name=""/>
-        <p:cNvGrpSpPr/>
-        <p:nvPr/>
-      </p:nvGrpSpPr>
-      <p:grpSpPr>
-        <a:xfrm>
-          <a:off x="0" y="0"/>
-          <a:ext cx="0" cy="0"/>
-          <a:chOff x="0" y="0"/>
-          <a:chExt cx="0" cy="0"/>
-        </a:xfrm>
-      </p:grpSpPr>
-      <p:sp>
-        <p:nvSpPr>
-          <p:cNvPr id="2" name="Title 1"/>
-          <p:cNvSpPr>
-            <a:spLocks noGrp="1"/>
-          </p:cNvSpPr>
-          <p:nvPr>
-            <p:ph type="title"/>
-          </p:nvPr>
-        </p:nvSpPr>
-        <p:spPr/>
-        <p:txBody>
-          <a:bodyPr/>
-          <a:lstStyle/>
-          <a:p>
-            <a:r>
-              <a:rPr lang="en-US" dirty="0" smtClean="0"/>
-              <a:t>Scaling Rules</a:t>
-            </a:r>
-            <a:endParaRPr lang="en-US" dirty="0"/>
-          </a:p>
-        </p:txBody>
-      </p:sp>
-      <p:sp>
-        <p:nvSpPr>
-          <p:cNvPr id="3" name="Content Placeholder 2"/>
-          <p:cNvSpPr>
-            <a:spLocks noGrp="1"/>
-          </p:cNvSpPr>
-          <p:nvPr>
-            <p:ph idx="1"/>
-          </p:nvPr>
-        </p:nvSpPr>
-        <p:spPr/>
-        <p:txBody>
-          <a:bodyPr/>
-          <a:lstStyle/>
-          <a:p>
-            <a:r>
-              <a:rPr lang="en-US" sz="2800" dirty="0" smtClean="0"/>
-              <a:t>Once </a:t>
-            </a:r>
-            <a:r>
-              <a:rPr lang="en-US" sz="2800" i="1" dirty="0" smtClean="0">
-                <a:solidFill>
-                  <a:srgbClr val="C00000"/>
-                </a:solidFill>
-              </a:rPr>
-              <a:t>a scaling indicator is selected</a:t>
-            </a:r>
-            <a:r>
-              <a:rPr lang="en-US" sz="2800" dirty="0" smtClean="0"/>
-              <a:t> for use to scale the application, </a:t>
-            </a:r>
-            <a:r>
-              <a:rPr lang="en-US" sz="2800" u="sng" dirty="0" smtClean="0"/>
-              <a:t>samplings</a:t>
-            </a:r>
-            <a:r>
-              <a:rPr lang="en-US" sz="2800" dirty="0" smtClean="0"/>
-              <a:t> of the scaling indicator are </a:t>
-            </a:r>
-            <a:r>
-              <a:rPr lang="en-US" sz="2800" u="sng" dirty="0" smtClean="0"/>
-              <a:t>collected</a:t>
-            </a:r>
-            <a:r>
-              <a:rPr lang="en-US" sz="2800" dirty="0" smtClean="0"/>
-              <a:t> in real-time, and statistics is </a:t>
-            </a:r>
-            <a:r>
-              <a:rPr lang="en-US" sz="2800" u="sng" dirty="0" smtClean="0"/>
-              <a:t>calculated</a:t>
-            </a:r>
-            <a:r>
-              <a:rPr lang="en-US" sz="2800" dirty="0" smtClean="0"/>
-              <a:t> periodically.</a:t>
-            </a:r>
-          </a:p>
-          <a:p>
-            <a:r>
-              <a:rPr lang="en-US" sz="2800" dirty="0" smtClean="0"/>
-              <a:t>Based on the historical trends and predictions derived from the statistics of the scaling indicator, </a:t>
-            </a:r>
-            <a:r>
-              <a:rPr lang="en-US" sz="2800" i="1" dirty="0" smtClean="0">
-                <a:solidFill>
-                  <a:srgbClr val="C00000"/>
-                </a:solidFill>
-              </a:rPr>
-              <a:t>scaling rules</a:t>
-            </a:r>
-            <a:r>
-              <a:rPr lang="en-US" sz="2800" dirty="0" smtClean="0"/>
-              <a:t> can </a:t>
-            </a:r>
-            <a:r>
-              <a:rPr lang="en-US" sz="2800" u="sng" dirty="0" smtClean="0"/>
-              <a:t>be defined to scale up or down</a:t>
-            </a:r>
-            <a:r>
-              <a:rPr lang="en-US" sz="2800" dirty="0" smtClean="0"/>
-              <a:t> the amount of web application instances.</a:t>
-            </a:r>
-            <a:endParaRPr lang="en-US" sz="2800" dirty="0"/>
-          </a:p>
-        </p:txBody>
-      </p:sp>
-    </p:spTree>
-  </p:cSld>
-  <p:clrMapOvr>
-    <a:masterClrMapping/>
-  </p:clrMapOvr>
 </p:sld>
 </file>
 

--- a/Microservices/07.3. Autoscaling.pptx
+++ b/Microservices/07.3. Autoscaling.pptx
@@ -5,7 +5,7 @@
     <p:sldMasterId id="2147483708" r:id="rId1"/>
   </p:sldMasterIdLst>
   <p:notesMasterIdLst>
-    <p:notesMasterId r:id="rId42"/>
+    <p:notesMasterId r:id="rId45"/>
   </p:notesMasterIdLst>
   <p:sldIdLst>
     <p:sldId id="561" r:id="rId2"/>
@@ -42,12 +42,15 @@
     <p:sldId id="666" r:id="rId33"/>
     <p:sldId id="659" r:id="rId34"/>
     <p:sldId id="667" r:id="rId35"/>
-    <p:sldId id="660" r:id="rId36"/>
-    <p:sldId id="661" r:id="rId37"/>
-    <p:sldId id="662" r:id="rId38"/>
-    <p:sldId id="664" r:id="rId39"/>
-    <p:sldId id="665" r:id="rId40"/>
-    <p:sldId id="516" r:id="rId41"/>
+    <p:sldId id="668" r:id="rId36"/>
+    <p:sldId id="669" r:id="rId37"/>
+    <p:sldId id="670" r:id="rId38"/>
+    <p:sldId id="660" r:id="rId39"/>
+    <p:sldId id="661" r:id="rId40"/>
+    <p:sldId id="662" r:id="rId41"/>
+    <p:sldId id="664" r:id="rId42"/>
+    <p:sldId id="665" r:id="rId43"/>
+    <p:sldId id="516" r:id="rId44"/>
   </p:sldIdLst>
   <p:sldSz cx="9144000" cy="6858000" type="screen4x3"/>
   <p:notesSz cx="6858000" cy="9144000"/>
@@ -9332,8 +9335,8 @@
           <a:lstStyle/>
           <a:p>
             <a:r>
-              <a:rPr lang="en-US" dirty="0" err="1" smtClean="0"/>
-              <a:t>PBScaler</a:t>
+              <a:rPr lang="en-US" dirty="0" smtClean="0"/>
+              <a:t>Sparse Causal Graphs</a:t>
             </a:r>
             <a:endParaRPr lang="en-US" dirty="0"/>
           </a:p>
@@ -9355,242 +9358,14 @@
           <a:lstStyle/>
           <a:p>
             <a:r>
-              <a:rPr lang="en-US" sz="2000" b="1" dirty="0" err="1" smtClean="0"/>
-              <a:t>Shuaiyu</a:t>
-            </a:r>
-            <a:r>
-              <a:rPr lang="en-US" sz="2000" b="1" dirty="0" smtClean="0"/>
-              <a:t> </a:t>
-            </a:r>
-            <a:r>
-              <a:rPr lang="en-US" sz="2000" b="1" dirty="0" err="1" smtClean="0"/>
-              <a:t>Xie</a:t>
-            </a:r>
-            <a:r>
-              <a:rPr lang="en-US" sz="2000" b="1" dirty="0" smtClean="0"/>
-              <a:t> et al. (2023). </a:t>
-            </a:r>
-            <a:r>
-              <a:rPr lang="en-US" sz="2000" b="1" dirty="0" err="1" smtClean="0"/>
-              <a:t>PBScaler</a:t>
-            </a:r>
-            <a:r>
-              <a:rPr lang="en-US" sz="2000" b="1" dirty="0" smtClean="0"/>
-              <a:t>: </a:t>
-            </a:r>
-            <a:r>
-              <a:rPr lang="en-US" sz="2000" b="1" dirty="0" smtClean="0"/>
-              <a:t>A Bottleneck-aware </a:t>
-            </a:r>
-            <a:r>
-              <a:rPr lang="en-US" sz="2000" b="1" dirty="0" err="1" smtClean="0"/>
-              <a:t>Autoscaling</a:t>
-            </a:r>
-            <a:r>
-              <a:rPr lang="en-US" sz="2000" b="1" dirty="0" smtClean="0"/>
-              <a:t> Framework for </a:t>
-            </a:r>
-            <a:r>
-              <a:rPr lang="en-US" sz="2000" b="1" dirty="0" err="1" smtClean="0"/>
-              <a:t>Microservice</a:t>
-            </a:r>
-            <a:r>
-              <a:rPr lang="en-US" sz="2000" b="1" dirty="0" smtClean="0"/>
-              <a:t>-based </a:t>
-            </a:r>
-            <a:r>
-              <a:rPr lang="en-US" sz="2000" b="1" dirty="0" smtClean="0"/>
-              <a:t>Applications.</a:t>
-            </a:r>
-          </a:p>
-          <a:p>
-            <a:r>
-              <a:rPr lang="en-US" sz="2000" dirty="0" smtClean="0"/>
-              <a:t>We </a:t>
-            </a:r>
-            <a:r>
-              <a:rPr lang="en-US" sz="2000" dirty="0" smtClean="0"/>
-              <a:t>propose </a:t>
-            </a:r>
-            <a:r>
-              <a:rPr lang="en-US" sz="2000" dirty="0" err="1" smtClean="0"/>
-              <a:t>TopoRank</a:t>
-            </a:r>
-            <a:r>
-              <a:rPr lang="en-US" sz="2000" dirty="0" smtClean="0"/>
-              <a:t>, a </a:t>
-            </a:r>
-            <a:r>
-              <a:rPr lang="en-US" sz="2000" u="sng" dirty="0" smtClean="0"/>
-              <a:t>random walk </a:t>
-            </a:r>
-            <a:r>
-              <a:rPr lang="en-US" sz="2000" u="sng" dirty="0" smtClean="0"/>
-              <a:t>algorithm</a:t>
-            </a:r>
-            <a:r>
-              <a:rPr lang="en-US" sz="2000" dirty="0" smtClean="0"/>
-              <a:t> based </a:t>
-            </a:r>
-            <a:r>
-              <a:rPr lang="en-US" sz="2000" dirty="0" smtClean="0"/>
-              <a:t>on topological potential theory (TPT) to </a:t>
-            </a:r>
-            <a:r>
-              <a:rPr lang="en-US" sz="2000" i="1" dirty="0" smtClean="0">
-                <a:solidFill>
-                  <a:srgbClr val="C00000"/>
-                </a:solidFill>
-              </a:rPr>
-              <a:t>identify performance </a:t>
-            </a:r>
-            <a:r>
-              <a:rPr lang="en-US" sz="2000" i="1" dirty="0" smtClean="0">
-                <a:solidFill>
-                  <a:srgbClr val="C00000"/>
-                </a:solidFill>
-              </a:rPr>
-              <a:t>bottlenecks</a:t>
-            </a:r>
-            <a:r>
-              <a:rPr lang="en-US" sz="2000" dirty="0" smtClean="0"/>
-              <a:t> (PBs</a:t>
-            </a:r>
-            <a:r>
-              <a:rPr lang="en-US" sz="2000" dirty="0" smtClean="0"/>
-              <a:t>).</a:t>
-            </a:r>
-          </a:p>
-          <a:p>
-            <a:r>
-              <a:rPr lang="en-US" sz="2000" dirty="0" smtClean="0"/>
-              <a:t>By taking into account </a:t>
-            </a:r>
-            <a:r>
-              <a:rPr lang="en-US" sz="2000" dirty="0" err="1" smtClean="0"/>
-              <a:t>microservice</a:t>
-            </a:r>
-            <a:r>
-              <a:rPr lang="en-US" sz="2000" dirty="0" smtClean="0"/>
-              <a:t> dependencies and anomaly potential, </a:t>
-            </a:r>
-            <a:r>
-              <a:rPr lang="en-US" sz="2000" dirty="0" err="1" smtClean="0"/>
-              <a:t>TopoRank</a:t>
-            </a:r>
-            <a:r>
-              <a:rPr lang="en-US" sz="2000" dirty="0" smtClean="0"/>
-              <a:t> </a:t>
-            </a:r>
-            <a:r>
-              <a:rPr lang="en-US" sz="2000" dirty="0" smtClean="0"/>
-              <a:t>improves the accuracy and </a:t>
-            </a:r>
-            <a:r>
-              <a:rPr lang="en-US" sz="2000" dirty="0" err="1" smtClean="0"/>
-              <a:t>explainability</a:t>
-            </a:r>
-            <a:r>
-              <a:rPr lang="en-US" sz="2000" dirty="0" smtClean="0"/>
-              <a:t> of bottleneck localization.</a:t>
-            </a:r>
-          </a:p>
-          <a:p>
-            <a:r>
-              <a:rPr lang="en-US" sz="2000" dirty="0" smtClean="0"/>
-              <a:t>After identifying the PBs by </a:t>
-            </a:r>
-            <a:r>
-              <a:rPr lang="en-US" sz="2000" dirty="0" err="1" smtClean="0"/>
-              <a:t>TopoRank</a:t>
-            </a:r>
-            <a:r>
-              <a:rPr lang="en-US" sz="2000" dirty="0" smtClean="0"/>
-              <a:t>, </a:t>
-            </a:r>
-            <a:r>
-              <a:rPr lang="en-US" sz="2000" dirty="0" err="1" smtClean="0"/>
-              <a:t>PBScaler</a:t>
-            </a:r>
-            <a:r>
-              <a:rPr lang="en-US" sz="2000" dirty="0" smtClean="0"/>
-              <a:t> further </a:t>
-            </a:r>
-            <a:r>
-              <a:rPr lang="en-US" sz="2000" dirty="0" smtClean="0"/>
-              <a:t>employs a </a:t>
-            </a:r>
-            <a:r>
-              <a:rPr lang="en-US" sz="2000" i="1" dirty="0" smtClean="0">
-                <a:solidFill>
-                  <a:srgbClr val="C00000"/>
-                </a:solidFill>
-              </a:rPr>
-              <a:t>genetic algorithm</a:t>
-            </a:r>
-            <a:r>
-              <a:rPr lang="en-US" sz="2000" dirty="0" smtClean="0"/>
-              <a:t> to find nearly </a:t>
-            </a:r>
-            <a:r>
-              <a:rPr lang="en-US" sz="2000" dirty="0" smtClean="0"/>
-              <a:t>optimal strategies.</a:t>
-            </a:r>
-          </a:p>
-          <a:p>
-            <a:r>
-              <a:rPr lang="en-US" sz="2000" dirty="0" smtClean="0"/>
-              <a:t>To </a:t>
-            </a:r>
-            <a:r>
-              <a:rPr lang="en-US" sz="2000" dirty="0" smtClean="0"/>
-              <a:t>avoid application oscillation caused by </a:t>
-            </a:r>
-            <a:r>
-              <a:rPr lang="en-US" sz="2000" dirty="0" smtClean="0"/>
-              <a:t>excessive optimization</a:t>
-            </a:r>
-            <a:r>
-              <a:rPr lang="en-US" sz="2000" dirty="0" smtClean="0"/>
-              <a:t>, the process is </a:t>
-            </a:r>
-            <a:r>
-              <a:rPr lang="en-US" sz="2000" i="1" dirty="0" smtClean="0">
-                <a:solidFill>
-                  <a:srgbClr val="C00000"/>
-                </a:solidFill>
-              </a:rPr>
-              <a:t>conducted offline</a:t>
-            </a:r>
-            <a:r>
-              <a:rPr lang="en-US" sz="2000" dirty="0" smtClean="0"/>
-              <a:t> </a:t>
-            </a:r>
-            <a:r>
-              <a:rPr lang="en-US" sz="2000" dirty="0" smtClean="0"/>
-              <a:t>and is </a:t>
-            </a:r>
-            <a:r>
-              <a:rPr lang="en-US" sz="2000" dirty="0" smtClean="0"/>
-              <a:t>guided by an SLO violation predictor, which </a:t>
-            </a:r>
-            <a:r>
-              <a:rPr lang="en-US" sz="2000" dirty="0" smtClean="0"/>
-              <a:t>simulates the </a:t>
-            </a:r>
-            <a:r>
-              <a:rPr lang="en-US" sz="2000" dirty="0" smtClean="0"/>
-              <a:t>online application and provides feedback to the </a:t>
-            </a:r>
-            <a:r>
-              <a:rPr lang="en-US" sz="2000" dirty="0" smtClean="0"/>
-              <a:t>scaling strategies</a:t>
-            </a:r>
-            <a:r>
-              <a:rPr lang="en-US" sz="2000" dirty="0" smtClean="0"/>
-              <a:t>.</a:t>
-            </a:r>
-            <a:endParaRPr lang="en-US" sz="2000" b="1" dirty="0"/>
+              <a:rPr lang="en-US" sz="2400" b="1" dirty="0" smtClean="0"/>
+              <a:t>(1990). An Algorithm for Fast Recovery of Sparse Causal </a:t>
+            </a:r>
+            <a:r>
+              <a:rPr lang="en-US" sz="2400" b="1" dirty="0" smtClean="0"/>
+              <a:t>Graphs.</a:t>
+            </a:r>
+            <a:endParaRPr lang="en-US" sz="2400" b="1" dirty="0"/>
           </a:p>
         </p:txBody>
       </p:sp>
@@ -9603,6 +9378,459 @@
 </file>
 
 <file path=ppt/slides/slide36.xml><?xml version="1.0" encoding="utf-8"?>
+<p:sld xmlns:a="http://schemas.openxmlformats.org/drawingml/2006/main" xmlns:r="http://schemas.openxmlformats.org/officeDocument/2006/relationships" xmlns:p="http://schemas.openxmlformats.org/presentationml/2006/main">
+  <p:cSld>
+    <p:spTree>
+      <p:nvGrpSpPr>
+        <p:cNvPr id="1" name=""/>
+        <p:cNvGrpSpPr/>
+        <p:nvPr/>
+      </p:nvGrpSpPr>
+      <p:grpSpPr>
+        <a:xfrm>
+          <a:off x="0" y="0"/>
+          <a:ext cx="0" cy="0"/>
+          <a:chOff x="0" y="0"/>
+          <a:chExt cx="0" cy="0"/>
+        </a:xfrm>
+      </p:grpSpPr>
+      <p:sp>
+        <p:nvSpPr>
+          <p:cNvPr id="2" name="Title 1"/>
+          <p:cNvSpPr>
+            <a:spLocks noGrp="1"/>
+          </p:cNvSpPr>
+          <p:nvPr>
+            <p:ph type="title"/>
+          </p:nvPr>
+        </p:nvSpPr>
+        <p:spPr/>
+        <p:txBody>
+          <a:bodyPr/>
+          <a:lstStyle/>
+          <a:p>
+            <a:r>
+              <a:rPr lang="en-US" dirty="0" smtClean="0"/>
+              <a:t>Topological Potential Theory</a:t>
+            </a:r>
+            <a:endParaRPr lang="en-US" dirty="0"/>
+          </a:p>
+        </p:txBody>
+      </p:sp>
+      <p:sp>
+        <p:nvSpPr>
+          <p:cNvPr id="3" name="Content Placeholder 2"/>
+          <p:cNvSpPr>
+            <a:spLocks noGrp="1"/>
+          </p:cNvSpPr>
+          <p:nvPr>
+            <p:ph idx="1"/>
+          </p:nvPr>
+        </p:nvSpPr>
+        <p:spPr/>
+        <p:txBody>
+          <a:bodyPr/>
+          <a:lstStyle/>
+          <a:p>
+            <a:r>
+              <a:rPr lang="en-US" sz="2400" b="1" dirty="0" smtClean="0"/>
+              <a:t>(1990). An Algorithm for Fast Recovery of Sparse Causal </a:t>
+            </a:r>
+            <a:r>
+              <a:rPr lang="en-US" sz="2400" b="1" dirty="0" smtClean="0"/>
+              <a:t>Graphs.</a:t>
+            </a:r>
+            <a:endParaRPr lang="en-US" sz="2400" b="1" dirty="0"/>
+          </a:p>
+        </p:txBody>
+      </p:sp>
+    </p:spTree>
+  </p:cSld>
+  <p:clrMapOvr>
+    <a:masterClrMapping/>
+  </p:clrMapOvr>
+</p:sld>
+</file>
+
+<file path=ppt/slides/slide37.xml><?xml version="1.0" encoding="utf-8"?>
+<p:sld xmlns:a="http://schemas.openxmlformats.org/drawingml/2006/main" xmlns:r="http://schemas.openxmlformats.org/officeDocument/2006/relationships" xmlns:p="http://schemas.openxmlformats.org/presentationml/2006/main">
+  <p:cSld>
+    <p:spTree>
+      <p:nvGrpSpPr>
+        <p:cNvPr id="1" name=""/>
+        <p:cNvGrpSpPr/>
+        <p:nvPr/>
+      </p:nvGrpSpPr>
+      <p:grpSpPr>
+        <a:xfrm>
+          <a:off x="0" y="0"/>
+          <a:ext cx="0" cy="0"/>
+          <a:chOff x="0" y="0"/>
+          <a:chExt cx="0" cy="0"/>
+        </a:xfrm>
+      </p:grpSpPr>
+      <p:sp>
+        <p:nvSpPr>
+          <p:cNvPr id="2" name="Title 1"/>
+          <p:cNvSpPr>
+            <a:spLocks noGrp="1"/>
+          </p:cNvSpPr>
+          <p:nvPr>
+            <p:ph type="title"/>
+          </p:nvPr>
+        </p:nvSpPr>
+        <p:spPr/>
+        <p:txBody>
+          <a:bodyPr/>
+          <a:lstStyle/>
+          <a:p>
+            <a:r>
+              <a:rPr lang="en-US" dirty="0" smtClean="0"/>
+              <a:t>Scaling Personalized Web Search</a:t>
+            </a:r>
+            <a:endParaRPr lang="en-US" dirty="0"/>
+          </a:p>
+        </p:txBody>
+      </p:sp>
+      <p:sp>
+        <p:nvSpPr>
+          <p:cNvPr id="3" name="Content Placeholder 2"/>
+          <p:cNvSpPr>
+            <a:spLocks noGrp="1"/>
+          </p:cNvSpPr>
+          <p:nvPr>
+            <p:ph idx="1"/>
+          </p:nvPr>
+        </p:nvSpPr>
+        <p:spPr/>
+        <p:txBody>
+          <a:bodyPr/>
+          <a:lstStyle/>
+          <a:p>
+            <a:r>
+              <a:rPr lang="en-US" sz="2400" b="1" dirty="0" smtClean="0"/>
+              <a:t>(2003). Scaling Personalized Web </a:t>
+            </a:r>
+            <a:r>
+              <a:rPr lang="en-US" sz="2400" b="1" smtClean="0"/>
+              <a:t>Search.</a:t>
+            </a:r>
+            <a:endParaRPr lang="en-US" sz="2400" b="1" dirty="0"/>
+          </a:p>
+        </p:txBody>
+      </p:sp>
+    </p:spTree>
+  </p:cSld>
+  <p:clrMapOvr>
+    <a:masterClrMapping/>
+  </p:clrMapOvr>
+</p:sld>
+</file>
+
+<file path=ppt/slides/slide38.xml><?xml version="1.0" encoding="utf-8"?>
+<p:sld xmlns:a="http://schemas.openxmlformats.org/drawingml/2006/main" xmlns:r="http://schemas.openxmlformats.org/officeDocument/2006/relationships" xmlns:p="http://schemas.openxmlformats.org/presentationml/2006/main">
+  <p:cSld>
+    <p:spTree>
+      <p:nvGrpSpPr>
+        <p:cNvPr id="1" name=""/>
+        <p:cNvGrpSpPr/>
+        <p:nvPr/>
+      </p:nvGrpSpPr>
+      <p:grpSpPr>
+        <a:xfrm>
+          <a:off x="0" y="0"/>
+          <a:ext cx="0" cy="0"/>
+          <a:chOff x="0" y="0"/>
+          <a:chExt cx="0" cy="0"/>
+        </a:xfrm>
+      </p:grpSpPr>
+      <p:sp>
+        <p:nvSpPr>
+          <p:cNvPr id="2" name="Title 1"/>
+          <p:cNvSpPr>
+            <a:spLocks noGrp="1"/>
+          </p:cNvSpPr>
+          <p:nvPr>
+            <p:ph type="title"/>
+          </p:nvPr>
+        </p:nvSpPr>
+        <p:spPr/>
+        <p:txBody>
+          <a:bodyPr/>
+          <a:lstStyle/>
+          <a:p>
+            <a:r>
+              <a:rPr lang="en-US" dirty="0" err="1" smtClean="0"/>
+              <a:t>PBScaler</a:t>
+            </a:r>
+            <a:endParaRPr lang="en-US" dirty="0"/>
+          </a:p>
+        </p:txBody>
+      </p:sp>
+      <p:sp>
+        <p:nvSpPr>
+          <p:cNvPr id="3" name="Content Placeholder 2"/>
+          <p:cNvSpPr>
+            <a:spLocks noGrp="1"/>
+          </p:cNvSpPr>
+          <p:nvPr>
+            <p:ph idx="1"/>
+          </p:nvPr>
+        </p:nvSpPr>
+        <p:spPr/>
+        <p:txBody>
+          <a:bodyPr/>
+          <a:lstStyle/>
+          <a:p>
+            <a:r>
+              <a:rPr lang="en-US" sz="2000" b="1" dirty="0" err="1" smtClean="0"/>
+              <a:t>Shuaiyu</a:t>
+            </a:r>
+            <a:r>
+              <a:rPr lang="en-US" sz="2000" b="1" dirty="0" smtClean="0"/>
+              <a:t> </a:t>
+            </a:r>
+            <a:r>
+              <a:rPr lang="en-US" sz="2000" b="1" dirty="0" err="1" smtClean="0"/>
+              <a:t>Xie</a:t>
+            </a:r>
+            <a:r>
+              <a:rPr lang="en-US" sz="2000" b="1" dirty="0" smtClean="0"/>
+              <a:t> et al. (2023). </a:t>
+            </a:r>
+            <a:r>
+              <a:rPr lang="en-US" sz="2000" b="1" dirty="0" err="1" smtClean="0"/>
+              <a:t>PBScaler</a:t>
+            </a:r>
+            <a:r>
+              <a:rPr lang="en-US" sz="2000" b="1" dirty="0" smtClean="0"/>
+              <a:t>: </a:t>
+            </a:r>
+            <a:r>
+              <a:rPr lang="en-US" sz="2000" b="1" dirty="0" smtClean="0"/>
+              <a:t>A Bottleneck-aware </a:t>
+            </a:r>
+            <a:r>
+              <a:rPr lang="en-US" sz="2000" b="1" dirty="0" err="1" smtClean="0"/>
+              <a:t>Autoscaling</a:t>
+            </a:r>
+            <a:r>
+              <a:rPr lang="en-US" sz="2000" b="1" dirty="0" smtClean="0"/>
+              <a:t> Framework for </a:t>
+            </a:r>
+            <a:r>
+              <a:rPr lang="en-US" sz="2000" b="1" dirty="0" err="1" smtClean="0"/>
+              <a:t>Microservice</a:t>
+            </a:r>
+            <a:r>
+              <a:rPr lang="en-US" sz="2000" b="1" dirty="0" smtClean="0"/>
+              <a:t>-based </a:t>
+            </a:r>
+            <a:r>
+              <a:rPr lang="en-US" sz="2000" b="1" dirty="0" smtClean="0"/>
+              <a:t>Applications.</a:t>
+            </a:r>
+          </a:p>
+          <a:p>
+            <a:r>
+              <a:rPr lang="en-US" sz="2000" dirty="0" smtClean="0"/>
+              <a:t>We </a:t>
+            </a:r>
+            <a:r>
+              <a:rPr lang="en-US" sz="2000" dirty="0" smtClean="0"/>
+              <a:t>propose </a:t>
+            </a:r>
+            <a:r>
+              <a:rPr lang="en-US" sz="2000" dirty="0" err="1" smtClean="0"/>
+              <a:t>TopoRank</a:t>
+            </a:r>
+            <a:r>
+              <a:rPr lang="en-US" sz="2000" dirty="0" smtClean="0"/>
+              <a:t>, a </a:t>
+            </a:r>
+            <a:r>
+              <a:rPr lang="en-US" sz="2000" u="sng" dirty="0" smtClean="0"/>
+              <a:t>random walk </a:t>
+            </a:r>
+            <a:r>
+              <a:rPr lang="en-US" sz="2000" u="sng" dirty="0" smtClean="0"/>
+              <a:t>algorithm</a:t>
+            </a:r>
+            <a:r>
+              <a:rPr lang="en-US" sz="2000" dirty="0" smtClean="0"/>
+              <a:t> based </a:t>
+            </a:r>
+            <a:r>
+              <a:rPr lang="en-US" sz="2000" dirty="0" smtClean="0"/>
+              <a:t>on topological potential theory (TPT) to </a:t>
+            </a:r>
+            <a:r>
+              <a:rPr lang="en-US" sz="2000" i="1" dirty="0" smtClean="0">
+                <a:solidFill>
+                  <a:srgbClr val="C00000"/>
+                </a:solidFill>
+              </a:rPr>
+              <a:t>identify performance </a:t>
+            </a:r>
+            <a:r>
+              <a:rPr lang="en-US" sz="2000" i="1" dirty="0" smtClean="0">
+                <a:solidFill>
+                  <a:srgbClr val="C00000"/>
+                </a:solidFill>
+              </a:rPr>
+              <a:t>bottlenecks</a:t>
+            </a:r>
+            <a:r>
+              <a:rPr lang="en-US" sz="2000" dirty="0" smtClean="0"/>
+              <a:t> (PBs</a:t>
+            </a:r>
+            <a:r>
+              <a:rPr lang="en-US" sz="2000" dirty="0" smtClean="0"/>
+              <a:t>).</a:t>
+            </a:r>
+          </a:p>
+          <a:p>
+            <a:r>
+              <a:rPr lang="en-US" sz="2000" dirty="0" smtClean="0"/>
+              <a:t>By taking into account </a:t>
+            </a:r>
+            <a:r>
+              <a:rPr lang="en-US" sz="2000" dirty="0" err="1" smtClean="0"/>
+              <a:t>microservice</a:t>
+            </a:r>
+            <a:r>
+              <a:rPr lang="en-US" sz="2000" dirty="0" smtClean="0"/>
+              <a:t> dependencies and anomaly potential, </a:t>
+            </a:r>
+            <a:r>
+              <a:rPr lang="en-US" sz="2000" dirty="0" err="1" smtClean="0"/>
+              <a:t>TopoRank</a:t>
+            </a:r>
+            <a:r>
+              <a:rPr lang="en-US" sz="2000" dirty="0" smtClean="0"/>
+              <a:t> </a:t>
+            </a:r>
+            <a:r>
+              <a:rPr lang="en-US" sz="2000" dirty="0" smtClean="0"/>
+              <a:t>improves the accuracy and </a:t>
+            </a:r>
+            <a:r>
+              <a:rPr lang="en-US" sz="2000" dirty="0" err="1" smtClean="0"/>
+              <a:t>explainability</a:t>
+            </a:r>
+            <a:r>
+              <a:rPr lang="en-US" sz="2000" dirty="0" smtClean="0"/>
+              <a:t> of bottleneck localization.</a:t>
+            </a:r>
+          </a:p>
+          <a:p>
+            <a:r>
+              <a:rPr lang="en-US" sz="2000" dirty="0" smtClean="0"/>
+              <a:t>After identifying the PBs by </a:t>
+            </a:r>
+            <a:r>
+              <a:rPr lang="en-US" sz="2000" dirty="0" err="1" smtClean="0"/>
+              <a:t>TopoRank</a:t>
+            </a:r>
+            <a:r>
+              <a:rPr lang="en-US" sz="2000" dirty="0" smtClean="0"/>
+              <a:t>, </a:t>
+            </a:r>
+            <a:r>
+              <a:rPr lang="en-US" sz="2000" dirty="0" err="1" smtClean="0"/>
+              <a:t>PBScaler</a:t>
+            </a:r>
+            <a:r>
+              <a:rPr lang="en-US" sz="2000" dirty="0" smtClean="0"/>
+              <a:t> further </a:t>
+            </a:r>
+            <a:r>
+              <a:rPr lang="en-US" sz="2000" dirty="0" smtClean="0"/>
+              <a:t>employs a </a:t>
+            </a:r>
+            <a:r>
+              <a:rPr lang="en-US" sz="2000" i="1" dirty="0" smtClean="0">
+                <a:solidFill>
+                  <a:srgbClr val="C00000"/>
+                </a:solidFill>
+              </a:rPr>
+              <a:t>genetic algorithm</a:t>
+            </a:r>
+            <a:r>
+              <a:rPr lang="en-US" sz="2000" dirty="0" smtClean="0"/>
+              <a:t> to find nearly </a:t>
+            </a:r>
+            <a:r>
+              <a:rPr lang="en-US" sz="2000" dirty="0" smtClean="0"/>
+              <a:t>optimal strategies.</a:t>
+            </a:r>
+          </a:p>
+          <a:p>
+            <a:r>
+              <a:rPr lang="en-US" sz="2000" dirty="0" smtClean="0"/>
+              <a:t>To </a:t>
+            </a:r>
+            <a:r>
+              <a:rPr lang="en-US" sz="2000" dirty="0" smtClean="0"/>
+              <a:t>avoid application oscillation caused by </a:t>
+            </a:r>
+            <a:r>
+              <a:rPr lang="en-US" sz="2000" dirty="0" smtClean="0"/>
+              <a:t>excessive optimization</a:t>
+            </a:r>
+            <a:r>
+              <a:rPr lang="en-US" sz="2000" dirty="0" smtClean="0"/>
+              <a:t>, the process is </a:t>
+            </a:r>
+            <a:r>
+              <a:rPr lang="en-US" sz="2000" i="1" dirty="0" smtClean="0">
+                <a:solidFill>
+                  <a:srgbClr val="C00000"/>
+                </a:solidFill>
+              </a:rPr>
+              <a:t>conducted offline</a:t>
+            </a:r>
+            <a:r>
+              <a:rPr lang="en-US" sz="2000" dirty="0" smtClean="0"/>
+              <a:t> </a:t>
+            </a:r>
+            <a:r>
+              <a:rPr lang="en-US" sz="2000" dirty="0" smtClean="0"/>
+              <a:t>and is </a:t>
+            </a:r>
+            <a:r>
+              <a:rPr lang="en-US" sz="2000" dirty="0" smtClean="0"/>
+              <a:t>guided by an SLO violation predictor, which </a:t>
+            </a:r>
+            <a:r>
+              <a:rPr lang="en-US" sz="2000" dirty="0" smtClean="0"/>
+              <a:t>simulates the </a:t>
+            </a:r>
+            <a:r>
+              <a:rPr lang="en-US" sz="2000" dirty="0" smtClean="0"/>
+              <a:t>online application and provides feedback to the </a:t>
+            </a:r>
+            <a:r>
+              <a:rPr lang="en-US" sz="2000" dirty="0" smtClean="0"/>
+              <a:t>scaling strategies</a:t>
+            </a:r>
+            <a:r>
+              <a:rPr lang="en-US" sz="2000" dirty="0" smtClean="0"/>
+              <a:t>.</a:t>
+            </a:r>
+            <a:endParaRPr lang="en-US" sz="2000" b="1" dirty="0"/>
+          </a:p>
+        </p:txBody>
+      </p:sp>
+    </p:spTree>
+  </p:cSld>
+  <p:clrMapOvr>
+    <a:masterClrMapping/>
+  </p:clrMapOvr>
+</p:sld>
+</file>
+
+<file path=ppt/slides/slide39.xml><?xml version="1.0" encoding="utf-8"?>
 <p:sld xmlns:a="http://schemas.openxmlformats.org/drawingml/2006/main" xmlns:r="http://schemas.openxmlformats.org/officeDocument/2006/relationships" xmlns:p="http://schemas.openxmlformats.org/presentationml/2006/main">
   <p:cSld>
     <p:spTree>
@@ -9705,547 +9933,6 @@
 </p:sld>
 </file>
 
-<file path=ppt/slides/slide37.xml><?xml version="1.0" encoding="utf-8"?>
-<p:sld xmlns:a="http://schemas.openxmlformats.org/drawingml/2006/main" xmlns:r="http://schemas.openxmlformats.org/officeDocument/2006/relationships" xmlns:p="http://schemas.openxmlformats.org/presentationml/2006/main">
-  <p:cSld>
-    <p:spTree>
-      <p:nvGrpSpPr>
-        <p:cNvPr id="1" name=""/>
-        <p:cNvGrpSpPr/>
-        <p:nvPr/>
-      </p:nvGrpSpPr>
-      <p:grpSpPr>
-        <a:xfrm>
-          <a:off x="0" y="0"/>
-          <a:ext cx="0" cy="0"/>
-          <a:chOff x="0" y="0"/>
-          <a:chExt cx="0" cy="0"/>
-        </a:xfrm>
-      </p:grpSpPr>
-      <p:sp>
-        <p:nvSpPr>
-          <p:cNvPr id="2" name="Title 1"/>
-          <p:cNvSpPr>
-            <a:spLocks noGrp="1"/>
-          </p:cNvSpPr>
-          <p:nvPr>
-            <p:ph type="title"/>
-          </p:nvPr>
-        </p:nvSpPr>
-        <p:spPr/>
-        <p:txBody>
-          <a:bodyPr/>
-          <a:lstStyle/>
-          <a:p>
-            <a:r>
-              <a:rPr lang="en-US" dirty="0" smtClean="0"/>
-              <a:t>SLO Violation Detection</a:t>
-            </a:r>
-            <a:endParaRPr lang="en-US" dirty="0"/>
-          </a:p>
-        </p:txBody>
-      </p:sp>
-      <p:sp>
-        <p:nvSpPr>
-          <p:cNvPr id="3" name="Content Placeholder 2"/>
-          <p:cNvSpPr>
-            <a:spLocks noGrp="1"/>
-          </p:cNvSpPr>
-          <p:nvPr>
-            <p:ph idx="1"/>
-          </p:nvPr>
-        </p:nvSpPr>
-        <p:spPr/>
-        <p:txBody>
-          <a:bodyPr/>
-          <a:lstStyle/>
-          <a:p>
-            <a:r>
-              <a:rPr lang="en-US" sz="2400" dirty="0" err="1" smtClean="0"/>
-              <a:t>PBScaler</a:t>
-            </a:r>
-            <a:r>
-              <a:rPr lang="en-US" sz="2400" dirty="0" smtClean="0"/>
-              <a:t> inspects the P90 tail latency of all invocation edges </a:t>
-            </a:r>
-            <a:r>
-              <a:rPr lang="en-US" sz="2400" dirty="0" smtClean="0"/>
-              <a:t>every </a:t>
-            </a:r>
-            <a:r>
-              <a:rPr lang="en-US" sz="2400" dirty="0" smtClean="0"/>
-              <a:t>15 seconds to timely detect performance degradation</a:t>
-            </a:r>
-            <a:r>
-              <a:rPr lang="en-US" sz="2400" dirty="0" smtClean="0"/>
-              <a:t>.</a:t>
-            </a:r>
-          </a:p>
-          <a:p>
-            <a:r>
-              <a:rPr lang="en-US" sz="2400" dirty="0" smtClean="0"/>
-              <a:t>If the tail latency of an invocation exceeds a predetermined threshold (such as the SLO), the invoked </a:t>
-            </a:r>
-            <a:r>
-              <a:rPr lang="en-US" sz="2400" dirty="0" err="1" smtClean="0"/>
-              <a:t>microservice</a:t>
-            </a:r>
-            <a:r>
-              <a:rPr lang="en-US" sz="2400" dirty="0" smtClean="0"/>
-              <a:t> of the invocation will be added to the set of abnormal </a:t>
-            </a:r>
-            <a:r>
-              <a:rPr lang="en-US" sz="2400" dirty="0" err="1" smtClean="0"/>
-              <a:t>microservices</a:t>
-            </a:r>
-            <a:r>
-              <a:rPr lang="en-US" sz="2400" dirty="0" smtClean="0"/>
-              <a:t>, </a:t>
-            </a:r>
-            <a:r>
-              <a:rPr lang="en-US" sz="2400" dirty="0" smtClean="0"/>
-              <a:t>and the bottleneck localization process will be activated</a:t>
-            </a:r>
-            <a:r>
-              <a:rPr lang="en-US" sz="2400" dirty="0" smtClean="0"/>
-              <a:t>.</a:t>
-            </a:r>
-          </a:p>
-          <a:p>
-            <a:r>
-              <a:rPr lang="en-US" sz="2400" dirty="0" smtClean="0"/>
-              <a:t>To account for occasional noise in the </a:t>
-            </a:r>
-            <a:r>
-              <a:rPr lang="en-US" sz="2400" dirty="0" err="1" smtClean="0"/>
-              <a:t>microservice</a:t>
-            </a:r>
-            <a:r>
-              <a:rPr lang="en-US" sz="2400" dirty="0" smtClean="0"/>
-              <a:t> latency, the threshold is set to </a:t>
-            </a:r>
-            <a:r>
-              <a:rPr lang="en-US" sz="2400" dirty="0" smtClean="0"/>
-              <a:t>SLO × (</a:t>
-            </a:r>
-            <a:r>
-              <a:rPr lang="en-US" sz="2400" dirty="0" smtClean="0"/>
-              <a:t>1 + α/2), where α is used to adjust the tolerance to noise.</a:t>
-            </a:r>
-            <a:endParaRPr lang="en-US" sz="2400" dirty="0"/>
-          </a:p>
-        </p:txBody>
-      </p:sp>
-    </p:spTree>
-  </p:cSld>
-  <p:clrMapOvr>
-    <a:masterClrMapping/>
-  </p:clrMapOvr>
-</p:sld>
-</file>
-
-<file path=ppt/slides/slide38.xml><?xml version="1.0" encoding="utf-8"?>
-<p:sld xmlns:a="http://schemas.openxmlformats.org/drawingml/2006/main" xmlns:r="http://schemas.openxmlformats.org/officeDocument/2006/relationships" xmlns:p="http://schemas.openxmlformats.org/presentationml/2006/main">
-  <p:cSld>
-    <p:spTree>
-      <p:nvGrpSpPr>
-        <p:cNvPr id="1" name=""/>
-        <p:cNvGrpSpPr/>
-        <p:nvPr/>
-      </p:nvGrpSpPr>
-      <p:grpSpPr>
-        <a:xfrm>
-          <a:off x="0" y="0"/>
-          <a:ext cx="0" cy="0"/>
-          <a:chOff x="0" y="0"/>
-          <a:chExt cx="0" cy="0"/>
-        </a:xfrm>
-      </p:grpSpPr>
-      <p:sp>
-        <p:nvSpPr>
-          <p:cNvPr id="2" name="Title 1"/>
-          <p:cNvSpPr>
-            <a:spLocks noGrp="1"/>
-          </p:cNvSpPr>
-          <p:nvPr>
-            <p:ph type="title"/>
-          </p:nvPr>
-        </p:nvSpPr>
-        <p:spPr/>
-        <p:txBody>
-          <a:bodyPr/>
-          <a:lstStyle/>
-          <a:p>
-            <a:r>
-              <a:rPr lang="en-US" dirty="0" smtClean="0"/>
-              <a:t>Redundancy Checking</a:t>
-            </a:r>
-            <a:endParaRPr lang="en-US" dirty="0"/>
-          </a:p>
-        </p:txBody>
-      </p:sp>
-      <p:sp>
-        <p:nvSpPr>
-          <p:cNvPr id="3" name="Content Placeholder 2"/>
-          <p:cNvSpPr>
-            <a:spLocks noGrp="1"/>
-          </p:cNvSpPr>
-          <p:nvPr>
-            <p:ph idx="1"/>
-          </p:nvPr>
-        </p:nvSpPr>
-        <p:spPr/>
-        <p:txBody>
-          <a:bodyPr/>
-          <a:lstStyle/>
-          <a:p>
-            <a:r>
-              <a:rPr lang="en-US" sz="2400" dirty="0" err="1" smtClean="0"/>
-              <a:t>PBScaler</a:t>
-            </a:r>
-            <a:r>
-              <a:rPr lang="en-US" sz="2400" dirty="0" smtClean="0"/>
-              <a:t> </a:t>
-            </a:r>
-            <a:r>
-              <a:rPr lang="en-US" sz="2400" dirty="0" smtClean="0"/>
-              <a:t>uses the </a:t>
-            </a:r>
-            <a:r>
-              <a:rPr lang="en-US" sz="2400" dirty="0" smtClean="0"/>
-              <a:t>rate of workload change per second of </a:t>
-            </a:r>
-            <a:r>
-              <a:rPr lang="en-US" sz="2400" dirty="0" err="1" smtClean="0"/>
-              <a:t>microservices</a:t>
-            </a:r>
-            <a:r>
-              <a:rPr lang="en-US" sz="2400" dirty="0" smtClean="0"/>
-              <a:t> </a:t>
-            </a:r>
-            <a:r>
-              <a:rPr lang="en-US" sz="2400" dirty="0" smtClean="0"/>
-              <a:t>to determine </a:t>
-            </a:r>
-            <a:r>
-              <a:rPr lang="en-US" sz="2400" dirty="0" smtClean="0"/>
-              <a:t>whether resources are redundant</a:t>
-            </a:r>
-            <a:r>
-              <a:rPr lang="en-US" sz="2400" dirty="0" smtClean="0"/>
-              <a:t>.</a:t>
-            </a:r>
-          </a:p>
-          <a:p>
-            <a:r>
-              <a:rPr lang="en-US" sz="2400" dirty="0" smtClean="0"/>
-              <a:t>This </a:t>
-            </a:r>
-            <a:r>
-              <a:rPr lang="en-US" sz="2400" dirty="0" smtClean="0"/>
-              <a:t>strategy </a:t>
-            </a:r>
-            <a:r>
-              <a:rPr lang="en-US" sz="2400" dirty="0" smtClean="0"/>
-              <a:t>is more </a:t>
-            </a:r>
-            <a:r>
-              <a:rPr lang="en-US" sz="2400" dirty="0" smtClean="0"/>
-              <a:t>effective than relying only on resource </a:t>
-            </a:r>
-            <a:r>
-              <a:rPr lang="en-US" sz="2400" dirty="0" smtClean="0"/>
-              <a:t>consumption because </a:t>
-            </a:r>
-            <a:r>
-              <a:rPr lang="en-US" sz="2400" dirty="0" smtClean="0"/>
-              <a:t>different </a:t>
-            </a:r>
-            <a:r>
-              <a:rPr lang="en-US" sz="2400" dirty="0" err="1" smtClean="0"/>
-              <a:t>microservices</a:t>
-            </a:r>
-            <a:r>
-              <a:rPr lang="en-US" sz="2400" dirty="0" smtClean="0"/>
-              <a:t> may have varying </a:t>
-            </a:r>
-            <a:r>
-              <a:rPr lang="en-US" sz="2400" dirty="0" smtClean="0"/>
-              <a:t>sensitivity to </a:t>
-            </a:r>
-            <a:r>
-              <a:rPr lang="en-US" sz="2400" dirty="0" smtClean="0"/>
-              <a:t>heterogeneous resources</a:t>
-            </a:r>
-            <a:r>
-              <a:rPr lang="en-US" sz="2400" dirty="0" smtClean="0"/>
-              <a:t>.</a:t>
-            </a:r>
-          </a:p>
-          <a:p>
-            <a:r>
-              <a:rPr lang="en-US" sz="2400" dirty="0" smtClean="0"/>
-              <a:t>The main idea </a:t>
-            </a:r>
-            <a:r>
-              <a:rPr lang="en-US" sz="2400" dirty="0" smtClean="0"/>
-              <a:t>behind </a:t>
-            </a:r>
-            <a:r>
-              <a:rPr lang="en-US" sz="2400" dirty="0" smtClean="0"/>
-              <a:t>redundancy checking is to employ hypothesis testing </a:t>
-            </a:r>
-            <a:r>
-              <a:rPr lang="en-US" sz="2400" dirty="0" smtClean="0"/>
-              <a:t>to detect </a:t>
-            </a:r>
-            <a:r>
-              <a:rPr lang="en-US" sz="2400" dirty="0" smtClean="0"/>
-              <a:t>whether a </a:t>
-            </a:r>
-            <a:r>
-              <a:rPr lang="en-US" sz="2400" dirty="0" err="1" smtClean="0"/>
-              <a:t>microservice’s</a:t>
-            </a:r>
-            <a:r>
-              <a:rPr lang="en-US" sz="2400" dirty="0" smtClean="0"/>
-              <a:t> current workload </a:t>
-            </a:r>
-            <a:r>
-              <a:rPr lang="en-US" sz="2400" dirty="0" smtClean="0"/>
-              <a:t>is significantly </a:t>
-            </a:r>
-            <a:r>
-              <a:rPr lang="en-US" sz="2400" dirty="0" smtClean="0"/>
-              <a:t>lower than its past </a:t>
-            </a:r>
-            <a:r>
-              <a:rPr lang="en-US" sz="2400" dirty="0" smtClean="0"/>
-              <a:t>workload.</a:t>
-            </a:r>
-          </a:p>
-          <a:p>
-            <a:r>
-              <a:rPr lang="en-US" sz="2400" dirty="0" smtClean="0"/>
-              <a:t>The degree of significance is adjusted by the parameter </a:t>
-            </a:r>
-            <a:r>
-              <a:rPr lang="en-US" sz="2400" dirty="0" smtClean="0"/>
-              <a:t>β.</a:t>
-            </a:r>
-            <a:endParaRPr lang="en-US" sz="2400" dirty="0"/>
-          </a:p>
-        </p:txBody>
-      </p:sp>
-    </p:spTree>
-  </p:cSld>
-  <p:clrMapOvr>
-    <a:masterClrMapping/>
-  </p:clrMapOvr>
-</p:sld>
-</file>
-
-<file path=ppt/slides/slide39.xml><?xml version="1.0" encoding="utf-8"?>
-<p:sld xmlns:a="http://schemas.openxmlformats.org/drawingml/2006/main" xmlns:r="http://schemas.openxmlformats.org/officeDocument/2006/relationships" xmlns:p="http://schemas.openxmlformats.org/presentationml/2006/main">
-  <p:cSld>
-    <p:spTree>
-      <p:nvGrpSpPr>
-        <p:cNvPr id="1" name=""/>
-        <p:cNvGrpSpPr/>
-        <p:nvPr/>
-      </p:nvGrpSpPr>
-      <p:grpSpPr>
-        <a:xfrm>
-          <a:off x="0" y="0"/>
-          <a:ext cx="0" cy="0"/>
-          <a:chOff x="0" y="0"/>
-          <a:chExt cx="0" cy="0"/>
-        </a:xfrm>
-      </p:grpSpPr>
-      <p:sp>
-        <p:nvSpPr>
-          <p:cNvPr id="2" name="Title 1"/>
-          <p:cNvSpPr>
-            <a:spLocks noGrp="1"/>
-          </p:cNvSpPr>
-          <p:nvPr>
-            <p:ph type="title"/>
-          </p:nvPr>
-        </p:nvSpPr>
-        <p:spPr/>
-        <p:txBody>
-          <a:bodyPr/>
-          <a:lstStyle/>
-          <a:p>
-            <a:r>
-              <a:rPr lang="en-US" dirty="0" smtClean="0"/>
-              <a:t>Bottleneck Localization</a:t>
-            </a:r>
-            <a:endParaRPr lang="en-US" dirty="0"/>
-          </a:p>
-        </p:txBody>
-      </p:sp>
-      <p:sp>
-        <p:nvSpPr>
-          <p:cNvPr id="3" name="Content Placeholder 2"/>
-          <p:cNvSpPr>
-            <a:spLocks noGrp="1"/>
-          </p:cNvSpPr>
-          <p:nvPr>
-            <p:ph idx="1"/>
-          </p:nvPr>
-        </p:nvSpPr>
-        <p:spPr/>
-        <p:txBody>
-          <a:bodyPr/>
-          <a:lstStyle/>
-          <a:p>
-            <a:r>
-              <a:rPr lang="en-US" sz="2400" dirty="0" err="1" smtClean="0"/>
-              <a:t>PBScaler</a:t>
-            </a:r>
-            <a:r>
-              <a:rPr lang="en-US" sz="2400" dirty="0" smtClean="0"/>
-              <a:t> </a:t>
-            </a:r>
-            <a:r>
-              <a:rPr lang="en-US" sz="2400" dirty="0" smtClean="0"/>
-              <a:t>uses the </a:t>
-            </a:r>
-            <a:r>
-              <a:rPr lang="en-US" sz="2400" dirty="0" smtClean="0"/>
-              <a:t>rate of workload change per second of </a:t>
-            </a:r>
-            <a:r>
-              <a:rPr lang="en-US" sz="2400" dirty="0" err="1" smtClean="0"/>
-              <a:t>microservices</a:t>
-            </a:r>
-            <a:r>
-              <a:rPr lang="en-US" sz="2400" dirty="0" smtClean="0"/>
-              <a:t> </a:t>
-            </a:r>
-            <a:r>
-              <a:rPr lang="en-US" sz="2400" dirty="0" smtClean="0"/>
-              <a:t>to determine </a:t>
-            </a:r>
-            <a:r>
-              <a:rPr lang="en-US" sz="2400" dirty="0" smtClean="0"/>
-              <a:t>whether resources are redundant</a:t>
-            </a:r>
-            <a:r>
-              <a:rPr lang="en-US" sz="2400" dirty="0" smtClean="0"/>
-              <a:t>.</a:t>
-            </a:r>
-          </a:p>
-          <a:p>
-            <a:r>
-              <a:rPr lang="en-US" sz="2400" dirty="0" smtClean="0"/>
-              <a:t>This </a:t>
-            </a:r>
-            <a:r>
-              <a:rPr lang="en-US" sz="2400" dirty="0" smtClean="0"/>
-              <a:t>strategy </a:t>
-            </a:r>
-            <a:r>
-              <a:rPr lang="en-US" sz="2400" dirty="0" smtClean="0"/>
-              <a:t>is more </a:t>
-            </a:r>
-            <a:r>
-              <a:rPr lang="en-US" sz="2400" dirty="0" smtClean="0"/>
-              <a:t>effective than relying only on resource </a:t>
-            </a:r>
-            <a:r>
-              <a:rPr lang="en-US" sz="2400" dirty="0" smtClean="0"/>
-              <a:t>consumption because </a:t>
-            </a:r>
-            <a:r>
-              <a:rPr lang="en-US" sz="2400" dirty="0" smtClean="0"/>
-              <a:t>different </a:t>
-            </a:r>
-            <a:r>
-              <a:rPr lang="en-US" sz="2400" dirty="0" err="1" smtClean="0"/>
-              <a:t>microservices</a:t>
-            </a:r>
-            <a:r>
-              <a:rPr lang="en-US" sz="2400" dirty="0" smtClean="0"/>
-              <a:t> may have varying </a:t>
-            </a:r>
-            <a:r>
-              <a:rPr lang="en-US" sz="2400" dirty="0" smtClean="0"/>
-              <a:t>sensitivity to </a:t>
-            </a:r>
-            <a:r>
-              <a:rPr lang="en-US" sz="2400" dirty="0" smtClean="0"/>
-              <a:t>heterogeneous resources</a:t>
-            </a:r>
-            <a:r>
-              <a:rPr lang="en-US" sz="2400" dirty="0" smtClean="0"/>
-              <a:t>.</a:t>
-            </a:r>
-          </a:p>
-          <a:p>
-            <a:r>
-              <a:rPr lang="en-US" sz="2400" dirty="0" smtClean="0"/>
-              <a:t>The main idea </a:t>
-            </a:r>
-            <a:r>
-              <a:rPr lang="en-US" sz="2400" dirty="0" smtClean="0"/>
-              <a:t>behind </a:t>
-            </a:r>
-            <a:r>
-              <a:rPr lang="en-US" sz="2400" dirty="0" smtClean="0"/>
-              <a:t>redundancy checking is to employ hypothesis testing </a:t>
-            </a:r>
-            <a:r>
-              <a:rPr lang="en-US" sz="2400" dirty="0" smtClean="0"/>
-              <a:t>to detect </a:t>
-            </a:r>
-            <a:r>
-              <a:rPr lang="en-US" sz="2400" dirty="0" smtClean="0"/>
-              <a:t>whether a </a:t>
-            </a:r>
-            <a:r>
-              <a:rPr lang="en-US" sz="2400" dirty="0" err="1" smtClean="0"/>
-              <a:t>microservice’s</a:t>
-            </a:r>
-            <a:r>
-              <a:rPr lang="en-US" sz="2400" dirty="0" smtClean="0"/>
-              <a:t> current workload </a:t>
-            </a:r>
-            <a:r>
-              <a:rPr lang="en-US" sz="2400" dirty="0" smtClean="0"/>
-              <a:t>is significantly </a:t>
-            </a:r>
-            <a:r>
-              <a:rPr lang="en-US" sz="2400" dirty="0" smtClean="0"/>
-              <a:t>lower than its past </a:t>
-            </a:r>
-            <a:r>
-              <a:rPr lang="en-US" sz="2400" dirty="0" smtClean="0"/>
-              <a:t>workload.</a:t>
-            </a:r>
-          </a:p>
-          <a:p>
-            <a:r>
-              <a:rPr lang="en-US" sz="2400" dirty="0" smtClean="0"/>
-              <a:t>The degree of significance is adjusted by the parameter </a:t>
-            </a:r>
-            <a:r>
-              <a:rPr lang="en-US" sz="2400" dirty="0" smtClean="0"/>
-              <a:t>β.</a:t>
-            </a:r>
-            <a:endParaRPr lang="en-US" sz="2400" dirty="0"/>
-          </a:p>
-        </p:txBody>
-      </p:sp>
-    </p:spTree>
-  </p:cSld>
-  <p:clrMapOvr>
-    <a:masterClrMapping/>
-  </p:clrMapOvr>
-</p:sld>
-</file>
-
 <file path=ppt/slides/slide4.xml><?xml version="1.0" encoding="utf-8"?>
 <p:sld xmlns:a="http://schemas.openxmlformats.org/drawingml/2006/main" xmlns:r="http://schemas.openxmlformats.org/officeDocument/2006/relationships" xmlns:p="http://schemas.openxmlformats.org/presentationml/2006/main">
   <p:cSld>
@@ -10380,6 +10067,579 @@
 </file>
 
 <file path=ppt/slides/slide40.xml><?xml version="1.0" encoding="utf-8"?>
+<p:sld xmlns:a="http://schemas.openxmlformats.org/drawingml/2006/main" xmlns:r="http://schemas.openxmlformats.org/officeDocument/2006/relationships" xmlns:p="http://schemas.openxmlformats.org/presentationml/2006/main">
+  <p:cSld>
+    <p:spTree>
+      <p:nvGrpSpPr>
+        <p:cNvPr id="1" name=""/>
+        <p:cNvGrpSpPr/>
+        <p:nvPr/>
+      </p:nvGrpSpPr>
+      <p:grpSpPr>
+        <a:xfrm>
+          <a:off x="0" y="0"/>
+          <a:ext cx="0" cy="0"/>
+          <a:chOff x="0" y="0"/>
+          <a:chExt cx="0" cy="0"/>
+        </a:xfrm>
+      </p:grpSpPr>
+      <p:sp>
+        <p:nvSpPr>
+          <p:cNvPr id="2" name="Title 1"/>
+          <p:cNvSpPr>
+            <a:spLocks noGrp="1"/>
+          </p:cNvSpPr>
+          <p:nvPr>
+            <p:ph type="title"/>
+          </p:nvPr>
+        </p:nvSpPr>
+        <p:spPr/>
+        <p:txBody>
+          <a:bodyPr/>
+          <a:lstStyle/>
+          <a:p>
+            <a:r>
+              <a:rPr lang="en-US" dirty="0" smtClean="0"/>
+              <a:t>SLO Violation Detection</a:t>
+            </a:r>
+            <a:endParaRPr lang="en-US" dirty="0"/>
+          </a:p>
+        </p:txBody>
+      </p:sp>
+      <p:sp>
+        <p:nvSpPr>
+          <p:cNvPr id="3" name="Content Placeholder 2"/>
+          <p:cNvSpPr>
+            <a:spLocks noGrp="1"/>
+          </p:cNvSpPr>
+          <p:nvPr>
+            <p:ph idx="1"/>
+          </p:nvPr>
+        </p:nvSpPr>
+        <p:spPr/>
+        <p:txBody>
+          <a:bodyPr/>
+          <a:lstStyle/>
+          <a:p>
+            <a:r>
+              <a:rPr lang="en-US" sz="2400" dirty="0" err="1" smtClean="0"/>
+              <a:t>PBScaler</a:t>
+            </a:r>
+            <a:r>
+              <a:rPr lang="en-US" sz="2400" dirty="0" smtClean="0"/>
+              <a:t> inspects the P90 tail latency of all invocation edges </a:t>
+            </a:r>
+            <a:r>
+              <a:rPr lang="en-US" sz="2400" dirty="0" smtClean="0"/>
+              <a:t>every </a:t>
+            </a:r>
+            <a:r>
+              <a:rPr lang="en-US" sz="2400" dirty="0" smtClean="0"/>
+              <a:t>15 seconds to timely detect performance degradation</a:t>
+            </a:r>
+            <a:r>
+              <a:rPr lang="en-US" sz="2400" dirty="0" smtClean="0"/>
+              <a:t>.</a:t>
+            </a:r>
+          </a:p>
+          <a:p>
+            <a:r>
+              <a:rPr lang="en-US" sz="2400" dirty="0" smtClean="0"/>
+              <a:t>If the tail latency of an invocation exceeds a predetermined threshold (such as the SLO), the invoked </a:t>
+            </a:r>
+            <a:r>
+              <a:rPr lang="en-US" sz="2400" dirty="0" err="1" smtClean="0"/>
+              <a:t>microservice</a:t>
+            </a:r>
+            <a:r>
+              <a:rPr lang="en-US" sz="2400" dirty="0" smtClean="0"/>
+              <a:t> of the invocation will be added to the set of abnormal </a:t>
+            </a:r>
+            <a:r>
+              <a:rPr lang="en-US" sz="2400" dirty="0" err="1" smtClean="0"/>
+              <a:t>microservices</a:t>
+            </a:r>
+            <a:r>
+              <a:rPr lang="en-US" sz="2400" dirty="0" smtClean="0"/>
+              <a:t>, </a:t>
+            </a:r>
+            <a:r>
+              <a:rPr lang="en-US" sz="2400" dirty="0" smtClean="0"/>
+              <a:t>and the bottleneck localization process will be activated</a:t>
+            </a:r>
+            <a:r>
+              <a:rPr lang="en-US" sz="2400" dirty="0" smtClean="0"/>
+              <a:t>.</a:t>
+            </a:r>
+          </a:p>
+          <a:p>
+            <a:r>
+              <a:rPr lang="en-US" sz="2400" dirty="0" smtClean="0"/>
+              <a:t>To account for occasional noise in the </a:t>
+            </a:r>
+            <a:r>
+              <a:rPr lang="en-US" sz="2400" dirty="0" err="1" smtClean="0"/>
+              <a:t>microservice</a:t>
+            </a:r>
+            <a:r>
+              <a:rPr lang="en-US" sz="2400" dirty="0" smtClean="0"/>
+              <a:t> latency, the threshold is set to </a:t>
+            </a:r>
+            <a:r>
+              <a:rPr lang="en-US" sz="2400" dirty="0" smtClean="0"/>
+              <a:t>SLO × (</a:t>
+            </a:r>
+            <a:r>
+              <a:rPr lang="en-US" sz="2400" dirty="0" smtClean="0"/>
+              <a:t>1 + α/2), where α is used to adjust the tolerance to noise.</a:t>
+            </a:r>
+            <a:endParaRPr lang="en-US" sz="2400" dirty="0"/>
+          </a:p>
+        </p:txBody>
+      </p:sp>
+    </p:spTree>
+  </p:cSld>
+  <p:clrMapOvr>
+    <a:masterClrMapping/>
+  </p:clrMapOvr>
+</p:sld>
+</file>
+
+<file path=ppt/slides/slide41.xml><?xml version="1.0" encoding="utf-8"?>
+<p:sld xmlns:a="http://schemas.openxmlformats.org/drawingml/2006/main" xmlns:r="http://schemas.openxmlformats.org/officeDocument/2006/relationships" xmlns:p="http://schemas.openxmlformats.org/presentationml/2006/main">
+  <p:cSld>
+    <p:spTree>
+      <p:nvGrpSpPr>
+        <p:cNvPr id="1" name=""/>
+        <p:cNvGrpSpPr/>
+        <p:nvPr/>
+      </p:nvGrpSpPr>
+      <p:grpSpPr>
+        <a:xfrm>
+          <a:off x="0" y="0"/>
+          <a:ext cx="0" cy="0"/>
+          <a:chOff x="0" y="0"/>
+          <a:chExt cx="0" cy="0"/>
+        </a:xfrm>
+      </p:grpSpPr>
+      <p:sp>
+        <p:nvSpPr>
+          <p:cNvPr id="2" name="Title 1"/>
+          <p:cNvSpPr>
+            <a:spLocks noGrp="1"/>
+          </p:cNvSpPr>
+          <p:nvPr>
+            <p:ph type="title"/>
+          </p:nvPr>
+        </p:nvSpPr>
+        <p:spPr/>
+        <p:txBody>
+          <a:bodyPr/>
+          <a:lstStyle/>
+          <a:p>
+            <a:r>
+              <a:rPr lang="en-US" dirty="0" smtClean="0"/>
+              <a:t>Redundancy Checking</a:t>
+            </a:r>
+            <a:endParaRPr lang="en-US" dirty="0"/>
+          </a:p>
+        </p:txBody>
+      </p:sp>
+      <p:sp>
+        <p:nvSpPr>
+          <p:cNvPr id="3" name="Content Placeholder 2"/>
+          <p:cNvSpPr>
+            <a:spLocks noGrp="1"/>
+          </p:cNvSpPr>
+          <p:nvPr>
+            <p:ph idx="1"/>
+          </p:nvPr>
+        </p:nvSpPr>
+        <p:spPr/>
+        <p:txBody>
+          <a:bodyPr/>
+          <a:lstStyle/>
+          <a:p>
+            <a:r>
+              <a:rPr lang="en-US" sz="2400" dirty="0" err="1" smtClean="0"/>
+              <a:t>PBScaler</a:t>
+            </a:r>
+            <a:r>
+              <a:rPr lang="en-US" sz="2400" dirty="0" smtClean="0"/>
+              <a:t> </a:t>
+            </a:r>
+            <a:r>
+              <a:rPr lang="en-US" sz="2400" dirty="0" smtClean="0"/>
+              <a:t>uses the </a:t>
+            </a:r>
+            <a:r>
+              <a:rPr lang="en-US" sz="2400" dirty="0" smtClean="0"/>
+              <a:t>rate of workload change per second of </a:t>
+            </a:r>
+            <a:r>
+              <a:rPr lang="en-US" sz="2400" dirty="0" err="1" smtClean="0"/>
+              <a:t>microservices</a:t>
+            </a:r>
+            <a:r>
+              <a:rPr lang="en-US" sz="2400" dirty="0" smtClean="0"/>
+              <a:t> </a:t>
+            </a:r>
+            <a:r>
+              <a:rPr lang="en-US" sz="2400" dirty="0" smtClean="0"/>
+              <a:t>to determine </a:t>
+            </a:r>
+            <a:r>
+              <a:rPr lang="en-US" sz="2400" dirty="0" smtClean="0"/>
+              <a:t>whether resources are redundant</a:t>
+            </a:r>
+            <a:r>
+              <a:rPr lang="en-US" sz="2400" dirty="0" smtClean="0"/>
+              <a:t>.</a:t>
+            </a:r>
+          </a:p>
+          <a:p>
+            <a:r>
+              <a:rPr lang="en-US" sz="2400" dirty="0" smtClean="0"/>
+              <a:t>This </a:t>
+            </a:r>
+            <a:r>
+              <a:rPr lang="en-US" sz="2400" dirty="0" smtClean="0"/>
+              <a:t>strategy </a:t>
+            </a:r>
+            <a:r>
+              <a:rPr lang="en-US" sz="2400" dirty="0" smtClean="0"/>
+              <a:t>is more </a:t>
+            </a:r>
+            <a:r>
+              <a:rPr lang="en-US" sz="2400" dirty="0" smtClean="0"/>
+              <a:t>effective than relying only on resource </a:t>
+            </a:r>
+            <a:r>
+              <a:rPr lang="en-US" sz="2400" dirty="0" smtClean="0"/>
+              <a:t>consumption because </a:t>
+            </a:r>
+            <a:r>
+              <a:rPr lang="en-US" sz="2400" dirty="0" smtClean="0"/>
+              <a:t>different </a:t>
+            </a:r>
+            <a:r>
+              <a:rPr lang="en-US" sz="2400" dirty="0" err="1" smtClean="0"/>
+              <a:t>microservices</a:t>
+            </a:r>
+            <a:r>
+              <a:rPr lang="en-US" sz="2400" dirty="0" smtClean="0"/>
+              <a:t> may have varying </a:t>
+            </a:r>
+            <a:r>
+              <a:rPr lang="en-US" sz="2400" dirty="0" smtClean="0"/>
+              <a:t>sensitivity to </a:t>
+            </a:r>
+            <a:r>
+              <a:rPr lang="en-US" sz="2400" dirty="0" smtClean="0"/>
+              <a:t>heterogeneous resources</a:t>
+            </a:r>
+            <a:r>
+              <a:rPr lang="en-US" sz="2400" dirty="0" smtClean="0"/>
+              <a:t>.</a:t>
+            </a:r>
+          </a:p>
+          <a:p>
+            <a:r>
+              <a:rPr lang="en-US" sz="2400" dirty="0" smtClean="0"/>
+              <a:t>The main idea </a:t>
+            </a:r>
+            <a:r>
+              <a:rPr lang="en-US" sz="2400" dirty="0" smtClean="0"/>
+              <a:t>behind </a:t>
+            </a:r>
+            <a:r>
+              <a:rPr lang="en-US" sz="2400" dirty="0" smtClean="0"/>
+              <a:t>redundancy checking is to employ hypothesis testing </a:t>
+            </a:r>
+            <a:r>
+              <a:rPr lang="en-US" sz="2400" dirty="0" smtClean="0"/>
+              <a:t>to detect </a:t>
+            </a:r>
+            <a:r>
+              <a:rPr lang="en-US" sz="2400" dirty="0" smtClean="0"/>
+              <a:t>whether a </a:t>
+            </a:r>
+            <a:r>
+              <a:rPr lang="en-US" sz="2400" dirty="0" err="1" smtClean="0"/>
+              <a:t>microservice’s</a:t>
+            </a:r>
+            <a:r>
+              <a:rPr lang="en-US" sz="2400" dirty="0" smtClean="0"/>
+              <a:t> current workload </a:t>
+            </a:r>
+            <a:r>
+              <a:rPr lang="en-US" sz="2400" dirty="0" smtClean="0"/>
+              <a:t>is significantly </a:t>
+            </a:r>
+            <a:r>
+              <a:rPr lang="en-US" sz="2400" dirty="0" smtClean="0"/>
+              <a:t>lower than its past </a:t>
+            </a:r>
+            <a:r>
+              <a:rPr lang="en-US" sz="2400" dirty="0" smtClean="0"/>
+              <a:t>workload.</a:t>
+            </a:r>
+          </a:p>
+          <a:p>
+            <a:r>
+              <a:rPr lang="en-US" sz="2400" dirty="0" smtClean="0"/>
+              <a:t>The degree of significance is adjusted by the parameter </a:t>
+            </a:r>
+            <a:r>
+              <a:rPr lang="en-US" sz="2400" dirty="0" smtClean="0"/>
+              <a:t>β.</a:t>
+            </a:r>
+            <a:endParaRPr lang="en-US" sz="2400" dirty="0"/>
+          </a:p>
+        </p:txBody>
+      </p:sp>
+    </p:spTree>
+  </p:cSld>
+  <p:clrMapOvr>
+    <a:masterClrMapping/>
+  </p:clrMapOvr>
+</p:sld>
+</file>
+
+<file path=ppt/slides/slide42.xml><?xml version="1.0" encoding="utf-8"?>
+<p:sld xmlns:a="http://schemas.openxmlformats.org/drawingml/2006/main" xmlns:r="http://schemas.openxmlformats.org/officeDocument/2006/relationships" xmlns:p="http://schemas.openxmlformats.org/presentationml/2006/main">
+  <p:cSld>
+    <p:spTree>
+      <p:nvGrpSpPr>
+        <p:cNvPr id="1" name=""/>
+        <p:cNvGrpSpPr/>
+        <p:nvPr/>
+      </p:nvGrpSpPr>
+      <p:grpSpPr>
+        <a:xfrm>
+          <a:off x="0" y="0"/>
+          <a:ext cx="0" cy="0"/>
+          <a:chOff x="0" y="0"/>
+          <a:chExt cx="0" cy="0"/>
+        </a:xfrm>
+      </p:grpSpPr>
+      <p:sp>
+        <p:nvSpPr>
+          <p:cNvPr id="2" name="Title 1"/>
+          <p:cNvSpPr>
+            <a:spLocks noGrp="1"/>
+          </p:cNvSpPr>
+          <p:nvPr>
+            <p:ph type="title"/>
+          </p:nvPr>
+        </p:nvSpPr>
+        <p:spPr/>
+        <p:txBody>
+          <a:bodyPr/>
+          <a:lstStyle/>
+          <a:p>
+            <a:r>
+              <a:rPr lang="en-US" dirty="0" smtClean="0"/>
+              <a:t>Bottleneck Localization</a:t>
+            </a:r>
+            <a:endParaRPr lang="en-US" dirty="0"/>
+          </a:p>
+        </p:txBody>
+      </p:sp>
+      <p:sp>
+        <p:nvSpPr>
+          <p:cNvPr id="3" name="Content Placeholder 2"/>
+          <p:cNvSpPr>
+            <a:spLocks noGrp="1"/>
+          </p:cNvSpPr>
+          <p:nvPr>
+            <p:ph idx="1"/>
+          </p:nvPr>
+        </p:nvSpPr>
+        <p:spPr/>
+        <p:txBody>
+          <a:bodyPr/>
+          <a:lstStyle/>
+          <a:p>
+            <a:r>
+              <a:rPr lang="en-US" sz="2200" dirty="0" smtClean="0"/>
+              <a:t>Only </a:t>
+            </a:r>
+            <a:r>
+              <a:rPr lang="en-US" sz="2200" dirty="0" smtClean="0"/>
+              <a:t>the bottleneck </a:t>
+            </a:r>
+            <a:r>
+              <a:rPr lang="en-US" sz="2200" dirty="0" err="1" smtClean="0"/>
+              <a:t>microservice</a:t>
+            </a:r>
+            <a:r>
+              <a:rPr lang="en-US" sz="2200" dirty="0" smtClean="0"/>
+              <a:t> </a:t>
+            </a:r>
+            <a:r>
+              <a:rPr lang="en-US" sz="2200" dirty="0" smtClean="0"/>
+              <a:t>must be </a:t>
+            </a:r>
+            <a:r>
+              <a:rPr lang="en-US" sz="2200" dirty="0" smtClean="0"/>
+              <a:t>scaled up while the other abnormal </a:t>
+            </a:r>
+            <a:r>
+              <a:rPr lang="en-US" sz="2200" dirty="0" err="1" smtClean="0"/>
+              <a:t>microservices</a:t>
+            </a:r>
+            <a:r>
+              <a:rPr lang="en-US" sz="2200" dirty="0" smtClean="0"/>
+              <a:t> </a:t>
+            </a:r>
+            <a:r>
+              <a:rPr lang="en-US" sz="2200" dirty="0" smtClean="0"/>
+              <a:t>are merely implicated.</a:t>
+            </a:r>
+          </a:p>
+          <a:p>
+            <a:r>
+              <a:rPr lang="en-US" sz="2200" dirty="0" smtClean="0"/>
+              <a:t>To </a:t>
+            </a:r>
+            <a:r>
+              <a:rPr lang="en-US" sz="2200" dirty="0" smtClean="0"/>
+              <a:t>pinpoint the bottleneck </a:t>
+            </a:r>
+            <a:r>
+              <a:rPr lang="en-US" sz="2200" dirty="0" err="1" smtClean="0"/>
+              <a:t>microservice</a:t>
+            </a:r>
+            <a:r>
+              <a:rPr lang="en-US" sz="2200" dirty="0" smtClean="0"/>
+              <a:t>, we </a:t>
+            </a:r>
+            <a:r>
+              <a:rPr lang="en-US" sz="2200" dirty="0" smtClean="0"/>
+              <a:t>introduce the concept of anomaly potential, which </a:t>
+            </a:r>
+            <a:r>
+              <a:rPr lang="en-US" sz="2200" dirty="0" smtClean="0"/>
+              <a:t>aggregates the </a:t>
+            </a:r>
+            <a:r>
+              <a:rPr lang="en-US" sz="2200" dirty="0" smtClean="0"/>
+              <a:t>anomaly impact of all </a:t>
+            </a:r>
+            <a:r>
+              <a:rPr lang="en-US" sz="2200" dirty="0" err="1" smtClean="0"/>
+              <a:t>microservices</a:t>
+            </a:r>
+            <a:r>
+              <a:rPr lang="en-US" sz="2200" dirty="0" smtClean="0"/>
+              <a:t> in a </a:t>
+            </a:r>
+            <a:r>
+              <a:rPr lang="en-US" sz="2200" dirty="0" smtClean="0"/>
+              <a:t>given position.</a:t>
+            </a:r>
+          </a:p>
+          <a:p>
+            <a:r>
+              <a:rPr lang="en-US" sz="2200" dirty="0" smtClean="0"/>
+              <a:t>Based on the </a:t>
+            </a:r>
+            <a:r>
+              <a:rPr lang="en-US" sz="2200" dirty="0" smtClean="0"/>
+              <a:t>anomaly potential</a:t>
+            </a:r>
+            <a:r>
+              <a:rPr lang="en-US" sz="2200" dirty="0" smtClean="0"/>
+              <a:t>, we model the backtracking of anomalies in </a:t>
+            </a:r>
+            <a:r>
+              <a:rPr lang="en-US" sz="2200" dirty="0" err="1" smtClean="0"/>
+              <a:t>microservice</a:t>
+            </a:r>
+            <a:r>
+              <a:rPr lang="en-US" sz="2200" dirty="0" smtClean="0"/>
+              <a:t> applications </a:t>
+            </a:r>
+            <a:r>
+              <a:rPr lang="en-US" sz="2200" dirty="0" smtClean="0"/>
+              <a:t>as a random walk on a </a:t>
+            </a:r>
+            <a:r>
+              <a:rPr lang="en-US" sz="2200" dirty="0" smtClean="0"/>
+              <a:t>directed graph.</a:t>
+            </a:r>
+          </a:p>
+          <a:p>
+            <a:r>
+              <a:rPr lang="en-US" sz="2200" dirty="0" smtClean="0"/>
+              <a:t>Therefore, </a:t>
+            </a:r>
+            <a:r>
+              <a:rPr lang="en-US" sz="2200" dirty="0" smtClean="0"/>
+              <a:t>we </a:t>
+            </a:r>
+            <a:r>
+              <a:rPr lang="en-US" sz="2200" dirty="0" smtClean="0"/>
+              <a:t>design a novel bottleneck </a:t>
+            </a:r>
+            <a:r>
+              <a:rPr lang="en-US" sz="2200" dirty="0" smtClean="0"/>
+              <a:t>localization algorithm</a:t>
+            </a:r>
+            <a:r>
+              <a:rPr lang="en-US" sz="2200" dirty="0" smtClean="0"/>
+              <a:t>, </a:t>
+            </a:r>
+            <a:r>
+              <a:rPr lang="en-US" sz="2200" dirty="0" err="1" smtClean="0"/>
+              <a:t>TopoRank</a:t>
+            </a:r>
+            <a:r>
+              <a:rPr lang="en-US" sz="2200" dirty="0" smtClean="0"/>
+              <a:t>, which introduces the topological </a:t>
+            </a:r>
+            <a:r>
+              <a:rPr lang="en-US" sz="2200" dirty="0" smtClean="0"/>
+              <a:t>potential theory </a:t>
+            </a:r>
+            <a:r>
+              <a:rPr lang="en-US" sz="2200" dirty="0" smtClean="0"/>
+              <a:t>(TPT) in random walks to calculate the </a:t>
+            </a:r>
+            <a:r>
+              <a:rPr lang="en-US" sz="2200" dirty="0" smtClean="0"/>
+              <a:t>scores for </a:t>
+            </a:r>
+            <a:r>
+              <a:rPr lang="en-US" sz="2200" dirty="0" smtClean="0"/>
+              <a:t>all abnormal </a:t>
+            </a:r>
+            <a:r>
+              <a:rPr lang="en-US" sz="2200" dirty="0" err="1" smtClean="0"/>
+              <a:t>microservices</a:t>
+            </a:r>
+            <a:r>
+              <a:rPr lang="en-US" sz="2200" dirty="0" smtClean="0"/>
+              <a:t> and finally outputs a </a:t>
+            </a:r>
+            <a:r>
+              <a:rPr lang="en-US" sz="2200" dirty="0" smtClean="0"/>
+              <a:t>ranking list.</a:t>
+            </a:r>
+            <a:endParaRPr lang="en-US" sz="2200" dirty="0"/>
+          </a:p>
+        </p:txBody>
+      </p:sp>
+    </p:spTree>
+  </p:cSld>
+  <p:clrMapOvr>
+    <a:masterClrMapping/>
+  </p:clrMapOvr>
+</p:sld>
+</file>
+
+<file path=ppt/slides/slide43.xml><?xml version="1.0" encoding="utf-8"?>
 <p:sld xmlns:a="http://schemas.openxmlformats.org/drawingml/2006/main" xmlns:r="http://schemas.openxmlformats.org/officeDocument/2006/relationships" xmlns:p="http://schemas.openxmlformats.org/presentationml/2006/main">
   <p:cSld>
     <p:spTree>

--- a/Microservices/07.3. Autoscaling.pptx
+++ b/Microservices/07.3. Autoscaling.pptx
@@ -5,52 +5,57 @@
     <p:sldMasterId id="2147483708" r:id="rId1"/>
   </p:sldMasterIdLst>
   <p:notesMasterIdLst>
-    <p:notesMasterId r:id="rId45"/>
+    <p:notesMasterId r:id="rId50"/>
   </p:notesMasterIdLst>
   <p:sldIdLst>
-    <p:sldId id="561" r:id="rId2"/>
-    <p:sldId id="517" r:id="rId3"/>
-    <p:sldId id="654" r:id="rId4"/>
-    <p:sldId id="655" r:id="rId5"/>
-    <p:sldId id="599" r:id="rId6"/>
-    <p:sldId id="600" r:id="rId7"/>
-    <p:sldId id="652" r:id="rId8"/>
-    <p:sldId id="653" r:id="rId9"/>
-    <p:sldId id="629" r:id="rId10"/>
-    <p:sldId id="582" r:id="rId11"/>
-    <p:sldId id="583" r:id="rId12"/>
-    <p:sldId id="584" r:id="rId13"/>
-    <p:sldId id="585" r:id="rId14"/>
-    <p:sldId id="586" r:id="rId15"/>
-    <p:sldId id="587" r:id="rId16"/>
-    <p:sldId id="588" r:id="rId17"/>
-    <p:sldId id="638" r:id="rId18"/>
-    <p:sldId id="631" r:id="rId19"/>
-    <p:sldId id="597" r:id="rId20"/>
-    <p:sldId id="637" r:id="rId21"/>
-    <p:sldId id="640" r:id="rId22"/>
-    <p:sldId id="641" r:id="rId23"/>
-    <p:sldId id="642" r:id="rId24"/>
-    <p:sldId id="643" r:id="rId25"/>
-    <p:sldId id="644" r:id="rId26"/>
-    <p:sldId id="647" r:id="rId27"/>
-    <p:sldId id="645" r:id="rId28"/>
-    <p:sldId id="646" r:id="rId29"/>
-    <p:sldId id="656" r:id="rId30"/>
-    <p:sldId id="657" r:id="rId31"/>
-    <p:sldId id="658" r:id="rId32"/>
-    <p:sldId id="666" r:id="rId33"/>
-    <p:sldId id="659" r:id="rId34"/>
-    <p:sldId id="667" r:id="rId35"/>
-    <p:sldId id="668" r:id="rId36"/>
-    <p:sldId id="669" r:id="rId37"/>
-    <p:sldId id="670" r:id="rId38"/>
-    <p:sldId id="660" r:id="rId39"/>
-    <p:sldId id="661" r:id="rId40"/>
-    <p:sldId id="662" r:id="rId41"/>
-    <p:sldId id="664" r:id="rId42"/>
-    <p:sldId id="665" r:id="rId43"/>
-    <p:sldId id="516" r:id="rId44"/>
+    <p:sldId id="671" r:id="rId2"/>
+    <p:sldId id="672" r:id="rId3"/>
+    <p:sldId id="673" r:id="rId4"/>
+    <p:sldId id="674" r:id="rId5"/>
+    <p:sldId id="654" r:id="rId6"/>
+    <p:sldId id="655" r:id="rId7"/>
+    <p:sldId id="599" r:id="rId8"/>
+    <p:sldId id="600" r:id="rId9"/>
+    <p:sldId id="652" r:id="rId10"/>
+    <p:sldId id="653" r:id="rId11"/>
+    <p:sldId id="629" r:id="rId12"/>
+    <p:sldId id="582" r:id="rId13"/>
+    <p:sldId id="583" r:id="rId14"/>
+    <p:sldId id="584" r:id="rId15"/>
+    <p:sldId id="585" r:id="rId16"/>
+    <p:sldId id="586" r:id="rId17"/>
+    <p:sldId id="587" r:id="rId18"/>
+    <p:sldId id="588" r:id="rId19"/>
+    <p:sldId id="638" r:id="rId20"/>
+    <p:sldId id="631" r:id="rId21"/>
+    <p:sldId id="597" r:id="rId22"/>
+    <p:sldId id="637" r:id="rId23"/>
+    <p:sldId id="640" r:id="rId24"/>
+    <p:sldId id="641" r:id="rId25"/>
+    <p:sldId id="642" r:id="rId26"/>
+    <p:sldId id="643" r:id="rId27"/>
+    <p:sldId id="644" r:id="rId28"/>
+    <p:sldId id="647" r:id="rId29"/>
+    <p:sldId id="645" r:id="rId30"/>
+    <p:sldId id="646" r:id="rId31"/>
+    <p:sldId id="656" r:id="rId32"/>
+    <p:sldId id="657" r:id="rId33"/>
+    <p:sldId id="658" r:id="rId34"/>
+    <p:sldId id="666" r:id="rId35"/>
+    <p:sldId id="659" r:id="rId36"/>
+    <p:sldId id="667" r:id="rId37"/>
+    <p:sldId id="668" r:id="rId38"/>
+    <p:sldId id="669" r:id="rId39"/>
+    <p:sldId id="670" r:id="rId40"/>
+    <p:sldId id="660" r:id="rId41"/>
+    <p:sldId id="661" r:id="rId42"/>
+    <p:sldId id="662" r:id="rId43"/>
+    <p:sldId id="664" r:id="rId44"/>
+    <p:sldId id="665" r:id="rId45"/>
+    <p:sldId id="675" r:id="rId46"/>
+    <p:sldId id="676" r:id="rId47"/>
+    <p:sldId id="677" r:id="rId48"/>
+    <p:sldId id="516" r:id="rId49"/>
   </p:sldIdLst>
   <p:sldSz cx="9144000" cy="6858000" type="screen4x3"/>
   <p:notesSz cx="6858000" cy="9144000"/>
@@ -265,7 +270,7 @@
             <a:fld id="{2F0940CE-BE1D-4C40-AF8B-3898A4D1F5EC}" type="datetimeFigureOut">
               <a:rPr lang="en-US" smtClean="0"/>
               <a:pPr/>
-              <a:t>8/8/2026</a:t>
+              <a:t>8/9/2026</a:t>
             </a:fld>
             <a:endParaRPr lang="en-US"/>
           </a:p>
@@ -531,6 +536,88 @@
 </p:notesMaster>
 </file>
 
+<file path=ppt/notesSlides/notesSlide1.xml><?xml version="1.0" encoding="utf-8"?>
+<p:notes xmlns:a="http://schemas.openxmlformats.org/drawingml/2006/main" xmlns:r="http://schemas.openxmlformats.org/officeDocument/2006/relationships" xmlns:p="http://schemas.openxmlformats.org/presentationml/2006/main">
+  <p:cSld>
+    <p:spTree>
+      <p:nvGrpSpPr>
+        <p:cNvPr id="1" name=""/>
+        <p:cNvGrpSpPr/>
+        <p:nvPr/>
+      </p:nvGrpSpPr>
+      <p:grpSpPr>
+        <a:xfrm>
+          <a:off x="0" y="0"/>
+          <a:ext cx="0" cy="0"/>
+          <a:chOff x="0" y="0"/>
+          <a:chExt cx="0" cy="0"/>
+        </a:xfrm>
+      </p:grpSpPr>
+      <p:sp>
+        <p:nvSpPr>
+          <p:cNvPr id="2" name="Slide Image Placeholder 1"/>
+          <p:cNvSpPr>
+            <a:spLocks noGrp="1" noRot="1" noChangeAspect="1"/>
+          </p:cNvSpPr>
+          <p:nvPr>
+            <p:ph type="sldImg"/>
+          </p:nvPr>
+        </p:nvSpPr>
+        <p:spPr/>
+      </p:sp>
+      <p:sp>
+        <p:nvSpPr>
+          <p:cNvPr id="3" name="Notes Placeholder 2"/>
+          <p:cNvSpPr>
+            <a:spLocks noGrp="1"/>
+          </p:cNvSpPr>
+          <p:nvPr>
+            <p:ph type="body" idx="1"/>
+          </p:nvPr>
+        </p:nvSpPr>
+        <p:spPr/>
+        <p:txBody>
+          <a:bodyPr>
+            <a:normAutofit/>
+          </a:bodyPr>
+          <a:lstStyle/>
+          <a:p>
+            <a:endParaRPr lang="en-US" dirty="0"/>
+          </a:p>
+        </p:txBody>
+      </p:sp>
+      <p:sp>
+        <p:nvSpPr>
+          <p:cNvPr id="4" name="Slide Number Placeholder 3"/>
+          <p:cNvSpPr>
+            <a:spLocks noGrp="1"/>
+          </p:cNvSpPr>
+          <p:nvPr>
+            <p:ph type="sldNum" sz="quarter" idx="10"/>
+          </p:nvPr>
+        </p:nvSpPr>
+        <p:spPr/>
+        <p:txBody>
+          <a:bodyPr/>
+          <a:lstStyle/>
+          <a:p>
+            <a:fld id="{B4E670EC-EF90-4A84-9798-83F1F2DBB460}" type="slidenum">
+              <a:rPr lang="en-US" smtClean="0"/>
+              <a:pPr/>
+              <a:t>3</a:t>
+            </a:fld>
+            <a:endParaRPr lang="en-US"/>
+          </a:p>
+        </p:txBody>
+      </p:sp>
+    </p:spTree>
+  </p:cSld>
+  <p:clrMapOvr>
+    <a:masterClrMapping/>
+  </p:clrMapOvr>
+</p:notes>
+</file>
+
 <file path=ppt/slideLayouts/slideLayout1.xml><?xml version="1.0" encoding="utf-8"?>
 <p:sldLayout xmlns:a="http://schemas.openxmlformats.org/drawingml/2006/main" xmlns:r="http://schemas.openxmlformats.org/officeDocument/2006/relationships" xmlns:p="http://schemas.openxmlformats.org/presentationml/2006/main" type="title" preserve="1">
   <p:cSld name="Title Slide">
@@ -722,7 +809,7 @@
               <a:pPr>
                 <a:defRPr/>
               </a:pPr>
-              <a:t>8/8/2026</a:t>
+              <a:t>8/9/2026</a:t>
             </a:fld>
             <a:endParaRPr lang="en-US"/>
           </a:p>
@@ -914,7 +1001,7 @@
               <a:pPr>
                 <a:defRPr/>
               </a:pPr>
-              <a:t>8/8/2026</a:t>
+              <a:t>8/9/2026</a:t>
             </a:fld>
             <a:endParaRPr lang="en-US"/>
           </a:p>
@@ -1116,7 +1203,7 @@
               <a:pPr>
                 <a:defRPr/>
               </a:pPr>
-              <a:t>8/8/2026</a:t>
+              <a:t>8/9/2026</a:t>
             </a:fld>
             <a:endParaRPr lang="en-US"/>
           </a:p>
@@ -1308,7 +1395,7 @@
               <a:pPr>
                 <a:defRPr/>
               </a:pPr>
-              <a:t>8/8/2026</a:t>
+              <a:t>8/9/2026</a:t>
             </a:fld>
             <a:endParaRPr lang="en-US"/>
           </a:p>
@@ -1576,7 +1663,7 @@
               <a:pPr>
                 <a:defRPr/>
               </a:pPr>
-              <a:t>8/8/2026</a:t>
+              <a:t>8/9/2026</a:t>
             </a:fld>
             <a:endParaRPr lang="en-US"/>
           </a:p>
@@ -1886,7 +1973,7 @@
               <a:pPr>
                 <a:defRPr/>
               </a:pPr>
-              <a:t>8/8/2026</a:t>
+              <a:t>8/9/2026</a:t>
             </a:fld>
             <a:endParaRPr lang="en-US"/>
           </a:p>
@@ -2330,7 +2417,7 @@
               <a:pPr>
                 <a:defRPr/>
               </a:pPr>
-              <a:t>8/8/2026</a:t>
+              <a:t>8/9/2026</a:t>
             </a:fld>
             <a:endParaRPr lang="en-US"/>
           </a:p>
@@ -2470,7 +2557,7 @@
               <a:pPr>
                 <a:defRPr/>
               </a:pPr>
-              <a:t>8/8/2026</a:t>
+              <a:t>8/9/2026</a:t>
             </a:fld>
             <a:endParaRPr lang="en-US"/>
           </a:p>
@@ -2587,7 +2674,7 @@
               <a:pPr>
                 <a:defRPr/>
               </a:pPr>
-              <a:t>8/8/2026</a:t>
+              <a:t>8/9/2026</a:t>
             </a:fld>
             <a:endParaRPr lang="en-US"/>
           </a:p>
@@ -2886,7 +2973,7 @@
               <a:pPr>
                 <a:defRPr/>
               </a:pPr>
-              <a:t>8/8/2026</a:t>
+              <a:t>8/9/2026</a:t>
             </a:fld>
             <a:endParaRPr lang="en-US"/>
           </a:p>
@@ -3164,7 +3251,7 @@
               <a:pPr>
                 <a:defRPr/>
               </a:pPr>
-              <a:t>8/8/2026</a:t>
+              <a:t>8/9/2026</a:t>
             </a:fld>
             <a:endParaRPr lang="en-US"/>
           </a:p>
@@ -3412,7 +3499,7 @@
               <a:pPr>
                 <a:defRPr/>
               </a:pPr>
-              <a:t>8/8/2026</a:t>
+              <a:t>8/9/2026</a:t>
             </a:fld>
             <a:endParaRPr lang="en-US"/>
           </a:p>
@@ -3922,7 +4009,7 @@
       </p:grpSpPr>
       <p:sp>
         <p:nvSpPr>
-          <p:cNvPr id="10242" name="Title 1"/>
+          <p:cNvPr id="2050" name="Title 1"/>
           <p:cNvSpPr>
             <a:spLocks noGrp="1"/>
           </p:cNvSpPr>
@@ -3930,16 +4017,22 @@
             <p:ph type="ctrTitle"/>
           </p:nvPr>
         </p:nvSpPr>
-        <p:spPr/>
+        <p:spPr>
+          <a:xfrm>
+            <a:off x="304800" y="2130425"/>
+            <a:ext cx="8534400" cy="1470025"/>
+          </a:xfrm>
+        </p:spPr>
         <p:txBody>
           <a:bodyPr/>
           <a:lstStyle/>
           <a:p>
             <a:pPr eaLnBrk="1" hangingPunct="1"/>
             <a:r>
-              <a:rPr lang="en-US" sz="6000" dirty="0" smtClean="0"/>
-              <a:t>Auto-Scaling</a:t>
-            </a:r>
+              <a:rPr lang="en-US" sz="6000" dirty="0" err="1" smtClean="0"/>
+              <a:t>Autoscaling</a:t>
+            </a:r>
+            <a:endParaRPr lang="en-US" sz="6000" dirty="0" smtClean="0"/>
           </a:p>
         </p:txBody>
       </p:sp>
@@ -3968,7 +4061,7 @@
             </a:pPr>
             <a:r>
               <a:rPr lang="en-US" sz="5400" dirty="0" smtClean="0"/>
-              <a:t>Ngo Huy Bien</a:t>
+              <a:t>Lecturer: Ngo Huy Bien</a:t>
             </a:r>
           </a:p>
           <a:p>
@@ -4027,7 +4120,7 @@
               <a:defRPr/>
             </a:pPr>
             <a:r>
-              <a:rPr lang="en-US" sz="4400" smtClean="0">
+              <a:rPr lang="en-US" sz="4400" dirty="0" smtClean="0">
                 <a:hlinkClick r:id="rId2"/>
               </a:rPr>
               <a:t>nhbien@fit.hcmus.edu.vn</a:t>
@@ -4084,12 +4177,8 @@
           <a:lstStyle/>
           <a:p>
             <a:r>
-              <a:rPr lang="en-US" dirty="0" err="1" smtClean="0"/>
-              <a:t>PaaS</a:t>
-            </a:r>
-            <a:r>
               <a:rPr lang="en-US" dirty="0" smtClean="0"/>
-              <a:t> Scalability Requirements [2]</a:t>
+              <a:t>Dynamic Scaling Algorithm (II)</a:t>
             </a:r>
             <a:endParaRPr lang="en-US" dirty="0"/>
           </a:p>
@@ -4110,36 +4199,27 @@
           <a:bodyPr/>
           <a:lstStyle/>
           <a:p>
-            <a:pPr lvl="0"/>
-            <a:r>
-              <a:rPr lang="en-US" sz="2800" dirty="0" err="1" smtClean="0"/>
-              <a:t>PaaS</a:t>
-            </a:r>
-            <a:r>
-              <a:rPr lang="en-US" sz="2800" dirty="0" smtClean="0"/>
-              <a:t>, where operating systems and middleware are virtualized and provided as a service to customers, promises an unprecedented ability of</a:t>
-            </a:r>
-          </a:p>
-          <a:p>
-            <a:pPr lvl="1"/>
+            <a:r>
+              <a:rPr lang="en-US" sz="2400" dirty="0" smtClean="0"/>
+              <a:t>The algorithm first determines the current web application instances with active sessions above or below </a:t>
+            </a:r>
             <a:r>
               <a:rPr lang="en-US" sz="2400" i="1" dirty="0" smtClean="0">
                 <a:solidFill>
                   <a:srgbClr val="C00000"/>
                 </a:solidFill>
               </a:rPr>
-              <a:t>increasing</a:t>
-            </a:r>
-            <a:r>
-              <a:rPr lang="en-US" sz="2400" dirty="0" smtClean="0"/>
-              <a:t> the capabilities  of allocated virtual resources, e.g. CPU, RAM, bandwidth… (scale up – vertical scaling)</a:t>
-            </a:r>
-          </a:p>
-          <a:p>
-            <a:pPr lvl="1"/>
-            <a:r>
-              <a:rPr lang="en-US" sz="2400" dirty="0" smtClean="0"/>
-              <a:t>seamlessly adding </a:t>
+              <a:t>given threshold</a:t>
+            </a:r>
+            <a:r>
+              <a:rPr lang="en-US" sz="2400" dirty="0" smtClean="0"/>
+              <a:t> numbers.</a:t>
+            </a:r>
+          </a:p>
+          <a:p>
+            <a:r>
+              <a:rPr lang="en-US" sz="2400" dirty="0" smtClean="0"/>
+              <a:t>If all instances have active sessions above the given upper threshold, a </a:t>
             </a:r>
             <a:r>
               <a:rPr lang="en-US" sz="2400" i="1" dirty="0" smtClean="0">
@@ -4147,27 +4227,47 @@
                   <a:srgbClr val="C00000"/>
                 </a:solidFill>
               </a:rPr>
-              <a:t>new resources</a:t>
-            </a:r>
-            <a:r>
-              <a:rPr lang="en-US" sz="2400" dirty="0" smtClean="0"/>
-              <a:t>, e.g. new machines (scale out – horizontal scaling), and </a:t>
-            </a:r>
-          </a:p>
-          <a:p>
-            <a:pPr lvl="1"/>
+              <a:t>new web application instance</a:t>
+            </a:r>
+            <a:r>
+              <a:rPr lang="en-US" sz="2400" dirty="0" smtClean="0"/>
+              <a:t> will be provisioned, started, and then added to the </a:t>
+            </a:r>
+            <a:r>
+              <a:rPr lang="en-US" sz="2400" u="sng" dirty="0" smtClean="0"/>
+              <a:t>front-end load-balancer</a:t>
+            </a:r>
+            <a:r>
+              <a:rPr lang="en-US" sz="2400" dirty="0" smtClean="0"/>
+              <a:t>.</a:t>
+            </a:r>
+          </a:p>
+          <a:p>
+            <a:r>
+              <a:rPr lang="en-US" sz="2400" dirty="0" smtClean="0"/>
+              <a:t>If there are instances with active sessions below a given lower threshold and with at least one instance that has </a:t>
+            </a:r>
             <a:r>
               <a:rPr lang="en-US" sz="2400" i="1" dirty="0" smtClean="0">
                 <a:solidFill>
                   <a:srgbClr val="C00000"/>
                 </a:solidFill>
               </a:rPr>
-              <a:t>releasing </a:t>
-            </a:r>
-            <a:r>
-              <a:rPr lang="en-US" sz="2400" dirty="0" smtClean="0"/>
-              <a:t>them when they are no longer needed (scale down).</a:t>
-            </a:r>
+              <a:t>no active session</a:t>
+            </a:r>
+            <a:r>
+              <a:rPr lang="en-US" sz="2400" dirty="0" smtClean="0"/>
+              <a:t>, the idle instance will be </a:t>
+            </a:r>
+            <a:r>
+              <a:rPr lang="en-US" sz="2400" u="sng" dirty="0" smtClean="0"/>
+              <a:t>removed</a:t>
+            </a:r>
+            <a:r>
+              <a:rPr lang="en-US" sz="2400" dirty="0" smtClean="0"/>
+              <a:t> from the load-balancer and be shutdown from the system.</a:t>
+            </a:r>
+            <a:endParaRPr lang="en-US" sz="2400" dirty="0"/>
           </a:p>
         </p:txBody>
       </p:sp>
@@ -4196,119 +4296,32 @@
           <a:chExt cx="0" cy="0"/>
         </a:xfrm>
       </p:grpSpPr>
-      <p:sp>
-        <p:nvSpPr>
-          <p:cNvPr id="2" name="Title 1"/>
-          <p:cNvSpPr>
-            <a:spLocks noGrp="1"/>
-          </p:cNvSpPr>
-          <p:nvPr>
-            <p:ph type="title"/>
-          </p:nvPr>
-        </p:nvSpPr>
-        <p:spPr/>
-        <p:txBody>
-          <a:bodyPr/>
-          <a:lstStyle/>
-          <a:p>
-            <a:r>
-              <a:rPr lang="en-US" dirty="0" smtClean="0"/>
-              <a:t>Single Platform Pattern</a:t>
-            </a:r>
-            <a:endParaRPr lang="en-US" dirty="0"/>
-          </a:p>
-        </p:txBody>
-      </p:sp>
-      <p:sp>
-        <p:nvSpPr>
-          <p:cNvPr id="3" name="Content Placeholder 2"/>
-          <p:cNvSpPr>
-            <a:spLocks noGrp="1"/>
-          </p:cNvSpPr>
-          <p:nvPr>
-            <p:ph idx="1"/>
-          </p:nvPr>
-        </p:nvSpPr>
-        <p:spPr/>
-        <p:txBody>
-          <a:bodyPr/>
-          <a:lstStyle/>
-          <a:p>
-            <a:r>
-              <a:rPr lang="en-US" sz="2400" dirty="0" smtClean="0"/>
-              <a:t>It considers a </a:t>
-            </a:r>
-            <a:r>
-              <a:rPr lang="en-US" sz="2400" i="1" dirty="0" smtClean="0">
-                <a:solidFill>
-                  <a:srgbClr val="C00000"/>
-                </a:solidFill>
-              </a:rPr>
-              <a:t>single-tenant</a:t>
-            </a:r>
-            <a:r>
-              <a:rPr lang="en-US" sz="2400" dirty="0" smtClean="0"/>
-              <a:t> scenario.</a:t>
-            </a:r>
-          </a:p>
-          <a:p>
-            <a:r>
-              <a:rPr lang="en-US" sz="2400" dirty="0" smtClean="0"/>
-              <a:t>A </a:t>
-            </a:r>
-            <a:r>
-              <a:rPr lang="en-US" sz="2400" u="sng" dirty="0" smtClean="0"/>
-              <a:t>single, isolated, and complete virtual machine</a:t>
-            </a:r>
-            <a:r>
-              <a:rPr lang="en-US" sz="2400" dirty="0" smtClean="0"/>
-              <a:t> with a platform installed on it is released to </a:t>
-            </a:r>
-            <a:r>
-              <a:rPr lang="en-US" sz="2400" i="1" dirty="0" smtClean="0">
-                <a:solidFill>
-                  <a:srgbClr val="C00000"/>
-                </a:solidFill>
-              </a:rPr>
-              <a:t>each customer</a:t>
-            </a:r>
-            <a:r>
-              <a:rPr lang="en-US" sz="2400" dirty="0" smtClean="0"/>
-              <a:t> in the cloud.</a:t>
-            </a:r>
-          </a:p>
-          <a:p>
-            <a:r>
-              <a:rPr lang="en-US" sz="2400" dirty="0" smtClean="0"/>
-              <a:t>This pattern is characterized by </a:t>
-            </a:r>
-            <a:r>
-              <a:rPr lang="en-US" sz="2400" i="1" dirty="0" smtClean="0">
-                <a:solidFill>
-                  <a:srgbClr val="C00000"/>
-                </a:solidFill>
-              </a:rPr>
-              <a:t>scarce resource utilization</a:t>
-            </a:r>
-            <a:r>
-              <a:rPr lang="en-US" sz="2400" dirty="0" smtClean="0"/>
-              <a:t>, since the resource distribution is done in advance independently by the real load, and </a:t>
-            </a:r>
-            <a:r>
-              <a:rPr lang="en-US" sz="2400" i="1" dirty="0" smtClean="0">
-                <a:solidFill>
-                  <a:srgbClr val="C00000"/>
-                </a:solidFill>
-              </a:rPr>
-              <a:t>low scalability</a:t>
-            </a:r>
-            <a:r>
-              <a:rPr lang="en-US" sz="2400" dirty="0" smtClean="0"/>
-              <a:t>, because the number of virtual machines and platforms is linear in the number of customers.</a:t>
-            </a:r>
-          </a:p>
-        </p:txBody>
-      </p:sp>
+      <p:pic>
+        <p:nvPicPr>
+          <p:cNvPr id="4" name="Picture 2" descr="https://lh3.ggpht.com/1IfZLL2QDSjZ0wS7sUhaMlsAOS8BBzdR3wZ1WawgRn7KZAM8nEVZYMOUM-lqQb0ikIzp=w300"/>
+          <p:cNvPicPr>
+            <a:picLocks noChangeAspect="1" noChangeArrowheads="1"/>
+          </p:cNvPicPr>
+          <p:nvPr/>
+        </p:nvPicPr>
+        <p:blipFill>
+          <a:blip r:embed="rId2" cstate="print"/>
+          <a:srcRect/>
+          <a:stretch>
+            <a:fillRect/>
+          </a:stretch>
+        </p:blipFill>
+        <p:spPr bwMode="auto">
+          <a:xfrm>
+            <a:off x="3276600" y="1905000"/>
+            <a:ext cx="2857500" cy="2857500"/>
+          </a:xfrm>
+          <a:prstGeom prst="rect">
+            <a:avLst/>
+          </a:prstGeom>
+          <a:noFill/>
+        </p:spPr>
+      </p:pic>
     </p:spTree>
   </p:cSld>
   <p:clrMapOvr>
@@ -4350,8 +4363,12 @@
           <a:lstStyle/>
           <a:p>
             <a:r>
+              <a:rPr lang="en-US" dirty="0" err="1" smtClean="0"/>
+              <a:t>PaaS</a:t>
+            </a:r>
+            <a:r>
               <a:rPr lang="en-US" dirty="0" smtClean="0"/>
-              <a:t>Shared Platform Pattern</a:t>
+              <a:t> Scalability Requirements [2]</a:t>
             </a:r>
             <a:endParaRPr lang="en-US" dirty="0"/>
           </a:p>
@@ -4372,119 +4389,64 @@
           <a:bodyPr/>
           <a:lstStyle/>
           <a:p>
-            <a:r>
-              <a:rPr lang="en-US" sz="2300" dirty="0" smtClean="0"/>
-              <a:t>It considers a </a:t>
-            </a:r>
-            <a:r>
-              <a:rPr lang="en-US" sz="2300" i="1" dirty="0" smtClean="0">
+            <a:pPr lvl="0"/>
+            <a:r>
+              <a:rPr lang="en-US" sz="2800" dirty="0" err="1" smtClean="0"/>
+              <a:t>PaaS</a:t>
+            </a:r>
+            <a:r>
+              <a:rPr lang="en-US" sz="2800" dirty="0" smtClean="0"/>
+              <a:t>, where operating systems and middleware are virtualized and provided as a service to customers, promises an unprecedented ability of</a:t>
+            </a:r>
+          </a:p>
+          <a:p>
+            <a:pPr lvl="1"/>
+            <a:r>
+              <a:rPr lang="en-US" sz="2400" i="1" dirty="0" smtClean="0">
                 <a:solidFill>
                   <a:srgbClr val="C00000"/>
                 </a:solidFill>
               </a:rPr>
-              <a:t>multitenant</a:t>
-            </a:r>
-            <a:r>
-              <a:rPr lang="en-US" sz="2300" dirty="0" smtClean="0"/>
-              <a:t> scenario where a </a:t>
-            </a:r>
-            <a:r>
-              <a:rPr lang="en-US" sz="2300" u="sng" dirty="0" smtClean="0"/>
-              <a:t>single platform is installed on a (set of) virtual machine</a:t>
-            </a:r>
-            <a:r>
-              <a:rPr lang="en-US" sz="2300" dirty="0" smtClean="0"/>
-              <a:t>.</a:t>
-            </a:r>
-          </a:p>
-          <a:p>
-            <a:r>
-              <a:rPr lang="en-US" sz="2300" dirty="0" smtClean="0"/>
-              <a:t>The platform is shared by multiple tenants, all having the right to manage a </a:t>
-            </a:r>
-            <a:r>
-              <a:rPr lang="en-US" sz="2300" i="1" dirty="0" smtClean="0">
+              <a:t>increasing</a:t>
+            </a:r>
+            <a:r>
+              <a:rPr lang="en-US" sz="2400" dirty="0" smtClean="0"/>
+              <a:t> the capabilities  of allocated virtual resources, e.g. CPU, RAM, bandwidth… (scale up – vertical scaling)</a:t>
+            </a:r>
+          </a:p>
+          <a:p>
+            <a:pPr lvl="1"/>
+            <a:r>
+              <a:rPr lang="en-US" sz="2400" dirty="0" smtClean="0"/>
+              <a:t>seamlessly adding </a:t>
+            </a:r>
+            <a:r>
+              <a:rPr lang="en-US" sz="2400" i="1" dirty="0" smtClean="0">
                 <a:solidFill>
                   <a:srgbClr val="C00000"/>
                 </a:solidFill>
               </a:rPr>
-              <a:t>portion</a:t>
-            </a:r>
-            <a:r>
-              <a:rPr lang="en-US" sz="2300" dirty="0" smtClean="0"/>
-              <a:t> of it and deploy their services independently.</a:t>
-            </a:r>
-          </a:p>
-          <a:p>
-            <a:r>
-              <a:rPr lang="en-US" sz="2300" dirty="0" smtClean="0"/>
-              <a:t>Whenever the load increases degrading the performance metrics of the platform, </a:t>
-            </a:r>
-            <a:r>
-              <a:rPr lang="en-US" sz="2300" i="1" dirty="0" smtClean="0">
+              <a:t>new resources</a:t>
+            </a:r>
+            <a:r>
+              <a:rPr lang="en-US" sz="2400" dirty="0" smtClean="0"/>
+              <a:t>, e.g. new machines (scale out – horizontal scaling), and </a:t>
+            </a:r>
+          </a:p>
+          <a:p>
+            <a:pPr lvl="1"/>
+            <a:r>
+              <a:rPr lang="en-US" sz="2400" i="1" dirty="0" smtClean="0">
                 <a:solidFill>
                   <a:srgbClr val="C00000"/>
                 </a:solidFill>
               </a:rPr>
-              <a:t>RAM, CPU, and/or bandwidth</a:t>
-            </a:r>
-            <a:r>
-              <a:rPr lang="en-US" sz="2300" dirty="0" smtClean="0"/>
-              <a:t> can be increased.</a:t>
-            </a:r>
-          </a:p>
-          <a:p>
-            <a:r>
-              <a:rPr lang="en-US" sz="2300" dirty="0" smtClean="0"/>
-              <a:t>Resources are shared and need to be managed in a way that preserves security and </a:t>
-            </a:r>
-            <a:r>
-              <a:rPr lang="en-US" sz="2300" i="1" dirty="0" smtClean="0">
-                <a:solidFill>
-                  <a:srgbClr val="C00000"/>
-                </a:solidFill>
-              </a:rPr>
-              <a:t>isolation</a:t>
-            </a:r>
-            <a:r>
-              <a:rPr lang="en-US" sz="2300" dirty="0" smtClean="0"/>
-              <a:t> among tenants.</a:t>
-            </a:r>
-          </a:p>
-          <a:p>
-            <a:r>
-              <a:rPr lang="en-US" sz="2300" dirty="0" err="1" smtClean="0"/>
-              <a:t>ShPP</a:t>
-            </a:r>
-            <a:r>
-              <a:rPr lang="en-US" sz="2300" dirty="0" smtClean="0"/>
-              <a:t> provides </a:t>
-            </a:r>
-            <a:r>
-              <a:rPr lang="en-US" sz="2300" i="1" dirty="0" smtClean="0">
-                <a:solidFill>
-                  <a:srgbClr val="C00000"/>
-                </a:solidFill>
-              </a:rPr>
-              <a:t>high utilization</a:t>
-            </a:r>
-            <a:r>
-              <a:rPr lang="en-US" sz="2300" dirty="0" smtClean="0"/>
-              <a:t>, while it does not provide linear scalability increase due to the additional overhead for </a:t>
-            </a:r>
-            <a:r>
-              <a:rPr lang="en-US" sz="2300" i="1" dirty="0" smtClean="0">
-                <a:solidFill>
-                  <a:srgbClr val="C00000"/>
-                </a:solidFill>
-              </a:rPr>
-              <a:t>resource management</a:t>
-            </a:r>
-            <a:r>
-              <a:rPr lang="en-US" sz="2300" dirty="0" smtClean="0"/>
-              <a:t>.</a:t>
-            </a:r>
-            <a:endParaRPr lang="en-US" sz="2300" dirty="0"/>
+              <a:t>releasing </a:t>
+            </a:r>
+            <a:r>
+              <a:rPr lang="en-US" sz="2400" dirty="0" smtClean="0"/>
+              <a:t>them when they are no longer needed (scale down).</a:t>
+            </a:r>
           </a:p>
         </p:txBody>
       </p:sp>
@@ -4530,7 +4492,7 @@
           <a:p>
             <a:r>
               <a:rPr lang="en-US" dirty="0" smtClean="0"/>
-              <a:t>Clustered Platform Pattern</a:t>
+              <a:t>Single Platform Pattern</a:t>
             </a:r>
             <a:endParaRPr lang="en-US" dirty="0"/>
           </a:p>
@@ -4553,7 +4515,7 @@
           <a:p>
             <a:r>
               <a:rPr lang="en-US" sz="2400" dirty="0" smtClean="0"/>
-              <a:t>A </a:t>
+              <a:t>It considers a </a:t>
             </a:r>
             <a:r>
               <a:rPr lang="en-US" sz="2400" i="1" dirty="0" smtClean="0">
@@ -4561,31 +4523,43 @@
                   <a:srgbClr val="C00000"/>
                 </a:solidFill>
               </a:rPr>
-              <a:t>single platform</a:t>
-            </a:r>
-            <a:r>
-              <a:rPr lang="en-US" sz="2400" dirty="0" smtClean="0"/>
-              <a:t> is deployed supporting clustering and is shared by all tenants.</a:t>
-            </a:r>
-          </a:p>
-          <a:p>
+              <a:t>single-tenant</a:t>
+            </a:r>
+            <a:r>
+              <a:rPr lang="en-US" sz="2400" dirty="0" smtClean="0"/>
+              <a:t> scenario.</a:t>
+            </a:r>
+          </a:p>
+          <a:p>
+            <a:r>
+              <a:rPr lang="en-US" sz="2400" dirty="0" smtClean="0"/>
+              <a:t>A </a:t>
+            </a:r>
+            <a:r>
+              <a:rPr lang="en-US" sz="2400" u="sng" dirty="0" smtClean="0"/>
+              <a:t>single, isolated, and complete virtual machine</a:t>
+            </a:r>
+            <a:r>
+              <a:rPr lang="en-US" sz="2400" dirty="0" smtClean="0"/>
+              <a:t> with a platform installed on it is released to </a:t>
+            </a:r>
             <a:r>
               <a:rPr lang="en-US" sz="2400" i="1" dirty="0" smtClean="0">
                 <a:solidFill>
                   <a:srgbClr val="C00000"/>
                 </a:solidFill>
               </a:rPr>
-              <a:t>Multiple instances</a:t>
-            </a:r>
-            <a:r>
-              <a:rPr lang="en-US" sz="2400" dirty="0" smtClean="0"/>
-              <a:t> of the platform components (e.g., AS, ESB) can be deployed in different machines of the cluster.</a:t>
-            </a:r>
-          </a:p>
-          <a:p>
-            <a:r>
-              <a:rPr lang="en-US" sz="2400" dirty="0" smtClean="0"/>
-              <a:t>This pattern manages shared resources preserving security and isolation among tenants. In addition, it implements a set of functionalities including </a:t>
+              <a:t>each customer</a:t>
+            </a:r>
+            <a:r>
+              <a:rPr lang="en-US" sz="2400" dirty="0" smtClean="0"/>
+              <a:t> in the cloud.</a:t>
+            </a:r>
+          </a:p>
+          <a:p>
+            <a:r>
+              <a:rPr lang="en-US" sz="2400" dirty="0" smtClean="0"/>
+              <a:t>This pattern is characterized by </a:t>
             </a:r>
             <a:r>
               <a:rPr lang="en-US" sz="2400" i="1" dirty="0" smtClean="0">
@@ -4593,19 +4567,11 @@
                   <a:srgbClr val="C00000"/>
                 </a:solidFill>
               </a:rPr>
-              <a:t>load balancing</a:t>
-            </a:r>
-            <a:r>
-              <a:rPr lang="en-US" sz="2400" dirty="0" smtClean="0"/>
-              <a:t>, </a:t>
-            </a:r>
-            <a:r>
-              <a:rPr lang="en-US" sz="2400" i="1" dirty="0" err="1" smtClean="0">
-                <a:solidFill>
-                  <a:srgbClr val="C00000"/>
-                </a:solidFill>
-              </a:rPr>
-              <a:t>PaaS</a:t>
+              <a:t>scarce resource utilization</a:t>
+            </a:r>
+            <a:r>
+              <a:rPr lang="en-US" sz="2400" dirty="0" smtClean="0"/>
+              <a:t>, since the resource distribution is done in advance independently by the real load, and </a:t>
             </a:r>
             <a:r>
               <a:rPr lang="en-US" sz="2400" i="1" dirty="0" smtClean="0">
@@ -4613,55 +4579,12 @@
                   <a:srgbClr val="C00000"/>
                 </a:solidFill>
               </a:rPr>
-              <a:t> monitoring</a:t>
-            </a:r>
-            <a:r>
-              <a:rPr lang="en-US" sz="2400" dirty="0" smtClean="0"/>
-              <a:t>, and </a:t>
-            </a:r>
-            <a:r>
-              <a:rPr lang="en-US" sz="2400" i="1" dirty="0" smtClean="0">
-                <a:solidFill>
-                  <a:srgbClr val="C00000"/>
-                </a:solidFill>
-              </a:rPr>
-              <a:t>elastic auto-scaling</a:t>
-            </a:r>
-            <a:r>
-              <a:rPr lang="en-US" sz="2400" dirty="0" smtClean="0"/>
-              <a:t>.</a:t>
-            </a:r>
-          </a:p>
-          <a:p>
-            <a:r>
-              <a:rPr lang="en-US" sz="2400" dirty="0" smtClean="0"/>
-              <a:t>CPP provides high resource </a:t>
-            </a:r>
-            <a:r>
-              <a:rPr lang="en-US" sz="2400" i="1" dirty="0" smtClean="0">
-                <a:solidFill>
-                  <a:srgbClr val="C00000"/>
-                </a:solidFill>
-              </a:rPr>
-              <a:t>utilization</a:t>
-            </a:r>
-            <a:r>
-              <a:rPr lang="en-US" sz="2400" dirty="0" smtClean="0"/>
-              <a:t>, since the machines in the cluster are shared among different tenants, system resources can be incrementally extended. CPP promises high availability and reliability due to the introduced </a:t>
-            </a:r>
-            <a:r>
-              <a:rPr lang="en-US" sz="2400" i="1" dirty="0" smtClean="0">
-                <a:solidFill>
-                  <a:srgbClr val="C00000"/>
-                </a:solidFill>
-              </a:rPr>
-              <a:t>redundancy</a:t>
-            </a:r>
-            <a:r>
-              <a:rPr lang="en-US" sz="2400" dirty="0" smtClean="0"/>
-              <a:t>.</a:t>
-            </a:r>
-            <a:endParaRPr lang="en-US" sz="2400" dirty="0"/>
+              <a:t>low scalability</a:t>
+            </a:r>
+            <a:r>
+              <a:rPr lang="en-US" sz="2400" dirty="0" smtClean="0"/>
+              <a:t>, because the number of virtual machines and platforms is linear in the number of customers.</a:t>
+            </a:r>
           </a:p>
         </p:txBody>
       </p:sp>
@@ -4707,7 +4630,7 @@
           <a:p>
             <a:r>
               <a:rPr lang="en-US" dirty="0" smtClean="0"/>
-              <a:t>Multiple Shared Platforms Pattern</a:t>
+              <a:t>Shared Platform Pattern</a:t>
             </a:r>
             <a:endParaRPr lang="en-US" dirty="0"/>
           </a:p>
@@ -4729,84 +4652,118 @@
           <a:lstStyle/>
           <a:p>
             <a:r>
-              <a:rPr lang="en-US" sz="2600" dirty="0" smtClean="0"/>
-              <a:t>It is an extension of </a:t>
-            </a:r>
-            <a:r>
-              <a:rPr lang="en-US" sz="2600" dirty="0" err="1" smtClean="0"/>
-              <a:t>ShPP</a:t>
-            </a:r>
-            <a:r>
-              <a:rPr lang="en-US" sz="2600" dirty="0" smtClean="0"/>
-              <a:t> and </a:t>
-            </a:r>
-            <a:r>
-              <a:rPr lang="en-US" sz="2600" i="1" dirty="0" smtClean="0">
+              <a:rPr lang="en-US" sz="2300" dirty="0" smtClean="0"/>
+              <a:t>It considers a </a:t>
+            </a:r>
+            <a:r>
+              <a:rPr lang="en-US" sz="2300" i="1" dirty="0" smtClean="0">
                 <a:solidFill>
                   <a:srgbClr val="C00000"/>
                 </a:solidFill>
               </a:rPr>
-              <a:t>mix</a:t>
-            </a:r>
-            <a:r>
-              <a:rPr lang="en-US" sz="2600" dirty="0" smtClean="0"/>
-              <a:t> both vertical and horizontal scaling.</a:t>
-            </a:r>
-          </a:p>
-          <a:p>
-            <a:r>
-              <a:rPr lang="en-US" sz="2600" dirty="0" smtClean="0"/>
-              <a:t>At initialization time, a </a:t>
-            </a:r>
-            <a:r>
-              <a:rPr lang="en-US" sz="2600" i="1" dirty="0" smtClean="0">
+              <a:t>multitenant</a:t>
+            </a:r>
+            <a:r>
+              <a:rPr lang="en-US" sz="2300" dirty="0" smtClean="0"/>
+              <a:t> scenario where a </a:t>
+            </a:r>
+            <a:r>
+              <a:rPr lang="en-US" sz="2300" u="sng" dirty="0" smtClean="0"/>
+              <a:t>single platform is installed on a (set of) virtual machine</a:t>
+            </a:r>
+            <a:r>
+              <a:rPr lang="en-US" sz="2300" dirty="0" smtClean="0"/>
+              <a:t>.</a:t>
+            </a:r>
+          </a:p>
+          <a:p>
+            <a:r>
+              <a:rPr lang="en-US" sz="2300" dirty="0" smtClean="0"/>
+              <a:t>The platform is shared by multiple tenants, all having the right to manage a </a:t>
+            </a:r>
+            <a:r>
+              <a:rPr lang="en-US" sz="2300" i="1" dirty="0" smtClean="0">
                 <a:solidFill>
                   <a:srgbClr val="C00000"/>
                 </a:solidFill>
               </a:rPr>
-              <a:t>single</a:t>
-            </a:r>
-            <a:r>
-              <a:rPr lang="en-US" sz="2600" dirty="0" smtClean="0"/>
-              <a:t>, shared, multi-tenant platform is deployed.</a:t>
-            </a:r>
-          </a:p>
-          <a:p>
-            <a:r>
-              <a:rPr lang="en-US" sz="2600" dirty="0" smtClean="0"/>
-              <a:t>Upon an increase in the load, additional resources (</a:t>
-            </a:r>
-            <a:r>
-              <a:rPr lang="en-US" sz="2600" i="1" dirty="0" smtClean="0">
+              <a:t>portion</a:t>
+            </a:r>
+            <a:r>
+              <a:rPr lang="en-US" sz="2300" dirty="0" smtClean="0"/>
+              <a:t> of it and deploy their services independently.</a:t>
+            </a:r>
+          </a:p>
+          <a:p>
+            <a:r>
+              <a:rPr lang="en-US" sz="2300" dirty="0" smtClean="0"/>
+              <a:t>Whenever the load increases degrading the performance metrics of the platform, </a:t>
+            </a:r>
+            <a:r>
+              <a:rPr lang="en-US" sz="2300" i="1" dirty="0" smtClean="0">
                 <a:solidFill>
                   <a:srgbClr val="C00000"/>
                 </a:solidFill>
               </a:rPr>
-              <a:t>CPU, RAM, bandwidth</a:t>
-            </a:r>
-            <a:r>
-              <a:rPr lang="en-US" sz="2600" dirty="0" smtClean="0"/>
-              <a:t>) are assigned to maintain the performance metrics.</a:t>
-            </a:r>
-          </a:p>
-          <a:p>
-            <a:r>
-              <a:rPr lang="en-US" sz="2600" dirty="0" smtClean="0"/>
-              <a:t>In case additional resources are not sufficient, a new platform is deployed and a part of the existing tenants are </a:t>
-            </a:r>
-            <a:r>
-              <a:rPr lang="en-US" sz="2600" i="1" dirty="0" smtClean="0">
+              <a:t>RAM, CPU, and/or bandwidth</a:t>
+            </a:r>
+            <a:r>
+              <a:rPr lang="en-US" sz="2300" dirty="0" smtClean="0"/>
+              <a:t> can be increased.</a:t>
+            </a:r>
+          </a:p>
+          <a:p>
+            <a:r>
+              <a:rPr lang="en-US" sz="2300" dirty="0" smtClean="0"/>
+              <a:t>Resources are shared and need to be managed in a way that preserves security and </a:t>
+            </a:r>
+            <a:r>
+              <a:rPr lang="en-US" sz="2300" i="1" dirty="0" smtClean="0">
                 <a:solidFill>
                   <a:srgbClr val="C00000"/>
                 </a:solidFill>
               </a:rPr>
-              <a:t>migrated</a:t>
-            </a:r>
-            <a:r>
-              <a:rPr lang="en-US" sz="2600" dirty="0" smtClean="0"/>
-              <a:t> to the new platform together with the services they own.</a:t>
-            </a:r>
-            <a:endParaRPr lang="en-US" sz="2600" dirty="0"/>
+              <a:t>isolation</a:t>
+            </a:r>
+            <a:r>
+              <a:rPr lang="en-US" sz="2300" dirty="0" smtClean="0"/>
+              <a:t> among tenants.</a:t>
+            </a:r>
+          </a:p>
+          <a:p>
+            <a:r>
+              <a:rPr lang="en-US" sz="2300" dirty="0" err="1" smtClean="0"/>
+              <a:t>ShPP</a:t>
+            </a:r>
+            <a:r>
+              <a:rPr lang="en-US" sz="2300" dirty="0" smtClean="0"/>
+              <a:t> provides </a:t>
+            </a:r>
+            <a:r>
+              <a:rPr lang="en-US" sz="2300" i="1" dirty="0" smtClean="0">
+                <a:solidFill>
+                  <a:srgbClr val="C00000"/>
+                </a:solidFill>
+              </a:rPr>
+              <a:t>high utilization</a:t>
+            </a:r>
+            <a:r>
+              <a:rPr lang="en-US" sz="2300" dirty="0" smtClean="0"/>
+              <a:t>, while it does not provide linear scalability increase due to the additional overhead for </a:t>
+            </a:r>
+            <a:r>
+              <a:rPr lang="en-US" sz="2300" i="1" dirty="0" smtClean="0">
+                <a:solidFill>
+                  <a:srgbClr val="C00000"/>
+                </a:solidFill>
+              </a:rPr>
+              <a:t>resource management</a:t>
+            </a:r>
+            <a:r>
+              <a:rPr lang="en-US" sz="2300" dirty="0" smtClean="0"/>
+              <a:t>.</a:t>
+            </a:r>
+            <a:endParaRPr lang="en-US" sz="2300" dirty="0"/>
           </a:p>
         </p:txBody>
       </p:sp>
@@ -4851,10 +4808,10 @@
           <a:lstStyle/>
           <a:p>
             <a:r>
-              <a:rPr lang="en-US" sz="4000" dirty="0" smtClean="0"/>
-              <a:t>Multiple Clustered Platforms Pattern</a:t>
-            </a:r>
-            <a:endParaRPr lang="en-US" sz="4000" dirty="0"/>
+              <a:rPr lang="en-US" dirty="0" smtClean="0"/>
+              <a:t>Clustered Platform Pattern</a:t>
+            </a:r>
+            <a:endParaRPr lang="en-US" dirty="0"/>
           </a:p>
         </p:txBody>
       </p:sp>
@@ -4875,13 +4832,7 @@
           <a:p>
             <a:r>
               <a:rPr lang="en-US" sz="2400" dirty="0" smtClean="0"/>
-              <a:t>It is an extension of CPP and provides horizontal scaling at two levels of abstraction.</a:t>
-            </a:r>
-          </a:p>
-          <a:p>
-            <a:r>
-              <a:rPr lang="en-US" sz="2400" dirty="0" smtClean="0"/>
-              <a:t>At initialization time, a </a:t>
+              <a:t>A </a:t>
             </a:r>
             <a:r>
               <a:rPr lang="en-US" sz="2400" i="1" dirty="0" smtClean="0">
@@ -4889,35 +4840,31 @@
                   <a:srgbClr val="C00000"/>
                 </a:solidFill>
               </a:rPr>
-              <a:t>single</a:t>
-            </a:r>
-            <a:r>
-              <a:rPr lang="en-US" sz="2400" dirty="0" smtClean="0"/>
-              <a:t>, shared, multi-tenant platform supporting clustering is deployed.</a:t>
-            </a:r>
-          </a:p>
-          <a:p>
-            <a:r>
-              <a:rPr lang="en-US" sz="2400" dirty="0" smtClean="0"/>
-              <a:t>Upon an increase in the load, additional resources (i.e., </a:t>
-            </a:r>
+              <a:t>single platform</a:t>
+            </a:r>
+            <a:r>
+              <a:rPr lang="en-US" sz="2400" dirty="0" smtClean="0"/>
+              <a:t> is deployed supporting clustering and is shared by all tenants.</a:t>
+            </a:r>
+          </a:p>
+          <a:p>
             <a:r>
               <a:rPr lang="en-US" sz="2400" i="1" dirty="0" smtClean="0">
                 <a:solidFill>
                   <a:srgbClr val="C00000"/>
                 </a:solidFill>
               </a:rPr>
-              <a:t>machines</a:t>
-            </a:r>
-            <a:r>
-              <a:rPr lang="en-US" sz="2400" dirty="0" smtClean="0"/>
-              <a:t> in the cluster) are added to maintain the performance level.</a:t>
-            </a:r>
-          </a:p>
-          <a:p>
-            <a:r>
-              <a:rPr lang="en-US" sz="2400" dirty="0" smtClean="0"/>
-              <a:t>In case the extended cluster is not sufficient to manage the new load, a new platform supporting clustering is deployed, and a part of the existing tenants are </a:t>
+              <a:t>Multiple instances</a:t>
+            </a:r>
+            <a:r>
+              <a:rPr lang="en-US" sz="2400" dirty="0" smtClean="0"/>
+              <a:t> of the platform components (e.g., AS, ESB) can be deployed in different machines of the cluster.</a:t>
+            </a:r>
+          </a:p>
+          <a:p>
+            <a:r>
+              <a:rPr lang="en-US" sz="2400" dirty="0" smtClean="0"/>
+              <a:t>This pattern manages shared resources preserving security and isolation among tenants. In addition, it implements a set of functionalities including </a:t>
             </a:r>
             <a:r>
               <a:rPr lang="en-US" sz="2400" i="1" dirty="0" smtClean="0">
@@ -4925,12 +4872,75 @@
                   <a:srgbClr val="C00000"/>
                 </a:solidFill>
               </a:rPr>
-              <a:t>migrated</a:t>
-            </a:r>
-            <a:r>
-              <a:rPr lang="en-US" sz="2400" dirty="0" smtClean="0"/>
-              <a:t> to the new clustered platform together with the services they own.</a:t>
-            </a:r>
+              <a:t>load balancing</a:t>
+            </a:r>
+            <a:r>
+              <a:rPr lang="en-US" sz="2400" dirty="0" smtClean="0"/>
+              <a:t>, </a:t>
+            </a:r>
+            <a:r>
+              <a:rPr lang="en-US" sz="2400" i="1" dirty="0" err="1" smtClean="0">
+                <a:solidFill>
+                  <a:srgbClr val="C00000"/>
+                </a:solidFill>
+              </a:rPr>
+              <a:t>PaaS</a:t>
+            </a:r>
+            <a:r>
+              <a:rPr lang="en-US" sz="2400" i="1" dirty="0" smtClean="0">
+                <a:solidFill>
+                  <a:srgbClr val="C00000"/>
+                </a:solidFill>
+              </a:rPr>
+              <a:t> monitoring</a:t>
+            </a:r>
+            <a:r>
+              <a:rPr lang="en-US" sz="2400" dirty="0" smtClean="0"/>
+              <a:t>, and </a:t>
+            </a:r>
+            <a:r>
+              <a:rPr lang="en-US" sz="2400" i="1" dirty="0" smtClean="0">
+                <a:solidFill>
+                  <a:srgbClr val="C00000"/>
+                </a:solidFill>
+              </a:rPr>
+              <a:t>elastic auto-scaling</a:t>
+            </a:r>
+            <a:r>
+              <a:rPr lang="en-US" sz="2400" dirty="0" smtClean="0"/>
+              <a:t>.</a:t>
+            </a:r>
+          </a:p>
+          <a:p>
+            <a:r>
+              <a:rPr lang="en-US" sz="2400" dirty="0" smtClean="0"/>
+              <a:t>CPP provides high resource </a:t>
+            </a:r>
+            <a:r>
+              <a:rPr lang="en-US" sz="2400" i="1" dirty="0" smtClean="0">
+                <a:solidFill>
+                  <a:srgbClr val="C00000"/>
+                </a:solidFill>
+              </a:rPr>
+              <a:t>utilization</a:t>
+            </a:r>
+            <a:r>
+              <a:rPr lang="en-US" sz="2400" dirty="0" smtClean="0"/>
+              <a:t>, since the machines in the cluster are shared among different tenants, system resources can be incrementally extended. CPP promises high availability and reliability due to the introduced </a:t>
+            </a:r>
+            <a:r>
+              <a:rPr lang="en-US" sz="2400" i="1" dirty="0" smtClean="0">
+                <a:solidFill>
+                  <a:srgbClr val="C00000"/>
+                </a:solidFill>
+              </a:rPr>
+              <a:t>redundancy</a:t>
+            </a:r>
+            <a:r>
+              <a:rPr lang="en-US" sz="2400" dirty="0" smtClean="0"/>
+              <a:t>.</a:t>
+            </a:r>
+            <a:endParaRPr lang="en-US" sz="2400" dirty="0"/>
           </a:p>
         </p:txBody>
       </p:sp>
@@ -4943,6 +4953,275 @@
 </file>
 
 <file path=ppt/slides/slide16.xml><?xml version="1.0" encoding="utf-8"?>
+<p:sld xmlns:a="http://schemas.openxmlformats.org/drawingml/2006/main" xmlns:r="http://schemas.openxmlformats.org/officeDocument/2006/relationships" xmlns:p="http://schemas.openxmlformats.org/presentationml/2006/main">
+  <p:cSld>
+    <p:spTree>
+      <p:nvGrpSpPr>
+        <p:cNvPr id="1" name=""/>
+        <p:cNvGrpSpPr/>
+        <p:nvPr/>
+      </p:nvGrpSpPr>
+      <p:grpSpPr>
+        <a:xfrm>
+          <a:off x="0" y="0"/>
+          <a:ext cx="0" cy="0"/>
+          <a:chOff x="0" y="0"/>
+          <a:chExt cx="0" cy="0"/>
+        </a:xfrm>
+      </p:grpSpPr>
+      <p:sp>
+        <p:nvSpPr>
+          <p:cNvPr id="2" name="Title 1"/>
+          <p:cNvSpPr>
+            <a:spLocks noGrp="1"/>
+          </p:cNvSpPr>
+          <p:nvPr>
+            <p:ph type="title"/>
+          </p:nvPr>
+        </p:nvSpPr>
+        <p:spPr/>
+        <p:txBody>
+          <a:bodyPr/>
+          <a:lstStyle/>
+          <a:p>
+            <a:r>
+              <a:rPr lang="en-US" dirty="0" smtClean="0"/>
+              <a:t>Multiple Shared Platforms Pattern</a:t>
+            </a:r>
+            <a:endParaRPr lang="en-US" dirty="0"/>
+          </a:p>
+        </p:txBody>
+      </p:sp>
+      <p:sp>
+        <p:nvSpPr>
+          <p:cNvPr id="3" name="Content Placeholder 2"/>
+          <p:cNvSpPr>
+            <a:spLocks noGrp="1"/>
+          </p:cNvSpPr>
+          <p:nvPr>
+            <p:ph idx="1"/>
+          </p:nvPr>
+        </p:nvSpPr>
+        <p:spPr/>
+        <p:txBody>
+          <a:bodyPr/>
+          <a:lstStyle/>
+          <a:p>
+            <a:r>
+              <a:rPr lang="en-US" sz="2600" dirty="0" smtClean="0"/>
+              <a:t>It is an extension of </a:t>
+            </a:r>
+            <a:r>
+              <a:rPr lang="en-US" sz="2600" dirty="0" err="1" smtClean="0"/>
+              <a:t>ShPP</a:t>
+            </a:r>
+            <a:r>
+              <a:rPr lang="en-US" sz="2600" dirty="0" smtClean="0"/>
+              <a:t> and </a:t>
+            </a:r>
+            <a:r>
+              <a:rPr lang="en-US" sz="2600" i="1" dirty="0" smtClean="0">
+                <a:solidFill>
+                  <a:srgbClr val="C00000"/>
+                </a:solidFill>
+              </a:rPr>
+              <a:t>mix</a:t>
+            </a:r>
+            <a:r>
+              <a:rPr lang="en-US" sz="2600" dirty="0" smtClean="0"/>
+              <a:t> both vertical and horizontal scaling.</a:t>
+            </a:r>
+          </a:p>
+          <a:p>
+            <a:r>
+              <a:rPr lang="en-US" sz="2600" dirty="0" smtClean="0"/>
+              <a:t>At initialization time, a </a:t>
+            </a:r>
+            <a:r>
+              <a:rPr lang="en-US" sz="2600" i="1" dirty="0" smtClean="0">
+                <a:solidFill>
+                  <a:srgbClr val="C00000"/>
+                </a:solidFill>
+              </a:rPr>
+              <a:t>single</a:t>
+            </a:r>
+            <a:r>
+              <a:rPr lang="en-US" sz="2600" dirty="0" smtClean="0"/>
+              <a:t>, shared, multi-tenant platform is deployed.</a:t>
+            </a:r>
+          </a:p>
+          <a:p>
+            <a:r>
+              <a:rPr lang="en-US" sz="2600" dirty="0" smtClean="0"/>
+              <a:t>Upon an increase in the load, additional resources (</a:t>
+            </a:r>
+            <a:r>
+              <a:rPr lang="en-US" sz="2600" i="1" dirty="0" smtClean="0">
+                <a:solidFill>
+                  <a:srgbClr val="C00000"/>
+                </a:solidFill>
+              </a:rPr>
+              <a:t>CPU, RAM, bandwidth</a:t>
+            </a:r>
+            <a:r>
+              <a:rPr lang="en-US" sz="2600" dirty="0" smtClean="0"/>
+              <a:t>) are assigned to maintain the performance metrics.</a:t>
+            </a:r>
+          </a:p>
+          <a:p>
+            <a:r>
+              <a:rPr lang="en-US" sz="2600" dirty="0" smtClean="0"/>
+              <a:t>In case additional resources are not sufficient, a new platform is deployed and a part of the existing tenants are </a:t>
+            </a:r>
+            <a:r>
+              <a:rPr lang="en-US" sz="2600" i="1" dirty="0" smtClean="0">
+                <a:solidFill>
+                  <a:srgbClr val="C00000"/>
+                </a:solidFill>
+              </a:rPr>
+              <a:t>migrated</a:t>
+            </a:r>
+            <a:r>
+              <a:rPr lang="en-US" sz="2600" dirty="0" smtClean="0"/>
+              <a:t> to the new platform together with the services they own.</a:t>
+            </a:r>
+            <a:endParaRPr lang="en-US" sz="2600" dirty="0"/>
+          </a:p>
+        </p:txBody>
+      </p:sp>
+    </p:spTree>
+  </p:cSld>
+  <p:clrMapOvr>
+    <a:masterClrMapping/>
+  </p:clrMapOvr>
+</p:sld>
+</file>
+
+<file path=ppt/slides/slide17.xml><?xml version="1.0" encoding="utf-8"?>
+<p:sld xmlns:a="http://schemas.openxmlformats.org/drawingml/2006/main" xmlns:r="http://schemas.openxmlformats.org/officeDocument/2006/relationships" xmlns:p="http://schemas.openxmlformats.org/presentationml/2006/main">
+  <p:cSld>
+    <p:spTree>
+      <p:nvGrpSpPr>
+        <p:cNvPr id="1" name=""/>
+        <p:cNvGrpSpPr/>
+        <p:nvPr/>
+      </p:nvGrpSpPr>
+      <p:grpSpPr>
+        <a:xfrm>
+          <a:off x="0" y="0"/>
+          <a:ext cx="0" cy="0"/>
+          <a:chOff x="0" y="0"/>
+          <a:chExt cx="0" cy="0"/>
+        </a:xfrm>
+      </p:grpSpPr>
+      <p:sp>
+        <p:nvSpPr>
+          <p:cNvPr id="2" name="Title 1"/>
+          <p:cNvSpPr>
+            <a:spLocks noGrp="1"/>
+          </p:cNvSpPr>
+          <p:nvPr>
+            <p:ph type="title"/>
+          </p:nvPr>
+        </p:nvSpPr>
+        <p:spPr/>
+        <p:txBody>
+          <a:bodyPr/>
+          <a:lstStyle/>
+          <a:p>
+            <a:r>
+              <a:rPr lang="en-US" sz="4000" dirty="0" smtClean="0"/>
+              <a:t>Multiple Clustered Platforms Pattern</a:t>
+            </a:r>
+            <a:endParaRPr lang="en-US" sz="4000" dirty="0"/>
+          </a:p>
+        </p:txBody>
+      </p:sp>
+      <p:sp>
+        <p:nvSpPr>
+          <p:cNvPr id="3" name="Content Placeholder 2"/>
+          <p:cNvSpPr>
+            <a:spLocks noGrp="1"/>
+          </p:cNvSpPr>
+          <p:nvPr>
+            <p:ph idx="1"/>
+          </p:nvPr>
+        </p:nvSpPr>
+        <p:spPr/>
+        <p:txBody>
+          <a:bodyPr/>
+          <a:lstStyle/>
+          <a:p>
+            <a:r>
+              <a:rPr lang="en-US" sz="2400" dirty="0" smtClean="0"/>
+              <a:t>It is an extension of CPP and provides horizontal scaling at two levels of abstraction.</a:t>
+            </a:r>
+          </a:p>
+          <a:p>
+            <a:r>
+              <a:rPr lang="en-US" sz="2400" dirty="0" smtClean="0"/>
+              <a:t>At initialization time, a </a:t>
+            </a:r>
+            <a:r>
+              <a:rPr lang="en-US" sz="2400" i="1" dirty="0" smtClean="0">
+                <a:solidFill>
+                  <a:srgbClr val="C00000"/>
+                </a:solidFill>
+              </a:rPr>
+              <a:t>single</a:t>
+            </a:r>
+            <a:r>
+              <a:rPr lang="en-US" sz="2400" dirty="0" smtClean="0"/>
+              <a:t>, shared, multi-tenant platform supporting clustering is deployed.</a:t>
+            </a:r>
+          </a:p>
+          <a:p>
+            <a:r>
+              <a:rPr lang="en-US" sz="2400" dirty="0" smtClean="0"/>
+              <a:t>Upon an increase in the load, additional resources (i.e., </a:t>
+            </a:r>
+            <a:r>
+              <a:rPr lang="en-US" sz="2400" i="1" dirty="0" smtClean="0">
+                <a:solidFill>
+                  <a:srgbClr val="C00000"/>
+                </a:solidFill>
+              </a:rPr>
+              <a:t>machines</a:t>
+            </a:r>
+            <a:r>
+              <a:rPr lang="en-US" sz="2400" dirty="0" smtClean="0"/>
+              <a:t> in the cluster) are added to maintain the performance level.</a:t>
+            </a:r>
+          </a:p>
+          <a:p>
+            <a:r>
+              <a:rPr lang="en-US" sz="2400" dirty="0" smtClean="0"/>
+              <a:t>In case the extended cluster is not sufficient to manage the new load, a new platform supporting clustering is deployed, and a part of the existing tenants are </a:t>
+            </a:r>
+            <a:r>
+              <a:rPr lang="en-US" sz="2400" i="1" dirty="0" smtClean="0">
+                <a:solidFill>
+                  <a:srgbClr val="C00000"/>
+                </a:solidFill>
+              </a:rPr>
+              <a:t>migrated</a:t>
+            </a:r>
+            <a:r>
+              <a:rPr lang="en-US" sz="2400" dirty="0" smtClean="0"/>
+              <a:t> to the new clustered platform together with the services they own.</a:t>
+            </a:r>
+          </a:p>
+        </p:txBody>
+      </p:sp>
+    </p:spTree>
+  </p:cSld>
+  <p:clrMapOvr>
+    <a:masterClrMapping/>
+  </p:clrMapOvr>
+</p:sld>
+</file>
+
+<file path=ppt/slides/slide18.xml><?xml version="1.0" encoding="utf-8"?>
 <p:sld xmlns:a="http://schemas.openxmlformats.org/drawingml/2006/main" xmlns:r="http://schemas.openxmlformats.org/officeDocument/2006/relationships" xmlns:p="http://schemas.openxmlformats.org/presentationml/2006/main">
   <p:cSld>
     <p:spTree>
@@ -6761,269 +7040,6 @@
 </p:sld>
 </file>
 
-<file path=ppt/slides/slide17.xml><?xml version="1.0" encoding="utf-8"?>
-<p:sld xmlns:a="http://schemas.openxmlformats.org/drawingml/2006/main" xmlns:r="http://schemas.openxmlformats.org/officeDocument/2006/relationships" xmlns:p="http://schemas.openxmlformats.org/presentationml/2006/main">
-  <p:cSld>
-    <p:spTree>
-      <p:nvGrpSpPr>
-        <p:cNvPr id="1" name=""/>
-        <p:cNvGrpSpPr/>
-        <p:nvPr/>
-      </p:nvGrpSpPr>
-      <p:grpSpPr>
-        <a:xfrm>
-          <a:off x="0" y="0"/>
-          <a:ext cx="0" cy="0"/>
-          <a:chOff x="0" y="0"/>
-          <a:chExt cx="0" cy="0"/>
-        </a:xfrm>
-      </p:grpSpPr>
-      <p:sp>
-        <p:nvSpPr>
-          <p:cNvPr id="2" name="Title 1"/>
-          <p:cNvSpPr>
-            <a:spLocks noGrp="1"/>
-          </p:cNvSpPr>
-          <p:nvPr>
-            <p:ph type="title"/>
-          </p:nvPr>
-        </p:nvSpPr>
-        <p:spPr/>
-        <p:txBody>
-          <a:bodyPr/>
-          <a:lstStyle/>
-          <a:p>
-            <a:r>
-              <a:rPr lang="en-US" dirty="0" smtClean="0"/>
-              <a:t>Session State</a:t>
-            </a:r>
-            <a:endParaRPr lang="en-US" dirty="0"/>
-          </a:p>
-        </p:txBody>
-      </p:sp>
-      <p:sp>
-        <p:nvSpPr>
-          <p:cNvPr id="3" name="Content Placeholder 2"/>
-          <p:cNvSpPr>
-            <a:spLocks noGrp="1"/>
-          </p:cNvSpPr>
-          <p:nvPr>
-            <p:ph idx="1"/>
-          </p:nvPr>
-        </p:nvSpPr>
-        <p:spPr/>
-        <p:txBody>
-          <a:bodyPr/>
-          <a:lstStyle/>
-          <a:p>
-            <a:r>
-              <a:rPr lang="en-US" sz="2400" dirty="0" smtClean="0"/>
-              <a:t>Usually a cloud-based application </a:t>
-            </a:r>
-            <a:r>
-              <a:rPr lang="en-US" sz="2400" i="1" dirty="0" smtClean="0">
-                <a:solidFill>
-                  <a:srgbClr val="C00000"/>
-                </a:solidFill>
-              </a:rPr>
-              <a:t>maintain user session</a:t>
-            </a:r>
-            <a:r>
-              <a:rPr lang="en-US" sz="2400" dirty="0" smtClean="0"/>
-              <a:t> on its server side to authorize her at every request.</a:t>
-            </a:r>
-          </a:p>
-          <a:p>
-            <a:r>
-              <a:rPr lang="en-US" sz="2400" dirty="0" smtClean="0"/>
-              <a:t>Session is also used </a:t>
-            </a:r>
-            <a:r>
-              <a:rPr lang="en-US" sz="2400" i="1" dirty="0" smtClean="0">
-                <a:solidFill>
-                  <a:srgbClr val="C00000"/>
-                </a:solidFill>
-              </a:rPr>
-              <a:t>map the user requests to user data</a:t>
-            </a:r>
-            <a:r>
-              <a:rPr lang="en-US" sz="2400" dirty="0" smtClean="0"/>
-              <a:t> in some designs.</a:t>
-            </a:r>
-          </a:p>
-          <a:p>
-            <a:r>
-              <a:rPr lang="en-US" sz="2400" dirty="0" smtClean="0"/>
-              <a:t>A </a:t>
-            </a:r>
-            <a:r>
-              <a:rPr lang="en-US" sz="2400" u="sng" dirty="0" smtClean="0"/>
-              <a:t>common approach</a:t>
-            </a:r>
-            <a:r>
-              <a:rPr lang="en-US" sz="2400" dirty="0" smtClean="0"/>
-              <a:t> is to </a:t>
-            </a:r>
-            <a:r>
-              <a:rPr lang="en-US" sz="2400" i="1" dirty="0" smtClean="0">
-                <a:solidFill>
-                  <a:srgbClr val="C00000"/>
-                </a:solidFill>
-              </a:rPr>
-              <a:t>store session data in memory</a:t>
-            </a:r>
-            <a:r>
-              <a:rPr lang="en-US" sz="2400" dirty="0" smtClean="0"/>
-              <a:t>.</a:t>
-            </a:r>
-          </a:p>
-          <a:p>
-            <a:r>
-              <a:rPr lang="en-US" sz="2400" dirty="0" smtClean="0"/>
-              <a:t>Unfortunately, this approach </a:t>
-            </a:r>
-            <a:r>
-              <a:rPr lang="en-US" sz="2400" i="1" dirty="0" smtClean="0">
-                <a:solidFill>
-                  <a:srgbClr val="C00000"/>
-                </a:solidFill>
-              </a:rPr>
-              <a:t>doesn't scale very well</a:t>
-            </a:r>
-            <a:r>
-              <a:rPr lang="en-US" sz="2400" dirty="0" smtClean="0"/>
-              <a:t> because the moment the application scales out beyond a single server, it becomes a necessity that the session state must </a:t>
-            </a:r>
-            <a:r>
-              <a:rPr lang="en-US" sz="2400" i="1" dirty="0" smtClean="0">
-                <a:solidFill>
-                  <a:srgbClr val="C00000"/>
-                </a:solidFill>
-              </a:rPr>
-              <a:t>be shared</a:t>
-            </a:r>
-            <a:r>
-              <a:rPr lang="en-US" sz="2400" dirty="0" smtClean="0"/>
-              <a:t> between multiple servers.</a:t>
-            </a:r>
-          </a:p>
-          <a:p>
-            <a:r>
-              <a:rPr lang="en-US" sz="2400" dirty="0" smtClean="0"/>
-              <a:t>The common solution is to </a:t>
-            </a:r>
-            <a:r>
-              <a:rPr lang="en-US" sz="2400" i="1" dirty="0" smtClean="0">
-                <a:solidFill>
-                  <a:srgbClr val="C00000"/>
-                </a:solidFill>
-              </a:rPr>
-              <a:t>store session state</a:t>
-            </a:r>
-            <a:r>
-              <a:rPr lang="en-US" sz="2400" dirty="0" smtClean="0"/>
-              <a:t> on altogether </a:t>
-            </a:r>
-            <a:r>
-              <a:rPr lang="en-US" sz="2400" u="sng" dirty="0" smtClean="0"/>
-              <a:t>different data store</a:t>
-            </a:r>
-            <a:r>
-              <a:rPr lang="en-US" sz="2400" dirty="0" smtClean="0"/>
-              <a:t> and share it with all the servers.</a:t>
-            </a:r>
-          </a:p>
-          <a:p>
-            <a:endParaRPr lang="en-US" sz="2400" dirty="0" smtClean="0"/>
-          </a:p>
-        </p:txBody>
-      </p:sp>
-    </p:spTree>
-  </p:cSld>
-  <p:clrMapOvr>
-    <a:masterClrMapping/>
-  </p:clrMapOvr>
-</p:sld>
-</file>
-
-<file path=ppt/slides/slide18.xml><?xml version="1.0" encoding="utf-8"?>
-<p:sld xmlns:a="http://schemas.openxmlformats.org/drawingml/2006/main" xmlns:r="http://schemas.openxmlformats.org/officeDocument/2006/relationships" xmlns:p="http://schemas.openxmlformats.org/presentationml/2006/main">
-  <p:cSld>
-    <p:spTree>
-      <p:nvGrpSpPr>
-        <p:cNvPr id="1" name=""/>
-        <p:cNvGrpSpPr/>
-        <p:nvPr/>
-      </p:nvGrpSpPr>
-      <p:grpSpPr>
-        <a:xfrm>
-          <a:off x="0" y="0"/>
-          <a:ext cx="0" cy="0"/>
-          <a:chOff x="0" y="0"/>
-          <a:chExt cx="0" cy="0"/>
-        </a:xfrm>
-      </p:grpSpPr>
-      <p:sp>
-        <p:nvSpPr>
-          <p:cNvPr id="2" name="Title 1"/>
-          <p:cNvSpPr>
-            <a:spLocks noGrp="1"/>
-          </p:cNvSpPr>
-          <p:nvPr>
-            <p:ph type="title"/>
-          </p:nvPr>
-        </p:nvSpPr>
-        <p:spPr/>
-        <p:txBody>
-          <a:bodyPr/>
-          <a:lstStyle/>
-          <a:p>
-            <a:r>
-              <a:rPr lang="en-US" dirty="0" smtClean="0"/>
-              <a:t>Statelessness</a:t>
-            </a:r>
-            <a:endParaRPr lang="en-US" dirty="0"/>
-          </a:p>
-        </p:txBody>
-      </p:sp>
-      <p:sp>
-        <p:nvSpPr>
-          <p:cNvPr id="3" name="Content Placeholder 2"/>
-          <p:cNvSpPr>
-            <a:spLocks noGrp="1"/>
-          </p:cNvSpPr>
-          <p:nvPr>
-            <p:ph idx="1"/>
-          </p:nvPr>
-        </p:nvSpPr>
-        <p:spPr/>
-        <p:txBody>
-          <a:bodyPr/>
-          <a:lstStyle/>
-          <a:p>
-            <a:r>
-              <a:rPr lang="en-US" sz="2800" i="1" dirty="0" smtClean="0">
-                <a:solidFill>
-                  <a:srgbClr val="C00000"/>
-                </a:solidFill>
-              </a:rPr>
-              <a:t>Statelessness</a:t>
-            </a:r>
-            <a:r>
-              <a:rPr lang="en-US" sz="2800" dirty="0" smtClean="0"/>
-              <a:t> is an important property that every cloud-based application needs to posses in order to achieve scalability and availability.</a:t>
-            </a:r>
-          </a:p>
-        </p:txBody>
-      </p:sp>
-    </p:spTree>
-  </p:cSld>
-  <p:clrMapOvr>
-    <a:masterClrMapping/>
-  </p:clrMapOvr>
-</p:sld>
-</file>
-
 <file path=ppt/slides/slide19.xml><?xml version="1.0" encoding="utf-8"?>
 <p:sld xmlns:a="http://schemas.openxmlformats.org/drawingml/2006/main" xmlns:r="http://schemas.openxmlformats.org/officeDocument/2006/relationships" xmlns:p="http://schemas.openxmlformats.org/presentationml/2006/main">
   <p:cSld>
@@ -7058,7 +7074,7 @@
           <a:p>
             <a:r>
               <a:rPr lang="en-US" dirty="0" smtClean="0"/>
-              <a:t>Tools</a:t>
+              <a:t>Session State</a:t>
             </a:r>
             <a:endParaRPr lang="en-US" dirty="0"/>
           </a:p>
@@ -7080,52 +7096,123 @@
           <a:lstStyle/>
           <a:p>
             <a:r>
-              <a:rPr lang="en-US" sz="2400" dirty="0" smtClean="0">
-                <a:hlinkClick r:id="rId2"/>
+              <a:rPr lang="en-US" sz="2400" dirty="0" smtClean="0"/>
+              <a:t>Usually a cloud-based application </a:t>
+            </a:r>
+            <a:r>
+              <a:rPr lang="en-US" sz="2400" i="1" dirty="0" smtClean="0">
+                <a:solidFill>
+                  <a:srgbClr val="C00000"/>
+                </a:solidFill>
               </a:rPr>
-              <a:t>http://terracotta.org/products/web-sessions</a:t>
-            </a:r>
-            <a:endParaRPr lang="en-US" sz="2400" dirty="0" smtClean="0"/>
-          </a:p>
-          <a:p>
-            <a:r>
-              <a:rPr lang="en-US" sz="2400" dirty="0" smtClean="0">
-                <a:hlinkClick r:id="rId3"/>
+              <a:t>maintain user session</a:t>
+            </a:r>
+            <a:r>
+              <a:rPr lang="en-US" sz="2400" dirty="0" smtClean="0"/>
+              <a:t> on its server side to authorize her at every request.</a:t>
+            </a:r>
+          </a:p>
+          <a:p>
+            <a:r>
+              <a:rPr lang="en-US" sz="2400" dirty="0" smtClean="0"/>
+              <a:t>Session is also used </a:t>
+            </a:r>
+            <a:r>
+              <a:rPr lang="en-US" sz="2400" i="1" dirty="0" smtClean="0">
+                <a:solidFill>
+                  <a:srgbClr val="C00000"/>
+                </a:solidFill>
               </a:rPr>
-              <a:t>http://aws.amazon.com/elasticache/</a:t>
-            </a:r>
-            <a:endParaRPr lang="en-US" sz="2400" dirty="0" smtClean="0"/>
-          </a:p>
-          <a:p>
-            <a:r>
-              <a:rPr lang="en-US" sz="2400" dirty="0" smtClean="0"/>
-              <a:t>Synchronization with RDS (</a:t>
-            </a:r>
-            <a:r>
-              <a:rPr lang="en-US" sz="2400" dirty="0" err="1" smtClean="0"/>
-              <a:t>MySQL</a:t>
-            </a:r>
-            <a:r>
-              <a:rPr lang="en-US" sz="2400" dirty="0" smtClean="0"/>
-              <a:t>, Oracle, MS SQL)</a:t>
-            </a:r>
-          </a:p>
-          <a:p>
-            <a:r>
-              <a:rPr lang="en-US" sz="2400" dirty="0" smtClean="0">
-                <a:hlinkClick r:id="rId4"/>
+              <a:t>map the user requests to user data</a:t>
+            </a:r>
+            <a:r>
+              <a:rPr lang="en-US" sz="2400" dirty="0" smtClean="0"/>
+              <a:t> in some designs.</a:t>
+            </a:r>
+          </a:p>
+          <a:p>
+            <a:r>
+              <a:rPr lang="en-US" sz="2400" dirty="0" smtClean="0"/>
+              <a:t>A </a:t>
+            </a:r>
+            <a:r>
+              <a:rPr lang="en-US" sz="2400" u="sng" dirty="0" smtClean="0"/>
+              <a:t>common approach</a:t>
+            </a:r>
+            <a:r>
+              <a:rPr lang="en-US" sz="2400" dirty="0" smtClean="0"/>
+              <a:t> is to </a:t>
+            </a:r>
+            <a:r>
+              <a:rPr lang="en-US" sz="2400" i="1" dirty="0" smtClean="0">
+                <a:solidFill>
+                  <a:srgbClr val="C00000"/>
+                </a:solidFill>
               </a:rPr>
-              <a:t>http://aws.amazon.com/dynamodb/</a:t>
-            </a:r>
-            <a:endParaRPr lang="en-US" sz="2400" dirty="0" smtClean="0"/>
-          </a:p>
-          <a:p>
-            <a:r>
-              <a:rPr lang="en-US" sz="2400" dirty="0" smtClean="0">
-                <a:hlinkClick r:id="rId5"/>
+              <a:t>store session data in memory</a:t>
+            </a:r>
+            <a:r>
+              <a:rPr lang="en-US" sz="2400" dirty="0" smtClean="0"/>
+              <a:t>.</a:t>
+            </a:r>
+          </a:p>
+          <a:p>
+            <a:r>
+              <a:rPr lang="en-US" sz="2400" dirty="0" smtClean="0"/>
+              <a:t>Unfortunately, this approach </a:t>
+            </a:r>
+            <a:r>
+              <a:rPr lang="en-US" sz="2400" i="1" dirty="0" smtClean="0">
+                <a:solidFill>
+                  <a:srgbClr val="C00000"/>
+                </a:solidFill>
               </a:rPr>
-              <a:t>http://www.couchbase.com</a:t>
-            </a:r>
+              <a:t>doesn't scale very well</a:t>
+            </a:r>
+            <a:r>
+              <a:rPr lang="en-US" sz="2400" dirty="0" smtClean="0"/>
+              <a:t> because the moment the application scales out beyond a single server, it becomes a necessity that the session state must </a:t>
+            </a:r>
+            <a:r>
+              <a:rPr lang="en-US" sz="2400" i="1" dirty="0" smtClean="0">
+                <a:solidFill>
+                  <a:srgbClr val="C00000"/>
+                </a:solidFill>
+              </a:rPr>
+              <a:t>be shared</a:t>
+            </a:r>
+            <a:r>
+              <a:rPr lang="en-US" sz="2400" dirty="0" smtClean="0"/>
+              <a:t> between multiple servers.</a:t>
+            </a:r>
+          </a:p>
+          <a:p>
+            <a:r>
+              <a:rPr lang="en-US" sz="2400" dirty="0" smtClean="0"/>
+              <a:t>The common solution is to </a:t>
+            </a:r>
+            <a:r>
+              <a:rPr lang="en-US" sz="2400" i="1" dirty="0" smtClean="0">
+                <a:solidFill>
+                  <a:srgbClr val="C00000"/>
+                </a:solidFill>
+              </a:rPr>
+              <a:t>store session state</a:t>
+            </a:r>
+            <a:r>
+              <a:rPr lang="en-US" sz="2400" dirty="0" smtClean="0"/>
+              <a:t> on altogether </a:t>
+            </a:r>
+            <a:r>
+              <a:rPr lang="en-US" sz="2400" u="sng" dirty="0" smtClean="0"/>
+              <a:t>different data store</a:t>
+            </a:r>
+            <a:r>
+              <a:rPr lang="en-US" sz="2400" dirty="0" smtClean="0"/>
+              <a:t> and share it with all the servers.</a:t>
+            </a:r>
+          </a:p>
+          <a:p>
             <a:endParaRPr lang="en-US" sz="2400" dirty="0" smtClean="0"/>
           </a:p>
         </p:txBody>
@@ -7172,7 +7259,7 @@
           <a:p>
             <a:r>
               <a:rPr lang="en-US" dirty="0" smtClean="0"/>
-              <a:t>References</a:t>
+              <a:t>Objectives</a:t>
             </a:r>
             <a:endParaRPr lang="en-US" dirty="0"/>
           </a:p>
@@ -7190,76 +7277,25 @@
         </p:nvSpPr>
         <p:spPr>
           <a:xfrm>
-            <a:off x="457200" y="1524000"/>
-            <a:ext cx="5638800" cy="4800600"/>
+            <a:off x="457200" y="1828800"/>
+            <a:ext cx="5334000" cy="3886200"/>
           </a:xfrm>
         </p:spPr>
         <p:txBody>
           <a:bodyPr/>
           <a:lstStyle/>
           <a:p>
-            <a:pPr>
-              <a:buFont typeface="+mj-lt"/>
-              <a:buAutoNum type="arabicPeriod"/>
+            <a:pPr marL="571500" indent="-571500">
+              <a:buFont typeface="Wingdings" pitchFamily="2" charset="2"/>
+              <a:buChar char="Ø"/>
             </a:pPr>
-            <a:r>
-              <a:rPr lang="en-US" sz="2200" dirty="0" err="1" smtClean="0"/>
-              <a:t>Trieu</a:t>
-            </a:r>
-            <a:r>
-              <a:rPr lang="en-US" sz="2200" dirty="0" smtClean="0"/>
-              <a:t> C. </a:t>
-            </a:r>
-            <a:r>
-              <a:rPr lang="en-US" sz="2200" dirty="0" err="1" smtClean="0"/>
-              <a:t>Chieu</a:t>
-            </a:r>
-            <a:r>
-              <a:rPr lang="en-US" sz="2200" dirty="0" smtClean="0"/>
-              <a:t> et al. (2009). Dynamic Scaling of Web Applications in a Virtualized Cloud Computing Environment.</a:t>
-            </a:r>
-          </a:p>
-          <a:p>
-            <a:pPr>
-              <a:buFont typeface="+mj-lt"/>
-              <a:buAutoNum type="arabicPeriod"/>
-            </a:pPr>
-            <a:r>
-              <a:rPr lang="en-US" sz="2200" dirty="0" smtClean="0"/>
-              <a:t>Claudio A. </a:t>
-            </a:r>
-            <a:r>
-              <a:rPr lang="en-US" sz="2200" dirty="0" err="1" smtClean="0"/>
-              <a:t>Ardagna</a:t>
-            </a:r>
-            <a:r>
-              <a:rPr lang="en-US" sz="2200" dirty="0" smtClean="0"/>
-              <a:t> et al. (2012). Scalability Patterns for Platform-as-a-Service.</a:t>
-            </a:r>
-          </a:p>
-          <a:p>
-            <a:pPr>
-              <a:buFont typeface="+mj-lt"/>
-              <a:buAutoNum type="arabicPeriod"/>
-            </a:pPr>
-            <a:r>
-              <a:rPr lang="en-US" sz="2200" dirty="0" smtClean="0"/>
-              <a:t>K. R. </a:t>
-            </a:r>
-            <a:r>
-              <a:rPr lang="en-US" sz="2200" dirty="0" err="1" smtClean="0"/>
-              <a:t>Jayaram</a:t>
-            </a:r>
-            <a:r>
-              <a:rPr lang="en-US" sz="2200" dirty="0" smtClean="0"/>
-              <a:t> (2014). Elastic Remote Methods.</a:t>
-            </a:r>
+            <a:endParaRPr lang="en-US" sz="2400" dirty="0" smtClean="0"/>
           </a:p>
         </p:txBody>
       </p:sp>
       <p:pic>
         <p:nvPicPr>
-          <p:cNvPr id="4" name="Picture 4" descr="http://2.bp.blogspot.com/-FqRM_5NQE6Q/TaSdzyWfvtI/AAAAAAAAAFg/C_2LDJWJOx4/s1600/books-pile.jpg"/>
+          <p:cNvPr id="4" name="Picture 2"/>
           <p:cNvPicPr>
             <a:picLocks noChangeAspect="1" noChangeArrowheads="1"/>
           </p:cNvPicPr>
@@ -7274,13 +7310,20 @@
         </p:blipFill>
         <p:spPr bwMode="auto">
           <a:xfrm>
-            <a:off x="6096000" y="1676400"/>
-            <a:ext cx="2724150" cy="4133850"/>
+            <a:off x="6019800" y="1828800"/>
+            <a:ext cx="2762250" cy="2114550"/>
           </a:xfrm>
           <a:prstGeom prst="rect">
             <a:avLst/>
           </a:prstGeom>
           <a:noFill/>
+          <a:ln w="9525">
+            <a:noFill/>
+            <a:miter lim="800000"/>
+            <a:headEnd/>
+            <a:tailEnd/>
+          </a:ln>
+          <a:effectLst/>
         </p:spPr>
       </p:pic>
     </p:spTree>
@@ -7299,6 +7342,198 @@
 </file>
 
 <file path=ppt/slides/slide20.xml><?xml version="1.0" encoding="utf-8"?>
+<p:sld xmlns:a="http://schemas.openxmlformats.org/drawingml/2006/main" xmlns:r="http://schemas.openxmlformats.org/officeDocument/2006/relationships" xmlns:p="http://schemas.openxmlformats.org/presentationml/2006/main">
+  <p:cSld>
+    <p:spTree>
+      <p:nvGrpSpPr>
+        <p:cNvPr id="1" name=""/>
+        <p:cNvGrpSpPr/>
+        <p:nvPr/>
+      </p:nvGrpSpPr>
+      <p:grpSpPr>
+        <a:xfrm>
+          <a:off x="0" y="0"/>
+          <a:ext cx="0" cy="0"/>
+          <a:chOff x="0" y="0"/>
+          <a:chExt cx="0" cy="0"/>
+        </a:xfrm>
+      </p:grpSpPr>
+      <p:sp>
+        <p:nvSpPr>
+          <p:cNvPr id="2" name="Title 1"/>
+          <p:cNvSpPr>
+            <a:spLocks noGrp="1"/>
+          </p:cNvSpPr>
+          <p:nvPr>
+            <p:ph type="title"/>
+          </p:nvPr>
+        </p:nvSpPr>
+        <p:spPr/>
+        <p:txBody>
+          <a:bodyPr/>
+          <a:lstStyle/>
+          <a:p>
+            <a:r>
+              <a:rPr lang="en-US" dirty="0" smtClean="0"/>
+              <a:t>Statelessness</a:t>
+            </a:r>
+            <a:endParaRPr lang="en-US" dirty="0"/>
+          </a:p>
+        </p:txBody>
+      </p:sp>
+      <p:sp>
+        <p:nvSpPr>
+          <p:cNvPr id="3" name="Content Placeholder 2"/>
+          <p:cNvSpPr>
+            <a:spLocks noGrp="1"/>
+          </p:cNvSpPr>
+          <p:nvPr>
+            <p:ph idx="1"/>
+          </p:nvPr>
+        </p:nvSpPr>
+        <p:spPr/>
+        <p:txBody>
+          <a:bodyPr/>
+          <a:lstStyle/>
+          <a:p>
+            <a:r>
+              <a:rPr lang="en-US" sz="2800" i="1" dirty="0" smtClean="0">
+                <a:solidFill>
+                  <a:srgbClr val="C00000"/>
+                </a:solidFill>
+              </a:rPr>
+              <a:t>Statelessness</a:t>
+            </a:r>
+            <a:r>
+              <a:rPr lang="en-US" sz="2800" dirty="0" smtClean="0"/>
+              <a:t> is an important property that every cloud-based application needs to posses in order to achieve scalability and availability.</a:t>
+            </a:r>
+          </a:p>
+        </p:txBody>
+      </p:sp>
+    </p:spTree>
+  </p:cSld>
+  <p:clrMapOvr>
+    <a:masterClrMapping/>
+  </p:clrMapOvr>
+</p:sld>
+</file>
+
+<file path=ppt/slides/slide21.xml><?xml version="1.0" encoding="utf-8"?>
+<p:sld xmlns:a="http://schemas.openxmlformats.org/drawingml/2006/main" xmlns:r="http://schemas.openxmlformats.org/officeDocument/2006/relationships" xmlns:p="http://schemas.openxmlformats.org/presentationml/2006/main">
+  <p:cSld>
+    <p:spTree>
+      <p:nvGrpSpPr>
+        <p:cNvPr id="1" name=""/>
+        <p:cNvGrpSpPr/>
+        <p:nvPr/>
+      </p:nvGrpSpPr>
+      <p:grpSpPr>
+        <a:xfrm>
+          <a:off x="0" y="0"/>
+          <a:ext cx="0" cy="0"/>
+          <a:chOff x="0" y="0"/>
+          <a:chExt cx="0" cy="0"/>
+        </a:xfrm>
+      </p:grpSpPr>
+      <p:sp>
+        <p:nvSpPr>
+          <p:cNvPr id="2" name="Title 1"/>
+          <p:cNvSpPr>
+            <a:spLocks noGrp="1"/>
+          </p:cNvSpPr>
+          <p:nvPr>
+            <p:ph type="title"/>
+          </p:nvPr>
+        </p:nvSpPr>
+        <p:spPr/>
+        <p:txBody>
+          <a:bodyPr/>
+          <a:lstStyle/>
+          <a:p>
+            <a:r>
+              <a:rPr lang="en-US" dirty="0" smtClean="0"/>
+              <a:t>Tools</a:t>
+            </a:r>
+            <a:endParaRPr lang="en-US" dirty="0"/>
+          </a:p>
+        </p:txBody>
+      </p:sp>
+      <p:sp>
+        <p:nvSpPr>
+          <p:cNvPr id="3" name="Content Placeholder 2"/>
+          <p:cNvSpPr>
+            <a:spLocks noGrp="1"/>
+          </p:cNvSpPr>
+          <p:nvPr>
+            <p:ph idx="1"/>
+          </p:nvPr>
+        </p:nvSpPr>
+        <p:spPr/>
+        <p:txBody>
+          <a:bodyPr/>
+          <a:lstStyle/>
+          <a:p>
+            <a:r>
+              <a:rPr lang="en-US" sz="2400" dirty="0" smtClean="0">
+                <a:hlinkClick r:id="rId2"/>
+              </a:rPr>
+              <a:t>http://terracotta.org/products/web-sessions</a:t>
+            </a:r>
+            <a:endParaRPr lang="en-US" sz="2400" dirty="0" smtClean="0"/>
+          </a:p>
+          <a:p>
+            <a:r>
+              <a:rPr lang="en-US" sz="2400" dirty="0" smtClean="0">
+                <a:hlinkClick r:id="rId3"/>
+              </a:rPr>
+              <a:t>http://aws.amazon.com/elasticache/</a:t>
+            </a:r>
+            <a:endParaRPr lang="en-US" sz="2400" dirty="0" smtClean="0"/>
+          </a:p>
+          <a:p>
+            <a:r>
+              <a:rPr lang="en-US" sz="2400" dirty="0" smtClean="0"/>
+              <a:t>Synchronization with RDS (</a:t>
+            </a:r>
+            <a:r>
+              <a:rPr lang="en-US" sz="2400" dirty="0" err="1" smtClean="0"/>
+              <a:t>MySQL</a:t>
+            </a:r>
+            <a:r>
+              <a:rPr lang="en-US" sz="2400" dirty="0" smtClean="0"/>
+              <a:t>, Oracle, MS SQL)</a:t>
+            </a:r>
+          </a:p>
+          <a:p>
+            <a:r>
+              <a:rPr lang="en-US" sz="2400" dirty="0" smtClean="0">
+                <a:hlinkClick r:id="rId4"/>
+              </a:rPr>
+              <a:t>http://aws.amazon.com/dynamodb/</a:t>
+            </a:r>
+            <a:endParaRPr lang="en-US" sz="2400" dirty="0" smtClean="0"/>
+          </a:p>
+          <a:p>
+            <a:r>
+              <a:rPr lang="en-US" sz="2400" dirty="0" smtClean="0">
+                <a:hlinkClick r:id="rId5"/>
+              </a:rPr>
+              <a:t>http://www.couchbase.com</a:t>
+            </a:r>
+            <a:endParaRPr lang="en-US" sz="2400" dirty="0" smtClean="0"/>
+          </a:p>
+        </p:txBody>
+      </p:sp>
+    </p:spTree>
+  </p:cSld>
+  <p:clrMapOvr>
+    <a:masterClrMapping/>
+  </p:clrMapOvr>
+</p:sld>
+</file>
+
+<file path=ppt/slides/slide22.xml><?xml version="1.0" encoding="utf-8"?>
 <p:sld xmlns:a="http://schemas.openxmlformats.org/drawingml/2006/main" xmlns:r="http://schemas.openxmlformats.org/officeDocument/2006/relationships" xmlns:p="http://schemas.openxmlformats.org/presentationml/2006/main">
   <p:cSld>
     <p:spTree>
@@ -7349,346 +7584,6 @@
 </p:sld>
 </file>
 
-<file path=ppt/slides/slide21.xml><?xml version="1.0" encoding="utf-8"?>
-<p:sld xmlns:a="http://schemas.openxmlformats.org/drawingml/2006/main" xmlns:r="http://schemas.openxmlformats.org/officeDocument/2006/relationships" xmlns:p="http://schemas.openxmlformats.org/presentationml/2006/main">
-  <p:cSld>
-    <p:spTree>
-      <p:nvGrpSpPr>
-        <p:cNvPr id="1" name=""/>
-        <p:cNvGrpSpPr/>
-        <p:nvPr/>
-      </p:nvGrpSpPr>
-      <p:grpSpPr>
-        <a:xfrm>
-          <a:off x="0" y="0"/>
-          <a:ext cx="0" cy="0"/>
-          <a:chOff x="0" y="0"/>
-          <a:chExt cx="0" cy="0"/>
-        </a:xfrm>
-      </p:grpSpPr>
-      <p:sp>
-        <p:nvSpPr>
-          <p:cNvPr id="2" name="Title 1"/>
-          <p:cNvSpPr>
-            <a:spLocks noGrp="1"/>
-          </p:cNvSpPr>
-          <p:nvPr>
-            <p:ph type="title"/>
-          </p:nvPr>
-        </p:nvSpPr>
-        <p:spPr/>
-        <p:txBody>
-          <a:bodyPr/>
-          <a:lstStyle/>
-          <a:p>
-            <a:r>
-              <a:rPr lang="en-US" dirty="0" smtClean="0"/>
-              <a:t>Elasticity [3]</a:t>
-            </a:r>
-            <a:endParaRPr lang="en-US" dirty="0"/>
-          </a:p>
-        </p:txBody>
-      </p:sp>
-      <p:sp>
-        <p:nvSpPr>
-          <p:cNvPr id="3" name="Content Placeholder 2"/>
-          <p:cNvSpPr>
-            <a:spLocks noGrp="1"/>
-          </p:cNvSpPr>
-          <p:nvPr>
-            <p:ph idx="1"/>
-          </p:nvPr>
-        </p:nvSpPr>
-        <p:spPr/>
-        <p:txBody>
-          <a:bodyPr/>
-          <a:lstStyle/>
-          <a:p>
-            <a:r>
-              <a:rPr lang="en-US" sz="2400" i="1" dirty="0" smtClean="0">
-                <a:solidFill>
-                  <a:srgbClr val="C00000"/>
-                </a:solidFill>
-              </a:rPr>
-              <a:t>Elasticity</a:t>
-            </a:r>
-            <a:r>
-              <a:rPr lang="en-US" sz="2400" dirty="0" smtClean="0"/>
-              <a:t>, the key driver of cloud computing, is the ability of a distributed application to dynamically </a:t>
-            </a:r>
-            <a:r>
-              <a:rPr lang="en-US" sz="2400" u="sng" dirty="0" smtClean="0"/>
-              <a:t>increase or decrease</a:t>
-            </a:r>
-            <a:r>
-              <a:rPr lang="en-US" sz="2400" dirty="0" smtClean="0"/>
-              <a:t> its use of </a:t>
-            </a:r>
-            <a:r>
-              <a:rPr lang="en-US" sz="2400" u="sng" dirty="0" smtClean="0"/>
-              <a:t>computing resources</a:t>
-            </a:r>
-            <a:r>
-              <a:rPr lang="en-US" sz="2400" dirty="0" smtClean="0"/>
-              <a:t>, to preserve its performance in response to varying workloads.</a:t>
-            </a:r>
-          </a:p>
-          <a:p>
-            <a:r>
-              <a:rPr lang="en-US" sz="2400" i="1" dirty="0" smtClean="0">
-                <a:solidFill>
-                  <a:srgbClr val="C00000"/>
-                </a:solidFill>
-              </a:rPr>
-              <a:t>Implicit elasticity</a:t>
-            </a:r>
-            <a:r>
-              <a:rPr lang="en-US" sz="2400" dirty="0" smtClean="0"/>
-              <a:t> is typically associated with a specific programming </a:t>
-            </a:r>
-            <a:r>
-              <a:rPr lang="en-US" sz="2400" u="sng" dirty="0" smtClean="0"/>
-              <a:t>framework</a:t>
-            </a:r>
-            <a:r>
-              <a:rPr lang="en-US" sz="2400" dirty="0" smtClean="0"/>
-              <a:t> or a </a:t>
-            </a:r>
-            <a:r>
-              <a:rPr lang="en-US" sz="2400" u="sng" dirty="0" smtClean="0"/>
-              <a:t>Platform-as-a-Service</a:t>
-            </a:r>
-            <a:r>
-              <a:rPr lang="en-US" sz="2400" dirty="0" smtClean="0"/>
-              <a:t> (</a:t>
-            </a:r>
-            <a:r>
-              <a:rPr lang="en-US" sz="2400" dirty="0" err="1" smtClean="0"/>
-              <a:t>PaaS</a:t>
-            </a:r>
-            <a:r>
-              <a:rPr lang="en-US" sz="2400" dirty="0" smtClean="0"/>
-              <a:t>) cloud.</a:t>
-            </a:r>
-          </a:p>
-          <a:p>
-            <a:r>
-              <a:rPr lang="en-US" sz="2400" dirty="0" smtClean="0"/>
-              <a:t>Implicit elasticity is </a:t>
-            </a:r>
-            <a:r>
-              <a:rPr lang="en-US" sz="2400" u="sng" dirty="0" smtClean="0"/>
-              <a:t>handled by the </a:t>
-            </a:r>
-            <a:r>
-              <a:rPr lang="en-US" sz="2400" u="sng" dirty="0" err="1" smtClean="0"/>
-              <a:t>PaaS</a:t>
-            </a:r>
-            <a:r>
-              <a:rPr lang="en-US" sz="2400" u="sng" dirty="0" smtClean="0"/>
-              <a:t> implementation</a:t>
-            </a:r>
-            <a:r>
-              <a:rPr lang="en-US" sz="2400" dirty="0" smtClean="0"/>
-              <a:t> and is </a:t>
-            </a:r>
-            <a:r>
-              <a:rPr lang="en-US" sz="2400" i="1" dirty="0" smtClean="0">
-                <a:solidFill>
-                  <a:srgbClr val="C00000"/>
-                </a:solidFill>
-              </a:rPr>
-              <a:t>not</a:t>
-            </a:r>
-            <a:r>
-              <a:rPr lang="en-US" sz="2400" dirty="0" smtClean="0"/>
-              <a:t> the </a:t>
-            </a:r>
-            <a:r>
-              <a:rPr lang="en-US" sz="2400" u="sng" dirty="0" smtClean="0"/>
-              <a:t>responsibility</a:t>
-            </a:r>
-            <a:r>
-              <a:rPr lang="en-US" sz="2400" dirty="0" smtClean="0"/>
-              <a:t> of the </a:t>
-            </a:r>
-            <a:r>
-              <a:rPr lang="en-US" sz="2400" u="sng" dirty="0" smtClean="0"/>
-              <a:t>programmer</a:t>
-            </a:r>
-            <a:r>
-              <a:rPr lang="en-US" sz="2400" dirty="0" smtClean="0"/>
-              <a:t>.</a:t>
-            </a:r>
-            <a:endParaRPr lang="en-US" sz="2400" dirty="0"/>
-          </a:p>
-        </p:txBody>
-      </p:sp>
-    </p:spTree>
-  </p:cSld>
-  <p:clrMapOvr>
-    <a:masterClrMapping/>
-  </p:clrMapOvr>
-</p:sld>
-</file>
-
-<file path=ppt/slides/slide22.xml><?xml version="1.0" encoding="utf-8"?>
-<p:sld xmlns:a="http://schemas.openxmlformats.org/drawingml/2006/main" xmlns:r="http://schemas.openxmlformats.org/officeDocument/2006/relationships" xmlns:p="http://schemas.openxmlformats.org/presentationml/2006/main">
-  <p:cSld>
-    <p:spTree>
-      <p:nvGrpSpPr>
-        <p:cNvPr id="1" name=""/>
-        <p:cNvGrpSpPr/>
-        <p:nvPr/>
-      </p:nvGrpSpPr>
-      <p:grpSpPr>
-        <a:xfrm>
-          <a:off x="0" y="0"/>
-          <a:ext cx="0" cy="0"/>
-          <a:chOff x="0" y="0"/>
-          <a:chExt cx="0" cy="0"/>
-        </a:xfrm>
-      </p:grpSpPr>
-      <p:sp>
-        <p:nvSpPr>
-          <p:cNvPr id="2" name="Title 1"/>
-          <p:cNvSpPr>
-            <a:spLocks noGrp="1"/>
-          </p:cNvSpPr>
-          <p:nvPr>
-            <p:ph type="title"/>
-          </p:nvPr>
-        </p:nvSpPr>
-        <p:spPr/>
-        <p:txBody>
-          <a:bodyPr/>
-          <a:lstStyle/>
-          <a:p>
-            <a:r>
-              <a:rPr lang="en-US" dirty="0" smtClean="0"/>
-              <a:t>Explicit Elasticity</a:t>
-            </a:r>
-            <a:endParaRPr lang="en-US" dirty="0"/>
-          </a:p>
-        </p:txBody>
-      </p:sp>
-      <p:sp>
-        <p:nvSpPr>
-          <p:cNvPr id="3" name="Content Placeholder 2"/>
-          <p:cNvSpPr>
-            <a:spLocks noGrp="1"/>
-          </p:cNvSpPr>
-          <p:nvPr>
-            <p:ph idx="1"/>
-          </p:nvPr>
-        </p:nvSpPr>
-        <p:spPr/>
-        <p:txBody>
-          <a:bodyPr/>
-          <a:lstStyle/>
-          <a:p>
-            <a:r>
-              <a:rPr lang="en-US" sz="2400" i="1" dirty="0" smtClean="0">
-                <a:solidFill>
-                  <a:srgbClr val="C00000"/>
-                </a:solidFill>
-              </a:rPr>
-              <a:t>Explicit Elasticity</a:t>
-            </a:r>
-            <a:r>
-              <a:rPr lang="en-US" sz="2400" dirty="0" smtClean="0"/>
-              <a:t> is typically associated with </a:t>
-            </a:r>
-            <a:r>
-              <a:rPr lang="en-US" sz="2400" u="sng" dirty="0" smtClean="0"/>
-              <a:t>Infrastructure as-a-Service</a:t>
-            </a:r>
-            <a:r>
-              <a:rPr lang="en-US" sz="2400" dirty="0" smtClean="0"/>
-              <a:t> (</a:t>
-            </a:r>
-            <a:r>
-              <a:rPr lang="en-US" sz="2400" dirty="0" err="1" smtClean="0"/>
-              <a:t>IaaS</a:t>
-            </a:r>
-            <a:r>
-              <a:rPr lang="en-US" sz="2400" dirty="0" smtClean="0"/>
-              <a:t>) clouds and/or </a:t>
-            </a:r>
-            <a:r>
-              <a:rPr lang="en-US" sz="2400" u="sng" dirty="0" smtClean="0"/>
-              <a:t>private data centers</a:t>
-            </a:r>
-            <a:r>
-              <a:rPr lang="en-US" sz="2400" dirty="0" smtClean="0"/>
-              <a:t>, which typically provide elasticity at the granularity of virtualized compute nodes (e.g., Amazon EC2) or virtualized storage (e.g., Amazon Elastic Block Store (EBS)) in a way that is </a:t>
-            </a:r>
-            <a:r>
-              <a:rPr lang="en-US" sz="2400" u="sng" dirty="0" smtClean="0"/>
-              <a:t>agnostic of the application</a:t>
-            </a:r>
-            <a:r>
-              <a:rPr lang="en-US" sz="2400" dirty="0" smtClean="0"/>
-              <a:t> using these resources.</a:t>
-            </a:r>
-          </a:p>
-          <a:p>
-            <a:r>
-              <a:rPr lang="en-US" sz="2400" dirty="0" smtClean="0"/>
-              <a:t>It is the application </a:t>
-            </a:r>
-            <a:r>
-              <a:rPr lang="en-US" sz="2400" i="1" dirty="0" smtClean="0">
-                <a:solidFill>
-                  <a:srgbClr val="C00000"/>
-                </a:solidFill>
-              </a:rPr>
-              <a:t>developer‘s</a:t>
-            </a:r>
-            <a:r>
-              <a:rPr lang="en-US" sz="2400" dirty="0" smtClean="0"/>
-              <a:t> or the </a:t>
-            </a:r>
-            <a:r>
-              <a:rPr lang="en-US" sz="2400" i="1" dirty="0" smtClean="0">
-                <a:solidFill>
-                  <a:srgbClr val="C00000"/>
-                </a:solidFill>
-              </a:rPr>
-              <a:t>system administrator's</a:t>
-            </a:r>
-            <a:r>
-              <a:rPr lang="en-US" sz="2400" dirty="0" smtClean="0"/>
-              <a:t> </a:t>
-            </a:r>
-            <a:r>
-              <a:rPr lang="en-US" sz="2400" u="sng" dirty="0" smtClean="0"/>
-              <a:t>responsibility</a:t>
-            </a:r>
-            <a:r>
-              <a:rPr lang="en-US" sz="2400" dirty="0" smtClean="0"/>
-              <a:t> to implement robust mechanisms to monitor the application's performance at runtime, request the addition or removal of resources, and perform </a:t>
-            </a:r>
-            <a:r>
-              <a:rPr lang="en-US" sz="2400" u="sng" dirty="0" smtClean="0"/>
-              <a:t>load-balancing</a:t>
-            </a:r>
-            <a:r>
-              <a:rPr lang="en-US" sz="2400" dirty="0" smtClean="0"/>
-              <a:t>, i.e., redistribute the application‘s workload among the new set of resources.</a:t>
-            </a:r>
-            <a:endParaRPr lang="en-US" sz="2400" dirty="0"/>
-          </a:p>
-        </p:txBody>
-      </p:sp>
-    </p:spTree>
-  </p:cSld>
-  <p:clrMapOvr>
-    <a:masterClrMapping/>
-  </p:clrMapOvr>
-</p:sld>
-</file>
-
 <file path=ppt/slides/slide23.xml><?xml version="1.0" encoding="utf-8"?>
 <p:sld xmlns:a="http://schemas.openxmlformats.org/drawingml/2006/main" xmlns:r="http://schemas.openxmlformats.org/officeDocument/2006/relationships" xmlns:p="http://schemas.openxmlformats.org/presentationml/2006/main">
   <p:cSld>
@@ -7723,7 +7618,7 @@
           <a:p>
             <a:r>
               <a:rPr lang="en-US" dirty="0" smtClean="0"/>
-              <a:t>Programmable Elasticity</a:t>
+              <a:t>Elasticity [3]</a:t>
             </a:r>
             <a:endParaRPr lang="en-US" dirty="0"/>
           </a:p>
@@ -7744,27 +7639,93 @@
           <a:bodyPr/>
           <a:lstStyle/>
           <a:p>
-            <a:r>
-              <a:rPr lang="en-US" sz="2400" dirty="0" smtClean="0"/>
-              <a:t>To optimize the performance of new or existing distributed applications while deploying or moving them to the cloud, engineering robust </a:t>
-            </a:r>
             <a:r>
               <a:rPr lang="en-US" sz="2400" i="1" dirty="0" smtClean="0">
                 <a:solidFill>
                   <a:srgbClr val="C00000"/>
                 </a:solidFill>
               </a:rPr>
-              <a:t>elasticity management components</a:t>
-            </a:r>
-            <a:r>
-              <a:rPr lang="en-US" sz="2400" dirty="0" smtClean="0"/>
-              <a:t> is essential.</a:t>
-            </a:r>
-          </a:p>
-          <a:p>
-            <a:r>
-              <a:rPr lang="en-US" sz="2400" dirty="0" smtClean="0"/>
-              <a:t>This is especially vital for applications that do </a:t>
+              <a:t>Elasticity</a:t>
+            </a:r>
+            <a:r>
+              <a:rPr lang="en-US" sz="2400" dirty="0" smtClean="0"/>
+              <a:t>, the key driver of cloud computing, is the ability of a distributed application to dynamically </a:t>
+            </a:r>
+            <a:r>
+              <a:rPr lang="en-US" sz="2400" u="sng" dirty="0" smtClean="0"/>
+              <a:t>increase or decrease</a:t>
+            </a:r>
+            <a:r>
+              <a:rPr lang="en-US" sz="2400" dirty="0" smtClean="0"/>
+              <a:t> its use of </a:t>
+            </a:r>
+            <a:r>
+              <a:rPr lang="en-US" sz="2400" u="sng" dirty="0" smtClean="0"/>
+              <a:t>computing resources</a:t>
+            </a:r>
+            <a:r>
+              <a:rPr lang="en-US" sz="2400" dirty="0" smtClean="0"/>
+              <a:t>, to preserve its performance in response to varying workloads.</a:t>
+            </a:r>
+          </a:p>
+          <a:p>
+            <a:r>
+              <a:rPr lang="en-US" sz="2400" i="1" dirty="0" smtClean="0">
+                <a:solidFill>
+                  <a:srgbClr val="C00000"/>
+                </a:solidFill>
+              </a:rPr>
+              <a:t>Implicit elasticity</a:t>
+            </a:r>
+            <a:r>
+              <a:rPr lang="en-US" sz="2400" dirty="0" smtClean="0"/>
+              <a:t> is typically associated with a specific programming </a:t>
+            </a:r>
+            <a:r>
+              <a:rPr lang="en-US" sz="2400" u="sng" dirty="0" smtClean="0"/>
+              <a:t>framework</a:t>
+            </a:r>
+            <a:r>
+              <a:rPr lang="en-US" sz="2400" dirty="0" smtClean="0"/>
+              <a:t> or a </a:t>
+            </a:r>
+            <a:r>
+              <a:rPr lang="en-US" sz="2400" u="sng" dirty="0" smtClean="0"/>
+              <a:t>Platform-as-a-Service</a:t>
+            </a:r>
+            <a:r>
+              <a:rPr lang="en-US" sz="2400" dirty="0" smtClean="0"/>
+              <a:t> (</a:t>
+            </a:r>
+            <a:r>
+              <a:rPr lang="en-US" sz="2400" dirty="0" err="1" smtClean="0"/>
+              <a:t>PaaS</a:t>
+            </a:r>
+            <a:r>
+              <a:rPr lang="en-US" sz="2400" dirty="0" smtClean="0"/>
+              <a:t>) cloud.</a:t>
+            </a:r>
+          </a:p>
+          <a:p>
+            <a:r>
+              <a:rPr lang="en-US" sz="2400" dirty="0" smtClean="0"/>
+              <a:t>Implicit elasticity is </a:t>
+            </a:r>
+            <a:r>
+              <a:rPr lang="en-US" sz="2400" u="sng" dirty="0" smtClean="0"/>
+              <a:t>handled by the </a:t>
+            </a:r>
+            <a:r>
+              <a:rPr lang="en-US" sz="2400" u="sng" dirty="0" err="1" smtClean="0"/>
+              <a:t>PaaS</a:t>
+            </a:r>
+            <a:r>
+              <a:rPr lang="en-US" sz="2400" u="sng" dirty="0" smtClean="0"/>
+              <a:t> implementation</a:t>
+            </a:r>
+            <a:r>
+              <a:rPr lang="en-US" sz="2400" dirty="0" smtClean="0"/>
+              <a:t> and is </a:t>
             </a:r>
             <a:r>
               <a:rPr lang="en-US" sz="2400" i="1" dirty="0" smtClean="0">
@@ -7776,37 +7737,23 @@
             </a:r>
             <a:r>
               <a:rPr lang="en-US" sz="2400" dirty="0" smtClean="0"/>
-              <a:t> fit the programming model of (implicit) elastic frameworks like </a:t>
-            </a:r>
-            <a:r>
-              <a:rPr lang="en-US" sz="2400" dirty="0" err="1" smtClean="0"/>
-              <a:t>Hadoop</a:t>
-            </a:r>
-            <a:r>
-              <a:rPr lang="en-US" sz="2400" dirty="0" smtClean="0"/>
-              <a:t>, Pig, etc., but require high performance (high throughput and low latency), scalability and elasticity.</a:t>
-            </a:r>
-          </a:p>
-          <a:p>
-            <a:r>
-              <a:rPr lang="en-US" sz="2400" dirty="0" smtClean="0"/>
-              <a:t>Elasticity frameworks which rely on externally observable resource utilization metrics (CPU, RAM, etc.) are </a:t>
-            </a:r>
-            <a:r>
-              <a:rPr lang="en-US" sz="2400" i="1" dirty="0" smtClean="0">
-                <a:solidFill>
-                  <a:srgbClr val="C00000"/>
-                </a:solidFill>
-              </a:rPr>
-              <a:t>insufficient</a:t>
-            </a:r>
-            <a:r>
-              <a:rPr lang="en-US" sz="2400" b="1" i="1" dirty="0" smtClean="0"/>
-              <a:t> </a:t>
-            </a:r>
-            <a:r>
-              <a:rPr lang="en-US" sz="2400" dirty="0" smtClean="0"/>
-              <a:t>for such applications.</a:t>
+              <a:t> the </a:t>
+            </a:r>
+            <a:r>
+              <a:rPr lang="en-US" sz="2400" u="sng" dirty="0" smtClean="0"/>
+              <a:t>responsibility</a:t>
+            </a:r>
+            <a:r>
+              <a:rPr lang="en-US" sz="2400" dirty="0" smtClean="0"/>
+              <a:t> of the </a:t>
+            </a:r>
+            <a:r>
+              <a:rPr lang="en-US" sz="2400" u="sng" dirty="0" smtClean="0"/>
+              <a:t>programmer</a:t>
+            </a:r>
+            <a:r>
+              <a:rPr lang="en-US" sz="2400" dirty="0" smtClean="0"/>
+              <a:t>.</a:t>
             </a:r>
             <a:endParaRPr lang="en-US" sz="2400" dirty="0"/>
           </a:p>
@@ -7854,7 +7801,7 @@
           <a:p>
             <a:r>
               <a:rPr lang="en-US" dirty="0" smtClean="0"/>
-              <a:t>Elasticity Management Component</a:t>
+              <a:t>Explicit Elasticity</a:t>
             </a:r>
             <a:endParaRPr lang="en-US" dirty="0"/>
           </a:p>
@@ -7875,21 +7822,95 @@
           <a:bodyPr/>
           <a:lstStyle/>
           <a:p>
-            <a:r>
-              <a:rPr lang="en-US" sz="2400" dirty="0" smtClean="0"/>
-              <a:t>Hence, there is an emerging need for a elasticity framework that bridges the gap between implicit and explicit elasticity, allowing the use fine grained </a:t>
-            </a:r>
             <a:r>
               <a:rPr lang="en-US" sz="2400" i="1" dirty="0" smtClean="0">
                 <a:solidFill>
                   <a:srgbClr val="C00000"/>
                 </a:solidFill>
               </a:rPr>
-              <a:t>application specific metrics</a:t>
-            </a:r>
-            <a:r>
-              <a:rPr lang="en-US" sz="2400" dirty="0" smtClean="0"/>
-              <a:t> (e.g., size of a queue/heap, number of aborted transactions or average number of attempts to acquire certain locks) to build an elasticity management component right into the application.</a:t>
+              <a:t>Explicit Elasticity</a:t>
+            </a:r>
+            <a:r>
+              <a:rPr lang="en-US" sz="2400" dirty="0" smtClean="0"/>
+              <a:t> is typically associated with </a:t>
+            </a:r>
+            <a:r>
+              <a:rPr lang="en-US" sz="2400" u="sng" dirty="0" smtClean="0"/>
+              <a:t>Infrastructure as-a-Service</a:t>
+            </a:r>
+            <a:r>
+              <a:rPr lang="en-US" sz="2400" dirty="0" smtClean="0"/>
+              <a:t> (</a:t>
+            </a:r>
+            <a:r>
+              <a:rPr lang="en-US" sz="2400" dirty="0" err="1" smtClean="0"/>
+              <a:t>IaaS</a:t>
+            </a:r>
+            <a:r>
+              <a:rPr lang="en-US" sz="2400" dirty="0" smtClean="0"/>
+              <a:t>) clouds and/or </a:t>
+            </a:r>
+            <a:r>
+              <a:rPr lang="en-US" sz="2400" u="sng" dirty="0" smtClean="0"/>
+              <a:t>private data centers</a:t>
+            </a:r>
+            <a:r>
+              <a:rPr lang="en-US" sz="2400" dirty="0" smtClean="0"/>
+              <a:t>, which typically provide elasticity at the granularity of virtualized compute nodes (e.g., Amazon EC2) or virtualized storage (e.g., Amazon Elastic Block Store (EBS)) in a way that is </a:t>
+            </a:r>
+            <a:r>
+              <a:rPr lang="en-US" sz="2400" u="sng" dirty="0" smtClean="0"/>
+              <a:t>agnostic of the application</a:t>
+            </a:r>
+            <a:r>
+              <a:rPr lang="en-US" sz="2400" dirty="0" smtClean="0"/>
+              <a:t> using these resources.</a:t>
+            </a:r>
+          </a:p>
+          <a:p>
+            <a:r>
+              <a:rPr lang="en-US" sz="2400" dirty="0" smtClean="0"/>
+              <a:t>It is the application </a:t>
+            </a:r>
+            <a:r>
+              <a:rPr lang="en-US" sz="2400" i="1" dirty="0" smtClean="0">
+                <a:solidFill>
+                  <a:srgbClr val="C00000"/>
+                </a:solidFill>
+              </a:rPr>
+              <a:t>developer‘s</a:t>
+            </a:r>
+            <a:r>
+              <a:rPr lang="en-US" sz="2400" dirty="0" smtClean="0"/>
+              <a:t> or the </a:t>
+            </a:r>
+            <a:r>
+              <a:rPr lang="en-US" sz="2400" i="1" dirty="0" smtClean="0">
+                <a:solidFill>
+                  <a:srgbClr val="C00000"/>
+                </a:solidFill>
+              </a:rPr>
+              <a:t>system administrator's</a:t>
+            </a:r>
+            <a:r>
+              <a:rPr lang="en-US" sz="2400" dirty="0" smtClean="0"/>
+              <a:t> </a:t>
+            </a:r>
+            <a:r>
+              <a:rPr lang="en-US" sz="2400" u="sng" dirty="0" smtClean="0"/>
+              <a:t>responsibility</a:t>
+            </a:r>
+            <a:r>
+              <a:rPr lang="en-US" sz="2400" dirty="0" smtClean="0"/>
+              <a:t> to implement robust mechanisms to monitor the application's performance at runtime, request the addition or removal of resources, and perform </a:t>
+            </a:r>
+            <a:r>
+              <a:rPr lang="en-US" sz="2400" u="sng" dirty="0" smtClean="0"/>
+              <a:t>load-balancing</a:t>
+            </a:r>
+            <a:r>
+              <a:rPr lang="en-US" sz="2400" dirty="0" smtClean="0"/>
+              <a:t>, i.e., redistribute the application‘s workload among the new set of resources.</a:t>
             </a:r>
             <a:endParaRPr lang="en-US" sz="2400" dirty="0"/>
           </a:p>
@@ -7904,6 +7925,220 @@
 </file>
 
 <file path=ppt/slides/slide25.xml><?xml version="1.0" encoding="utf-8"?>
+<p:sld xmlns:a="http://schemas.openxmlformats.org/drawingml/2006/main" xmlns:r="http://schemas.openxmlformats.org/officeDocument/2006/relationships" xmlns:p="http://schemas.openxmlformats.org/presentationml/2006/main">
+  <p:cSld>
+    <p:spTree>
+      <p:nvGrpSpPr>
+        <p:cNvPr id="1" name=""/>
+        <p:cNvGrpSpPr/>
+        <p:nvPr/>
+      </p:nvGrpSpPr>
+      <p:grpSpPr>
+        <a:xfrm>
+          <a:off x="0" y="0"/>
+          <a:ext cx="0" cy="0"/>
+          <a:chOff x="0" y="0"/>
+          <a:chExt cx="0" cy="0"/>
+        </a:xfrm>
+      </p:grpSpPr>
+      <p:sp>
+        <p:nvSpPr>
+          <p:cNvPr id="2" name="Title 1"/>
+          <p:cNvSpPr>
+            <a:spLocks noGrp="1"/>
+          </p:cNvSpPr>
+          <p:nvPr>
+            <p:ph type="title"/>
+          </p:nvPr>
+        </p:nvSpPr>
+        <p:spPr/>
+        <p:txBody>
+          <a:bodyPr/>
+          <a:lstStyle/>
+          <a:p>
+            <a:r>
+              <a:rPr lang="en-US" dirty="0" smtClean="0"/>
+              <a:t>Programmable Elasticity</a:t>
+            </a:r>
+            <a:endParaRPr lang="en-US" dirty="0"/>
+          </a:p>
+        </p:txBody>
+      </p:sp>
+      <p:sp>
+        <p:nvSpPr>
+          <p:cNvPr id="3" name="Content Placeholder 2"/>
+          <p:cNvSpPr>
+            <a:spLocks noGrp="1"/>
+          </p:cNvSpPr>
+          <p:nvPr>
+            <p:ph idx="1"/>
+          </p:nvPr>
+        </p:nvSpPr>
+        <p:spPr/>
+        <p:txBody>
+          <a:bodyPr/>
+          <a:lstStyle/>
+          <a:p>
+            <a:r>
+              <a:rPr lang="en-US" sz="2400" dirty="0" smtClean="0"/>
+              <a:t>To optimize the performance of new or existing distributed applications while deploying or moving them to the cloud, engineering robust </a:t>
+            </a:r>
+            <a:r>
+              <a:rPr lang="en-US" sz="2400" i="1" dirty="0" smtClean="0">
+                <a:solidFill>
+                  <a:srgbClr val="C00000"/>
+                </a:solidFill>
+              </a:rPr>
+              <a:t>elasticity management components</a:t>
+            </a:r>
+            <a:r>
+              <a:rPr lang="en-US" sz="2400" dirty="0" smtClean="0"/>
+              <a:t> is essential.</a:t>
+            </a:r>
+          </a:p>
+          <a:p>
+            <a:r>
+              <a:rPr lang="en-US" sz="2400" dirty="0" smtClean="0"/>
+              <a:t>This is especially vital for applications that do </a:t>
+            </a:r>
+            <a:r>
+              <a:rPr lang="en-US" sz="2400" i="1" dirty="0" smtClean="0">
+                <a:solidFill>
+                  <a:srgbClr val="C00000"/>
+                </a:solidFill>
+              </a:rPr>
+              <a:t>not</a:t>
+            </a:r>
+            <a:r>
+              <a:rPr lang="en-US" sz="2400" dirty="0" smtClean="0"/>
+              <a:t> fit the programming model of (implicit) elastic frameworks like </a:t>
+            </a:r>
+            <a:r>
+              <a:rPr lang="en-US" sz="2400" dirty="0" err="1" smtClean="0"/>
+              <a:t>Hadoop</a:t>
+            </a:r>
+            <a:r>
+              <a:rPr lang="en-US" sz="2400" dirty="0" smtClean="0"/>
+              <a:t>, Pig, etc., but require high performance (high throughput and low latency), scalability and elasticity.</a:t>
+            </a:r>
+          </a:p>
+          <a:p>
+            <a:r>
+              <a:rPr lang="en-US" sz="2400" dirty="0" smtClean="0"/>
+              <a:t>Elasticity frameworks which rely on externally observable resource utilization metrics (CPU, RAM, etc.) are </a:t>
+            </a:r>
+            <a:r>
+              <a:rPr lang="en-US" sz="2400" i="1" dirty="0" smtClean="0">
+                <a:solidFill>
+                  <a:srgbClr val="C00000"/>
+                </a:solidFill>
+              </a:rPr>
+              <a:t>insufficient</a:t>
+            </a:r>
+            <a:r>
+              <a:rPr lang="en-US" sz="2400" b="1" i="1" dirty="0" smtClean="0"/>
+              <a:t> </a:t>
+            </a:r>
+            <a:r>
+              <a:rPr lang="en-US" sz="2400" dirty="0" smtClean="0"/>
+              <a:t>for such applications.</a:t>
+            </a:r>
+            <a:endParaRPr lang="en-US" sz="2400" dirty="0"/>
+          </a:p>
+        </p:txBody>
+      </p:sp>
+    </p:spTree>
+  </p:cSld>
+  <p:clrMapOvr>
+    <a:masterClrMapping/>
+  </p:clrMapOvr>
+</p:sld>
+</file>
+
+<file path=ppt/slides/slide26.xml><?xml version="1.0" encoding="utf-8"?>
+<p:sld xmlns:a="http://schemas.openxmlformats.org/drawingml/2006/main" xmlns:r="http://schemas.openxmlformats.org/officeDocument/2006/relationships" xmlns:p="http://schemas.openxmlformats.org/presentationml/2006/main">
+  <p:cSld>
+    <p:spTree>
+      <p:nvGrpSpPr>
+        <p:cNvPr id="1" name=""/>
+        <p:cNvGrpSpPr/>
+        <p:nvPr/>
+      </p:nvGrpSpPr>
+      <p:grpSpPr>
+        <a:xfrm>
+          <a:off x="0" y="0"/>
+          <a:ext cx="0" cy="0"/>
+          <a:chOff x="0" y="0"/>
+          <a:chExt cx="0" cy="0"/>
+        </a:xfrm>
+      </p:grpSpPr>
+      <p:sp>
+        <p:nvSpPr>
+          <p:cNvPr id="2" name="Title 1"/>
+          <p:cNvSpPr>
+            <a:spLocks noGrp="1"/>
+          </p:cNvSpPr>
+          <p:nvPr>
+            <p:ph type="title"/>
+          </p:nvPr>
+        </p:nvSpPr>
+        <p:spPr/>
+        <p:txBody>
+          <a:bodyPr/>
+          <a:lstStyle/>
+          <a:p>
+            <a:r>
+              <a:rPr lang="en-US" dirty="0" smtClean="0"/>
+              <a:t>Elasticity Management Component</a:t>
+            </a:r>
+            <a:endParaRPr lang="en-US" dirty="0"/>
+          </a:p>
+        </p:txBody>
+      </p:sp>
+      <p:sp>
+        <p:nvSpPr>
+          <p:cNvPr id="3" name="Content Placeholder 2"/>
+          <p:cNvSpPr>
+            <a:spLocks noGrp="1"/>
+          </p:cNvSpPr>
+          <p:nvPr>
+            <p:ph idx="1"/>
+          </p:nvPr>
+        </p:nvSpPr>
+        <p:spPr/>
+        <p:txBody>
+          <a:bodyPr/>
+          <a:lstStyle/>
+          <a:p>
+            <a:r>
+              <a:rPr lang="en-US" sz="2400" dirty="0" smtClean="0"/>
+              <a:t>Hence, there is an emerging need for a elasticity framework that bridges the gap between implicit and explicit elasticity, allowing the use fine grained </a:t>
+            </a:r>
+            <a:r>
+              <a:rPr lang="en-US" sz="2400" i="1" dirty="0" smtClean="0">
+                <a:solidFill>
+                  <a:srgbClr val="C00000"/>
+                </a:solidFill>
+              </a:rPr>
+              <a:t>application specific metrics</a:t>
+            </a:r>
+            <a:r>
+              <a:rPr lang="en-US" sz="2400" dirty="0" smtClean="0"/>
+              <a:t> (e.g., size of a queue/heap, number of aborted transactions or average number of attempts to acquire certain locks) to build an elasticity management component right into the application.</a:t>
+            </a:r>
+            <a:endParaRPr lang="en-US" sz="2400" dirty="0"/>
+          </a:p>
+        </p:txBody>
+      </p:sp>
+    </p:spTree>
+  </p:cSld>
+  <p:clrMapOvr>
+    <a:masterClrMapping/>
+  </p:clrMapOvr>
+</p:sld>
+</file>
+
+<file path=ppt/slides/slide27.xml><?xml version="1.0" encoding="utf-8"?>
 <p:sld xmlns:a="http://schemas.openxmlformats.org/drawingml/2006/main" xmlns:r="http://schemas.openxmlformats.org/officeDocument/2006/relationships" xmlns:p="http://schemas.openxmlformats.org/presentationml/2006/main">
   <p:cSld>
     <p:spTree>
@@ -8057,328 +8292,6 @@
 </p:sld>
 </file>
 
-<file path=ppt/slides/slide26.xml><?xml version="1.0" encoding="utf-8"?>
-<p:sld xmlns:a="http://schemas.openxmlformats.org/drawingml/2006/main" xmlns:r="http://schemas.openxmlformats.org/officeDocument/2006/relationships" xmlns:p="http://schemas.openxmlformats.org/presentationml/2006/main">
-  <p:cSld>
-    <p:spTree>
-      <p:nvGrpSpPr>
-        <p:cNvPr id="1" name=""/>
-        <p:cNvGrpSpPr/>
-        <p:nvPr/>
-      </p:nvGrpSpPr>
-      <p:grpSpPr>
-        <a:xfrm>
-          <a:off x="0" y="0"/>
-          <a:ext cx="0" cy="0"/>
-          <a:chOff x="0" y="0"/>
-          <a:chExt cx="0" cy="0"/>
-        </a:xfrm>
-      </p:grpSpPr>
-      <p:sp>
-        <p:nvSpPr>
-          <p:cNvPr id="2" name="Title 1"/>
-          <p:cNvSpPr>
-            <a:spLocks noGrp="1"/>
-          </p:cNvSpPr>
-          <p:nvPr>
-            <p:ph type="title"/>
-          </p:nvPr>
-        </p:nvSpPr>
-        <p:spPr/>
-        <p:txBody>
-          <a:bodyPr/>
-          <a:lstStyle/>
-          <a:p>
-            <a:r>
-              <a:rPr lang="en-US" dirty="0" smtClean="0"/>
-              <a:t>Object Pools</a:t>
-            </a:r>
-            <a:endParaRPr lang="en-US" dirty="0"/>
-          </a:p>
-        </p:txBody>
-      </p:sp>
-      <p:sp>
-        <p:nvSpPr>
-          <p:cNvPr id="3" name="Content Placeholder 2"/>
-          <p:cNvSpPr>
-            <a:spLocks noGrp="1"/>
-          </p:cNvSpPr>
-          <p:nvPr>
-            <p:ph idx="1"/>
-          </p:nvPr>
-        </p:nvSpPr>
-        <p:spPr>
-          <a:xfrm>
-            <a:off x="457200" y="3810000"/>
-            <a:ext cx="8229600" cy="2316163"/>
-          </a:xfrm>
-        </p:spPr>
-        <p:txBody>
-          <a:bodyPr/>
-          <a:lstStyle/>
-          <a:p>
-            <a:r>
-              <a:rPr lang="en-US" sz="2000" dirty="0" smtClean="0"/>
-              <a:t>An elastic class can only be </a:t>
-            </a:r>
-            <a:r>
-              <a:rPr lang="en-US" sz="2000" i="1" dirty="0" smtClean="0">
-                <a:solidFill>
-                  <a:srgbClr val="C00000"/>
-                </a:solidFill>
-              </a:rPr>
-              <a:t>instantiated</a:t>
-            </a:r>
-            <a:r>
-              <a:rPr lang="en-US" sz="2000" dirty="0" smtClean="0"/>
-              <a:t> by providing a minimum and maximum number of objects that constitute its </a:t>
-            </a:r>
-            <a:r>
-              <a:rPr lang="en-US" sz="2000" i="1" dirty="0" smtClean="0">
-                <a:solidFill>
-                  <a:srgbClr val="C00000"/>
-                </a:solidFill>
-              </a:rPr>
-              <a:t>elastic object pool</a:t>
-            </a:r>
-            <a:r>
-              <a:rPr lang="en-US" sz="2000" dirty="0" smtClean="0"/>
-              <a:t>. </a:t>
-            </a:r>
-          </a:p>
-          <a:p>
-            <a:r>
-              <a:rPr lang="en-US" sz="2000" dirty="0" smtClean="0"/>
-              <a:t>Obviously, instantiating all objects in the pool on separate JVMs on the </a:t>
-            </a:r>
-            <a:r>
-              <a:rPr lang="en-US" sz="2000" i="1" dirty="0" smtClean="0">
-                <a:solidFill>
-                  <a:srgbClr val="C00000"/>
-                </a:solidFill>
-              </a:rPr>
-              <a:t>same</a:t>
-            </a:r>
-            <a:r>
-              <a:rPr lang="en-US" sz="2000" dirty="0" smtClean="0"/>
-              <a:t> physical machine may degrade performance.</a:t>
-            </a:r>
-          </a:p>
-          <a:p>
-            <a:r>
-              <a:rPr lang="en-US" sz="2000" dirty="0" smtClean="0"/>
-              <a:t>Hence, </a:t>
-            </a:r>
-            <a:r>
-              <a:rPr lang="en-US" sz="2000" dirty="0" err="1" smtClean="0"/>
-              <a:t>ElasticRMI</a:t>
-            </a:r>
-            <a:r>
-              <a:rPr lang="en-US" sz="2000" dirty="0" smtClean="0"/>
-              <a:t> attempts to instantiate each object in a virtual node in a </a:t>
-            </a:r>
-            <a:r>
-              <a:rPr lang="en-US" sz="2000" i="1" dirty="0" smtClean="0">
-                <a:solidFill>
-                  <a:srgbClr val="C00000"/>
-                </a:solidFill>
-              </a:rPr>
-              <a:t>compute cluster</a:t>
-            </a:r>
-            <a:r>
-              <a:rPr lang="en-US" sz="2000" dirty="0" smtClean="0"/>
-              <a:t>.</a:t>
-            </a:r>
-          </a:p>
-        </p:txBody>
-      </p:sp>
-      <p:pic>
-        <p:nvPicPr>
-          <p:cNvPr id="4" name="Picture 2"/>
-          <p:cNvPicPr>
-            <a:picLocks noChangeAspect="1" noChangeArrowheads="1"/>
-          </p:cNvPicPr>
-          <p:nvPr/>
-        </p:nvPicPr>
-        <p:blipFill>
-          <a:blip r:embed="rId2" cstate="print"/>
-          <a:srcRect/>
-          <a:stretch>
-            <a:fillRect/>
-          </a:stretch>
-        </p:blipFill>
-        <p:spPr bwMode="auto">
-          <a:xfrm>
-            <a:off x="2514600" y="1752600"/>
-            <a:ext cx="4210050" cy="1876425"/>
-          </a:xfrm>
-          <a:prstGeom prst="rect">
-            <a:avLst/>
-          </a:prstGeom>
-          <a:noFill/>
-          <a:ln w="9525">
-            <a:noFill/>
-            <a:miter lim="800000"/>
-            <a:headEnd/>
-            <a:tailEnd/>
-          </a:ln>
-        </p:spPr>
-      </p:pic>
-    </p:spTree>
-  </p:cSld>
-  <p:clrMapOvr>
-    <a:masterClrMapping/>
-  </p:clrMapOvr>
-</p:sld>
-</file>
-
-<file path=ppt/slides/slide27.xml><?xml version="1.0" encoding="utf-8"?>
-<p:sld xmlns:a="http://schemas.openxmlformats.org/drawingml/2006/main" xmlns:r="http://schemas.openxmlformats.org/officeDocument/2006/relationships" xmlns:p="http://schemas.openxmlformats.org/presentationml/2006/main">
-  <p:cSld>
-    <p:spTree>
-      <p:nvGrpSpPr>
-        <p:cNvPr id="1" name=""/>
-        <p:cNvGrpSpPr/>
-        <p:nvPr/>
-      </p:nvGrpSpPr>
-      <p:grpSpPr>
-        <a:xfrm>
-          <a:off x="0" y="0"/>
-          <a:ext cx="0" cy="0"/>
-          <a:chOff x="0" y="0"/>
-          <a:chExt cx="0" cy="0"/>
-        </a:xfrm>
-      </p:grpSpPr>
-      <p:sp>
-        <p:nvSpPr>
-          <p:cNvPr id="2" name="Title 1"/>
-          <p:cNvSpPr>
-            <a:spLocks noGrp="1"/>
-          </p:cNvSpPr>
-          <p:nvPr>
-            <p:ph type="title"/>
-          </p:nvPr>
-        </p:nvSpPr>
-        <p:spPr/>
-        <p:txBody>
-          <a:bodyPr/>
-          <a:lstStyle/>
-          <a:p>
-            <a:r>
-              <a:rPr lang="en-US" dirty="0" smtClean="0"/>
-              <a:t>Virtual Nodes</a:t>
-            </a:r>
-            <a:endParaRPr lang="en-US" dirty="0"/>
-          </a:p>
-        </p:txBody>
-      </p:sp>
-      <p:sp>
-        <p:nvSpPr>
-          <p:cNvPr id="3" name="Content Placeholder 2"/>
-          <p:cNvSpPr>
-            <a:spLocks noGrp="1"/>
-          </p:cNvSpPr>
-          <p:nvPr>
-            <p:ph idx="1"/>
-          </p:nvPr>
-        </p:nvSpPr>
-        <p:spPr>
-          <a:xfrm>
-            <a:off x="457200" y="3810000"/>
-            <a:ext cx="8229600" cy="2316163"/>
-          </a:xfrm>
-        </p:spPr>
-        <p:txBody>
-          <a:bodyPr/>
-          <a:lstStyle/>
-          <a:p>
-            <a:r>
-              <a:rPr lang="en-US" sz="2000" dirty="0" smtClean="0"/>
-              <a:t>Virtual nodes can be obtained either (1) from </a:t>
-            </a:r>
-            <a:r>
-              <a:rPr lang="en-US" sz="2000" dirty="0" err="1" smtClean="0"/>
-              <a:t>IaaS</a:t>
-            </a:r>
-            <a:r>
-              <a:rPr lang="en-US" sz="2000" dirty="0" smtClean="0"/>
-              <a:t> clouds by provisioning and instantiating virtual machines, or (2) from a cluster management/resource sharing system like Apache </a:t>
-            </a:r>
-            <a:r>
-              <a:rPr lang="en-US" sz="2000" dirty="0" err="1" smtClean="0"/>
-              <a:t>Mesos</a:t>
-            </a:r>
-            <a:r>
-              <a:rPr lang="en-US" sz="2000" dirty="0" smtClean="0"/>
-              <a:t>.</a:t>
-            </a:r>
-          </a:p>
-          <a:p>
-            <a:r>
-              <a:rPr lang="en-US" sz="2000" dirty="0" smtClean="0">
-                <a:hlinkClick r:id="rId2"/>
-              </a:rPr>
-              <a:t>http://mesos.apache.org/</a:t>
-            </a:r>
-            <a:endParaRPr lang="en-US" sz="2000" dirty="0" smtClean="0"/>
-          </a:p>
-          <a:p>
-            <a:r>
-              <a:rPr lang="en-US" sz="2000" dirty="0" smtClean="0"/>
-              <a:t>Apache </a:t>
-            </a:r>
-            <a:r>
-              <a:rPr lang="en-US" sz="2000" dirty="0" err="1" smtClean="0"/>
-              <a:t>Mesos</a:t>
-            </a:r>
-            <a:r>
-              <a:rPr lang="en-US" sz="2000" dirty="0" smtClean="0"/>
-              <a:t> abstracts CPU, memory, storage, and other compute resources away from machines (physical or virtual), enabling fault-tolerant and elastic distributed systems to easily be built and run effectively.</a:t>
-            </a:r>
-            <a:endParaRPr lang="en-US" sz="2000" dirty="0"/>
-          </a:p>
-        </p:txBody>
-      </p:sp>
-      <p:pic>
-        <p:nvPicPr>
-          <p:cNvPr id="4" name="Picture 2"/>
-          <p:cNvPicPr>
-            <a:picLocks noChangeAspect="1" noChangeArrowheads="1"/>
-          </p:cNvPicPr>
-          <p:nvPr/>
-        </p:nvPicPr>
-        <p:blipFill>
-          <a:blip r:embed="rId3" cstate="print"/>
-          <a:srcRect/>
-          <a:stretch>
-            <a:fillRect/>
-          </a:stretch>
-        </p:blipFill>
-        <p:spPr bwMode="auto">
-          <a:xfrm>
-            <a:off x="2514600" y="1524000"/>
-            <a:ext cx="4210050" cy="1876425"/>
-          </a:xfrm>
-          <a:prstGeom prst="rect">
-            <a:avLst/>
-          </a:prstGeom>
-          <a:noFill/>
-          <a:ln w="9525">
-            <a:noFill/>
-            <a:miter lim="800000"/>
-            <a:headEnd/>
-            <a:tailEnd/>
-          </a:ln>
-        </p:spPr>
-      </p:pic>
-    </p:spTree>
-  </p:cSld>
-  <p:clrMapOvr>
-    <a:masterClrMapping/>
-  </p:clrMapOvr>
-</p:sld>
-</file>
-
 <file path=ppt/slides/slide28.xml><?xml version="1.0" encoding="utf-8"?>
 <p:sld xmlns:a="http://schemas.openxmlformats.org/drawingml/2006/main" xmlns:r="http://schemas.openxmlformats.org/officeDocument/2006/relationships" xmlns:p="http://schemas.openxmlformats.org/presentationml/2006/main">
   <p:cSld>
@@ -8413,7 +8326,7 @@
           <a:p>
             <a:r>
               <a:rPr lang="en-US" dirty="0" smtClean="0"/>
-              <a:t>Portability</a:t>
+              <a:t>Object Pools</a:t>
             </a:r>
             <a:endParaRPr lang="en-US" dirty="0"/>
           </a:p>
@@ -8440,66 +8353,83 @@
           <a:lstStyle/>
           <a:p>
             <a:r>
-              <a:rPr lang="en-US" sz="2400" dirty="0" err="1" smtClean="0"/>
-              <a:t>Mesos</a:t>
-            </a:r>
-            <a:r>
-              <a:rPr lang="en-US" sz="2400" dirty="0" smtClean="0"/>
-              <a:t> can also be viewed as a thin </a:t>
-            </a:r>
-            <a:r>
-              <a:rPr lang="en-US" sz="2400" i="1" dirty="0" smtClean="0">
+              <a:rPr lang="en-US" sz="2000" dirty="0" smtClean="0"/>
+              <a:t>An elastic class can only be </a:t>
+            </a:r>
+            <a:r>
+              <a:rPr lang="en-US" sz="2000" i="1" dirty="0" smtClean="0">
                 <a:solidFill>
                   <a:srgbClr val="C00000"/>
                 </a:solidFill>
               </a:rPr>
-              <a:t>resource-sharing layer</a:t>
-            </a:r>
-            <a:r>
-              <a:rPr lang="en-US" sz="2400" dirty="0" smtClean="0"/>
-              <a:t> that manages a cluster of physical nodes/virtual machines.</a:t>
-            </a:r>
-          </a:p>
-          <a:p>
-            <a:r>
-              <a:rPr lang="en-US" sz="2400" dirty="0" smtClean="0"/>
-              <a:t>As long as </a:t>
-            </a:r>
-            <a:r>
-              <a:rPr lang="en-US" sz="2400" dirty="0" err="1" smtClean="0"/>
-              <a:t>Mesos</a:t>
-            </a:r>
-            <a:r>
-              <a:rPr lang="en-US" sz="2400" dirty="0" smtClean="0"/>
-              <a:t> is available, </a:t>
-            </a:r>
-            <a:r>
-              <a:rPr lang="en-US" sz="2400" dirty="0" err="1" smtClean="0"/>
-              <a:t>ElasticRMI</a:t>
-            </a:r>
-            <a:r>
-              <a:rPr lang="en-US" sz="2400" dirty="0" smtClean="0"/>
-              <a:t> applications can be executed, making them </a:t>
-            </a:r>
-            <a:r>
-              <a:rPr lang="en-US" sz="2400" i="1" dirty="0" smtClean="0">
+              <a:t>instantiated</a:t>
+            </a:r>
+            <a:r>
+              <a:rPr lang="en-US" sz="2000" dirty="0" smtClean="0"/>
+              <a:t> by providing a minimum and maximum number of objects that constitute its </a:t>
+            </a:r>
+            <a:r>
+              <a:rPr lang="en-US" sz="2000" i="1" dirty="0" smtClean="0">
                 <a:solidFill>
                   <a:srgbClr val="C00000"/>
                 </a:solidFill>
               </a:rPr>
-              <a:t>portable</a:t>
-            </a:r>
-            <a:r>
-              <a:rPr lang="en-US" sz="2400" dirty="0" smtClean="0"/>
-              <a:t> across different cloud vendors.</a:t>
-            </a:r>
-            <a:endParaRPr lang="en-US" sz="2400" dirty="0"/>
+              <a:t>elastic object pool</a:t>
+            </a:r>
+            <a:r>
+              <a:rPr lang="en-US" sz="2000" dirty="0" smtClean="0"/>
+              <a:t>. </a:t>
+            </a:r>
+          </a:p>
+          <a:p>
+            <a:r>
+              <a:rPr lang="en-US" sz="2000" dirty="0" smtClean="0"/>
+              <a:t>Obviously, instantiating all objects in the pool on separate JVMs on the </a:t>
+            </a:r>
+            <a:r>
+              <a:rPr lang="en-US" sz="2000" i="1" dirty="0" smtClean="0">
+                <a:solidFill>
+                  <a:srgbClr val="C00000"/>
+                </a:solidFill>
+              </a:rPr>
+              <a:t>same</a:t>
+            </a:r>
+            <a:r>
+              <a:rPr lang="en-US" sz="2000" dirty="0" smtClean="0"/>
+              <a:t> physical machine may degrade performance.</a:t>
+            </a:r>
+          </a:p>
+          <a:p>
+            <a:r>
+              <a:rPr lang="en-US" sz="2000" dirty="0" smtClean="0"/>
+              <a:t>Hence, </a:t>
+            </a:r>
+            <a:r>
+              <a:rPr lang="en-US" sz="2000" dirty="0" err="1" smtClean="0"/>
+              <a:t>ElasticRMI</a:t>
+            </a:r>
+            <a:r>
+              <a:rPr lang="en-US" sz="2000" dirty="0" smtClean="0"/>
+              <a:t> attempts to instantiate each object in a virtual node in a </a:t>
+            </a:r>
+            <a:r>
+              <a:rPr lang="en-US" sz="2000" i="1" dirty="0" smtClean="0">
+                <a:solidFill>
+                  <a:srgbClr val="C00000"/>
+                </a:solidFill>
+              </a:rPr>
+              <a:t>compute cluster</a:t>
+            </a:r>
+            <a:r>
+              <a:rPr lang="en-US" sz="2000" dirty="0" smtClean="0"/>
+              <a:t>.</a:t>
+            </a:r>
           </a:p>
         </p:txBody>
       </p:sp>
       <p:pic>
         <p:nvPicPr>
-          <p:cNvPr id="2050" name="Picture 2"/>
+          <p:cNvPr id="4" name="Picture 2"/>
           <p:cNvPicPr>
             <a:picLocks noChangeAspect="1" noChangeArrowheads="1"/>
           </p:cNvPicPr>
@@ -8554,16 +8484,106 @@
           <a:chExt cx="0" cy="0"/>
         </a:xfrm>
       </p:grpSpPr>
+      <p:sp>
+        <p:nvSpPr>
+          <p:cNvPr id="2" name="Title 1"/>
+          <p:cNvSpPr>
+            <a:spLocks noGrp="1"/>
+          </p:cNvSpPr>
+          <p:nvPr>
+            <p:ph type="title"/>
+          </p:nvPr>
+        </p:nvSpPr>
+        <p:spPr/>
+        <p:txBody>
+          <a:bodyPr/>
+          <a:lstStyle/>
+          <a:p>
+            <a:r>
+              <a:rPr lang="en-US" dirty="0" smtClean="0"/>
+              <a:t>Virtual Nodes</a:t>
+            </a:r>
+            <a:endParaRPr lang="en-US" dirty="0"/>
+          </a:p>
+        </p:txBody>
+      </p:sp>
+      <p:sp>
+        <p:nvSpPr>
+          <p:cNvPr id="3" name="Content Placeholder 2"/>
+          <p:cNvSpPr>
+            <a:spLocks noGrp="1"/>
+          </p:cNvSpPr>
+          <p:nvPr>
+            <p:ph idx="1"/>
+          </p:nvPr>
+        </p:nvSpPr>
+        <p:spPr>
+          <a:xfrm>
+            <a:off x="457200" y="3810000"/>
+            <a:ext cx="8229600" cy="2316163"/>
+          </a:xfrm>
+        </p:spPr>
+        <p:txBody>
+          <a:bodyPr/>
+          <a:lstStyle/>
+          <a:p>
+            <a:r>
+              <a:rPr lang="en-US" sz="2000" dirty="0" smtClean="0"/>
+              <a:t>Virtual nodes can be obtained either (1) from </a:t>
+            </a:r>
+            <a:r>
+              <a:rPr lang="en-US" sz="2000" dirty="0" err="1" smtClean="0"/>
+              <a:t>IaaS</a:t>
+            </a:r>
+            <a:r>
+              <a:rPr lang="en-US" sz="2000" dirty="0" smtClean="0"/>
+              <a:t> clouds by provisioning and instantiating virtual machines, or (2) from a cluster management/resource sharing system like Apache </a:t>
+            </a:r>
+            <a:r>
+              <a:rPr lang="en-US" sz="2000" dirty="0" err="1" smtClean="0"/>
+              <a:t>Mesos</a:t>
+            </a:r>
+            <a:r>
+              <a:rPr lang="en-US" sz="2000" dirty="0" smtClean="0"/>
+              <a:t>.</a:t>
+            </a:r>
+          </a:p>
+          <a:p>
+            <a:r>
+              <a:rPr lang="en-US" sz="2000" dirty="0" smtClean="0">
+                <a:hlinkClick r:id="rId2"/>
+              </a:rPr>
+              <a:t>http://mesos.apache.org/</a:t>
+            </a:r>
+            <a:endParaRPr lang="en-US" sz="2000" dirty="0" smtClean="0"/>
+          </a:p>
+          <a:p>
+            <a:r>
+              <a:rPr lang="en-US" sz="2000" dirty="0" smtClean="0"/>
+              <a:t>Apache </a:t>
+            </a:r>
+            <a:r>
+              <a:rPr lang="en-US" sz="2000" dirty="0" err="1" smtClean="0"/>
+              <a:t>Mesos</a:t>
+            </a:r>
+            <a:r>
+              <a:rPr lang="en-US" sz="2000" dirty="0" smtClean="0"/>
+              <a:t> abstracts CPU, memory, storage, and other compute resources away from machines (physical or virtual), enabling fault-tolerant and elastic distributed systems to easily be built and run effectively.</a:t>
+            </a:r>
+            <a:endParaRPr lang="en-US" sz="2000" dirty="0"/>
+          </a:p>
+        </p:txBody>
+      </p:sp>
       <p:pic>
         <p:nvPicPr>
-          <p:cNvPr id="4" name="Picture 2" descr="https://lh3.ggpht.com/1IfZLL2QDSjZ0wS7sUhaMlsAOS8BBzdR3wZ1WawgRn7KZAM8nEVZYMOUM-lqQb0ikIzp=w300"/>
+          <p:cNvPr id="4" name="Picture 2"/>
           <p:cNvPicPr>
             <a:picLocks noChangeAspect="1" noChangeArrowheads="1"/>
           </p:cNvPicPr>
           <p:nvPr/>
         </p:nvPicPr>
         <p:blipFill>
-          <a:blip r:embed="rId2" cstate="print"/>
+          <a:blip r:embed="rId3" cstate="print"/>
           <a:srcRect/>
           <a:stretch>
             <a:fillRect/>
@@ -8571,13 +8591,19 @@
         </p:blipFill>
         <p:spPr bwMode="auto">
           <a:xfrm>
-            <a:off x="3276600" y="1905000"/>
-            <a:ext cx="2857500" cy="2857500"/>
+            <a:off x="2514600" y="1524000"/>
+            <a:ext cx="4210050" cy="1876425"/>
           </a:xfrm>
           <a:prstGeom prst="rect">
             <a:avLst/>
           </a:prstGeom>
           <a:noFill/>
+          <a:ln w="9525">
+            <a:noFill/>
+            <a:miter lim="800000"/>
+            <a:headEnd/>
+            <a:tailEnd/>
+          </a:ln>
         </p:spPr>
       </p:pic>
     </p:spTree>
@@ -8605,6 +8631,38 @@
           <a:chExt cx="0" cy="0"/>
         </a:xfrm>
       </p:grpSpPr>
+      <p:pic>
+        <p:nvPicPr>
+          <p:cNvPr id="1028" name="Picture 4"/>
+          <p:cNvPicPr>
+            <a:picLocks noChangeAspect="1" noChangeArrowheads="1"/>
+          </p:cNvPicPr>
+          <p:nvPr/>
+        </p:nvPicPr>
+        <p:blipFill>
+          <a:blip r:embed="rId3" cstate="print"/>
+          <a:srcRect/>
+          <a:stretch>
+            <a:fillRect/>
+          </a:stretch>
+        </p:blipFill>
+        <p:spPr bwMode="auto">
+          <a:xfrm>
+            <a:off x="6477000" y="2438400"/>
+            <a:ext cx="2390775" cy="2390775"/>
+          </a:xfrm>
+          <a:prstGeom prst="rect">
+            <a:avLst/>
+          </a:prstGeom>
+          <a:noFill/>
+          <a:ln w="9525">
+            <a:noFill/>
+            <a:miter lim="800000"/>
+            <a:headEnd/>
+            <a:tailEnd/>
+          </a:ln>
+        </p:spPr>
+      </p:pic>
       <p:sp>
         <p:nvSpPr>
           <p:cNvPr id="2" name="Title 1"/>
@@ -8622,7 +8680,7 @@
           <a:p>
             <a:r>
               <a:rPr lang="en-US" dirty="0" smtClean="0"/>
-              <a:t>Scaling Indicators [1]</a:t>
+              <a:t>Contents</a:t>
             </a:r>
             <a:endParaRPr lang="en-US" dirty="0"/>
           </a:p>
@@ -8638,90 +8696,21 @@
             <p:ph idx="1"/>
           </p:nvPr>
         </p:nvSpPr>
-        <p:spPr/>
+        <p:spPr>
+          <a:xfrm>
+            <a:off x="457200" y="1600200"/>
+            <a:ext cx="6096000" cy="4525963"/>
+          </a:xfrm>
+        </p:spPr>
         <p:txBody>
           <a:bodyPr/>
           <a:lstStyle/>
           <a:p>
-            <a:r>
-              <a:rPr lang="en-US" sz="2800" dirty="0" smtClean="0"/>
-              <a:t>In order to scale the application in </a:t>
-            </a:r>
-            <a:r>
-              <a:rPr lang="en-US" sz="2800" u="sng" dirty="0" smtClean="0"/>
-              <a:t>dynamic manner</a:t>
-            </a:r>
-            <a:r>
-              <a:rPr lang="en-US" sz="2800" dirty="0" smtClean="0"/>
-              <a:t>, it is common to use </a:t>
-            </a:r>
-            <a:r>
-              <a:rPr lang="en-US" sz="2800" i="1" dirty="0" smtClean="0">
-                <a:solidFill>
-                  <a:srgbClr val="C00000"/>
-                </a:solidFill>
-              </a:rPr>
-              <a:t>scaling indicators</a:t>
-            </a:r>
-            <a:r>
-              <a:rPr lang="en-US" sz="2800" dirty="0" smtClean="0"/>
-              <a:t> at the </a:t>
-            </a:r>
-            <a:r>
-              <a:rPr lang="en-US" sz="2800" u="sng" dirty="0" smtClean="0"/>
-              <a:t>scaling point</a:t>
-            </a:r>
-            <a:r>
-              <a:rPr lang="en-US" sz="2800" dirty="0" smtClean="0"/>
-              <a:t> to monitor and track the performance.</a:t>
-            </a:r>
-          </a:p>
-          <a:p>
-            <a:r>
-              <a:rPr lang="en-US" sz="2800" dirty="0" smtClean="0"/>
-              <a:t>For </a:t>
-            </a:r>
-            <a:r>
-              <a:rPr lang="en-US" sz="2800" i="1" dirty="0" smtClean="0">
-                <a:solidFill>
-                  <a:srgbClr val="C00000"/>
-                </a:solidFill>
-              </a:rPr>
-              <a:t>web applications</a:t>
-            </a:r>
-            <a:r>
-              <a:rPr lang="en-US" sz="2800" dirty="0" smtClean="0"/>
-              <a:t>, typical scaling indicators at the web server may include:</a:t>
-            </a:r>
-          </a:p>
-          <a:p>
-            <a:pPr lvl="1"/>
-            <a:r>
-              <a:rPr lang="en-US" sz="2400" dirty="0" smtClean="0"/>
-              <a:t>Number of concurrent users.</a:t>
-            </a:r>
-          </a:p>
-          <a:p>
-            <a:pPr lvl="1"/>
-            <a:r>
-              <a:rPr lang="en-US" sz="2400" dirty="0" smtClean="0"/>
-              <a:t>Number of active connections.</a:t>
-            </a:r>
-          </a:p>
-          <a:p>
-            <a:pPr lvl="1"/>
-            <a:r>
-              <a:rPr lang="en-US" sz="2400" dirty="0" smtClean="0"/>
-              <a:t>Number of requests per second.</a:t>
-            </a:r>
-          </a:p>
-          <a:p>
-            <a:pPr lvl="1"/>
-            <a:r>
-              <a:rPr lang="en-US" sz="2400" dirty="0" smtClean="0"/>
-              <a:t>Average response times per request.</a:t>
-            </a:r>
-            <a:endParaRPr lang="en-US" sz="2400" dirty="0"/>
+            <a:pPr marL="571500" indent="-571500">
+              <a:buFont typeface="+mj-lt"/>
+              <a:buAutoNum type="romanUcPeriod"/>
+            </a:pPr>
+            <a:endParaRPr lang="en-US" sz="2400" dirty="0" smtClean="0"/>
           </a:p>
         </p:txBody>
       </p:sp>
@@ -8767,11 +8756,7 @@
           <a:p>
             <a:r>
               <a:rPr lang="en-US" dirty="0" smtClean="0"/>
-              <a:t>Horizontal Pod </a:t>
-            </a:r>
-            <a:r>
-              <a:rPr lang="en-US" dirty="0" err="1" smtClean="0"/>
-              <a:t>Autoscaling</a:t>
+              <a:t>Portability</a:t>
             </a:r>
             <a:endParaRPr lang="en-US" dirty="0"/>
           </a:p>
@@ -8787,76 +8772,106 @@
             <p:ph idx="1"/>
           </p:nvPr>
         </p:nvSpPr>
-        <p:spPr/>
+        <p:spPr>
+          <a:xfrm>
+            <a:off x="457200" y="3810000"/>
+            <a:ext cx="8229600" cy="2316163"/>
+          </a:xfrm>
+        </p:spPr>
         <p:txBody>
           <a:bodyPr/>
           <a:lstStyle/>
           <a:p>
             <a:r>
-              <a:rPr lang="en-US" sz="2400" dirty="0" smtClean="0">
-                <a:hlinkClick r:id="rId2"/>
+              <a:rPr lang="en-US" sz="2400" dirty="0" err="1" smtClean="0"/>
+              <a:t>Mesos</a:t>
+            </a:r>
+            <a:r>
+              <a:rPr lang="en-US" sz="2400" dirty="0" smtClean="0"/>
+              <a:t> can also be viewed as a thin </a:t>
+            </a:r>
+            <a:r>
+              <a:rPr lang="en-US" sz="2400" i="1" dirty="0" smtClean="0">
+                <a:solidFill>
+                  <a:srgbClr val="C00000"/>
+                </a:solidFill>
               </a:rPr>
-              <a:t>https://kubernetes.io/docs/concepts/workloads/autoscaling/horizontal-pod-autoscale</a:t>
-            </a:r>
-            <a:r>
-              <a:rPr lang="en-US" sz="2400" dirty="0" smtClean="0">
-                <a:hlinkClick r:id="rId2"/>
+              <a:t>resource-sharing layer</a:t>
+            </a:r>
+            <a:r>
+              <a:rPr lang="en-US" sz="2400" dirty="0" smtClean="0"/>
+              <a:t> that manages a cluster of physical nodes/virtual machines.</a:t>
+            </a:r>
+          </a:p>
+          <a:p>
+            <a:r>
+              <a:rPr lang="en-US" sz="2400" dirty="0" smtClean="0"/>
+              <a:t>As long as </a:t>
+            </a:r>
+            <a:r>
+              <a:rPr lang="en-US" sz="2400" dirty="0" err="1" smtClean="0"/>
+              <a:t>Mesos</a:t>
+            </a:r>
+            <a:r>
+              <a:rPr lang="en-US" sz="2400" dirty="0" smtClean="0"/>
+              <a:t> is available, </a:t>
+            </a:r>
+            <a:r>
+              <a:rPr lang="en-US" sz="2400" dirty="0" err="1" smtClean="0"/>
+              <a:t>ElasticRMI</a:t>
+            </a:r>
+            <a:r>
+              <a:rPr lang="en-US" sz="2400" dirty="0" smtClean="0"/>
+              <a:t> applications can be executed, making them </a:t>
+            </a:r>
+            <a:r>
+              <a:rPr lang="en-US" sz="2400" i="1" dirty="0" smtClean="0">
+                <a:solidFill>
+                  <a:srgbClr val="C00000"/>
+                </a:solidFill>
               </a:rPr>
-              <a:t>/</a:t>
-            </a:r>
-            <a:endParaRPr lang="en-US" sz="2400" dirty="0" smtClean="0"/>
-          </a:p>
-          <a:p>
-            <a:r>
-              <a:rPr lang="en-US" sz="2400" dirty="0" smtClean="0"/>
-              <a:t>Horizontal scaling means that the response to increased load is to deploy more Pods.</a:t>
-            </a:r>
-          </a:p>
-          <a:p>
-            <a:r>
-              <a:rPr lang="en-US" sz="2400" dirty="0" smtClean="0"/>
-              <a:t>If the load decreases, and the number of Pods is above the configured minimum, the </a:t>
-            </a:r>
-            <a:r>
-              <a:rPr lang="en-US" sz="2400" dirty="0" err="1" smtClean="0"/>
-              <a:t>HorizontalPodAutoscaler</a:t>
-            </a:r>
-            <a:r>
-              <a:rPr lang="en-US" sz="2400" dirty="0" smtClean="0"/>
-              <a:t> instructs the workload resource (the Deployment, </a:t>
-            </a:r>
-            <a:r>
-              <a:rPr lang="en-US" sz="2400" dirty="0" err="1" smtClean="0"/>
-              <a:t>StatefulSet</a:t>
-            </a:r>
-            <a:r>
-              <a:rPr lang="en-US" sz="2400" dirty="0" smtClean="0"/>
-              <a:t>, or other similar resource) to scale back down.</a:t>
-            </a:r>
-          </a:p>
-          <a:p>
-            <a:r>
-              <a:rPr lang="en-US" sz="2400" dirty="0" err="1" smtClean="0"/>
-              <a:t>Kubernetes</a:t>
-            </a:r>
-            <a:r>
-              <a:rPr lang="en-US" sz="2400" dirty="0" smtClean="0"/>
-              <a:t> implements horizontal pod </a:t>
-            </a:r>
-            <a:r>
-              <a:rPr lang="en-US" sz="2400" dirty="0" err="1" smtClean="0"/>
-              <a:t>autoscaling</a:t>
-            </a:r>
-            <a:r>
-              <a:rPr lang="en-US" sz="2400" dirty="0" smtClean="0"/>
-              <a:t> as a control loop that runs intermittently (it is not a continuous process).</a:t>
-            </a:r>
-          </a:p>
-          <a:p>
+              <a:t>portable</a:t>
+            </a:r>
+            <a:r>
+              <a:rPr lang="en-US" sz="2400" dirty="0" smtClean="0"/>
+              <a:t> across different cloud vendors.</a:t>
+            </a:r>
             <a:endParaRPr lang="en-US" sz="2400" dirty="0"/>
           </a:p>
         </p:txBody>
       </p:sp>
+      <p:pic>
+        <p:nvPicPr>
+          <p:cNvPr id="2050" name="Picture 2"/>
+          <p:cNvPicPr>
+            <a:picLocks noChangeAspect="1" noChangeArrowheads="1"/>
+          </p:cNvPicPr>
+          <p:nvPr/>
+        </p:nvPicPr>
+        <p:blipFill>
+          <a:blip r:embed="rId2" cstate="print"/>
+          <a:srcRect/>
+          <a:stretch>
+            <a:fillRect/>
+          </a:stretch>
+        </p:blipFill>
+        <p:spPr bwMode="auto">
+          <a:xfrm>
+            <a:off x="2514600" y="1752600"/>
+            <a:ext cx="4210050" cy="1876425"/>
+          </a:xfrm>
+          <a:prstGeom prst="rect">
+            <a:avLst/>
+          </a:prstGeom>
+          <a:noFill/>
+          <a:ln w="9525">
+            <a:noFill/>
+            <a:miter lim="800000"/>
+            <a:headEnd/>
+            <a:tailEnd/>
+          </a:ln>
+        </p:spPr>
+      </p:pic>
     </p:spTree>
   </p:cSld>
   <p:clrMapOvr>
@@ -8866,159 +8881,6 @@
 </file>
 
 <file path=ppt/slides/slide31.xml><?xml version="1.0" encoding="utf-8"?>
-<p:sld xmlns:a="http://schemas.openxmlformats.org/drawingml/2006/main" xmlns:r="http://schemas.openxmlformats.org/officeDocument/2006/relationships" xmlns:p="http://schemas.openxmlformats.org/presentationml/2006/main">
-  <p:cSld>
-    <p:spTree>
-      <p:nvGrpSpPr>
-        <p:cNvPr id="1" name=""/>
-        <p:cNvGrpSpPr/>
-        <p:nvPr/>
-      </p:nvGrpSpPr>
-      <p:grpSpPr>
-        <a:xfrm>
-          <a:off x="0" y="0"/>
-          <a:ext cx="0" cy="0"/>
-          <a:chOff x="0" y="0"/>
-          <a:chExt cx="0" cy="0"/>
-        </a:xfrm>
-      </p:grpSpPr>
-      <p:sp>
-        <p:nvSpPr>
-          <p:cNvPr id="2" name="Title 1"/>
-          <p:cNvSpPr>
-            <a:spLocks noGrp="1"/>
-          </p:cNvSpPr>
-          <p:nvPr>
-            <p:ph type="title"/>
-          </p:nvPr>
-        </p:nvSpPr>
-        <p:spPr/>
-        <p:txBody>
-          <a:bodyPr/>
-          <a:lstStyle/>
-          <a:p>
-            <a:r>
-              <a:rPr lang="en-US" dirty="0" err="1" smtClean="0"/>
-              <a:t>Kubernetes</a:t>
-            </a:r>
-            <a:r>
-              <a:rPr lang="en-US" dirty="0" smtClean="0"/>
-              <a:t> HPA (KHPA</a:t>
-            </a:r>
-            <a:r>
-              <a:rPr lang="en-US" dirty="0" smtClean="0"/>
-              <a:t>) Algorithm</a:t>
-            </a:r>
-            <a:endParaRPr lang="en-US" dirty="0"/>
-          </a:p>
-        </p:txBody>
-      </p:sp>
-      <p:sp>
-        <p:nvSpPr>
-          <p:cNvPr id="3" name="Content Placeholder 2"/>
-          <p:cNvSpPr>
-            <a:spLocks noGrp="1"/>
-          </p:cNvSpPr>
-          <p:nvPr>
-            <p:ph idx="1"/>
-          </p:nvPr>
-        </p:nvSpPr>
-        <p:spPr/>
-        <p:txBody>
-          <a:bodyPr/>
-          <a:lstStyle/>
-          <a:p>
-            <a:r>
-              <a:rPr lang="en-US" sz="2400" dirty="0" smtClean="0"/>
-              <a:t>The </a:t>
-            </a:r>
-            <a:r>
-              <a:rPr lang="en-US" sz="2400" dirty="0" err="1" smtClean="0"/>
-              <a:t>HorizontalPodAutoscaler</a:t>
-            </a:r>
-            <a:r>
-              <a:rPr lang="en-US" sz="2400" dirty="0" smtClean="0"/>
-              <a:t> controller operates on the ratio between desired metric value and current metric value:</a:t>
-            </a:r>
-          </a:p>
-          <a:p>
-            <a:r>
-              <a:rPr lang="en-US" sz="2400" dirty="0" err="1" smtClean="0"/>
-              <a:t>desiredReplicas</a:t>
-            </a:r>
-            <a:r>
-              <a:rPr lang="en-US" sz="2400" dirty="0" smtClean="0"/>
-              <a:t> = ceil [ </a:t>
-            </a:r>
-            <a:r>
-              <a:rPr lang="en-US" sz="2400" dirty="0" err="1" smtClean="0"/>
-              <a:t>currentReplicas</a:t>
-            </a:r>
-            <a:r>
-              <a:rPr lang="en-US" sz="2400" dirty="0" smtClean="0"/>
-              <a:t> × (</a:t>
-            </a:r>
-            <a:r>
-              <a:rPr lang="en-US" sz="2400" dirty="0" err="1" smtClean="0"/>
-              <a:t>desiredMetricValue</a:t>
-            </a:r>
-            <a:r>
-              <a:rPr lang="en-US" sz="2400" dirty="0" smtClean="0"/>
-              <a:t>/</a:t>
-            </a:r>
-            <a:r>
-              <a:rPr lang="en-US" sz="2400" dirty="0" err="1" smtClean="0"/>
-              <a:t>currentMetricValue</a:t>
-            </a:r>
-            <a:r>
-              <a:rPr lang="en-US" sz="2400" dirty="0" smtClean="0"/>
-              <a:t>​) ]</a:t>
-            </a:r>
-          </a:p>
-          <a:p>
-            <a:r>
-              <a:rPr lang="en-US" sz="2400" dirty="0" smtClean="0"/>
-              <a:t>For example, if the current metric value is 200m, and the desired value is 100m, the number of replicas will be doubled, since </a:t>
-            </a:r>
-            <a:r>
-              <a:rPr lang="en-US" sz="2400" dirty="0" smtClean="0"/>
-              <a:t>200.0 ÷ 100.0 = 2.0.</a:t>
-            </a:r>
-            <a:endParaRPr lang="en-US" sz="2400" dirty="0" smtClean="0"/>
-          </a:p>
-          <a:p>
-            <a:r>
-              <a:rPr lang="en-US" sz="2400" dirty="0" smtClean="0"/>
-              <a:t>If the current value is instead 50m, you'll halve the number of replicas, since </a:t>
-            </a:r>
-            <a:r>
-              <a:rPr lang="en-US" sz="2400" dirty="0" smtClean="0"/>
-              <a:t>50.0 ÷ 100.0 = 0.5.</a:t>
-            </a:r>
-            <a:endParaRPr lang="en-US" sz="2400" dirty="0" smtClean="0"/>
-          </a:p>
-          <a:p>
-            <a:r>
-              <a:rPr lang="en-US" sz="2400" dirty="0" smtClean="0"/>
-              <a:t>The control plane skips any scaling action if the ratio is sufficiently close to </a:t>
-            </a:r>
-            <a:r>
-              <a:rPr lang="en-US" sz="2400" dirty="0" smtClean="0"/>
-              <a:t>1.0.</a:t>
-            </a:r>
-            <a:endParaRPr lang="en-US" sz="2400" dirty="0" smtClean="0"/>
-          </a:p>
-        </p:txBody>
-      </p:sp>
-    </p:spTree>
-  </p:cSld>
-  <p:clrMapOvr>
-    <a:masterClrMapping/>
-  </p:clrMapOvr>
-</p:sld>
-</file>
-
-<file path=ppt/slides/slide32.xml><?xml version="1.0" encoding="utf-8"?>
 <p:sld xmlns:a="http://schemas.openxmlformats.org/drawingml/2006/main" xmlns:r="http://schemas.openxmlformats.org/officeDocument/2006/relationships" xmlns:p="http://schemas.openxmlformats.org/presentationml/2006/main">
   <p:cSld>
     <p:spTree>
@@ -9069,6 +8931,132 @@
 </p:sld>
 </file>
 
+<file path=ppt/slides/slide32.xml><?xml version="1.0" encoding="utf-8"?>
+<p:sld xmlns:a="http://schemas.openxmlformats.org/drawingml/2006/main" xmlns:r="http://schemas.openxmlformats.org/officeDocument/2006/relationships" xmlns:p="http://schemas.openxmlformats.org/presentationml/2006/main">
+  <p:cSld>
+    <p:spTree>
+      <p:nvGrpSpPr>
+        <p:cNvPr id="1" name=""/>
+        <p:cNvGrpSpPr/>
+        <p:nvPr/>
+      </p:nvGrpSpPr>
+      <p:grpSpPr>
+        <a:xfrm>
+          <a:off x="0" y="0"/>
+          <a:ext cx="0" cy="0"/>
+          <a:chOff x="0" y="0"/>
+          <a:chExt cx="0" cy="0"/>
+        </a:xfrm>
+      </p:grpSpPr>
+      <p:sp>
+        <p:nvSpPr>
+          <p:cNvPr id="2" name="Title 1"/>
+          <p:cNvSpPr>
+            <a:spLocks noGrp="1"/>
+          </p:cNvSpPr>
+          <p:nvPr>
+            <p:ph type="title"/>
+          </p:nvPr>
+        </p:nvSpPr>
+        <p:spPr/>
+        <p:txBody>
+          <a:bodyPr/>
+          <a:lstStyle/>
+          <a:p>
+            <a:r>
+              <a:rPr lang="en-US" dirty="0" smtClean="0"/>
+              <a:t>Horizontal Pod </a:t>
+            </a:r>
+            <a:r>
+              <a:rPr lang="en-US" dirty="0" err="1" smtClean="0"/>
+              <a:t>Autoscaling</a:t>
+            </a:r>
+            <a:endParaRPr lang="en-US" dirty="0"/>
+          </a:p>
+        </p:txBody>
+      </p:sp>
+      <p:sp>
+        <p:nvSpPr>
+          <p:cNvPr id="3" name="Content Placeholder 2"/>
+          <p:cNvSpPr>
+            <a:spLocks noGrp="1"/>
+          </p:cNvSpPr>
+          <p:nvPr>
+            <p:ph idx="1"/>
+          </p:nvPr>
+        </p:nvSpPr>
+        <p:spPr/>
+        <p:txBody>
+          <a:bodyPr/>
+          <a:lstStyle/>
+          <a:p>
+            <a:r>
+              <a:rPr lang="en-US" sz="2400" dirty="0" smtClean="0">
+                <a:hlinkClick r:id="rId2"/>
+              </a:rPr>
+              <a:t>https://kubernetes.io/docs/concepts/workloads/autoscaling/horizontal-pod-autoscale/</a:t>
+            </a:r>
+            <a:endParaRPr lang="en-US" sz="2400" dirty="0" smtClean="0"/>
+          </a:p>
+          <a:p>
+            <a:r>
+              <a:rPr lang="en-US" sz="2400" dirty="0" smtClean="0"/>
+              <a:t>Horizontal scaling means that the response to increased load is to deploy more Pods.</a:t>
+            </a:r>
+          </a:p>
+          <a:p>
+            <a:r>
+              <a:rPr lang="en-US" sz="2400" dirty="0" smtClean="0"/>
+              <a:t>If the load decreases, and the number of Pods is above the configured minimum, the </a:t>
+            </a:r>
+            <a:r>
+              <a:rPr lang="en-US" sz="2400" dirty="0" err="1" smtClean="0"/>
+              <a:t>HorizontalPodAutoscaler</a:t>
+            </a:r>
+            <a:r>
+              <a:rPr lang="en-US" sz="2400" dirty="0" smtClean="0"/>
+              <a:t> instructs the workload resource (the Deployment, </a:t>
+            </a:r>
+            <a:r>
+              <a:rPr lang="en-US" sz="2400" dirty="0" err="1" smtClean="0"/>
+              <a:t>StatefulSet</a:t>
+            </a:r>
+            <a:r>
+              <a:rPr lang="en-US" sz="2400" dirty="0" smtClean="0"/>
+              <a:t>, or other similar resource) to scale back down.</a:t>
+            </a:r>
+          </a:p>
+          <a:p>
+            <a:r>
+              <a:rPr lang="en-US" sz="2400" dirty="0" err="1" smtClean="0"/>
+              <a:t>Kubernetes</a:t>
+            </a:r>
+            <a:r>
+              <a:rPr lang="en-US" sz="2400" dirty="0" smtClean="0"/>
+              <a:t> implements horizontal pod </a:t>
+            </a:r>
+            <a:r>
+              <a:rPr lang="en-US" sz="2400" dirty="0" err="1" smtClean="0"/>
+              <a:t>autoscaling</a:t>
+            </a:r>
+            <a:r>
+              <a:rPr lang="en-US" sz="2400" dirty="0" smtClean="0"/>
+              <a:t> as a control loop that runs intermittently (it is not a continuous process).</a:t>
+            </a:r>
+          </a:p>
+          <a:p>
+            <a:endParaRPr lang="en-US" sz="2400" dirty="0"/>
+          </a:p>
+        </p:txBody>
+      </p:sp>
+    </p:spTree>
+  </p:cSld>
+  <p:clrMapOvr>
+    <a:masterClrMapping/>
+  </p:clrMapOvr>
+</p:sld>
+</file>
+
 <file path=ppt/slides/slide33.xml><?xml version="1.0" encoding="utf-8"?>
 <p:sld xmlns:a="http://schemas.openxmlformats.org/drawingml/2006/main" xmlns:r="http://schemas.openxmlformats.org/officeDocument/2006/relationships" xmlns:p="http://schemas.openxmlformats.org/presentationml/2006/main">
   <p:cSld>
@@ -9102,8 +9090,12 @@
           <a:lstStyle/>
           <a:p>
             <a:r>
+              <a:rPr lang="en-US" dirty="0" err="1" smtClean="0"/>
+              <a:t>Kubernetes</a:t>
+            </a:r>
+            <a:r>
               <a:rPr lang="en-US" dirty="0" smtClean="0"/>
-              <a:t>Smart HPA</a:t>
+              <a:t> HPA (KHPA) Algorithm</a:t>
             </a:r>
             <a:endParaRPr lang="en-US" dirty="0"/>
           </a:p>
@@ -9125,121 +9117,69 @@
           <a:lstStyle/>
           <a:p>
             <a:r>
-              <a:rPr lang="en-US" sz="2000" b="1" dirty="0" err="1" smtClean="0"/>
-              <a:t>Hussain</a:t>
-            </a:r>
-            <a:r>
-              <a:rPr lang="en-US" sz="2000" b="1" dirty="0" smtClean="0"/>
-              <a:t> Ahmad et al. (2025). Towards resource-efficient reactive and proactive auto-scaling for </a:t>
-            </a:r>
-            <a:r>
-              <a:rPr lang="en-US" sz="2000" b="1" dirty="0" err="1" smtClean="0"/>
-              <a:t>microservice</a:t>
-            </a:r>
-            <a:r>
-              <a:rPr lang="en-US" sz="2000" b="1" dirty="0" smtClean="0"/>
-              <a:t> </a:t>
-            </a:r>
-            <a:r>
-              <a:rPr lang="en-US" sz="2000" b="1" dirty="0" smtClean="0"/>
-              <a:t>architectures.</a:t>
-            </a:r>
-            <a:endParaRPr lang="en-US" sz="2000" b="1" dirty="0" smtClean="0"/>
-          </a:p>
-        </p:txBody>
-      </p:sp>
-      <p:pic>
-        <p:nvPicPr>
-          <p:cNvPr id="1026" name="Picture 2"/>
-          <p:cNvPicPr>
-            <a:picLocks noChangeAspect="1" noChangeArrowheads="1"/>
-          </p:cNvPicPr>
-          <p:nvPr/>
-        </p:nvPicPr>
-        <p:blipFill>
-          <a:blip r:embed="rId2" cstate="print"/>
-          <a:srcRect/>
-          <a:stretch>
-            <a:fillRect/>
-          </a:stretch>
-        </p:blipFill>
-        <p:spPr bwMode="auto">
-          <a:xfrm>
-            <a:off x="2514600" y="2514600"/>
-            <a:ext cx="6235700" cy="3444875"/>
-          </a:xfrm>
-          <a:prstGeom prst="rect">
-            <a:avLst/>
-          </a:prstGeom>
-          <a:noFill/>
-          <a:ln w="9525">
-            <a:noFill/>
-            <a:miter lim="800000"/>
-            <a:headEnd/>
-            <a:tailEnd/>
-          </a:ln>
-        </p:spPr>
-      </p:pic>
-      <p:sp>
-        <p:nvSpPr>
-          <p:cNvPr id="5" name="Rectangle 4"/>
-          <p:cNvSpPr/>
-          <p:nvPr/>
-        </p:nvSpPr>
-        <p:spPr>
-          <a:xfrm>
-            <a:off x="609600" y="2590800"/>
-            <a:ext cx="1828800" cy="3693319"/>
-          </a:xfrm>
-          <a:prstGeom prst="rect">
-            <a:avLst/>
-          </a:prstGeom>
-        </p:spPr>
-        <p:style>
-          <a:lnRef idx="2">
-            <a:schemeClr val="dk1"/>
-          </a:lnRef>
-          <a:fillRef idx="1">
-            <a:schemeClr val="lt1"/>
-          </a:fillRef>
-          <a:effectRef idx="0">
-            <a:schemeClr val="dk1"/>
-          </a:effectRef>
-          <a:fontRef idx="minor">
-            <a:schemeClr val="dk1"/>
-          </a:fontRef>
-        </p:style>
-        <p:txBody>
-          <a:bodyPr wrap="square">
-            <a:spAutoFit/>
-          </a:bodyPr>
-          <a:lstStyle/>
-          <a:p>
-            <a:r>
-              <a:rPr lang="en-US" dirty="0" smtClean="0"/>
-              <a:t>Smart HPA employs a reactive scaling policy that facilitates </a:t>
-            </a:r>
-            <a:r>
-              <a:rPr lang="en-US" i="1" dirty="0" smtClean="0">
-                <a:solidFill>
-                  <a:srgbClr val="C00000"/>
-                </a:solidFill>
-              </a:rPr>
-              <a:t>resource exchange among </a:t>
-            </a:r>
-            <a:r>
-              <a:rPr lang="en-US" i="1" dirty="0" err="1" smtClean="0">
-                <a:solidFill>
-                  <a:srgbClr val="C00000"/>
-                </a:solidFill>
-              </a:rPr>
-              <a:t>microservices</a:t>
-            </a:r>
-            <a:r>
-              <a:rPr lang="en-US" dirty="0" smtClean="0"/>
-              <a:t>, optimizing auto-scaling in resource-constrained environments.</a:t>
-            </a:r>
-            <a:endParaRPr lang="en-US" dirty="0"/>
+              <a:rPr lang="en-US" sz="2400" dirty="0" smtClean="0"/>
+              <a:t>The </a:t>
+            </a:r>
+            <a:r>
+              <a:rPr lang="en-US" sz="2400" dirty="0" err="1" smtClean="0"/>
+              <a:t>HorizontalPodAutoscaler</a:t>
+            </a:r>
+            <a:r>
+              <a:rPr lang="en-US" sz="2400" dirty="0" smtClean="0"/>
+              <a:t> controller operates on the ratio between desired metric value and current metric value:</a:t>
+            </a:r>
+          </a:p>
+          <a:p>
+            <a:r>
+              <a:rPr lang="en-US" sz="2400" dirty="0" err="1" smtClean="0"/>
+              <a:t>desiredReplicas</a:t>
+            </a:r>
+            <a:r>
+              <a:rPr lang="en-US" sz="2400" dirty="0" smtClean="0"/>
+              <a:t> = ceil [ </a:t>
+            </a:r>
+            <a:r>
+              <a:rPr lang="en-US" sz="2400" dirty="0" err="1" smtClean="0"/>
+              <a:t>currentReplicas</a:t>
+            </a:r>
+            <a:r>
+              <a:rPr lang="en-US" sz="2400" dirty="0" smtClean="0"/>
+              <a:t> × (</a:t>
+            </a:r>
+            <a:r>
+              <a:rPr lang="en-US" sz="2400" dirty="0" err="1" smtClean="0"/>
+              <a:t>desiredMetricValue</a:t>
+            </a:r>
+            <a:r>
+              <a:rPr lang="en-US" sz="2400" dirty="0" smtClean="0"/>
+              <a:t>/</a:t>
+            </a:r>
+            <a:r>
+              <a:rPr lang="en-US" sz="2400" dirty="0" err="1" smtClean="0"/>
+              <a:t>currentMetricValue</a:t>
+            </a:r>
+            <a:r>
+              <a:rPr lang="en-US" sz="2400" dirty="0" smtClean="0"/>
+              <a:t>​) ]</a:t>
+            </a:r>
+          </a:p>
+          <a:p>
+            <a:r>
+              <a:rPr lang="en-US" sz="2400" dirty="0" smtClean="0"/>
+              <a:t>For example, if the current metric value is 200m, and the desired value is 100m, the number of replicas will be doubled, since 200.0 ÷ 100.0 = 2.0.</a:t>
+            </a:r>
+          </a:p>
+          <a:p>
+            <a:r>
+              <a:rPr lang="en-US" sz="2400" dirty="0" smtClean="0"/>
+              <a:t>If the current value is instead 50m, you'll halve the number of replicas, since 50.0 ÷ 100.0 = 0.5.</a:t>
+            </a:r>
+          </a:p>
+          <a:p>
+            <a:r>
+              <a:rPr lang="en-US" sz="2400" dirty="0" smtClean="0"/>
+              <a:t>The control plane skips any scaling action if the ratio is sufficiently close to 1.0.</a:t>
+            </a:r>
           </a:p>
         </p:txBody>
       </p:sp>
@@ -9336,7 +9276,7 @@
           <a:p>
             <a:r>
               <a:rPr lang="en-US" dirty="0" smtClean="0"/>
-              <a:t>Sparse Causal Graphs</a:t>
+              <a:t>Smart HPA</a:t>
             </a:r>
             <a:endParaRPr lang="en-US" dirty="0"/>
           </a:p>
@@ -9358,14 +9298,116 @@
           <a:lstStyle/>
           <a:p>
             <a:r>
-              <a:rPr lang="en-US" sz="2400" b="1" dirty="0" smtClean="0"/>
-              <a:t>(1990). An Algorithm for Fast Recovery of Sparse Causal </a:t>
-            </a:r>
-            <a:r>
-              <a:rPr lang="en-US" sz="2400" b="1" dirty="0" smtClean="0"/>
-              <a:t>Graphs.</a:t>
-            </a:r>
-            <a:endParaRPr lang="en-US" sz="2400" b="1" dirty="0"/>
+              <a:rPr lang="en-US" sz="2000" b="1" dirty="0" err="1" smtClean="0"/>
+              <a:t>Hussain</a:t>
+            </a:r>
+            <a:r>
+              <a:rPr lang="en-US" sz="2000" b="1" dirty="0" smtClean="0"/>
+              <a:t> Ahmad et al. (2025). Towards resource-efficient reactive and proactive auto-scaling for </a:t>
+            </a:r>
+            <a:r>
+              <a:rPr lang="en-US" sz="2000" b="1" dirty="0" err="1" smtClean="0"/>
+              <a:t>microservice</a:t>
+            </a:r>
+            <a:r>
+              <a:rPr lang="en-US" sz="2000" b="1" dirty="0" smtClean="0"/>
+              <a:t> architectures.</a:t>
+            </a:r>
+          </a:p>
+        </p:txBody>
+      </p:sp>
+      <p:pic>
+        <p:nvPicPr>
+          <p:cNvPr id="1026" name="Picture 2"/>
+          <p:cNvPicPr>
+            <a:picLocks noChangeAspect="1" noChangeArrowheads="1"/>
+          </p:cNvPicPr>
+          <p:nvPr/>
+        </p:nvPicPr>
+        <p:blipFill>
+          <a:blip r:embed="rId2" cstate="print"/>
+          <a:srcRect/>
+          <a:stretch>
+            <a:fillRect/>
+          </a:stretch>
+        </p:blipFill>
+        <p:spPr bwMode="auto">
+          <a:xfrm>
+            <a:off x="2514600" y="2514600"/>
+            <a:ext cx="6235700" cy="3444875"/>
+          </a:xfrm>
+          <a:prstGeom prst="rect">
+            <a:avLst/>
+          </a:prstGeom>
+          <a:noFill/>
+          <a:ln w="9525">
+            <a:noFill/>
+            <a:miter lim="800000"/>
+            <a:headEnd/>
+            <a:tailEnd/>
+          </a:ln>
+        </p:spPr>
+      </p:pic>
+      <p:sp>
+        <p:nvSpPr>
+          <p:cNvPr id="5" name="Rectangle 4"/>
+          <p:cNvSpPr/>
+          <p:nvPr/>
+        </p:nvSpPr>
+        <p:spPr>
+          <a:xfrm>
+            <a:off x="609600" y="2590800"/>
+            <a:ext cx="1828800" cy="3693319"/>
+          </a:xfrm>
+          <a:prstGeom prst="rect">
+            <a:avLst/>
+          </a:prstGeom>
+        </p:spPr>
+        <p:style>
+          <a:lnRef idx="2">
+            <a:schemeClr val="dk1"/>
+          </a:lnRef>
+          <a:fillRef idx="1">
+            <a:schemeClr val="lt1"/>
+          </a:fillRef>
+          <a:effectRef idx="0">
+            <a:schemeClr val="dk1"/>
+          </a:effectRef>
+          <a:fontRef idx="minor">
+            <a:schemeClr val="dk1"/>
+          </a:fontRef>
+        </p:style>
+        <p:txBody>
+          <a:bodyPr wrap="square">
+            <a:spAutoFit/>
+          </a:bodyPr>
+          <a:lstStyle/>
+          <a:p>
+            <a:r>
+              <a:rPr lang="en-US" dirty="0" smtClean="0"/>
+              <a:t>Smart HPA employs a reactive scaling policy that facilitates </a:t>
+            </a:r>
+            <a:r>
+              <a:rPr lang="en-US" i="1" dirty="0" smtClean="0">
+                <a:solidFill>
+                  <a:srgbClr val="C00000"/>
+                </a:solidFill>
+              </a:rPr>
+              <a:t>resource exchange among </a:t>
+            </a:r>
+            <a:r>
+              <a:rPr lang="en-US" i="1" dirty="0" err="1" smtClean="0">
+                <a:solidFill>
+                  <a:srgbClr val="C00000"/>
+                </a:solidFill>
+              </a:rPr>
+              <a:t>microservices</a:t>
+            </a:r>
+            <a:r>
+              <a:rPr lang="en-US" dirty="0" smtClean="0"/>
+              <a:t>, optimizing auto-scaling in resource-constrained environments.</a:t>
+            </a:r>
+            <a:endParaRPr lang="en-US" dirty="0"/>
           </a:p>
         </p:txBody>
       </p:sp>
@@ -9394,56 +9436,32 @@
           <a:chExt cx="0" cy="0"/>
         </a:xfrm>
       </p:grpSpPr>
-      <p:sp>
-        <p:nvSpPr>
-          <p:cNvPr id="2" name="Title 1"/>
-          <p:cNvSpPr>
-            <a:spLocks noGrp="1"/>
-          </p:cNvSpPr>
-          <p:nvPr>
-            <p:ph type="title"/>
-          </p:nvPr>
-        </p:nvSpPr>
-        <p:spPr/>
-        <p:txBody>
-          <a:bodyPr/>
-          <a:lstStyle/>
-          <a:p>
-            <a:r>
-              <a:rPr lang="en-US" dirty="0" smtClean="0"/>
-              <a:t>Topological Potential Theory</a:t>
-            </a:r>
-            <a:endParaRPr lang="en-US" dirty="0"/>
-          </a:p>
-        </p:txBody>
-      </p:sp>
-      <p:sp>
-        <p:nvSpPr>
-          <p:cNvPr id="3" name="Content Placeholder 2"/>
-          <p:cNvSpPr>
-            <a:spLocks noGrp="1"/>
-          </p:cNvSpPr>
-          <p:nvPr>
-            <p:ph idx="1"/>
-          </p:nvPr>
-        </p:nvSpPr>
-        <p:spPr/>
-        <p:txBody>
-          <a:bodyPr/>
-          <a:lstStyle/>
-          <a:p>
-            <a:r>
-              <a:rPr lang="en-US" sz="2400" b="1" dirty="0" smtClean="0"/>
-              <a:t>(1990). An Algorithm for Fast Recovery of Sparse Causal </a:t>
-            </a:r>
-            <a:r>
-              <a:rPr lang="en-US" sz="2400" b="1" dirty="0" smtClean="0"/>
-              <a:t>Graphs.</a:t>
-            </a:r>
-            <a:endParaRPr lang="en-US" sz="2400" b="1" dirty="0"/>
-          </a:p>
-        </p:txBody>
-      </p:sp>
+      <p:pic>
+        <p:nvPicPr>
+          <p:cNvPr id="4" name="Picture 2" descr="https://lh3.ggpht.com/1IfZLL2QDSjZ0wS7sUhaMlsAOS8BBzdR3wZ1WawgRn7KZAM8nEVZYMOUM-lqQb0ikIzp=w300"/>
+          <p:cNvPicPr>
+            <a:picLocks noChangeAspect="1" noChangeArrowheads="1"/>
+          </p:cNvPicPr>
+          <p:nvPr/>
+        </p:nvPicPr>
+        <p:blipFill>
+          <a:blip r:embed="rId2" cstate="print"/>
+          <a:srcRect/>
+          <a:stretch>
+            <a:fillRect/>
+          </a:stretch>
+        </p:blipFill>
+        <p:spPr bwMode="auto">
+          <a:xfrm>
+            <a:off x="3276600" y="1905000"/>
+            <a:ext cx="2857500" cy="2857500"/>
+          </a:xfrm>
+          <a:prstGeom prst="rect">
+            <a:avLst/>
+          </a:prstGeom>
+          <a:noFill/>
+        </p:spPr>
+      </p:pic>
     </p:spTree>
   </p:cSld>
   <p:clrMapOvr>
@@ -9486,7 +9504,7 @@
           <a:p>
             <a:r>
               <a:rPr lang="en-US" dirty="0" smtClean="0"/>
-              <a:t>Scaling Personalized Web Search</a:t>
+              <a:t>Sparse Causal Graphs</a:t>
             </a:r>
             <a:endParaRPr lang="en-US" dirty="0"/>
           </a:p>
@@ -9509,11 +9527,7 @@
           <a:p>
             <a:r>
               <a:rPr lang="en-US" sz="2400" b="1" dirty="0" smtClean="0"/>
-              <a:t>(2003). Scaling Personalized Web </a:t>
-            </a:r>
-            <a:r>
-              <a:rPr lang="en-US" sz="2400" b="1" smtClean="0"/>
-              <a:t>Search.</a:t>
+              <a:t>(1990). An Algorithm for Fast Recovery of Sparse Causal Graphs.</a:t>
             </a:r>
             <a:endParaRPr lang="en-US" sz="2400" b="1" dirty="0"/>
           </a:p>
@@ -9560,8 +9574,8 @@
           <a:lstStyle/>
           <a:p>
             <a:r>
-              <a:rPr lang="en-US" dirty="0" err="1" smtClean="0"/>
-              <a:t>PBScaler</a:t>
+              <a:rPr lang="en-US" dirty="0" smtClean="0"/>
+              <a:t>Topological Potential Theory</a:t>
             </a:r>
             <a:endParaRPr lang="en-US" dirty="0"/>
           </a:p>
@@ -9583,242 +9597,10 @@
           <a:lstStyle/>
           <a:p>
             <a:r>
-              <a:rPr lang="en-US" sz="2000" b="1" dirty="0" err="1" smtClean="0"/>
-              <a:t>Shuaiyu</a:t>
-            </a:r>
-            <a:r>
-              <a:rPr lang="en-US" sz="2000" b="1" dirty="0" smtClean="0"/>
-              <a:t> </a:t>
-            </a:r>
-            <a:r>
-              <a:rPr lang="en-US" sz="2000" b="1" dirty="0" err="1" smtClean="0"/>
-              <a:t>Xie</a:t>
-            </a:r>
-            <a:r>
-              <a:rPr lang="en-US" sz="2000" b="1" dirty="0" smtClean="0"/>
-              <a:t> et al. (2023). </a:t>
-            </a:r>
-            <a:r>
-              <a:rPr lang="en-US" sz="2000" b="1" dirty="0" err="1" smtClean="0"/>
-              <a:t>PBScaler</a:t>
-            </a:r>
-            <a:r>
-              <a:rPr lang="en-US" sz="2000" b="1" dirty="0" smtClean="0"/>
-              <a:t>: </a:t>
-            </a:r>
-            <a:r>
-              <a:rPr lang="en-US" sz="2000" b="1" dirty="0" smtClean="0"/>
-              <a:t>A Bottleneck-aware </a:t>
-            </a:r>
-            <a:r>
-              <a:rPr lang="en-US" sz="2000" b="1" dirty="0" err="1" smtClean="0"/>
-              <a:t>Autoscaling</a:t>
-            </a:r>
-            <a:r>
-              <a:rPr lang="en-US" sz="2000" b="1" dirty="0" smtClean="0"/>
-              <a:t> Framework for </a:t>
-            </a:r>
-            <a:r>
-              <a:rPr lang="en-US" sz="2000" b="1" dirty="0" err="1" smtClean="0"/>
-              <a:t>Microservice</a:t>
-            </a:r>
-            <a:r>
-              <a:rPr lang="en-US" sz="2000" b="1" dirty="0" smtClean="0"/>
-              <a:t>-based </a:t>
-            </a:r>
-            <a:r>
-              <a:rPr lang="en-US" sz="2000" b="1" dirty="0" smtClean="0"/>
-              <a:t>Applications.</a:t>
-            </a:r>
-          </a:p>
-          <a:p>
-            <a:r>
-              <a:rPr lang="en-US" sz="2000" dirty="0" smtClean="0"/>
-              <a:t>We </a:t>
-            </a:r>
-            <a:r>
-              <a:rPr lang="en-US" sz="2000" dirty="0" smtClean="0"/>
-              <a:t>propose </a:t>
-            </a:r>
-            <a:r>
-              <a:rPr lang="en-US" sz="2000" dirty="0" err="1" smtClean="0"/>
-              <a:t>TopoRank</a:t>
-            </a:r>
-            <a:r>
-              <a:rPr lang="en-US" sz="2000" dirty="0" smtClean="0"/>
-              <a:t>, a </a:t>
-            </a:r>
-            <a:r>
-              <a:rPr lang="en-US" sz="2000" u="sng" dirty="0" smtClean="0"/>
-              <a:t>random walk </a:t>
-            </a:r>
-            <a:r>
-              <a:rPr lang="en-US" sz="2000" u="sng" dirty="0" smtClean="0"/>
-              <a:t>algorithm</a:t>
-            </a:r>
-            <a:r>
-              <a:rPr lang="en-US" sz="2000" dirty="0" smtClean="0"/>
-              <a:t> based </a:t>
-            </a:r>
-            <a:r>
-              <a:rPr lang="en-US" sz="2000" dirty="0" smtClean="0"/>
-              <a:t>on topological potential theory (TPT) to </a:t>
-            </a:r>
-            <a:r>
-              <a:rPr lang="en-US" sz="2000" i="1" dirty="0" smtClean="0">
-                <a:solidFill>
-                  <a:srgbClr val="C00000"/>
-                </a:solidFill>
-              </a:rPr>
-              <a:t>identify performance </a:t>
-            </a:r>
-            <a:r>
-              <a:rPr lang="en-US" sz="2000" i="1" dirty="0" smtClean="0">
-                <a:solidFill>
-                  <a:srgbClr val="C00000"/>
-                </a:solidFill>
-              </a:rPr>
-              <a:t>bottlenecks</a:t>
-            </a:r>
-            <a:r>
-              <a:rPr lang="en-US" sz="2000" dirty="0" smtClean="0"/>
-              <a:t> (PBs</a:t>
-            </a:r>
-            <a:r>
-              <a:rPr lang="en-US" sz="2000" dirty="0" smtClean="0"/>
-              <a:t>).</a:t>
-            </a:r>
-          </a:p>
-          <a:p>
-            <a:r>
-              <a:rPr lang="en-US" sz="2000" dirty="0" smtClean="0"/>
-              <a:t>By taking into account </a:t>
-            </a:r>
-            <a:r>
-              <a:rPr lang="en-US" sz="2000" dirty="0" err="1" smtClean="0"/>
-              <a:t>microservice</a:t>
-            </a:r>
-            <a:r>
-              <a:rPr lang="en-US" sz="2000" dirty="0" smtClean="0"/>
-              <a:t> dependencies and anomaly potential, </a:t>
-            </a:r>
-            <a:r>
-              <a:rPr lang="en-US" sz="2000" dirty="0" err="1" smtClean="0"/>
-              <a:t>TopoRank</a:t>
-            </a:r>
-            <a:r>
-              <a:rPr lang="en-US" sz="2000" dirty="0" smtClean="0"/>
-              <a:t> </a:t>
-            </a:r>
-            <a:r>
-              <a:rPr lang="en-US" sz="2000" dirty="0" smtClean="0"/>
-              <a:t>improves the accuracy and </a:t>
-            </a:r>
-            <a:r>
-              <a:rPr lang="en-US" sz="2000" dirty="0" err="1" smtClean="0"/>
-              <a:t>explainability</a:t>
-            </a:r>
-            <a:r>
-              <a:rPr lang="en-US" sz="2000" dirty="0" smtClean="0"/>
-              <a:t> of bottleneck localization.</a:t>
-            </a:r>
-          </a:p>
-          <a:p>
-            <a:r>
-              <a:rPr lang="en-US" sz="2000" dirty="0" smtClean="0"/>
-              <a:t>After identifying the PBs by </a:t>
-            </a:r>
-            <a:r>
-              <a:rPr lang="en-US" sz="2000" dirty="0" err="1" smtClean="0"/>
-              <a:t>TopoRank</a:t>
-            </a:r>
-            <a:r>
-              <a:rPr lang="en-US" sz="2000" dirty="0" smtClean="0"/>
-              <a:t>, </a:t>
-            </a:r>
-            <a:r>
-              <a:rPr lang="en-US" sz="2000" dirty="0" err="1" smtClean="0"/>
-              <a:t>PBScaler</a:t>
-            </a:r>
-            <a:r>
-              <a:rPr lang="en-US" sz="2000" dirty="0" smtClean="0"/>
-              <a:t> further </a:t>
-            </a:r>
-            <a:r>
-              <a:rPr lang="en-US" sz="2000" dirty="0" smtClean="0"/>
-              <a:t>employs a </a:t>
-            </a:r>
-            <a:r>
-              <a:rPr lang="en-US" sz="2000" i="1" dirty="0" smtClean="0">
-                <a:solidFill>
-                  <a:srgbClr val="C00000"/>
-                </a:solidFill>
-              </a:rPr>
-              <a:t>genetic algorithm</a:t>
-            </a:r>
-            <a:r>
-              <a:rPr lang="en-US" sz="2000" dirty="0" smtClean="0"/>
-              <a:t> to find nearly </a:t>
-            </a:r>
-            <a:r>
-              <a:rPr lang="en-US" sz="2000" dirty="0" smtClean="0"/>
-              <a:t>optimal strategies.</a:t>
-            </a:r>
-          </a:p>
-          <a:p>
-            <a:r>
-              <a:rPr lang="en-US" sz="2000" dirty="0" smtClean="0"/>
-              <a:t>To </a:t>
-            </a:r>
-            <a:r>
-              <a:rPr lang="en-US" sz="2000" dirty="0" smtClean="0"/>
-              <a:t>avoid application oscillation caused by </a:t>
-            </a:r>
-            <a:r>
-              <a:rPr lang="en-US" sz="2000" dirty="0" smtClean="0"/>
-              <a:t>excessive optimization</a:t>
-            </a:r>
-            <a:r>
-              <a:rPr lang="en-US" sz="2000" dirty="0" smtClean="0"/>
-              <a:t>, the process is </a:t>
-            </a:r>
-            <a:r>
-              <a:rPr lang="en-US" sz="2000" i="1" dirty="0" smtClean="0">
-                <a:solidFill>
-                  <a:srgbClr val="C00000"/>
-                </a:solidFill>
-              </a:rPr>
-              <a:t>conducted offline</a:t>
-            </a:r>
-            <a:r>
-              <a:rPr lang="en-US" sz="2000" dirty="0" smtClean="0"/>
-              <a:t> </a:t>
-            </a:r>
-            <a:r>
-              <a:rPr lang="en-US" sz="2000" dirty="0" smtClean="0"/>
-              <a:t>and is </a:t>
-            </a:r>
-            <a:r>
-              <a:rPr lang="en-US" sz="2000" dirty="0" smtClean="0"/>
-              <a:t>guided by an SLO violation predictor, which </a:t>
-            </a:r>
-            <a:r>
-              <a:rPr lang="en-US" sz="2000" dirty="0" smtClean="0"/>
-              <a:t>simulates the </a:t>
-            </a:r>
-            <a:r>
-              <a:rPr lang="en-US" sz="2000" dirty="0" smtClean="0"/>
-              <a:t>online application and provides feedback to the </a:t>
-            </a:r>
-            <a:r>
-              <a:rPr lang="en-US" sz="2000" dirty="0" smtClean="0"/>
-              <a:t>scaling strategies</a:t>
-            </a:r>
-            <a:r>
-              <a:rPr lang="en-US" sz="2000" dirty="0" smtClean="0"/>
-              <a:t>.</a:t>
-            </a:r>
-            <a:endParaRPr lang="en-US" sz="2000" b="1" dirty="0"/>
+              <a:rPr lang="en-US" sz="2400" b="1" dirty="0" smtClean="0"/>
+              <a:t>(1990). An Algorithm for Fast Recovery of Sparse Causal Graphs.</a:t>
+            </a:r>
+            <a:endParaRPr lang="en-US" sz="2400" b="1" dirty="0"/>
           </a:p>
         </p:txBody>
       </p:sp>
@@ -9831,6 +9613,464 @@
 </file>
 
 <file path=ppt/slides/slide39.xml><?xml version="1.0" encoding="utf-8"?>
+<p:sld xmlns:a="http://schemas.openxmlformats.org/drawingml/2006/main" xmlns:r="http://schemas.openxmlformats.org/officeDocument/2006/relationships" xmlns:p="http://schemas.openxmlformats.org/presentationml/2006/main">
+  <p:cSld>
+    <p:spTree>
+      <p:nvGrpSpPr>
+        <p:cNvPr id="1" name=""/>
+        <p:cNvGrpSpPr/>
+        <p:nvPr/>
+      </p:nvGrpSpPr>
+      <p:grpSpPr>
+        <a:xfrm>
+          <a:off x="0" y="0"/>
+          <a:ext cx="0" cy="0"/>
+          <a:chOff x="0" y="0"/>
+          <a:chExt cx="0" cy="0"/>
+        </a:xfrm>
+      </p:grpSpPr>
+      <p:sp>
+        <p:nvSpPr>
+          <p:cNvPr id="2" name="Title 1"/>
+          <p:cNvSpPr>
+            <a:spLocks noGrp="1"/>
+          </p:cNvSpPr>
+          <p:nvPr>
+            <p:ph type="title"/>
+          </p:nvPr>
+        </p:nvSpPr>
+        <p:spPr/>
+        <p:txBody>
+          <a:bodyPr/>
+          <a:lstStyle/>
+          <a:p>
+            <a:r>
+              <a:rPr lang="en-US" dirty="0" smtClean="0"/>
+              <a:t>Scaling Personalized Web Search</a:t>
+            </a:r>
+            <a:endParaRPr lang="en-US" dirty="0"/>
+          </a:p>
+        </p:txBody>
+      </p:sp>
+      <p:sp>
+        <p:nvSpPr>
+          <p:cNvPr id="3" name="Content Placeholder 2"/>
+          <p:cNvSpPr>
+            <a:spLocks noGrp="1"/>
+          </p:cNvSpPr>
+          <p:nvPr>
+            <p:ph idx="1"/>
+          </p:nvPr>
+        </p:nvSpPr>
+        <p:spPr/>
+        <p:txBody>
+          <a:bodyPr/>
+          <a:lstStyle/>
+          <a:p>
+            <a:r>
+              <a:rPr lang="en-US" sz="2400" b="1" dirty="0" smtClean="0"/>
+              <a:t>(2003). Scaling Personalized Web </a:t>
+            </a:r>
+            <a:r>
+              <a:rPr lang="en-US" sz="2400" b="1" smtClean="0"/>
+              <a:t>Search.</a:t>
+            </a:r>
+            <a:endParaRPr lang="en-US" sz="2400" b="1" dirty="0"/>
+          </a:p>
+        </p:txBody>
+      </p:sp>
+    </p:spTree>
+  </p:cSld>
+  <p:clrMapOvr>
+    <a:masterClrMapping/>
+  </p:clrMapOvr>
+</p:sld>
+</file>
+
+<file path=ppt/slides/slide4.xml><?xml version="1.0" encoding="utf-8"?>
+<p:sld xmlns:a="http://schemas.openxmlformats.org/drawingml/2006/main" xmlns:r="http://schemas.openxmlformats.org/officeDocument/2006/relationships" xmlns:p="http://schemas.openxmlformats.org/presentationml/2006/main">
+  <p:cSld>
+    <p:spTree>
+      <p:nvGrpSpPr>
+        <p:cNvPr id="1" name=""/>
+        <p:cNvGrpSpPr/>
+        <p:nvPr/>
+      </p:nvGrpSpPr>
+      <p:grpSpPr>
+        <a:xfrm>
+          <a:off x="0" y="0"/>
+          <a:ext cx="0" cy="0"/>
+          <a:chOff x="0" y="0"/>
+          <a:chExt cx="0" cy="0"/>
+        </a:xfrm>
+      </p:grpSpPr>
+      <p:sp>
+        <p:nvSpPr>
+          <p:cNvPr id="2" name="Title 1"/>
+          <p:cNvSpPr>
+            <a:spLocks noGrp="1"/>
+          </p:cNvSpPr>
+          <p:nvPr>
+            <p:ph type="title"/>
+          </p:nvPr>
+        </p:nvSpPr>
+        <p:spPr/>
+        <p:txBody>
+          <a:bodyPr/>
+          <a:lstStyle/>
+          <a:p>
+            <a:r>
+              <a:rPr lang="en-US" dirty="0" smtClean="0"/>
+              <a:t>References</a:t>
+            </a:r>
+            <a:endParaRPr lang="en-US" dirty="0"/>
+          </a:p>
+        </p:txBody>
+      </p:sp>
+      <p:sp>
+        <p:nvSpPr>
+          <p:cNvPr id="3" name="Content Placeholder 2"/>
+          <p:cNvSpPr>
+            <a:spLocks noGrp="1"/>
+          </p:cNvSpPr>
+          <p:nvPr>
+            <p:ph idx="1"/>
+          </p:nvPr>
+        </p:nvSpPr>
+        <p:spPr>
+          <a:xfrm>
+            <a:off x="457200" y="1600200"/>
+            <a:ext cx="5867400" cy="4724400"/>
+          </a:xfrm>
+        </p:spPr>
+        <p:txBody>
+          <a:bodyPr/>
+          <a:lstStyle/>
+          <a:p>
+            <a:pPr>
+              <a:buFont typeface="+mj-lt"/>
+              <a:buAutoNum type="arabicPeriod"/>
+            </a:pPr>
+            <a:r>
+              <a:rPr lang="en-US" sz="2400" dirty="0" err="1" smtClean="0"/>
+              <a:t>Trieu</a:t>
+            </a:r>
+            <a:r>
+              <a:rPr lang="en-US" sz="2400" dirty="0" smtClean="0"/>
+              <a:t> C. </a:t>
+            </a:r>
+            <a:r>
+              <a:rPr lang="en-US" sz="2400" dirty="0" err="1" smtClean="0"/>
+              <a:t>Chieu</a:t>
+            </a:r>
+            <a:r>
+              <a:rPr lang="en-US" sz="2400" dirty="0" smtClean="0"/>
+              <a:t> et al. (2009). Dynamic Scaling of Web Applications in a Virtualized Cloud Computing Environment.</a:t>
+            </a:r>
+          </a:p>
+          <a:p>
+            <a:pPr>
+              <a:buFont typeface="+mj-lt"/>
+              <a:buAutoNum type="arabicPeriod"/>
+            </a:pPr>
+            <a:r>
+              <a:rPr lang="en-US" sz="2400" dirty="0" smtClean="0"/>
+              <a:t>Claudio A. </a:t>
+            </a:r>
+            <a:r>
+              <a:rPr lang="en-US" sz="2400" dirty="0" err="1" smtClean="0"/>
+              <a:t>Ardagna</a:t>
+            </a:r>
+            <a:r>
+              <a:rPr lang="en-US" sz="2400" dirty="0" smtClean="0"/>
+              <a:t> et al. (2012). Scalability Patterns for Platform-as-a-Service.</a:t>
+            </a:r>
+          </a:p>
+          <a:p>
+            <a:pPr>
+              <a:buFont typeface="+mj-lt"/>
+              <a:buAutoNum type="arabicPeriod"/>
+            </a:pPr>
+            <a:r>
+              <a:rPr lang="en-US" sz="2400" dirty="0" smtClean="0"/>
+              <a:t>K. R. </a:t>
+            </a:r>
+            <a:r>
+              <a:rPr lang="en-US" sz="2400" dirty="0" err="1" smtClean="0"/>
+              <a:t>Jayaram</a:t>
+            </a:r>
+            <a:r>
+              <a:rPr lang="en-US" sz="2400" dirty="0" smtClean="0"/>
+              <a:t> (2014). Elastic Remote Methods.</a:t>
+            </a:r>
+          </a:p>
+        </p:txBody>
+      </p:sp>
+      <p:pic>
+        <p:nvPicPr>
+          <p:cNvPr id="4" name="Picture 4" descr="http://2.bp.blogspot.com/-FqRM_5NQE6Q/TaSdzyWfvtI/AAAAAAAAAFg/C_2LDJWJOx4/s1600/books-pile.jpg"/>
+          <p:cNvPicPr>
+            <a:picLocks noChangeAspect="1" noChangeArrowheads="1"/>
+          </p:cNvPicPr>
+          <p:nvPr/>
+        </p:nvPicPr>
+        <p:blipFill>
+          <a:blip r:embed="rId2" cstate="print"/>
+          <a:srcRect/>
+          <a:stretch>
+            <a:fillRect/>
+          </a:stretch>
+        </p:blipFill>
+        <p:spPr bwMode="auto">
+          <a:xfrm>
+            <a:off x="6248400" y="1676400"/>
+            <a:ext cx="2724150" cy="4133850"/>
+          </a:xfrm>
+          <a:prstGeom prst="rect">
+            <a:avLst/>
+          </a:prstGeom>
+          <a:noFill/>
+        </p:spPr>
+      </p:pic>
+    </p:spTree>
+  </p:cSld>
+  <p:clrMapOvr>
+    <a:masterClrMapping/>
+  </p:clrMapOvr>
+  <p:timing>
+    <p:tnLst>
+      <p:par>
+        <p:cTn id="1" dur="indefinite" restart="never" nodeType="tmRoot"/>
+      </p:par>
+    </p:tnLst>
+  </p:timing>
+</p:sld>
+</file>
+
+<file path=ppt/slides/slide40.xml><?xml version="1.0" encoding="utf-8"?>
+<p:sld xmlns:a="http://schemas.openxmlformats.org/drawingml/2006/main" xmlns:r="http://schemas.openxmlformats.org/officeDocument/2006/relationships" xmlns:p="http://schemas.openxmlformats.org/presentationml/2006/main">
+  <p:cSld>
+    <p:spTree>
+      <p:nvGrpSpPr>
+        <p:cNvPr id="1" name=""/>
+        <p:cNvGrpSpPr/>
+        <p:nvPr/>
+      </p:nvGrpSpPr>
+      <p:grpSpPr>
+        <a:xfrm>
+          <a:off x="0" y="0"/>
+          <a:ext cx="0" cy="0"/>
+          <a:chOff x="0" y="0"/>
+          <a:chExt cx="0" cy="0"/>
+        </a:xfrm>
+      </p:grpSpPr>
+      <p:sp>
+        <p:nvSpPr>
+          <p:cNvPr id="2" name="Title 1"/>
+          <p:cNvSpPr>
+            <a:spLocks noGrp="1"/>
+          </p:cNvSpPr>
+          <p:nvPr>
+            <p:ph type="title"/>
+          </p:nvPr>
+        </p:nvSpPr>
+        <p:spPr/>
+        <p:txBody>
+          <a:bodyPr/>
+          <a:lstStyle/>
+          <a:p>
+            <a:r>
+              <a:rPr lang="en-US" dirty="0" err="1" smtClean="0"/>
+              <a:t>PBScaler</a:t>
+            </a:r>
+            <a:endParaRPr lang="en-US" dirty="0"/>
+          </a:p>
+        </p:txBody>
+      </p:sp>
+      <p:sp>
+        <p:nvSpPr>
+          <p:cNvPr id="3" name="Content Placeholder 2"/>
+          <p:cNvSpPr>
+            <a:spLocks noGrp="1"/>
+          </p:cNvSpPr>
+          <p:nvPr>
+            <p:ph idx="1"/>
+          </p:nvPr>
+        </p:nvSpPr>
+        <p:spPr/>
+        <p:txBody>
+          <a:bodyPr/>
+          <a:lstStyle/>
+          <a:p>
+            <a:r>
+              <a:rPr lang="en-US" sz="2000" b="1" dirty="0" err="1" smtClean="0"/>
+              <a:t>Shuaiyu</a:t>
+            </a:r>
+            <a:r>
+              <a:rPr lang="en-US" sz="2000" b="1" dirty="0" smtClean="0"/>
+              <a:t> </a:t>
+            </a:r>
+            <a:r>
+              <a:rPr lang="en-US" sz="2000" b="1" dirty="0" err="1" smtClean="0"/>
+              <a:t>Xie</a:t>
+            </a:r>
+            <a:r>
+              <a:rPr lang="en-US" sz="2000" b="1" dirty="0" smtClean="0"/>
+              <a:t> et al. (2023). </a:t>
+            </a:r>
+            <a:r>
+              <a:rPr lang="en-US" sz="2000" b="1" dirty="0" err="1" smtClean="0"/>
+              <a:t>PBScaler</a:t>
+            </a:r>
+            <a:r>
+              <a:rPr lang="en-US" sz="2000" b="1" dirty="0" smtClean="0"/>
+              <a:t>: A Bottleneck-aware </a:t>
+            </a:r>
+            <a:r>
+              <a:rPr lang="en-US" sz="2000" b="1" dirty="0" err="1" smtClean="0"/>
+              <a:t>Autoscaling</a:t>
+            </a:r>
+            <a:r>
+              <a:rPr lang="en-US" sz="2000" b="1" dirty="0" smtClean="0"/>
+              <a:t> Framework for </a:t>
+            </a:r>
+            <a:r>
+              <a:rPr lang="en-US" sz="2000" b="1" dirty="0" err="1" smtClean="0"/>
+              <a:t>Microservice</a:t>
+            </a:r>
+            <a:r>
+              <a:rPr lang="en-US" sz="2000" b="1" dirty="0" smtClean="0"/>
+              <a:t>-based Applications.</a:t>
+            </a:r>
+          </a:p>
+          <a:p>
+            <a:r>
+              <a:rPr lang="en-US" sz="2000" dirty="0" smtClean="0"/>
+              <a:t>We propose </a:t>
+            </a:r>
+            <a:r>
+              <a:rPr lang="en-US" sz="2000" dirty="0" err="1" smtClean="0"/>
+              <a:t>TopoRank</a:t>
+            </a:r>
+            <a:r>
+              <a:rPr lang="en-US" sz="2000" dirty="0" smtClean="0"/>
+              <a:t>, a </a:t>
+            </a:r>
+            <a:r>
+              <a:rPr lang="en-US" sz="2000" u="sng" dirty="0" smtClean="0"/>
+              <a:t>random walk algorithm</a:t>
+            </a:r>
+            <a:r>
+              <a:rPr lang="en-US" sz="2000" dirty="0" smtClean="0"/>
+              <a:t> based on topological potential theory (TPT) to </a:t>
+            </a:r>
+            <a:r>
+              <a:rPr lang="en-US" sz="2000" i="1" dirty="0" smtClean="0">
+                <a:solidFill>
+                  <a:srgbClr val="C00000"/>
+                </a:solidFill>
+              </a:rPr>
+              <a:t>identify performance bottlenecks</a:t>
+            </a:r>
+            <a:r>
+              <a:rPr lang="en-US" sz="2000" dirty="0" smtClean="0"/>
+              <a:t> (PBs).</a:t>
+            </a:r>
+          </a:p>
+          <a:p>
+            <a:r>
+              <a:rPr lang="en-US" sz="2000" dirty="0" smtClean="0"/>
+              <a:t>By taking into account </a:t>
+            </a:r>
+            <a:r>
+              <a:rPr lang="en-US" sz="2000" dirty="0" err="1" smtClean="0"/>
+              <a:t>microservice</a:t>
+            </a:r>
+            <a:r>
+              <a:rPr lang="en-US" sz="2000" dirty="0" smtClean="0"/>
+              <a:t> dependencies and anomaly potential, </a:t>
+            </a:r>
+            <a:r>
+              <a:rPr lang="en-US" sz="2000" dirty="0" err="1" smtClean="0"/>
+              <a:t>TopoRank</a:t>
+            </a:r>
+            <a:r>
+              <a:rPr lang="en-US" sz="2000" dirty="0" smtClean="0"/>
+              <a:t> improves the accuracy and </a:t>
+            </a:r>
+            <a:r>
+              <a:rPr lang="en-US" sz="2000" dirty="0" err="1" smtClean="0"/>
+              <a:t>explainability</a:t>
+            </a:r>
+            <a:r>
+              <a:rPr lang="en-US" sz="2000" dirty="0" smtClean="0"/>
+              <a:t> of bottleneck localization.</a:t>
+            </a:r>
+          </a:p>
+          <a:p>
+            <a:r>
+              <a:rPr lang="en-US" sz="2000" dirty="0" smtClean="0"/>
+              <a:t>After identifying the PBs by </a:t>
+            </a:r>
+            <a:r>
+              <a:rPr lang="en-US" sz="2000" dirty="0" err="1" smtClean="0"/>
+              <a:t>TopoRank</a:t>
+            </a:r>
+            <a:r>
+              <a:rPr lang="en-US" sz="2000" dirty="0" smtClean="0"/>
+              <a:t>, </a:t>
+            </a:r>
+            <a:r>
+              <a:rPr lang="en-US" sz="2000" dirty="0" err="1" smtClean="0"/>
+              <a:t>PBScaler</a:t>
+            </a:r>
+            <a:r>
+              <a:rPr lang="en-US" sz="2000" dirty="0" smtClean="0"/>
+              <a:t> further employs a </a:t>
+            </a:r>
+            <a:r>
+              <a:rPr lang="en-US" sz="2000" i="1" dirty="0" smtClean="0">
+                <a:solidFill>
+                  <a:srgbClr val="C00000"/>
+                </a:solidFill>
+              </a:rPr>
+              <a:t>genetic algorithm</a:t>
+            </a:r>
+            <a:r>
+              <a:rPr lang="en-US" sz="2000" dirty="0" smtClean="0"/>
+              <a:t> to find nearly optimal strategies.</a:t>
+            </a:r>
+          </a:p>
+          <a:p>
+            <a:r>
+              <a:rPr lang="en-US" sz="2000" dirty="0" smtClean="0"/>
+              <a:t>To avoid application oscillation caused by excessive optimization, the process is </a:t>
+            </a:r>
+            <a:r>
+              <a:rPr lang="en-US" sz="2000" i="1" dirty="0" smtClean="0">
+                <a:solidFill>
+                  <a:srgbClr val="C00000"/>
+                </a:solidFill>
+              </a:rPr>
+              <a:t>conducted offline</a:t>
+            </a:r>
+            <a:r>
+              <a:rPr lang="en-US" sz="2000" dirty="0" smtClean="0"/>
+              <a:t> and is guided by an SLO violation predictor, which simulates the online application and provides feedback to the scaling strategies.</a:t>
+            </a:r>
+            <a:endParaRPr lang="en-US" sz="2000" b="1" dirty="0"/>
+          </a:p>
+        </p:txBody>
+      </p:sp>
+    </p:spTree>
+  </p:cSld>
+  <p:clrMapOvr>
+    <a:masterClrMapping/>
+  </p:clrMapOvr>
+</p:sld>
+</file>
+
+<file path=ppt/slides/slide41.xml><?xml version="1.0" encoding="utf-8"?>
 <p:sld xmlns:a="http://schemas.openxmlformats.org/drawingml/2006/main" xmlns:r="http://schemas.openxmlformats.org/officeDocument/2006/relationships" xmlns:p="http://schemas.openxmlformats.org/presentationml/2006/main">
   <p:cSld>
     <p:spTree>
@@ -9933,479 +10173,6 @@
 </p:sld>
 </file>
 
-<file path=ppt/slides/slide4.xml><?xml version="1.0" encoding="utf-8"?>
-<p:sld xmlns:a="http://schemas.openxmlformats.org/drawingml/2006/main" xmlns:r="http://schemas.openxmlformats.org/officeDocument/2006/relationships" xmlns:p="http://schemas.openxmlformats.org/presentationml/2006/main">
-  <p:cSld>
-    <p:spTree>
-      <p:nvGrpSpPr>
-        <p:cNvPr id="1" name=""/>
-        <p:cNvGrpSpPr/>
-        <p:nvPr/>
-      </p:nvGrpSpPr>
-      <p:grpSpPr>
-        <a:xfrm>
-          <a:off x="0" y="0"/>
-          <a:ext cx="0" cy="0"/>
-          <a:chOff x="0" y="0"/>
-          <a:chExt cx="0" cy="0"/>
-        </a:xfrm>
-      </p:grpSpPr>
-      <p:sp>
-        <p:nvSpPr>
-          <p:cNvPr id="2" name="Title 1"/>
-          <p:cNvSpPr>
-            <a:spLocks noGrp="1"/>
-          </p:cNvSpPr>
-          <p:nvPr>
-            <p:ph type="title"/>
-          </p:nvPr>
-        </p:nvSpPr>
-        <p:spPr/>
-        <p:txBody>
-          <a:bodyPr/>
-          <a:lstStyle/>
-          <a:p>
-            <a:r>
-              <a:rPr lang="en-US" dirty="0" smtClean="0"/>
-              <a:t>Scaling Rules</a:t>
-            </a:r>
-            <a:endParaRPr lang="en-US" dirty="0"/>
-          </a:p>
-        </p:txBody>
-      </p:sp>
-      <p:sp>
-        <p:nvSpPr>
-          <p:cNvPr id="3" name="Content Placeholder 2"/>
-          <p:cNvSpPr>
-            <a:spLocks noGrp="1"/>
-          </p:cNvSpPr>
-          <p:nvPr>
-            <p:ph idx="1"/>
-          </p:nvPr>
-        </p:nvSpPr>
-        <p:spPr/>
-        <p:txBody>
-          <a:bodyPr/>
-          <a:lstStyle/>
-          <a:p>
-            <a:r>
-              <a:rPr lang="en-US" sz="2800" dirty="0" smtClean="0"/>
-              <a:t>Once </a:t>
-            </a:r>
-            <a:r>
-              <a:rPr lang="en-US" sz="2800" i="1" dirty="0" smtClean="0">
-                <a:solidFill>
-                  <a:srgbClr val="C00000"/>
-                </a:solidFill>
-              </a:rPr>
-              <a:t>a scaling indicator is selected</a:t>
-            </a:r>
-            <a:r>
-              <a:rPr lang="en-US" sz="2800" dirty="0" smtClean="0"/>
-              <a:t> for use to scale the application, </a:t>
-            </a:r>
-            <a:r>
-              <a:rPr lang="en-US" sz="2800" u="sng" dirty="0" smtClean="0"/>
-              <a:t>samplings</a:t>
-            </a:r>
-            <a:r>
-              <a:rPr lang="en-US" sz="2800" dirty="0" smtClean="0"/>
-              <a:t> of the scaling indicator are </a:t>
-            </a:r>
-            <a:r>
-              <a:rPr lang="en-US" sz="2800" u="sng" dirty="0" smtClean="0"/>
-              <a:t>collected</a:t>
-            </a:r>
-            <a:r>
-              <a:rPr lang="en-US" sz="2800" dirty="0" smtClean="0"/>
-              <a:t> in real-time, and statistics is </a:t>
-            </a:r>
-            <a:r>
-              <a:rPr lang="en-US" sz="2800" u="sng" dirty="0" smtClean="0"/>
-              <a:t>calculated</a:t>
-            </a:r>
-            <a:r>
-              <a:rPr lang="en-US" sz="2800" dirty="0" smtClean="0"/>
-              <a:t> periodically.</a:t>
-            </a:r>
-          </a:p>
-          <a:p>
-            <a:r>
-              <a:rPr lang="en-US" sz="2800" dirty="0" smtClean="0"/>
-              <a:t>Based on the historical trends and predictions derived from the statistics of the scaling indicator, </a:t>
-            </a:r>
-            <a:r>
-              <a:rPr lang="en-US" sz="2800" i="1" dirty="0" smtClean="0">
-                <a:solidFill>
-                  <a:srgbClr val="C00000"/>
-                </a:solidFill>
-              </a:rPr>
-              <a:t>scaling rules</a:t>
-            </a:r>
-            <a:r>
-              <a:rPr lang="en-US" sz="2800" dirty="0" smtClean="0"/>
-              <a:t> can </a:t>
-            </a:r>
-            <a:r>
-              <a:rPr lang="en-US" sz="2800" u="sng" dirty="0" smtClean="0"/>
-              <a:t>be defined to scale up or down</a:t>
-            </a:r>
-            <a:r>
-              <a:rPr lang="en-US" sz="2800" dirty="0" smtClean="0"/>
-              <a:t> the amount of web application instances.</a:t>
-            </a:r>
-            <a:endParaRPr lang="en-US" sz="2800" dirty="0"/>
-          </a:p>
-        </p:txBody>
-      </p:sp>
-    </p:spTree>
-  </p:cSld>
-  <p:clrMapOvr>
-    <a:masterClrMapping/>
-  </p:clrMapOvr>
-</p:sld>
-</file>
-
-<file path=ppt/slides/slide40.xml><?xml version="1.0" encoding="utf-8"?>
-<p:sld xmlns:a="http://schemas.openxmlformats.org/drawingml/2006/main" xmlns:r="http://schemas.openxmlformats.org/officeDocument/2006/relationships" xmlns:p="http://schemas.openxmlformats.org/presentationml/2006/main">
-  <p:cSld>
-    <p:spTree>
-      <p:nvGrpSpPr>
-        <p:cNvPr id="1" name=""/>
-        <p:cNvGrpSpPr/>
-        <p:nvPr/>
-      </p:nvGrpSpPr>
-      <p:grpSpPr>
-        <a:xfrm>
-          <a:off x="0" y="0"/>
-          <a:ext cx="0" cy="0"/>
-          <a:chOff x="0" y="0"/>
-          <a:chExt cx="0" cy="0"/>
-        </a:xfrm>
-      </p:grpSpPr>
-      <p:sp>
-        <p:nvSpPr>
-          <p:cNvPr id="2" name="Title 1"/>
-          <p:cNvSpPr>
-            <a:spLocks noGrp="1"/>
-          </p:cNvSpPr>
-          <p:nvPr>
-            <p:ph type="title"/>
-          </p:nvPr>
-        </p:nvSpPr>
-        <p:spPr/>
-        <p:txBody>
-          <a:bodyPr/>
-          <a:lstStyle/>
-          <a:p>
-            <a:r>
-              <a:rPr lang="en-US" dirty="0" smtClean="0"/>
-              <a:t>SLO Violation Detection</a:t>
-            </a:r>
-            <a:endParaRPr lang="en-US" dirty="0"/>
-          </a:p>
-        </p:txBody>
-      </p:sp>
-      <p:sp>
-        <p:nvSpPr>
-          <p:cNvPr id="3" name="Content Placeholder 2"/>
-          <p:cNvSpPr>
-            <a:spLocks noGrp="1"/>
-          </p:cNvSpPr>
-          <p:nvPr>
-            <p:ph idx="1"/>
-          </p:nvPr>
-        </p:nvSpPr>
-        <p:spPr/>
-        <p:txBody>
-          <a:bodyPr/>
-          <a:lstStyle/>
-          <a:p>
-            <a:r>
-              <a:rPr lang="en-US" sz="2400" dirty="0" err="1" smtClean="0"/>
-              <a:t>PBScaler</a:t>
-            </a:r>
-            <a:r>
-              <a:rPr lang="en-US" sz="2400" dirty="0" smtClean="0"/>
-              <a:t> inspects the P90 tail latency of all invocation edges </a:t>
-            </a:r>
-            <a:r>
-              <a:rPr lang="en-US" sz="2400" dirty="0" smtClean="0"/>
-              <a:t>every </a:t>
-            </a:r>
-            <a:r>
-              <a:rPr lang="en-US" sz="2400" dirty="0" smtClean="0"/>
-              <a:t>15 seconds to timely detect performance degradation</a:t>
-            </a:r>
-            <a:r>
-              <a:rPr lang="en-US" sz="2400" dirty="0" smtClean="0"/>
-              <a:t>.</a:t>
-            </a:r>
-          </a:p>
-          <a:p>
-            <a:r>
-              <a:rPr lang="en-US" sz="2400" dirty="0" smtClean="0"/>
-              <a:t>If the tail latency of an invocation exceeds a predetermined threshold (such as the SLO), the invoked </a:t>
-            </a:r>
-            <a:r>
-              <a:rPr lang="en-US" sz="2400" dirty="0" err="1" smtClean="0"/>
-              <a:t>microservice</a:t>
-            </a:r>
-            <a:r>
-              <a:rPr lang="en-US" sz="2400" dirty="0" smtClean="0"/>
-              <a:t> of the invocation will be added to the set of abnormal </a:t>
-            </a:r>
-            <a:r>
-              <a:rPr lang="en-US" sz="2400" dirty="0" err="1" smtClean="0"/>
-              <a:t>microservices</a:t>
-            </a:r>
-            <a:r>
-              <a:rPr lang="en-US" sz="2400" dirty="0" smtClean="0"/>
-              <a:t>, </a:t>
-            </a:r>
-            <a:r>
-              <a:rPr lang="en-US" sz="2400" dirty="0" smtClean="0"/>
-              <a:t>and the bottleneck localization process will be activated</a:t>
-            </a:r>
-            <a:r>
-              <a:rPr lang="en-US" sz="2400" dirty="0" smtClean="0"/>
-              <a:t>.</a:t>
-            </a:r>
-          </a:p>
-          <a:p>
-            <a:r>
-              <a:rPr lang="en-US" sz="2400" dirty="0" smtClean="0"/>
-              <a:t>To account for occasional noise in the </a:t>
-            </a:r>
-            <a:r>
-              <a:rPr lang="en-US" sz="2400" dirty="0" err="1" smtClean="0"/>
-              <a:t>microservice</a:t>
-            </a:r>
-            <a:r>
-              <a:rPr lang="en-US" sz="2400" dirty="0" smtClean="0"/>
-              <a:t> latency, the threshold is set to </a:t>
-            </a:r>
-            <a:r>
-              <a:rPr lang="en-US" sz="2400" dirty="0" smtClean="0"/>
-              <a:t>SLO × (</a:t>
-            </a:r>
-            <a:r>
-              <a:rPr lang="en-US" sz="2400" dirty="0" smtClean="0"/>
-              <a:t>1 + α/2), where α is used to adjust the tolerance to noise.</a:t>
-            </a:r>
-            <a:endParaRPr lang="en-US" sz="2400" dirty="0"/>
-          </a:p>
-        </p:txBody>
-      </p:sp>
-    </p:spTree>
-  </p:cSld>
-  <p:clrMapOvr>
-    <a:masterClrMapping/>
-  </p:clrMapOvr>
-</p:sld>
-</file>
-
-<file path=ppt/slides/slide41.xml><?xml version="1.0" encoding="utf-8"?>
-<p:sld xmlns:a="http://schemas.openxmlformats.org/drawingml/2006/main" xmlns:r="http://schemas.openxmlformats.org/officeDocument/2006/relationships" xmlns:p="http://schemas.openxmlformats.org/presentationml/2006/main">
-  <p:cSld>
-    <p:spTree>
-      <p:nvGrpSpPr>
-        <p:cNvPr id="1" name=""/>
-        <p:cNvGrpSpPr/>
-        <p:nvPr/>
-      </p:nvGrpSpPr>
-      <p:grpSpPr>
-        <a:xfrm>
-          <a:off x="0" y="0"/>
-          <a:ext cx="0" cy="0"/>
-          <a:chOff x="0" y="0"/>
-          <a:chExt cx="0" cy="0"/>
-        </a:xfrm>
-      </p:grpSpPr>
-      <p:sp>
-        <p:nvSpPr>
-          <p:cNvPr id="2" name="Title 1"/>
-          <p:cNvSpPr>
-            <a:spLocks noGrp="1"/>
-          </p:cNvSpPr>
-          <p:nvPr>
-            <p:ph type="title"/>
-          </p:nvPr>
-        </p:nvSpPr>
-        <p:spPr/>
-        <p:txBody>
-          <a:bodyPr/>
-          <a:lstStyle/>
-          <a:p>
-            <a:r>
-              <a:rPr lang="en-US" dirty="0" smtClean="0"/>
-              <a:t>Redundancy Checking</a:t>
-            </a:r>
-            <a:endParaRPr lang="en-US" dirty="0"/>
-          </a:p>
-        </p:txBody>
-      </p:sp>
-      <p:sp>
-        <p:nvSpPr>
-          <p:cNvPr id="3" name="Content Placeholder 2"/>
-          <p:cNvSpPr>
-            <a:spLocks noGrp="1"/>
-          </p:cNvSpPr>
-          <p:nvPr>
-            <p:ph idx="1"/>
-          </p:nvPr>
-        </p:nvSpPr>
-        <p:spPr/>
-        <p:txBody>
-          <a:bodyPr/>
-          <a:lstStyle/>
-          <a:p>
-            <a:r>
-              <a:rPr lang="en-US" sz="2400" dirty="0" err="1" smtClean="0"/>
-              <a:t>PBScaler</a:t>
-            </a:r>
-            <a:r>
-              <a:rPr lang="en-US" sz="2400" dirty="0" smtClean="0"/>
-              <a:t> </a:t>
-            </a:r>
-            <a:r>
-              <a:rPr lang="en-US" sz="2400" dirty="0" smtClean="0"/>
-              <a:t>uses the </a:t>
-            </a:r>
-            <a:r>
-              <a:rPr lang="en-US" sz="2400" dirty="0" smtClean="0"/>
-              <a:t>rate of workload change per second of </a:t>
-            </a:r>
-            <a:r>
-              <a:rPr lang="en-US" sz="2400" dirty="0" err="1" smtClean="0"/>
-              <a:t>microservices</a:t>
-            </a:r>
-            <a:r>
-              <a:rPr lang="en-US" sz="2400" dirty="0" smtClean="0"/>
-              <a:t> </a:t>
-            </a:r>
-            <a:r>
-              <a:rPr lang="en-US" sz="2400" dirty="0" smtClean="0"/>
-              <a:t>to determine </a:t>
-            </a:r>
-            <a:r>
-              <a:rPr lang="en-US" sz="2400" dirty="0" smtClean="0"/>
-              <a:t>whether resources are redundant</a:t>
-            </a:r>
-            <a:r>
-              <a:rPr lang="en-US" sz="2400" dirty="0" smtClean="0"/>
-              <a:t>.</a:t>
-            </a:r>
-          </a:p>
-          <a:p>
-            <a:r>
-              <a:rPr lang="en-US" sz="2400" dirty="0" smtClean="0"/>
-              <a:t>This </a:t>
-            </a:r>
-            <a:r>
-              <a:rPr lang="en-US" sz="2400" dirty="0" smtClean="0"/>
-              <a:t>strategy </a:t>
-            </a:r>
-            <a:r>
-              <a:rPr lang="en-US" sz="2400" dirty="0" smtClean="0"/>
-              <a:t>is more </a:t>
-            </a:r>
-            <a:r>
-              <a:rPr lang="en-US" sz="2400" dirty="0" smtClean="0"/>
-              <a:t>effective than relying only on resource </a:t>
-            </a:r>
-            <a:r>
-              <a:rPr lang="en-US" sz="2400" dirty="0" smtClean="0"/>
-              <a:t>consumption because </a:t>
-            </a:r>
-            <a:r>
-              <a:rPr lang="en-US" sz="2400" dirty="0" smtClean="0"/>
-              <a:t>different </a:t>
-            </a:r>
-            <a:r>
-              <a:rPr lang="en-US" sz="2400" dirty="0" err="1" smtClean="0"/>
-              <a:t>microservices</a:t>
-            </a:r>
-            <a:r>
-              <a:rPr lang="en-US" sz="2400" dirty="0" smtClean="0"/>
-              <a:t> may have varying </a:t>
-            </a:r>
-            <a:r>
-              <a:rPr lang="en-US" sz="2400" dirty="0" smtClean="0"/>
-              <a:t>sensitivity to </a:t>
-            </a:r>
-            <a:r>
-              <a:rPr lang="en-US" sz="2400" dirty="0" smtClean="0"/>
-              <a:t>heterogeneous resources</a:t>
-            </a:r>
-            <a:r>
-              <a:rPr lang="en-US" sz="2400" dirty="0" smtClean="0"/>
-              <a:t>.</a:t>
-            </a:r>
-          </a:p>
-          <a:p>
-            <a:r>
-              <a:rPr lang="en-US" sz="2400" dirty="0" smtClean="0"/>
-              <a:t>The main idea </a:t>
-            </a:r>
-            <a:r>
-              <a:rPr lang="en-US" sz="2400" dirty="0" smtClean="0"/>
-              <a:t>behind </a:t>
-            </a:r>
-            <a:r>
-              <a:rPr lang="en-US" sz="2400" dirty="0" smtClean="0"/>
-              <a:t>redundancy checking is to employ hypothesis testing </a:t>
-            </a:r>
-            <a:r>
-              <a:rPr lang="en-US" sz="2400" dirty="0" smtClean="0"/>
-              <a:t>to detect </a:t>
-            </a:r>
-            <a:r>
-              <a:rPr lang="en-US" sz="2400" dirty="0" smtClean="0"/>
-              <a:t>whether a </a:t>
-            </a:r>
-            <a:r>
-              <a:rPr lang="en-US" sz="2400" dirty="0" err="1" smtClean="0"/>
-              <a:t>microservice’s</a:t>
-            </a:r>
-            <a:r>
-              <a:rPr lang="en-US" sz="2400" dirty="0" smtClean="0"/>
-              <a:t> current workload </a:t>
-            </a:r>
-            <a:r>
-              <a:rPr lang="en-US" sz="2400" dirty="0" smtClean="0"/>
-              <a:t>is significantly </a:t>
-            </a:r>
-            <a:r>
-              <a:rPr lang="en-US" sz="2400" dirty="0" smtClean="0"/>
-              <a:t>lower than its past </a:t>
-            </a:r>
-            <a:r>
-              <a:rPr lang="en-US" sz="2400" dirty="0" smtClean="0"/>
-              <a:t>workload.</a:t>
-            </a:r>
-          </a:p>
-          <a:p>
-            <a:r>
-              <a:rPr lang="en-US" sz="2400" dirty="0" smtClean="0"/>
-              <a:t>The degree of significance is adjusted by the parameter </a:t>
-            </a:r>
-            <a:r>
-              <a:rPr lang="en-US" sz="2400" dirty="0" smtClean="0"/>
-              <a:t>β.</a:t>
-            </a:r>
-            <a:endParaRPr lang="en-US" sz="2400" dirty="0"/>
-          </a:p>
-        </p:txBody>
-      </p:sp>
-    </p:spTree>
-  </p:cSld>
-  <p:clrMapOvr>
-    <a:masterClrMapping/>
-  </p:clrMapOvr>
-</p:sld>
-</file>
-
 <file path=ppt/slides/slide42.xml><?xml version="1.0" encoding="utf-8"?>
 <p:sld xmlns:a="http://schemas.openxmlformats.org/drawingml/2006/main" xmlns:r="http://schemas.openxmlformats.org/officeDocument/2006/relationships" xmlns:p="http://schemas.openxmlformats.org/presentationml/2006/main">
   <p:cSld>
@@ -10440,7 +10207,7 @@
           <a:p>
             <a:r>
               <a:rPr lang="en-US" dirty="0" smtClean="0"/>
-              <a:t>Bottleneck Localization</a:t>
+              <a:t>SLO Violation Detection</a:t>
             </a:r>
             <a:endParaRPr lang="en-US" dirty="0"/>
           </a:p>
@@ -10462,172 +10229,50 @@
           <a:lstStyle/>
           <a:p>
             <a:r>
-              <a:rPr lang="en-US" sz="2200" dirty="0" smtClean="0"/>
-              <a:t>Only </a:t>
-            </a:r>
-            <a:r>
-              <a:rPr lang="en-US" sz="2200" dirty="0" smtClean="0"/>
-              <a:t>the bottleneck </a:t>
-            </a:r>
-            <a:r>
-              <a:rPr lang="en-US" sz="2200" dirty="0" err="1" smtClean="0"/>
+              <a:rPr lang="en-US" sz="2400" dirty="0" err="1" smtClean="0"/>
+              <a:t>PBScaler</a:t>
+            </a:r>
+            <a:r>
+              <a:rPr lang="en-US" sz="2400" dirty="0" smtClean="0"/>
+              <a:t> inspects the P90 tail latency of all invocation edges every 15 seconds to timely detect performance degradation.</a:t>
+            </a:r>
+          </a:p>
+          <a:p>
+            <a:r>
+              <a:rPr lang="en-US" sz="2400" dirty="0" smtClean="0"/>
+              <a:t>If the tail latency of an invocation exceeds a predetermined threshold (such as the SLO), the invoked </a:t>
+            </a:r>
+            <a:r>
+              <a:rPr lang="en-US" sz="2400" dirty="0" err="1" smtClean="0"/>
               <a:t>microservice</a:t>
             </a:r>
             <a:r>
-              <a:rPr lang="en-US" sz="2200" dirty="0" smtClean="0"/>
-              <a:t> </a:t>
-            </a:r>
-            <a:r>
-              <a:rPr lang="en-US" sz="2200" dirty="0" smtClean="0"/>
-              <a:t>must be </a:t>
-            </a:r>
-            <a:r>
-              <a:rPr lang="en-US" sz="2200" dirty="0" smtClean="0"/>
-              <a:t>scaled up while the other abnormal </a:t>
-            </a:r>
-            <a:r>
-              <a:rPr lang="en-US" sz="2200" dirty="0" err="1" smtClean="0"/>
+              <a:rPr lang="en-US" sz="2400" dirty="0" smtClean="0"/>
+              <a:t> of the invocation will be added to the set of abnormal </a:t>
+            </a:r>
+            <a:r>
+              <a:rPr lang="en-US" sz="2400" dirty="0" err="1" smtClean="0"/>
               <a:t>microservices</a:t>
             </a:r>
             <a:r>
-              <a:rPr lang="en-US" sz="2200" dirty="0" smtClean="0"/>
-              <a:t> </a:t>
-            </a:r>
-            <a:r>
-              <a:rPr lang="en-US" sz="2200" dirty="0" smtClean="0"/>
-              <a:t>are merely implicated.</a:t>
-            </a:r>
-          </a:p>
-          <a:p>
-            <a:r>
-              <a:rPr lang="en-US" sz="2200" dirty="0" smtClean="0"/>
-              <a:t>To </a:t>
-            </a:r>
-            <a:r>
-              <a:rPr lang="en-US" sz="2200" dirty="0" smtClean="0"/>
-              <a:t>pinpoint the bottleneck </a:t>
-            </a:r>
-            <a:r>
-              <a:rPr lang="en-US" sz="2200" dirty="0" err="1" smtClean="0"/>
+              <a:rPr lang="en-US" sz="2400" dirty="0" smtClean="0"/>
+              <a:t>, and the bottleneck localization process will be activated.</a:t>
+            </a:r>
+          </a:p>
+          <a:p>
+            <a:r>
+              <a:rPr lang="en-US" sz="2400" dirty="0" smtClean="0"/>
+              <a:t>To account for occasional noise in the </a:t>
+            </a:r>
+            <a:r>
+              <a:rPr lang="en-US" sz="2400" dirty="0" err="1" smtClean="0"/>
               <a:t>microservice</a:t>
             </a:r>
             <a:r>
-              <a:rPr lang="en-US" sz="2200" dirty="0" smtClean="0"/>
-              <a:t>, we </a:t>
-            </a:r>
-            <a:r>
-              <a:rPr lang="en-US" sz="2200" dirty="0" smtClean="0"/>
-              <a:t>introduce the concept of anomaly potential, which </a:t>
-            </a:r>
-            <a:r>
-              <a:rPr lang="en-US" sz="2200" dirty="0" smtClean="0"/>
-              <a:t>aggregates the </a:t>
-            </a:r>
-            <a:r>
-              <a:rPr lang="en-US" sz="2200" dirty="0" smtClean="0"/>
-              <a:t>anomaly impact of all </a:t>
-            </a:r>
-            <a:r>
-              <a:rPr lang="en-US" sz="2200" dirty="0" err="1" smtClean="0"/>
-              <a:t>microservices</a:t>
-            </a:r>
-            <a:r>
-              <a:rPr lang="en-US" sz="2200" dirty="0" smtClean="0"/>
-              <a:t> in a </a:t>
-            </a:r>
-            <a:r>
-              <a:rPr lang="en-US" sz="2200" dirty="0" smtClean="0"/>
-              <a:t>given position.</a:t>
-            </a:r>
-          </a:p>
-          <a:p>
-            <a:r>
-              <a:rPr lang="en-US" sz="2200" dirty="0" smtClean="0"/>
-              <a:t>Based on the </a:t>
-            </a:r>
-            <a:r>
-              <a:rPr lang="en-US" sz="2200" dirty="0" smtClean="0"/>
-              <a:t>anomaly potential</a:t>
-            </a:r>
-            <a:r>
-              <a:rPr lang="en-US" sz="2200" dirty="0" smtClean="0"/>
-              <a:t>, we model the backtracking of anomalies in </a:t>
-            </a:r>
-            <a:r>
-              <a:rPr lang="en-US" sz="2200" dirty="0" err="1" smtClean="0"/>
-              <a:t>microservice</a:t>
-            </a:r>
-            <a:r>
-              <a:rPr lang="en-US" sz="2200" dirty="0" smtClean="0"/>
-              <a:t> applications </a:t>
-            </a:r>
-            <a:r>
-              <a:rPr lang="en-US" sz="2200" dirty="0" smtClean="0"/>
-              <a:t>as a random walk on a </a:t>
-            </a:r>
-            <a:r>
-              <a:rPr lang="en-US" sz="2200" dirty="0" smtClean="0"/>
-              <a:t>directed graph.</a:t>
-            </a:r>
-          </a:p>
-          <a:p>
-            <a:r>
-              <a:rPr lang="en-US" sz="2200" dirty="0" smtClean="0"/>
-              <a:t>Therefore, </a:t>
-            </a:r>
-            <a:r>
-              <a:rPr lang="en-US" sz="2200" dirty="0" smtClean="0"/>
-              <a:t>we </a:t>
-            </a:r>
-            <a:r>
-              <a:rPr lang="en-US" sz="2200" dirty="0" smtClean="0"/>
-              <a:t>design a novel bottleneck </a:t>
-            </a:r>
-            <a:r>
-              <a:rPr lang="en-US" sz="2200" dirty="0" smtClean="0"/>
-              <a:t>localization algorithm</a:t>
-            </a:r>
-            <a:r>
-              <a:rPr lang="en-US" sz="2200" dirty="0" smtClean="0"/>
-              <a:t>, </a:t>
-            </a:r>
-            <a:r>
-              <a:rPr lang="en-US" sz="2200" dirty="0" err="1" smtClean="0"/>
-              <a:t>TopoRank</a:t>
-            </a:r>
-            <a:r>
-              <a:rPr lang="en-US" sz="2200" dirty="0" smtClean="0"/>
-              <a:t>, which introduces the topological </a:t>
-            </a:r>
-            <a:r>
-              <a:rPr lang="en-US" sz="2200" dirty="0" smtClean="0"/>
-              <a:t>potential theory </a:t>
-            </a:r>
-            <a:r>
-              <a:rPr lang="en-US" sz="2200" dirty="0" smtClean="0"/>
-              <a:t>(TPT) in random walks to calculate the </a:t>
-            </a:r>
-            <a:r>
-              <a:rPr lang="en-US" sz="2200" dirty="0" smtClean="0"/>
-              <a:t>scores for </a:t>
-            </a:r>
-            <a:r>
-              <a:rPr lang="en-US" sz="2200" dirty="0" smtClean="0"/>
-              <a:t>all abnormal </a:t>
-            </a:r>
-            <a:r>
-              <a:rPr lang="en-US" sz="2200" dirty="0" err="1" smtClean="0"/>
-              <a:t>microservices</a:t>
-            </a:r>
-            <a:r>
-              <a:rPr lang="en-US" sz="2200" dirty="0" smtClean="0"/>
-              <a:t> and finally outputs a </a:t>
-            </a:r>
-            <a:r>
-              <a:rPr lang="en-US" sz="2200" dirty="0" smtClean="0"/>
-              <a:t>ranking list.</a:t>
-            </a:r>
-            <a:endParaRPr lang="en-US" sz="2200" dirty="0"/>
+              <a:rPr lang="en-US" sz="2400" dirty="0" smtClean="0"/>
+              <a:t> latency, the threshold is set to SLO × (1 + α/2), where α is used to adjust the tolerance to noise.</a:t>
+            </a:r>
+            <a:endParaRPr lang="en-US" sz="2400" dirty="0"/>
           </a:p>
         </p:txBody>
       </p:sp>
@@ -10640,6 +10285,617 @@
 </file>
 
 <file path=ppt/slides/slide43.xml><?xml version="1.0" encoding="utf-8"?>
+<p:sld xmlns:a="http://schemas.openxmlformats.org/drawingml/2006/main" xmlns:r="http://schemas.openxmlformats.org/officeDocument/2006/relationships" xmlns:p="http://schemas.openxmlformats.org/presentationml/2006/main">
+  <p:cSld>
+    <p:spTree>
+      <p:nvGrpSpPr>
+        <p:cNvPr id="1" name=""/>
+        <p:cNvGrpSpPr/>
+        <p:nvPr/>
+      </p:nvGrpSpPr>
+      <p:grpSpPr>
+        <a:xfrm>
+          <a:off x="0" y="0"/>
+          <a:ext cx="0" cy="0"/>
+          <a:chOff x="0" y="0"/>
+          <a:chExt cx="0" cy="0"/>
+        </a:xfrm>
+      </p:grpSpPr>
+      <p:sp>
+        <p:nvSpPr>
+          <p:cNvPr id="2" name="Title 1"/>
+          <p:cNvSpPr>
+            <a:spLocks noGrp="1"/>
+          </p:cNvSpPr>
+          <p:nvPr>
+            <p:ph type="title"/>
+          </p:nvPr>
+        </p:nvSpPr>
+        <p:spPr/>
+        <p:txBody>
+          <a:bodyPr/>
+          <a:lstStyle/>
+          <a:p>
+            <a:r>
+              <a:rPr lang="en-US" dirty="0" smtClean="0"/>
+              <a:t>Redundancy Checking</a:t>
+            </a:r>
+            <a:endParaRPr lang="en-US" dirty="0"/>
+          </a:p>
+        </p:txBody>
+      </p:sp>
+      <p:sp>
+        <p:nvSpPr>
+          <p:cNvPr id="3" name="Content Placeholder 2"/>
+          <p:cNvSpPr>
+            <a:spLocks noGrp="1"/>
+          </p:cNvSpPr>
+          <p:nvPr>
+            <p:ph idx="1"/>
+          </p:nvPr>
+        </p:nvSpPr>
+        <p:spPr/>
+        <p:txBody>
+          <a:bodyPr/>
+          <a:lstStyle/>
+          <a:p>
+            <a:r>
+              <a:rPr lang="en-US" sz="2400" dirty="0" err="1" smtClean="0"/>
+              <a:t>PBScaler</a:t>
+            </a:r>
+            <a:r>
+              <a:rPr lang="en-US" sz="2400" dirty="0" smtClean="0"/>
+              <a:t> uses the rate of workload change per second of </a:t>
+            </a:r>
+            <a:r>
+              <a:rPr lang="en-US" sz="2400" dirty="0" err="1" smtClean="0"/>
+              <a:t>microservices</a:t>
+            </a:r>
+            <a:r>
+              <a:rPr lang="en-US" sz="2400" dirty="0" smtClean="0"/>
+              <a:t> to determine whether resources are redundant.</a:t>
+            </a:r>
+          </a:p>
+          <a:p>
+            <a:r>
+              <a:rPr lang="en-US" sz="2400" dirty="0" smtClean="0"/>
+              <a:t>This strategy is more effective than relying only on resource consumption because different </a:t>
+            </a:r>
+            <a:r>
+              <a:rPr lang="en-US" sz="2400" dirty="0" err="1" smtClean="0"/>
+              <a:t>microservices</a:t>
+            </a:r>
+            <a:r>
+              <a:rPr lang="en-US" sz="2400" dirty="0" smtClean="0"/>
+              <a:t> may have varying sensitivity to heterogeneous resources.</a:t>
+            </a:r>
+          </a:p>
+          <a:p>
+            <a:r>
+              <a:rPr lang="en-US" sz="2400" dirty="0" smtClean="0"/>
+              <a:t>The main idea behind redundancy checking is to employ hypothesis testing to detect whether a </a:t>
+            </a:r>
+            <a:r>
+              <a:rPr lang="en-US" sz="2400" dirty="0" err="1" smtClean="0"/>
+              <a:t>microservice’s</a:t>
+            </a:r>
+            <a:r>
+              <a:rPr lang="en-US" sz="2400" dirty="0" smtClean="0"/>
+              <a:t> current workload is significantly lower than its past workload.</a:t>
+            </a:r>
+          </a:p>
+          <a:p>
+            <a:r>
+              <a:rPr lang="en-US" sz="2400" dirty="0" smtClean="0"/>
+              <a:t>The degree of significance is adjusted by the parameter β.</a:t>
+            </a:r>
+            <a:endParaRPr lang="en-US" sz="2400" dirty="0"/>
+          </a:p>
+        </p:txBody>
+      </p:sp>
+    </p:spTree>
+  </p:cSld>
+  <p:clrMapOvr>
+    <a:masterClrMapping/>
+  </p:clrMapOvr>
+</p:sld>
+</file>
+
+<file path=ppt/slides/slide44.xml><?xml version="1.0" encoding="utf-8"?>
+<p:sld xmlns:a="http://schemas.openxmlformats.org/drawingml/2006/main" xmlns:r="http://schemas.openxmlformats.org/officeDocument/2006/relationships" xmlns:p="http://schemas.openxmlformats.org/presentationml/2006/main">
+  <p:cSld>
+    <p:spTree>
+      <p:nvGrpSpPr>
+        <p:cNvPr id="1" name=""/>
+        <p:cNvGrpSpPr/>
+        <p:nvPr/>
+      </p:nvGrpSpPr>
+      <p:grpSpPr>
+        <a:xfrm>
+          <a:off x="0" y="0"/>
+          <a:ext cx="0" cy="0"/>
+          <a:chOff x="0" y="0"/>
+          <a:chExt cx="0" cy="0"/>
+        </a:xfrm>
+      </p:grpSpPr>
+      <p:sp>
+        <p:nvSpPr>
+          <p:cNvPr id="2" name="Title 1"/>
+          <p:cNvSpPr>
+            <a:spLocks noGrp="1"/>
+          </p:cNvSpPr>
+          <p:nvPr>
+            <p:ph type="title"/>
+          </p:nvPr>
+        </p:nvSpPr>
+        <p:spPr/>
+        <p:txBody>
+          <a:bodyPr/>
+          <a:lstStyle/>
+          <a:p>
+            <a:r>
+              <a:rPr lang="en-US" dirty="0" smtClean="0"/>
+              <a:t>Bottleneck Localization</a:t>
+            </a:r>
+            <a:endParaRPr lang="en-US" dirty="0"/>
+          </a:p>
+        </p:txBody>
+      </p:sp>
+      <p:sp>
+        <p:nvSpPr>
+          <p:cNvPr id="3" name="Content Placeholder 2"/>
+          <p:cNvSpPr>
+            <a:spLocks noGrp="1"/>
+          </p:cNvSpPr>
+          <p:nvPr>
+            <p:ph idx="1"/>
+          </p:nvPr>
+        </p:nvSpPr>
+        <p:spPr/>
+        <p:txBody>
+          <a:bodyPr/>
+          <a:lstStyle/>
+          <a:p>
+            <a:r>
+              <a:rPr lang="en-US" sz="2200" dirty="0" smtClean="0"/>
+              <a:t>Only the bottleneck </a:t>
+            </a:r>
+            <a:r>
+              <a:rPr lang="en-US" sz="2200" dirty="0" err="1" smtClean="0"/>
+              <a:t>microservice</a:t>
+            </a:r>
+            <a:r>
+              <a:rPr lang="en-US" sz="2200" dirty="0" smtClean="0"/>
+              <a:t> must be scaled up while the other abnormal </a:t>
+            </a:r>
+            <a:r>
+              <a:rPr lang="en-US" sz="2200" dirty="0" err="1" smtClean="0"/>
+              <a:t>microservices</a:t>
+            </a:r>
+            <a:r>
+              <a:rPr lang="en-US" sz="2200" dirty="0" smtClean="0"/>
+              <a:t> are merely implicated.</a:t>
+            </a:r>
+          </a:p>
+          <a:p>
+            <a:r>
+              <a:rPr lang="en-US" sz="2200" dirty="0" smtClean="0"/>
+              <a:t>To pinpoint the bottleneck </a:t>
+            </a:r>
+            <a:r>
+              <a:rPr lang="en-US" sz="2200" dirty="0" err="1" smtClean="0"/>
+              <a:t>microservice</a:t>
+            </a:r>
+            <a:r>
+              <a:rPr lang="en-US" sz="2200" dirty="0" smtClean="0"/>
+              <a:t>, we introduce the concept of anomaly potential, which aggregates the anomaly impact of all </a:t>
+            </a:r>
+            <a:r>
+              <a:rPr lang="en-US" sz="2200" dirty="0" err="1" smtClean="0"/>
+              <a:t>microservices</a:t>
+            </a:r>
+            <a:r>
+              <a:rPr lang="en-US" sz="2200" dirty="0" smtClean="0"/>
+              <a:t> in a given position.</a:t>
+            </a:r>
+          </a:p>
+          <a:p>
+            <a:r>
+              <a:rPr lang="en-US" sz="2200" dirty="0" smtClean="0"/>
+              <a:t>Based on the anomaly potential, we model the backtracking of anomalies in </a:t>
+            </a:r>
+            <a:r>
+              <a:rPr lang="en-US" sz="2200" dirty="0" err="1" smtClean="0"/>
+              <a:t>microservice</a:t>
+            </a:r>
+            <a:r>
+              <a:rPr lang="en-US" sz="2200" dirty="0" smtClean="0"/>
+              <a:t> applications as a random walk on a directed graph.</a:t>
+            </a:r>
+          </a:p>
+          <a:p>
+            <a:r>
+              <a:rPr lang="en-US" sz="2200" dirty="0" smtClean="0"/>
+              <a:t>Therefore, we design a novel bottleneck localization algorithm, </a:t>
+            </a:r>
+            <a:r>
+              <a:rPr lang="en-US" sz="2200" dirty="0" err="1" smtClean="0"/>
+              <a:t>TopoRank</a:t>
+            </a:r>
+            <a:r>
+              <a:rPr lang="en-US" sz="2200" dirty="0" smtClean="0"/>
+              <a:t>, which introduces the topological potential theory (TPT) in random walks to calculate the scores for all abnormal </a:t>
+            </a:r>
+            <a:r>
+              <a:rPr lang="en-US" sz="2200" dirty="0" err="1" smtClean="0"/>
+              <a:t>microservices</a:t>
+            </a:r>
+            <a:r>
+              <a:rPr lang="en-US" sz="2200" dirty="0" smtClean="0"/>
+              <a:t> and finally outputs a ranking list.</a:t>
+            </a:r>
+            <a:endParaRPr lang="en-US" sz="2200" dirty="0"/>
+          </a:p>
+        </p:txBody>
+      </p:sp>
+    </p:spTree>
+  </p:cSld>
+  <p:clrMapOvr>
+    <a:masterClrMapping/>
+  </p:clrMapOvr>
+</p:sld>
+</file>
+
+<file path=ppt/slides/slide45.xml><?xml version="1.0" encoding="utf-8"?>
+<p:sld xmlns:a="http://schemas.openxmlformats.org/drawingml/2006/main" xmlns:r="http://schemas.openxmlformats.org/officeDocument/2006/relationships" xmlns:p="http://schemas.openxmlformats.org/presentationml/2006/main">
+  <p:cSld>
+    <p:spTree>
+      <p:nvGrpSpPr>
+        <p:cNvPr id="1" name=""/>
+        <p:cNvGrpSpPr/>
+        <p:nvPr/>
+      </p:nvGrpSpPr>
+      <p:grpSpPr>
+        <a:xfrm>
+          <a:off x="0" y="0"/>
+          <a:ext cx="0" cy="0"/>
+          <a:chOff x="0" y="0"/>
+          <a:chExt cx="0" cy="0"/>
+        </a:xfrm>
+      </p:grpSpPr>
+      <p:sp>
+        <p:nvSpPr>
+          <p:cNvPr id="2" name="Title 1"/>
+          <p:cNvSpPr>
+            <a:spLocks noGrp="1"/>
+          </p:cNvSpPr>
+          <p:nvPr>
+            <p:ph type="title"/>
+          </p:nvPr>
+        </p:nvSpPr>
+        <p:spPr/>
+        <p:txBody>
+          <a:bodyPr/>
+          <a:lstStyle/>
+          <a:p>
+            <a:r>
+              <a:rPr lang="en-US" dirty="0" smtClean="0"/>
+              <a:t>Scaling Decision</a:t>
+            </a:r>
+            <a:endParaRPr lang="en-US" dirty="0"/>
+          </a:p>
+        </p:txBody>
+      </p:sp>
+      <p:sp>
+        <p:nvSpPr>
+          <p:cNvPr id="3" name="Content Placeholder 2"/>
+          <p:cNvSpPr>
+            <a:spLocks noGrp="1"/>
+          </p:cNvSpPr>
+          <p:nvPr>
+            <p:ph idx="1"/>
+          </p:nvPr>
+        </p:nvSpPr>
+        <p:spPr/>
+        <p:txBody>
+          <a:bodyPr/>
+          <a:lstStyle/>
+          <a:p>
+            <a:r>
+              <a:rPr lang="en-US" sz="2400" dirty="0" smtClean="0"/>
+              <a:t>Although abundant replicas can alleviate the performance degradation problem, they also consume a significant amount of resources.</a:t>
+            </a:r>
+          </a:p>
+          <a:p>
+            <a:r>
+              <a:rPr lang="en-US" sz="2400" dirty="0" smtClean="0"/>
+              <a:t>It is essential to maintain a balance between performance guarantees and resource consumption.</a:t>
+            </a:r>
+          </a:p>
+          <a:p>
+            <a:r>
+              <a:rPr lang="en-US" sz="2400" dirty="0" smtClean="0"/>
+              <a:t>The process of </a:t>
+            </a:r>
+            <a:r>
+              <a:rPr lang="en-US" sz="2400" i="1" dirty="0" smtClean="0">
+                <a:solidFill>
+                  <a:srgbClr val="C00000"/>
+                </a:solidFill>
+              </a:rPr>
+              <a:t>scaling decision</a:t>
+            </a:r>
+            <a:r>
+              <a:rPr lang="en-US" sz="2400" dirty="0" smtClean="0"/>
+              <a:t> will be modeled as a </a:t>
+            </a:r>
+            <a:r>
+              <a:rPr lang="en-US" sz="2400" u="sng" dirty="0" smtClean="0"/>
+              <a:t>constrained optimization problem</a:t>
+            </a:r>
+            <a:r>
+              <a:rPr lang="en-US" sz="2400" dirty="0" smtClean="0"/>
+              <a:t> to achieve this balance.</a:t>
+            </a:r>
+          </a:p>
+          <a:p>
+            <a:r>
+              <a:rPr lang="en-US" sz="2400" dirty="0" smtClean="0"/>
+              <a:t>The goal of the scaling decision is to </a:t>
+            </a:r>
+            <a:r>
+              <a:rPr lang="en-US" sz="2400" i="1" dirty="0" smtClean="0">
+                <a:solidFill>
+                  <a:srgbClr val="C00000"/>
+                </a:solidFill>
+              </a:rPr>
+              <a:t>minimize the application’s resource consumption</a:t>
+            </a:r>
+            <a:r>
+              <a:rPr lang="en-US" sz="2400" dirty="0" smtClean="0"/>
+              <a:t> while </a:t>
+            </a:r>
+            <a:r>
+              <a:rPr lang="en-US" sz="2400" u="sng" dirty="0" smtClean="0"/>
+              <a:t>maintaining its performance</a:t>
+            </a:r>
+            <a:r>
+              <a:rPr lang="en-US" sz="2400" dirty="0" smtClean="0"/>
+              <a:t>.</a:t>
+            </a:r>
+          </a:p>
+          <a:p>
+            <a:r>
+              <a:rPr lang="en-US" sz="2400" dirty="0" smtClean="0"/>
+              <a:t>Application performance is usually expressed by SLO violations that users are more concerned about.</a:t>
+            </a:r>
+            <a:endParaRPr lang="en-US" sz="2200" dirty="0"/>
+          </a:p>
+        </p:txBody>
+      </p:sp>
+    </p:spTree>
+  </p:cSld>
+  <p:clrMapOvr>
+    <a:masterClrMapping/>
+  </p:clrMapOvr>
+</p:sld>
+</file>
+
+<file path=ppt/slides/slide46.xml><?xml version="1.0" encoding="utf-8"?>
+<p:sld xmlns:a="http://schemas.openxmlformats.org/drawingml/2006/main" xmlns:r="http://schemas.openxmlformats.org/officeDocument/2006/relationships" xmlns:p="http://schemas.openxmlformats.org/presentationml/2006/main">
+  <p:cSld>
+    <p:spTree>
+      <p:nvGrpSpPr>
+        <p:cNvPr id="1" name=""/>
+        <p:cNvGrpSpPr/>
+        <p:nvPr/>
+      </p:nvGrpSpPr>
+      <p:grpSpPr>
+        <a:xfrm>
+          <a:off x="0" y="0"/>
+          <a:ext cx="0" cy="0"/>
+          <a:chOff x="0" y="0"/>
+          <a:chExt cx="0" cy="0"/>
+        </a:xfrm>
+      </p:grpSpPr>
+      <p:sp>
+        <p:nvSpPr>
+          <p:cNvPr id="2" name="Title 1"/>
+          <p:cNvSpPr>
+            <a:spLocks noGrp="1"/>
+          </p:cNvSpPr>
+          <p:nvPr>
+            <p:ph type="title"/>
+          </p:nvPr>
+        </p:nvSpPr>
+        <p:spPr/>
+        <p:txBody>
+          <a:bodyPr/>
+          <a:lstStyle/>
+          <a:p>
+            <a:r>
+              <a:rPr lang="en-US" dirty="0" smtClean="0"/>
+              <a:t>SLO Violation Predictor</a:t>
+            </a:r>
+            <a:endParaRPr lang="en-US" dirty="0"/>
+          </a:p>
+        </p:txBody>
+      </p:sp>
+      <p:sp>
+        <p:nvSpPr>
+          <p:cNvPr id="3" name="Content Placeholder 2"/>
+          <p:cNvSpPr>
+            <a:spLocks noGrp="1"/>
+          </p:cNvSpPr>
+          <p:nvPr>
+            <p:ph idx="1"/>
+          </p:nvPr>
+        </p:nvSpPr>
+        <p:spPr/>
+        <p:txBody>
+          <a:bodyPr/>
+          <a:lstStyle/>
+          <a:p>
+            <a:r>
+              <a:rPr lang="en-US" sz="2400" dirty="0" smtClean="0"/>
+              <a:t>Evaluating whether a strategy will cause the SLO violation in online applications is necessary.</a:t>
+            </a:r>
+          </a:p>
+          <a:p>
+            <a:r>
+              <a:rPr lang="en-US" sz="2400" dirty="0" smtClean="0"/>
+              <a:t>A simple way is to </a:t>
+            </a:r>
+            <a:r>
+              <a:rPr lang="en-US" sz="2400" i="1" dirty="0" smtClean="0">
+                <a:solidFill>
+                  <a:srgbClr val="C00000"/>
+                </a:solidFill>
+              </a:rPr>
+              <a:t>execute candidate strategies</a:t>
+            </a:r>
+            <a:r>
+              <a:rPr lang="en-US" sz="2400" dirty="0" smtClean="0"/>
+              <a:t> directly in online applications and wait for feedback from the monitoring system. However, </a:t>
+            </a:r>
+            <a:r>
+              <a:rPr lang="en-US" sz="2400" u="sng" dirty="0" smtClean="0"/>
+              <a:t>oscillations</a:t>
+            </a:r>
+            <a:r>
+              <a:rPr lang="en-US" sz="2400" dirty="0" smtClean="0"/>
+              <a:t> caused by frequent scaling in online applications will be inevitable.</a:t>
+            </a:r>
+          </a:p>
+          <a:p>
+            <a:r>
+              <a:rPr lang="en-US" sz="2400" dirty="0" smtClean="0"/>
+              <a:t>An alternative method is to </a:t>
+            </a:r>
+            <a:r>
+              <a:rPr lang="en-US" sz="2400" i="1" dirty="0" smtClean="0">
+                <a:solidFill>
+                  <a:srgbClr val="C00000"/>
+                </a:solidFill>
+              </a:rPr>
+              <a:t>train an evaluation model</a:t>
+            </a:r>
+            <a:r>
+              <a:rPr lang="en-US" sz="2400" dirty="0" smtClean="0"/>
+              <a:t> with </a:t>
+            </a:r>
+            <a:r>
+              <a:rPr lang="en-US" sz="2400" u="sng" dirty="0" smtClean="0"/>
+              <a:t>historical metric data</a:t>
+            </a:r>
+            <a:r>
+              <a:rPr lang="en-US" sz="2400" dirty="0" smtClean="0"/>
+              <a:t>, which can simulate the feedback from online applications. Without interacting with online applications, this model </a:t>
+            </a:r>
+            <a:r>
+              <a:rPr lang="en-US" sz="2400" i="1" dirty="0" smtClean="0">
+                <a:solidFill>
+                  <a:srgbClr val="C00000"/>
+                </a:solidFill>
+              </a:rPr>
+              <a:t>predicts</a:t>
+            </a:r>
+            <a:r>
+              <a:rPr lang="en-US" sz="2400" dirty="0" smtClean="0"/>
+              <a:t> application performance based on </a:t>
+            </a:r>
+            <a:r>
+              <a:rPr lang="en-US" sz="2400" u="sng" dirty="0" smtClean="0"/>
+              <a:t>the current application state</a:t>
+            </a:r>
+            <a:r>
+              <a:rPr lang="en-US" sz="2400" dirty="0" smtClean="0"/>
+              <a:t>.</a:t>
+            </a:r>
+            <a:endParaRPr lang="en-US" sz="2200" dirty="0"/>
+          </a:p>
+        </p:txBody>
+      </p:sp>
+    </p:spTree>
+  </p:cSld>
+  <p:clrMapOvr>
+    <a:masterClrMapping/>
+  </p:clrMapOvr>
+</p:sld>
+</file>
+
+<file path=ppt/slides/slide47.xml><?xml version="1.0" encoding="utf-8"?>
+<p:sld xmlns:a="http://schemas.openxmlformats.org/drawingml/2006/main" xmlns:r="http://schemas.openxmlformats.org/officeDocument/2006/relationships" xmlns:p="http://schemas.openxmlformats.org/presentationml/2006/main">
+  <p:cSld>
+    <p:spTree>
+      <p:nvGrpSpPr>
+        <p:cNvPr id="1" name=""/>
+        <p:cNvGrpSpPr/>
+        <p:nvPr/>
+      </p:nvGrpSpPr>
+      <p:grpSpPr>
+        <a:xfrm>
+          <a:off x="0" y="0"/>
+          <a:ext cx="0" cy="0"/>
+          <a:chOff x="0" y="0"/>
+          <a:chExt cx="0" cy="0"/>
+        </a:xfrm>
+      </p:grpSpPr>
+      <p:sp>
+        <p:nvSpPr>
+          <p:cNvPr id="2" name="Title 1"/>
+          <p:cNvSpPr>
+            <a:spLocks noGrp="1"/>
+          </p:cNvSpPr>
+          <p:nvPr>
+            <p:ph type="title"/>
+          </p:nvPr>
+        </p:nvSpPr>
+        <p:spPr/>
+        <p:txBody>
+          <a:bodyPr/>
+          <a:lstStyle/>
+          <a:p>
+            <a:r>
+              <a:rPr lang="en-US" dirty="0" err="1" smtClean="0"/>
+              <a:t>Autoscaling</a:t>
+            </a:r>
+            <a:r>
+              <a:rPr lang="en-US" dirty="0" smtClean="0"/>
+              <a:t> Optimization</a:t>
+            </a:r>
+            <a:endParaRPr lang="en-US" dirty="0"/>
+          </a:p>
+        </p:txBody>
+      </p:sp>
+      <p:sp>
+        <p:nvSpPr>
+          <p:cNvPr id="3" name="Content Placeholder 2"/>
+          <p:cNvSpPr>
+            <a:spLocks noGrp="1"/>
+          </p:cNvSpPr>
+          <p:nvPr>
+            <p:ph idx="1"/>
+          </p:nvPr>
+        </p:nvSpPr>
+        <p:spPr/>
+        <p:txBody>
+          <a:bodyPr/>
+          <a:lstStyle/>
+          <a:p>
+            <a:endParaRPr lang="en-US" sz="2200" dirty="0"/>
+          </a:p>
+        </p:txBody>
+      </p:sp>
+    </p:spTree>
+  </p:cSld>
+  <p:clrMapOvr>
+    <a:masterClrMapping/>
+  </p:clrMapOvr>
+</p:sld>
+</file>
+
+<file path=ppt/slides/slide48.xml><?xml version="1.0" encoding="utf-8"?>
 <p:sld xmlns:a="http://schemas.openxmlformats.org/drawingml/2006/main" xmlns:r="http://schemas.openxmlformats.org/officeDocument/2006/relationships" xmlns:p="http://schemas.openxmlformats.org/presentationml/2006/main">
   <p:cSld>
     <p:spTree>
@@ -10753,6 +11009,284 @@
           <a:p>
             <a:r>
               <a:rPr lang="en-US" dirty="0" smtClean="0"/>
+              <a:t>Scaling Indicators [1]</a:t>
+            </a:r>
+            <a:endParaRPr lang="en-US" dirty="0"/>
+          </a:p>
+        </p:txBody>
+      </p:sp>
+      <p:sp>
+        <p:nvSpPr>
+          <p:cNvPr id="3" name="Content Placeholder 2"/>
+          <p:cNvSpPr>
+            <a:spLocks noGrp="1"/>
+          </p:cNvSpPr>
+          <p:nvPr>
+            <p:ph idx="1"/>
+          </p:nvPr>
+        </p:nvSpPr>
+        <p:spPr/>
+        <p:txBody>
+          <a:bodyPr/>
+          <a:lstStyle/>
+          <a:p>
+            <a:r>
+              <a:rPr lang="en-US" sz="2800" dirty="0" smtClean="0"/>
+              <a:t>In order to scale the application in </a:t>
+            </a:r>
+            <a:r>
+              <a:rPr lang="en-US" sz="2800" u="sng" dirty="0" smtClean="0"/>
+              <a:t>dynamic manner</a:t>
+            </a:r>
+            <a:r>
+              <a:rPr lang="en-US" sz="2800" dirty="0" smtClean="0"/>
+              <a:t>, it is common to use </a:t>
+            </a:r>
+            <a:r>
+              <a:rPr lang="en-US" sz="2800" i="1" dirty="0" smtClean="0">
+                <a:solidFill>
+                  <a:srgbClr val="C00000"/>
+                </a:solidFill>
+              </a:rPr>
+              <a:t>scaling indicators</a:t>
+            </a:r>
+            <a:r>
+              <a:rPr lang="en-US" sz="2800" dirty="0" smtClean="0"/>
+              <a:t> at the </a:t>
+            </a:r>
+            <a:r>
+              <a:rPr lang="en-US" sz="2800" u="sng" dirty="0" smtClean="0"/>
+              <a:t>scaling point</a:t>
+            </a:r>
+            <a:r>
+              <a:rPr lang="en-US" sz="2800" dirty="0" smtClean="0"/>
+              <a:t> to monitor and track the performance.</a:t>
+            </a:r>
+          </a:p>
+          <a:p>
+            <a:r>
+              <a:rPr lang="en-US" sz="2800" dirty="0" smtClean="0"/>
+              <a:t>For </a:t>
+            </a:r>
+            <a:r>
+              <a:rPr lang="en-US" sz="2800" i="1" dirty="0" smtClean="0">
+                <a:solidFill>
+                  <a:srgbClr val="C00000"/>
+                </a:solidFill>
+              </a:rPr>
+              <a:t>web applications</a:t>
+            </a:r>
+            <a:r>
+              <a:rPr lang="en-US" sz="2800" dirty="0" smtClean="0"/>
+              <a:t>, typical scaling indicators at the web server may include:</a:t>
+            </a:r>
+          </a:p>
+          <a:p>
+            <a:pPr lvl="1"/>
+            <a:r>
+              <a:rPr lang="en-US" sz="2400" dirty="0" smtClean="0"/>
+              <a:t>Number of concurrent users.</a:t>
+            </a:r>
+          </a:p>
+          <a:p>
+            <a:pPr lvl="1"/>
+            <a:r>
+              <a:rPr lang="en-US" sz="2400" dirty="0" smtClean="0"/>
+              <a:t>Number of active connections.</a:t>
+            </a:r>
+          </a:p>
+          <a:p>
+            <a:pPr lvl="1"/>
+            <a:r>
+              <a:rPr lang="en-US" sz="2400" dirty="0" smtClean="0"/>
+              <a:t>Number of requests per second.</a:t>
+            </a:r>
+          </a:p>
+          <a:p>
+            <a:pPr lvl="1"/>
+            <a:r>
+              <a:rPr lang="en-US" sz="2400" dirty="0" smtClean="0"/>
+              <a:t>Average response times per request.</a:t>
+            </a:r>
+            <a:endParaRPr lang="en-US" sz="2400" dirty="0"/>
+          </a:p>
+        </p:txBody>
+      </p:sp>
+    </p:spTree>
+  </p:cSld>
+  <p:clrMapOvr>
+    <a:masterClrMapping/>
+  </p:clrMapOvr>
+</p:sld>
+</file>
+
+<file path=ppt/slides/slide6.xml><?xml version="1.0" encoding="utf-8"?>
+<p:sld xmlns:a="http://schemas.openxmlformats.org/drawingml/2006/main" xmlns:r="http://schemas.openxmlformats.org/officeDocument/2006/relationships" xmlns:p="http://schemas.openxmlformats.org/presentationml/2006/main">
+  <p:cSld>
+    <p:spTree>
+      <p:nvGrpSpPr>
+        <p:cNvPr id="1" name=""/>
+        <p:cNvGrpSpPr/>
+        <p:nvPr/>
+      </p:nvGrpSpPr>
+      <p:grpSpPr>
+        <a:xfrm>
+          <a:off x="0" y="0"/>
+          <a:ext cx="0" cy="0"/>
+          <a:chOff x="0" y="0"/>
+          <a:chExt cx="0" cy="0"/>
+        </a:xfrm>
+      </p:grpSpPr>
+      <p:sp>
+        <p:nvSpPr>
+          <p:cNvPr id="2" name="Title 1"/>
+          <p:cNvSpPr>
+            <a:spLocks noGrp="1"/>
+          </p:cNvSpPr>
+          <p:nvPr>
+            <p:ph type="title"/>
+          </p:nvPr>
+        </p:nvSpPr>
+        <p:spPr/>
+        <p:txBody>
+          <a:bodyPr/>
+          <a:lstStyle/>
+          <a:p>
+            <a:r>
+              <a:rPr lang="en-US" dirty="0" smtClean="0"/>
+              <a:t>Scaling Rules</a:t>
+            </a:r>
+            <a:endParaRPr lang="en-US" dirty="0"/>
+          </a:p>
+        </p:txBody>
+      </p:sp>
+      <p:sp>
+        <p:nvSpPr>
+          <p:cNvPr id="3" name="Content Placeholder 2"/>
+          <p:cNvSpPr>
+            <a:spLocks noGrp="1"/>
+          </p:cNvSpPr>
+          <p:nvPr>
+            <p:ph idx="1"/>
+          </p:nvPr>
+        </p:nvSpPr>
+        <p:spPr/>
+        <p:txBody>
+          <a:bodyPr/>
+          <a:lstStyle/>
+          <a:p>
+            <a:r>
+              <a:rPr lang="en-US" sz="2800" dirty="0" smtClean="0"/>
+              <a:t>Once </a:t>
+            </a:r>
+            <a:r>
+              <a:rPr lang="en-US" sz="2800" i="1" dirty="0" smtClean="0">
+                <a:solidFill>
+                  <a:srgbClr val="C00000"/>
+                </a:solidFill>
+              </a:rPr>
+              <a:t>a scaling indicator is selected</a:t>
+            </a:r>
+            <a:r>
+              <a:rPr lang="en-US" sz="2800" dirty="0" smtClean="0"/>
+              <a:t> for use to scale the application, </a:t>
+            </a:r>
+            <a:r>
+              <a:rPr lang="en-US" sz="2800" u="sng" dirty="0" smtClean="0"/>
+              <a:t>samplings</a:t>
+            </a:r>
+            <a:r>
+              <a:rPr lang="en-US" sz="2800" dirty="0" smtClean="0"/>
+              <a:t> of the scaling indicator are </a:t>
+            </a:r>
+            <a:r>
+              <a:rPr lang="en-US" sz="2800" u="sng" dirty="0" smtClean="0"/>
+              <a:t>collected</a:t>
+            </a:r>
+            <a:r>
+              <a:rPr lang="en-US" sz="2800" dirty="0" smtClean="0"/>
+              <a:t> in real-time, and statistics is </a:t>
+            </a:r>
+            <a:r>
+              <a:rPr lang="en-US" sz="2800" u="sng" dirty="0" smtClean="0"/>
+              <a:t>calculated</a:t>
+            </a:r>
+            <a:r>
+              <a:rPr lang="en-US" sz="2800" dirty="0" smtClean="0"/>
+              <a:t> periodically.</a:t>
+            </a:r>
+          </a:p>
+          <a:p>
+            <a:r>
+              <a:rPr lang="en-US" sz="2800" dirty="0" smtClean="0"/>
+              <a:t>Based on the historical trends and predictions derived from the statistics of the scaling indicator, </a:t>
+            </a:r>
+            <a:r>
+              <a:rPr lang="en-US" sz="2800" i="1" dirty="0" smtClean="0">
+                <a:solidFill>
+                  <a:srgbClr val="C00000"/>
+                </a:solidFill>
+              </a:rPr>
+              <a:t>scaling rules</a:t>
+            </a:r>
+            <a:r>
+              <a:rPr lang="en-US" sz="2800" dirty="0" smtClean="0"/>
+              <a:t> can </a:t>
+            </a:r>
+            <a:r>
+              <a:rPr lang="en-US" sz="2800" u="sng" dirty="0" smtClean="0"/>
+              <a:t>be defined to scale up or down</a:t>
+            </a:r>
+            <a:r>
+              <a:rPr lang="en-US" sz="2800" dirty="0" smtClean="0"/>
+              <a:t> the amount of web application instances.</a:t>
+            </a:r>
+            <a:endParaRPr lang="en-US" sz="2800" dirty="0"/>
+          </a:p>
+        </p:txBody>
+      </p:sp>
+    </p:spTree>
+  </p:cSld>
+  <p:clrMapOvr>
+    <a:masterClrMapping/>
+  </p:clrMapOvr>
+</p:sld>
+</file>
+
+<file path=ppt/slides/slide7.xml><?xml version="1.0" encoding="utf-8"?>
+<p:sld xmlns:a="http://schemas.openxmlformats.org/drawingml/2006/main" xmlns:r="http://schemas.openxmlformats.org/officeDocument/2006/relationships" xmlns:p="http://schemas.openxmlformats.org/presentationml/2006/main">
+  <p:cSld>
+    <p:spTree>
+      <p:nvGrpSpPr>
+        <p:cNvPr id="1" name=""/>
+        <p:cNvGrpSpPr/>
+        <p:nvPr/>
+      </p:nvGrpSpPr>
+      <p:grpSpPr>
+        <a:xfrm>
+          <a:off x="0" y="0"/>
+          <a:ext cx="0" cy="0"/>
+          <a:chOff x="0" y="0"/>
+          <a:chExt cx="0" cy="0"/>
+        </a:xfrm>
+      </p:grpSpPr>
+      <p:sp>
+        <p:nvSpPr>
+          <p:cNvPr id="2" name="Title 1"/>
+          <p:cNvSpPr>
+            <a:spLocks noGrp="1"/>
+          </p:cNvSpPr>
+          <p:nvPr>
+            <p:ph type="title"/>
+          </p:nvPr>
+        </p:nvSpPr>
+        <p:spPr/>
+        <p:txBody>
+          <a:bodyPr/>
+          <a:lstStyle/>
+          <a:p>
+            <a:r>
+              <a:rPr lang="en-US" dirty="0" smtClean="0"/>
               <a:t>Architecture to Scale Web Applications in a Cloud</a:t>
             </a:r>
             <a:endParaRPr lang="en-US" dirty="0"/>
@@ -10799,262 +11333,6 @@
 </p:sld>
 </file>
 
-<file path=ppt/slides/slide6.xml><?xml version="1.0" encoding="utf-8"?>
-<p:sld xmlns:a="http://schemas.openxmlformats.org/drawingml/2006/main" xmlns:r="http://schemas.openxmlformats.org/officeDocument/2006/relationships" xmlns:p="http://schemas.openxmlformats.org/presentationml/2006/main">
-  <p:cSld>
-    <p:spTree>
-      <p:nvGrpSpPr>
-        <p:cNvPr id="1" name=""/>
-        <p:cNvGrpSpPr/>
-        <p:nvPr/>
-      </p:nvGrpSpPr>
-      <p:grpSpPr>
-        <a:xfrm>
-          <a:off x="0" y="0"/>
-          <a:ext cx="0" cy="0"/>
-          <a:chOff x="0" y="0"/>
-          <a:chExt cx="0" cy="0"/>
-        </a:xfrm>
-      </p:grpSpPr>
-      <p:sp>
-        <p:nvSpPr>
-          <p:cNvPr id="2" name="Title 1"/>
-          <p:cNvSpPr>
-            <a:spLocks noGrp="1"/>
-          </p:cNvSpPr>
-          <p:nvPr>
-            <p:ph type="title"/>
-          </p:nvPr>
-        </p:nvSpPr>
-        <p:spPr/>
-        <p:txBody>
-          <a:bodyPr/>
-          <a:lstStyle/>
-          <a:p>
-            <a:r>
-              <a:rPr lang="en-US" dirty="0" smtClean="0"/>
-              <a:t>Architecture Components</a:t>
-            </a:r>
-            <a:endParaRPr lang="en-US" dirty="0"/>
-          </a:p>
-        </p:txBody>
-      </p:sp>
-      <p:sp>
-        <p:nvSpPr>
-          <p:cNvPr id="3" name="Content Placeholder 2"/>
-          <p:cNvSpPr>
-            <a:spLocks noGrp="1"/>
-          </p:cNvSpPr>
-          <p:nvPr>
-            <p:ph idx="1"/>
-          </p:nvPr>
-        </p:nvSpPr>
-        <p:spPr/>
-        <p:txBody>
-          <a:bodyPr/>
-          <a:lstStyle/>
-          <a:p>
-            <a:r>
-              <a:rPr lang="en-US" sz="2100" i="1" dirty="0" smtClean="0">
-                <a:solidFill>
-                  <a:srgbClr val="C00000"/>
-                </a:solidFill>
-              </a:rPr>
-              <a:t>Load-Balancer</a:t>
-            </a:r>
-            <a:r>
-              <a:rPr lang="en-US" sz="2100" dirty="0" smtClean="0"/>
-              <a:t>: Apache HTTP Load-Balancer</a:t>
-            </a:r>
-          </a:p>
-          <a:p>
-            <a:r>
-              <a:rPr lang="en-US" sz="2100" dirty="0" smtClean="0"/>
-              <a:t>The </a:t>
-            </a:r>
-            <a:r>
-              <a:rPr lang="en-US" sz="2100" i="1" dirty="0" smtClean="0">
-                <a:solidFill>
-                  <a:srgbClr val="C00000"/>
-                </a:solidFill>
-              </a:rPr>
-              <a:t>web application</a:t>
-            </a:r>
-            <a:r>
-              <a:rPr lang="en-US" sz="2100" dirty="0" smtClean="0"/>
-              <a:t> and its corresponding web server (Apache HTTP server) is pre-installed in a virtual machine appliance image template.</a:t>
-            </a:r>
-          </a:p>
-          <a:p>
-            <a:r>
-              <a:rPr lang="en-US" sz="2100" i="1" dirty="0" smtClean="0">
-                <a:solidFill>
-                  <a:srgbClr val="C00000"/>
-                </a:solidFill>
-              </a:rPr>
-              <a:t>Service Monitor</a:t>
-            </a:r>
-            <a:r>
-              <a:rPr lang="en-US" sz="2100" dirty="0" smtClean="0"/>
-              <a:t>: A monitoring agent is installed in each web application to track the number of active sessions and to forward the number periodically to the Service Monitor subsystem.</a:t>
-            </a:r>
-          </a:p>
-          <a:p>
-            <a:r>
-              <a:rPr lang="en-US" sz="2100" i="1" dirty="0" smtClean="0">
-                <a:solidFill>
-                  <a:srgbClr val="C00000"/>
-                </a:solidFill>
-              </a:rPr>
-              <a:t>Provisioning sub-system</a:t>
-            </a:r>
-            <a:r>
-              <a:rPr lang="en-US" sz="2100" dirty="0" smtClean="0"/>
-              <a:t>: IBM Tivoli Provisioning Manager (TPM) software product. A number of TPM automation workflows have been developed for different operating systems and virtualization technologies</a:t>
-            </a:r>
-          </a:p>
-          <a:p>
-            <a:r>
-              <a:rPr lang="en-US" sz="2100" i="1" dirty="0" smtClean="0">
-                <a:solidFill>
-                  <a:srgbClr val="C00000"/>
-                </a:solidFill>
-              </a:rPr>
-              <a:t>Scaling Algorithm</a:t>
-            </a:r>
-            <a:r>
-              <a:rPr lang="en-US" sz="2100" dirty="0" smtClean="0"/>
-              <a:t>: If all instances have active sessions above the given upper threshold, a new web application instance will be provisioned, started, and then added to the front-end load-balancer.</a:t>
-            </a:r>
-            <a:endParaRPr lang="en-US" sz="2100" dirty="0"/>
-          </a:p>
-        </p:txBody>
-      </p:sp>
-    </p:spTree>
-  </p:cSld>
-  <p:clrMapOvr>
-    <a:masterClrMapping/>
-  </p:clrMapOvr>
-</p:sld>
-</file>
-
-<file path=ppt/slides/slide7.xml><?xml version="1.0" encoding="utf-8"?>
-<p:sld xmlns:a="http://schemas.openxmlformats.org/drawingml/2006/main" xmlns:r="http://schemas.openxmlformats.org/officeDocument/2006/relationships" xmlns:p="http://schemas.openxmlformats.org/presentationml/2006/main">
-  <p:cSld>
-    <p:spTree>
-      <p:nvGrpSpPr>
-        <p:cNvPr id="1" name=""/>
-        <p:cNvGrpSpPr/>
-        <p:nvPr/>
-      </p:nvGrpSpPr>
-      <p:grpSpPr>
-        <a:xfrm>
-          <a:off x="0" y="0"/>
-          <a:ext cx="0" cy="0"/>
-          <a:chOff x="0" y="0"/>
-          <a:chExt cx="0" cy="0"/>
-        </a:xfrm>
-      </p:grpSpPr>
-      <p:sp>
-        <p:nvSpPr>
-          <p:cNvPr id="2" name="Title 1"/>
-          <p:cNvSpPr>
-            <a:spLocks noGrp="1"/>
-          </p:cNvSpPr>
-          <p:nvPr>
-            <p:ph type="title"/>
-          </p:nvPr>
-        </p:nvSpPr>
-        <p:spPr/>
-        <p:txBody>
-          <a:bodyPr/>
-          <a:lstStyle/>
-          <a:p>
-            <a:r>
-              <a:rPr lang="en-US" dirty="0" smtClean="0"/>
-              <a:t>Dynamic Scaling Algorithm (I)</a:t>
-            </a:r>
-            <a:endParaRPr lang="en-US" dirty="0"/>
-          </a:p>
-        </p:txBody>
-      </p:sp>
-      <p:sp>
-        <p:nvSpPr>
-          <p:cNvPr id="3" name="Content Placeholder 2"/>
-          <p:cNvSpPr>
-            <a:spLocks noGrp="1"/>
-          </p:cNvSpPr>
-          <p:nvPr>
-            <p:ph idx="1"/>
-          </p:nvPr>
-        </p:nvSpPr>
-        <p:spPr/>
-        <p:txBody>
-          <a:bodyPr/>
-          <a:lstStyle/>
-          <a:p>
-            <a:r>
-              <a:rPr lang="en-US" sz="2800" dirty="0" smtClean="0"/>
-              <a:t>The </a:t>
-            </a:r>
-            <a:r>
-              <a:rPr lang="en-US" sz="2800" i="1" dirty="0" smtClean="0">
-                <a:solidFill>
-                  <a:srgbClr val="C00000"/>
-                </a:solidFill>
-              </a:rPr>
-              <a:t>scaling algorithm</a:t>
-            </a:r>
-            <a:r>
-              <a:rPr lang="en-US" sz="2800" dirty="0" smtClean="0"/>
-              <a:t> is implemented in the Service Monitor sub-system, and is used to control and trigger the scale-up or down in the Provisioning sub-system on </a:t>
-            </a:r>
-            <a:r>
-              <a:rPr lang="en-US" sz="2800" u="sng" dirty="0" smtClean="0"/>
-              <a:t>the number of virtual machine instances</a:t>
-            </a:r>
-            <a:r>
-              <a:rPr lang="en-US" sz="2800" dirty="0" smtClean="0"/>
-              <a:t> based on the statistics of the scaling indicator.</a:t>
-            </a:r>
-          </a:p>
-          <a:p>
-            <a:r>
-              <a:rPr lang="en-US" sz="2800" dirty="0" smtClean="0"/>
-              <a:t>For the sake of illustration, we choose a </a:t>
-            </a:r>
-            <a:r>
-              <a:rPr lang="en-US" sz="2800" i="1" dirty="0" smtClean="0">
-                <a:solidFill>
-                  <a:srgbClr val="C00000"/>
-                </a:solidFill>
-              </a:rPr>
-              <a:t>scaling indicator</a:t>
-            </a:r>
-            <a:r>
-              <a:rPr lang="en-US" sz="2800" dirty="0" smtClean="0"/>
-              <a:t> in our implementation that corresponds to </a:t>
-            </a:r>
-            <a:r>
-              <a:rPr lang="en-US" sz="2800" u="sng" dirty="0" smtClean="0"/>
-              <a:t>the number of active sessions</a:t>
-            </a:r>
-            <a:r>
-              <a:rPr lang="en-US" sz="2800" dirty="0" smtClean="0"/>
-              <a:t> in the web application of each instance.</a:t>
-            </a:r>
-            <a:endParaRPr lang="en-US" sz="2800" dirty="0"/>
-          </a:p>
-        </p:txBody>
-      </p:sp>
-    </p:spTree>
-  </p:cSld>
-  <p:clrMapOvr>
-    <a:masterClrMapping/>
-  </p:clrMapOvr>
-</p:sld>
-</file>
-
 <file path=ppt/slides/slide8.xml><?xml version="1.0" encoding="utf-8"?>
 <p:sld xmlns:a="http://schemas.openxmlformats.org/drawingml/2006/main" xmlns:r="http://schemas.openxmlformats.org/officeDocument/2006/relationships" xmlns:p="http://schemas.openxmlformats.org/presentationml/2006/main">
   <p:cSld>
@@ -11089,7 +11367,7 @@
           <a:p>
             <a:r>
               <a:rPr lang="en-US" dirty="0" smtClean="0"/>
-              <a:t>Dynamic Scaling Algorithm (II)</a:t>
+              <a:t>Architecture Components</a:t>
             </a:r>
             <a:endParaRPr lang="en-US" dirty="0"/>
           </a:p>
@@ -11111,74 +11389,78 @@
           <a:lstStyle/>
           <a:p>
             <a:r>
-              <a:rPr lang="en-US" sz="2400" dirty="0" smtClean="0"/>
-              <a:t>The algorithm first determines the current web application instances with active sessions above or below </a:t>
-            </a:r>
-            <a:r>
-              <a:rPr lang="en-US" sz="2400" i="1" dirty="0" smtClean="0">
+              <a:rPr lang="en-US" sz="2100" i="1" dirty="0" smtClean="0">
                 <a:solidFill>
                   <a:srgbClr val="C00000"/>
                 </a:solidFill>
               </a:rPr>
-              <a:t>given threshold</a:t>
-            </a:r>
-            <a:r>
-              <a:rPr lang="en-US" sz="2400" dirty="0" smtClean="0"/>
-              <a:t> numbers.</a:t>
-            </a:r>
-          </a:p>
-          <a:p>
-            <a:r>
-              <a:rPr lang="en-US" sz="2400" dirty="0" smtClean="0"/>
-              <a:t>If all instances have active sessions above the given upper threshold, a </a:t>
-            </a:r>
-            <a:r>
-              <a:rPr lang="en-US" sz="2400" i="1" dirty="0" smtClean="0">
+              <a:t>Load-Balancer</a:t>
+            </a:r>
+            <a:r>
+              <a:rPr lang="en-US" sz="2100" dirty="0" smtClean="0"/>
+              <a:t>: Apache HTTP Load-Balancer</a:t>
+            </a:r>
+          </a:p>
+          <a:p>
+            <a:r>
+              <a:rPr lang="en-US" sz="2100" dirty="0" smtClean="0"/>
+              <a:t>The </a:t>
+            </a:r>
+            <a:r>
+              <a:rPr lang="en-US" sz="2100" i="1" dirty="0" smtClean="0">
                 <a:solidFill>
                   <a:srgbClr val="C00000"/>
                 </a:solidFill>
               </a:rPr>
-              <a:t>new web application instance</a:t>
-            </a:r>
-            <a:r>
-              <a:rPr lang="en-US" sz="2400" dirty="0" smtClean="0"/>
-              <a:t> will be provisioned, started, and then added to the </a:t>
-            </a:r>
-            <a:r>
-              <a:rPr lang="en-US" sz="2400" u="sng" dirty="0" smtClean="0"/>
-              <a:t>front-end load-balancer</a:t>
-            </a:r>
-            <a:r>
-              <a:rPr lang="en-US" sz="2400" dirty="0" smtClean="0"/>
-              <a:t>.</a:t>
-            </a:r>
-          </a:p>
-          <a:p>
-            <a:r>
-              <a:rPr lang="en-US" sz="2400" dirty="0" smtClean="0"/>
-              <a:t>If there are instances with active sessions below a given lower threshold and with at least one instance that has </a:t>
-            </a:r>
-            <a:r>
-              <a:rPr lang="en-US" sz="2400" i="1" dirty="0" smtClean="0">
+              <a:t>web application</a:t>
+            </a:r>
+            <a:r>
+              <a:rPr lang="en-US" sz="2100" dirty="0" smtClean="0"/>
+              <a:t> and its corresponding web server (Apache HTTP server) is pre-installed in a virtual machine appliance image template.</a:t>
+            </a:r>
+          </a:p>
+          <a:p>
+            <a:r>
+              <a:rPr lang="en-US" sz="2100" i="1" dirty="0" smtClean="0">
                 <a:solidFill>
                   <a:srgbClr val="C00000"/>
                 </a:solidFill>
               </a:rPr>
-              <a:t>no active session</a:t>
-            </a:r>
-            <a:r>
-              <a:rPr lang="en-US" sz="2400" dirty="0" smtClean="0"/>
-              <a:t>, the idle instance will be </a:t>
-            </a:r>
-            <a:r>
-              <a:rPr lang="en-US" sz="2400" u="sng" dirty="0" smtClean="0"/>
-              <a:t>removed</a:t>
-            </a:r>
-            <a:r>
-              <a:rPr lang="en-US" sz="2400" dirty="0" smtClean="0"/>
-              <a:t> from the load-balancer and be shutdown from the system.</a:t>
-            </a:r>
-            <a:endParaRPr lang="en-US" sz="2400" dirty="0"/>
+              <a:t>Service Monitor</a:t>
+            </a:r>
+            <a:r>
+              <a:rPr lang="en-US" sz="2100" dirty="0" smtClean="0"/>
+              <a:t>: A monitoring agent is installed in each web application to track the number of active sessions and to forward the number periodically to the Service Monitor subsystem.</a:t>
+            </a:r>
+          </a:p>
+          <a:p>
+            <a:r>
+              <a:rPr lang="en-US" sz="2100" i="1" dirty="0" smtClean="0">
+                <a:solidFill>
+                  <a:srgbClr val="C00000"/>
+                </a:solidFill>
+              </a:rPr>
+              <a:t>Provisioning sub-system</a:t>
+            </a:r>
+            <a:r>
+              <a:rPr lang="en-US" sz="2100" dirty="0" smtClean="0"/>
+              <a:t>: IBM Tivoli Provisioning Manager (TPM) software product. A number of TPM automation workflows have been developed for different operating systems and virtualization technologies</a:t>
+            </a:r>
+          </a:p>
+          <a:p>
+            <a:r>
+              <a:rPr lang="en-US" sz="2100" i="1" dirty="0" smtClean="0">
+                <a:solidFill>
+                  <a:srgbClr val="C00000"/>
+                </a:solidFill>
+              </a:rPr>
+              <a:t>Scaling Algorithm</a:t>
+            </a:r>
+            <a:r>
+              <a:rPr lang="en-US" sz="2100" dirty="0" smtClean="0"/>
+              <a:t>: If all instances have active sessions above the given upper threshold, a new web application instance will be provisioned, started, and then added to the front-end load-balancer.</a:t>
+            </a:r>
+            <a:endParaRPr lang="en-US" sz="2100" dirty="0"/>
           </a:p>
         </p:txBody>
       </p:sp>
@@ -11207,32 +11489,98 @@
           <a:chExt cx="0" cy="0"/>
         </a:xfrm>
       </p:grpSpPr>
-      <p:pic>
-        <p:nvPicPr>
-          <p:cNvPr id="4" name="Picture 2" descr="https://lh3.ggpht.com/1IfZLL2QDSjZ0wS7sUhaMlsAOS8BBzdR3wZ1WawgRn7KZAM8nEVZYMOUM-lqQb0ikIzp=w300"/>
-          <p:cNvPicPr>
-            <a:picLocks noChangeAspect="1" noChangeArrowheads="1"/>
-          </p:cNvPicPr>
-          <p:nvPr/>
-        </p:nvPicPr>
-        <p:blipFill>
-          <a:blip r:embed="rId2" cstate="print"/>
-          <a:srcRect/>
-          <a:stretch>
-            <a:fillRect/>
-          </a:stretch>
-        </p:blipFill>
-        <p:spPr bwMode="auto">
-          <a:xfrm>
-            <a:off x="3276600" y="1905000"/>
-            <a:ext cx="2857500" cy="2857500"/>
-          </a:xfrm>
-          <a:prstGeom prst="rect">
-            <a:avLst/>
-          </a:prstGeom>
-          <a:noFill/>
-        </p:spPr>
-      </p:pic>
+      <p:sp>
+        <p:nvSpPr>
+          <p:cNvPr id="2" name="Title 1"/>
+          <p:cNvSpPr>
+            <a:spLocks noGrp="1"/>
+          </p:cNvSpPr>
+          <p:nvPr>
+            <p:ph type="title"/>
+          </p:nvPr>
+        </p:nvSpPr>
+        <p:spPr/>
+        <p:txBody>
+          <a:bodyPr/>
+          <a:lstStyle/>
+          <a:p>
+            <a:r>
+              <a:rPr lang="en-US" dirty="0" smtClean="0"/>
+              <a:t>Dynamic Scaling Algorithm (I)</a:t>
+            </a:r>
+            <a:endParaRPr lang="en-US" dirty="0"/>
+          </a:p>
+        </p:txBody>
+      </p:sp>
+      <p:sp>
+        <p:nvSpPr>
+          <p:cNvPr id="3" name="Content Placeholder 2"/>
+          <p:cNvSpPr>
+            <a:spLocks noGrp="1"/>
+          </p:cNvSpPr>
+          <p:nvPr>
+            <p:ph idx="1"/>
+          </p:nvPr>
+        </p:nvSpPr>
+        <p:spPr/>
+        <p:txBody>
+          <a:bodyPr/>
+          <a:lstStyle/>
+          <a:p>
+            <a:r>
+              <a:rPr lang="en-US" sz="2800" dirty="0" smtClean="0"/>
+              <a:t>The </a:t>
+            </a:r>
+            <a:r>
+              <a:rPr lang="en-US" sz="2800" i="1" dirty="0" smtClean="0">
+                <a:solidFill>
+                  <a:srgbClr val="C00000"/>
+                </a:solidFill>
+              </a:rPr>
+              <a:t>scaling algorithm</a:t>
+            </a:r>
+            <a:r>
+              <a:rPr lang="en-US" sz="2800" dirty="0" smtClean="0"/>
+              <a:t> is implemented in the Service Monitor sub-system, and is used to control and trigger the scale-up or down in the Provisioning sub-system on </a:t>
+            </a:r>
+            <a:r>
+              <a:rPr lang="en-US" sz="2800" u="sng" dirty="0" smtClean="0"/>
+              <a:t>the number of virtual machine instances</a:t>
+            </a:r>
+            <a:r>
+              <a:rPr lang="en-US" sz="2800" dirty="0" smtClean="0"/>
+              <a:t> based on the statistics of the scaling indicator.</a:t>
+            </a:r>
+          </a:p>
+          <a:p>
+            <a:r>
+              <a:rPr lang="en-US" sz="2800" dirty="0" smtClean="0"/>
+              <a:t>For the sake of illustration, we choose a </a:t>
+            </a:r>
+            <a:r>
+              <a:rPr lang="en-US" sz="2800" i="1" dirty="0" smtClean="0">
+                <a:solidFill>
+                  <a:srgbClr val="C00000"/>
+                </a:solidFill>
+              </a:rPr>
+              <a:t>scaling indicator</a:t>
+            </a:r>
+            <a:r>
+              <a:rPr lang="en-US" sz="2800" dirty="0" smtClean="0"/>
+              <a:t> in our implementation that corresponds to </a:t>
+            </a:r>
+            <a:r>
+              <a:rPr lang="en-US" sz="2800" u="sng" dirty="0" smtClean="0"/>
+              <a:t>the number of active sessions</a:t>
+            </a:r>
+            <a:r>
+              <a:rPr lang="en-US" sz="2800" dirty="0" smtClean="0"/>
+              <a:t> in the web application of each instance.</a:t>
+            </a:r>
+            <a:endParaRPr lang="en-US" sz="2800" dirty="0"/>
+          </a:p>
+        </p:txBody>
+      </p:sp>
     </p:spTree>
   </p:cSld>
   <p:clrMapOvr>
